--- a/presentation/gyurza-presentation.pptx
+++ b/presentation/gyurza-presentation.pptx
@@ -15,6 +15,11 @@
     <p:sldId id="263" r:id="rId14"/>
     <p:sldId id="264" r:id="rId15"/>
     <p:sldId id="265" r:id="rId16"/>
+    <p:sldId id="266" r:id="rId17"/>
+    <p:sldId id="267" r:id="rId18"/>
+    <p:sldId id="268" r:id="rId19"/>
+    <p:sldId id="269" r:id="rId20"/>
+    <p:sldId id="270" r:id="rId21"/>
   </p:sldIdLst>
   <p:sldSz cx="12191695" cy="6858000" type="screen4x3"/>
   <p:notesSz cx="6858000" cy="9144000"/>
@@ -3090,14 +3095,6 @@
 <file path=ppt/slides/slide1.xml><?xml version="1.0" encoding="utf-8"?>
 <p:sld xmlns:a="http://schemas.openxmlformats.org/drawingml/2006/main" xmlns:p="http://schemas.openxmlformats.org/presentationml/2006/main" xmlns:r="http://schemas.openxmlformats.org/officeDocument/2006/relationships">
   <p:cSld>
-    <p:bg>
-      <p:bgPr>
-        <a:solidFill>
-          <a:srgbClr val="0C1018"/>
-        </a:solidFill>
-        <a:effectLst/>
-      </p:bgPr>
-    </p:bg>
     <p:spTree>
       <p:nvGrpSpPr>
         <p:cNvPr id="1" name=""/>
@@ -3105,103 +3102,9 @@
         <p:nvPr/>
       </p:nvGrpSpPr>
       <p:grpSpPr/>
-      <p:sp>
-        <p:nvSpPr>
-          <p:cNvPr id="2" name="TextBox 1"/>
-          <p:cNvSpPr txBox="1"/>
-          <p:nvPr/>
-        </p:nvSpPr>
-        <p:spPr>
-          <a:xfrm>
-            <a:off x="9601200" y="320040"/>
-            <a:ext cx="2286000" cy="274320"/>
-          </a:xfrm>
-          <a:prstGeom prst="rect">
-            <a:avLst/>
-          </a:prstGeom>
-          <a:noFill/>
-        </p:spPr>
-        <p:txBody>
-          <a:bodyPr wrap="none">
-            <a:spAutoFit/>
-          </a:bodyPr>
-          <a:lstStyle/>
-          <a:p>
-            <a:pPr algn="r">
-              <a:defRPr sz="1200">
-                <a:solidFill>
-                  <a:srgbClr val="D4AF37"/>
-                </a:solidFill>
-              </a:defRPr>
-            </a:pPr>
-            <a:r>
-              <a:t>gurza36.ru</a:t>
-            </a:r>
-          </a:p>
-        </p:txBody>
-      </p:sp>
-      <p:sp>
-        <p:nvSpPr>
-          <p:cNvPr id="3" name="TextBox 2"/>
-          <p:cNvSpPr txBox="1"/>
-          <p:nvPr/>
-        </p:nvSpPr>
-        <p:spPr>
-          <a:xfrm>
-            <a:off x="731520" y="1828800"/>
-            <a:ext cx="7315200" cy="2286000"/>
-          </a:xfrm>
-          <a:prstGeom prst="rect">
-            <a:avLst/>
-          </a:prstGeom>
-          <a:noFill/>
-        </p:spPr>
-        <p:txBody>
-          <a:bodyPr wrap="none">
-            <a:spAutoFit/>
-          </a:bodyPr>
-          <a:lstStyle/>
-          <a:p>
-            <a:pPr>
-              <a:defRPr sz="7200" b="1">
-                <a:solidFill>
-                  <a:srgbClr val="D4AF37"/>
-                </a:solidFill>
-              </a:defRPr>
-            </a:pPr>
-            <a:r>
-              <a:t>ГЮРЗА</a:t>
-            </a:r>
-          </a:p>
-          <a:p>
-            <a:pPr>
-              <a:defRPr sz="3600">
-                <a:solidFill>
-                  <a:srgbClr val="EEF1F6"/>
-                </a:solidFill>
-              </a:defRPr>
-            </a:pPr>
-            <a:r>
-              <a:t>Цифровое лицо компании</a:t>
-            </a:r>
-          </a:p>
-          <a:p>
-            <a:pPr>
-              <a:defRPr sz="1800">
-                <a:solidFill>
-                  <a:srgbClr val="9AA3B5"/>
-                </a:solidFill>
-              </a:defRPr>
-            </a:pPr>
-            <a:r>
-              <a:t>ЧОО «Гюрза» · Воронеж · gurza36.ru</a:t>
-            </a:r>
-          </a:p>
-        </p:txBody>
-      </p:sp>
       <p:pic>
         <p:nvPicPr>
-          <p:cNvPr id="4" name="Picture 3" descr="04-logo.png"/>
+          <p:cNvPr id="2" name="Picture 1" descr="bg-dark.png"/>
           <p:cNvPicPr>
             <a:picLocks noChangeAspect="1"/>
           </p:cNvPicPr>
@@ -3215,33 +3118,247 @@
         </p:blipFill>
         <p:spPr>
           <a:xfrm>
-            <a:off x="8229600" y="1463040"/>
-            <a:ext cx="2926080" cy="2919291"/>
+            <a:off x="0" y="0"/>
+            <a:ext cx="12191695" cy="6858000"/>
           </a:xfrm>
           <a:prstGeom prst="rect">
             <a:avLst/>
           </a:prstGeom>
         </p:spPr>
       </p:pic>
+      <p:pic>
+        <p:nvPicPr>
+          <p:cNvPr id="3" name="Picture 2" descr="04-logo.png"/>
+          <p:cNvPicPr>
+            <a:picLocks noChangeAspect="1"/>
+          </p:cNvPicPr>
+          <p:nvPr/>
+        </p:nvPicPr>
+        <p:blipFill>
+          <a:blip r:embed="rId3"/>
+          <a:stretch>
+            <a:fillRect/>
+          </a:stretch>
+        </p:blipFill>
+        <p:spPr>
+          <a:xfrm>
+            <a:off x="8412480" y="1371600"/>
+            <a:ext cx="3017520" cy="3010519"/>
+          </a:xfrm>
+          <a:prstGeom prst="rect">
+            <a:avLst/>
+          </a:prstGeom>
+        </p:spPr>
+      </p:pic>
+      <p:sp>
+        <p:nvSpPr>
+          <p:cNvPr id="4" name="TextBox 3"/>
+          <p:cNvSpPr txBox="1"/>
+          <p:nvPr/>
+        </p:nvSpPr>
+        <p:spPr>
+          <a:xfrm>
+            <a:off x="685800" y="1645920"/>
+            <a:ext cx="7772400" cy="1097280"/>
+          </a:xfrm>
+          <a:prstGeom prst="rect">
+            <a:avLst/>
+          </a:prstGeom>
+          <a:noFill/>
+        </p:spPr>
+        <p:txBody>
+          <a:bodyPr wrap="square" anchor="t">
+            <a:spAutoFit/>
+          </a:bodyPr>
+          <a:lstStyle/>
+          <a:p>
+            <a:pPr algn="l">
+              <a:spcAft>
+                <a:spcPts val="1400"/>
+              </a:spcAft>
+              <a:defRPr sz="8000" b="1">
+                <a:solidFill>
+                  <a:srgbClr val="D4AF37"/>
+                </a:solidFill>
+                <a:latin typeface="Calibri"/>
+              </a:defRPr>
+            </a:pPr>
+            <a:r>
+              <a:t>ГЮРЗА</a:t>
+            </a:r>
+          </a:p>
+        </p:txBody>
+      </p:sp>
+      <p:sp>
+        <p:nvSpPr>
+          <p:cNvPr id="5" name="TextBox 4"/>
+          <p:cNvSpPr txBox="1"/>
+          <p:nvPr/>
+        </p:nvSpPr>
+        <p:spPr>
+          <a:xfrm>
+            <a:off x="685800" y="2743200"/>
+            <a:ext cx="7772400" cy="914400"/>
+          </a:xfrm>
+          <a:prstGeom prst="rect">
+            <a:avLst/>
+          </a:prstGeom>
+          <a:noFill/>
+        </p:spPr>
+        <p:txBody>
+          <a:bodyPr wrap="square" anchor="t">
+            <a:spAutoFit/>
+          </a:bodyPr>
+          <a:lstStyle/>
+          <a:p>
+            <a:pPr algn="l">
+              <a:spcAft>
+                <a:spcPts val="1400"/>
+              </a:spcAft>
+              <a:defRPr sz="4400" b="1">
+                <a:solidFill>
+                  <a:srgbClr val="F5F7FA"/>
+                </a:solidFill>
+                <a:latin typeface="Calibri"/>
+              </a:defRPr>
+            </a:pPr>
+            <a:r>
+              <a:t>Цифровое лицо</a:t>
+            </a:r>
+          </a:p>
+        </p:txBody>
+      </p:sp>
+      <p:sp>
+        <p:nvSpPr>
+          <p:cNvPr id="6" name="TextBox 5"/>
+          <p:cNvSpPr txBox="1"/>
+          <p:nvPr/>
+        </p:nvSpPr>
+        <p:spPr>
+          <a:xfrm>
+            <a:off x="685800" y="3429000"/>
+            <a:ext cx="7772400" cy="914400"/>
+          </a:xfrm>
+          <a:prstGeom prst="rect">
+            <a:avLst/>
+          </a:prstGeom>
+          <a:noFill/>
+        </p:spPr>
+        <p:txBody>
+          <a:bodyPr wrap="square" anchor="t">
+            <a:spAutoFit/>
+          </a:bodyPr>
+          <a:lstStyle/>
+          <a:p>
+            <a:pPr algn="l">
+              <a:spcAft>
+                <a:spcPts val="1400"/>
+              </a:spcAft>
+              <a:defRPr sz="4400" b="0">
+                <a:solidFill>
+                  <a:srgbClr val="F5F7FA"/>
+                </a:solidFill>
+                <a:latin typeface="Calibri"/>
+              </a:defRPr>
+            </a:pPr>
+            <a:r>
+              <a:t>охранной компании</a:t>
+            </a:r>
+          </a:p>
+        </p:txBody>
+      </p:sp>
+      <p:sp>
+        <p:nvSpPr>
+          <p:cNvPr id="7" name="TextBox 6"/>
+          <p:cNvSpPr txBox="1"/>
+          <p:nvPr/>
+        </p:nvSpPr>
+        <p:spPr>
+          <a:xfrm>
+            <a:off x="713232" y="4572000"/>
+            <a:ext cx="6400800" cy="457200"/>
+          </a:xfrm>
+          <a:prstGeom prst="rect">
+            <a:avLst/>
+          </a:prstGeom>
+          <a:noFill/>
+        </p:spPr>
+        <p:txBody>
+          <a:bodyPr wrap="square" anchor="t">
+            <a:spAutoFit/>
+          </a:bodyPr>
+          <a:lstStyle/>
+          <a:p>
+            <a:pPr algn="l">
+              <a:spcAft>
+                <a:spcPts val="800"/>
+              </a:spcAft>
+              <a:defRPr sz="1800" b="0">
+                <a:solidFill>
+                  <a:srgbClr val="919BAF"/>
+                </a:solidFill>
+                <a:latin typeface="Calibri"/>
+              </a:defRPr>
+            </a:pPr>
+            <a:r>
+              <a:t>Частная охранная организация · Воронеж · с 2011</a:t>
+            </a:r>
+          </a:p>
+        </p:txBody>
+      </p:sp>
+      <p:sp>
+        <p:nvSpPr>
+          <p:cNvPr id="8" name="TextBox 7"/>
+          <p:cNvSpPr txBox="1"/>
+          <p:nvPr/>
+        </p:nvSpPr>
+        <p:spPr>
+          <a:xfrm>
+            <a:off x="713232" y="5074920"/>
+            <a:ext cx="6400800" cy="457200"/>
+          </a:xfrm>
+          <a:prstGeom prst="rect">
+            <a:avLst/>
+          </a:prstGeom>
+          <a:noFill/>
+        </p:spPr>
+        <p:txBody>
+          <a:bodyPr wrap="square" anchor="t">
+            <a:spAutoFit/>
+          </a:bodyPr>
+          <a:lstStyle/>
+          <a:p>
+            <a:pPr algn="l">
+              <a:spcAft>
+                <a:spcPts val="800"/>
+              </a:spcAft>
+              <a:defRPr sz="2200" b="1">
+                <a:solidFill>
+                  <a:srgbClr val="F0D98C"/>
+                </a:solidFill>
+                <a:latin typeface="Calibri"/>
+              </a:defRPr>
+            </a:pPr>
+            <a:r>
+              <a:t>gurza36.ru</a:t>
+            </a:r>
+          </a:p>
+        </p:txBody>
+      </p:sp>
     </p:spTree>
   </p:cSld>
   <p:clrMapOvr>
     <a:masterClrMapping/>
   </p:clrMapOvr>
+  <p:transition spd="med" advClick="1">
+    <p:fadeThroughBlack/>
+  </p:transition>
 </p:sld>
 </file>
 
 <file path=ppt/slides/slide10.xml><?xml version="1.0" encoding="utf-8"?>
 <p:sld xmlns:a="http://schemas.openxmlformats.org/drawingml/2006/main" xmlns:p="http://schemas.openxmlformats.org/presentationml/2006/main" xmlns:r="http://schemas.openxmlformats.org/officeDocument/2006/relationships">
   <p:cSld>
-    <p:bg>
-      <p:bgPr>
-        <a:solidFill>
-          <a:srgbClr val="0C1018"/>
-        </a:solidFill>
-        <a:effectLst/>
-      </p:bgPr>
-    </p:bg>
     <p:spTree>
       <p:nvGrpSpPr>
         <p:cNvPr id="1" name=""/>
@@ -3249,206 +3366,292 @@
         <p:nvPr/>
       </p:nvGrpSpPr>
       <p:grpSpPr/>
-      <p:sp>
-        <p:nvSpPr>
-          <p:cNvPr id="2" name="TextBox 1"/>
+      <p:pic>
+        <p:nvPicPr>
+          <p:cNvPr id="2" name="Picture 1" descr="bg-dark.png"/>
+          <p:cNvPicPr>
+            <a:picLocks noChangeAspect="1"/>
+          </p:cNvPicPr>
+          <p:nvPr/>
+        </p:nvPicPr>
+        <p:blipFill>
+          <a:blip r:embed="rId2"/>
+          <a:stretch>
+            <a:fillRect/>
+          </a:stretch>
+        </p:blipFill>
+        <p:spPr>
+          <a:xfrm>
+            <a:off x="0" y="0"/>
+            <a:ext cx="12191695" cy="6858000"/>
+          </a:xfrm>
+          <a:prstGeom prst="rect">
+            <a:avLst/>
+          </a:prstGeom>
+        </p:spPr>
+      </p:pic>
+      <p:sp>
+        <p:nvSpPr>
+          <p:cNvPr id="3" name="TextBox 2"/>
           <p:cNvSpPr txBox="1"/>
           <p:nvPr/>
         </p:nvSpPr>
         <p:spPr>
           <a:xfrm>
-            <a:off x="9601200" y="320040"/>
-            <a:ext cx="2286000" cy="274320"/>
-          </a:xfrm>
-          <a:prstGeom prst="rect">
-            <a:avLst/>
-          </a:prstGeom>
-          <a:noFill/>
-        </p:spPr>
-        <p:txBody>
-          <a:bodyPr wrap="none">
+            <a:off x="502920" y="320040"/>
+            <a:ext cx="3657600" cy="274320"/>
+          </a:xfrm>
+          <a:prstGeom prst="rect">
+            <a:avLst/>
+          </a:prstGeom>
+          <a:noFill/>
+        </p:spPr>
+        <p:txBody>
+          <a:bodyPr wrap="square" anchor="t">
             <a:spAutoFit/>
           </a:bodyPr>
           <a:lstStyle/>
           <a:p>
-            <a:pPr algn="r">
-              <a:defRPr sz="1200">
+            <a:pPr algn="l">
+              <a:spcAft>
+                <a:spcPts val="800"/>
+              </a:spcAft>
+              <a:defRPr sz="1100" b="1">
                 <a:solidFill>
                   <a:srgbClr val="D4AF37"/>
                 </a:solidFill>
-              </a:defRPr>
-            </a:pPr>
-            <a:r>
-              <a:t>gurza36.ru</a:t>
-            </a:r>
-          </a:p>
-        </p:txBody>
-      </p:sp>
-      <p:sp>
-        <p:nvSpPr>
-          <p:cNvPr id="3" name="TextBox 2"/>
+                <a:latin typeface="Calibri"/>
+              </a:defRPr>
+            </a:pPr>
+            <a:r>
+              <a:t>ЧОО «ГЮРЗА»</a:t>
+            </a:r>
+          </a:p>
+        </p:txBody>
+      </p:sp>
+      <p:sp>
+        <p:nvSpPr>
+          <p:cNvPr id="4" name="TextBox 3"/>
           <p:cNvSpPr txBox="1"/>
           <p:nvPr/>
         </p:nvSpPr>
         <p:spPr>
           <a:xfrm>
-            <a:off x="640080" y="1097280"/>
-            <a:ext cx="10972800" cy="365760"/>
-          </a:xfrm>
-          <a:prstGeom prst="rect">
-            <a:avLst/>
-          </a:prstGeom>
-          <a:noFill/>
-        </p:spPr>
-        <p:txBody>
-          <a:bodyPr wrap="none">
+            <a:off x="8961120" y="320040"/>
+            <a:ext cx="2743200" cy="274320"/>
+          </a:xfrm>
+          <a:prstGeom prst="rect">
+            <a:avLst/>
+          </a:prstGeom>
+          <a:noFill/>
+        </p:spPr>
+        <p:txBody>
+          <a:bodyPr wrap="square" anchor="t">
             <a:spAutoFit/>
           </a:bodyPr>
           <a:lstStyle/>
           <a:p>
-            <a:pPr>
-              <a:defRPr sz="1400" b="1">
+            <a:pPr algn="r">
+              <a:spcAft>
+                <a:spcPts val="800"/>
+              </a:spcAft>
+              <a:defRPr sz="1100" b="1">
                 <a:solidFill>
                   <a:srgbClr val="D4AF37"/>
                 </a:solidFill>
-              </a:defRPr>
-            </a:pPr>
-            <a:r>
-              <a:t>КОНТАКТЫ</a:t>
-            </a:r>
-          </a:p>
-        </p:txBody>
-      </p:sp>
-      <p:sp>
-        <p:nvSpPr>
-          <p:cNvPr id="4" name="TextBox 3"/>
+                <a:latin typeface="Calibri"/>
+              </a:defRPr>
+            </a:pPr>
+            <a:r>
+              <a:t>gurza36.ru</a:t>
+            </a:r>
+          </a:p>
+        </p:txBody>
+      </p:sp>
+      <p:sp>
+        <p:nvSpPr>
+          <p:cNvPr id="5" name="Rectangle 4"/>
+          <p:cNvSpPr/>
+          <p:nvPr/>
+        </p:nvSpPr>
+        <p:spPr>
+          <a:xfrm>
+            <a:off x="502920" y="658368"/>
+            <a:ext cx="11155680" cy="0"/>
+          </a:xfrm>
+          <a:prstGeom prst="rect">
+            <a:avLst/>
+          </a:prstGeom>
+          <a:ln w="9525">
+            <a:solidFill>
+              <a:srgbClr val="D4AF37"/>
+            </a:solidFill>
+          </a:ln>
+        </p:spPr>
+        <p:style>
+          <a:lnRef idx="1">
+            <a:schemeClr val="accent1"/>
+          </a:lnRef>
+          <a:fillRef idx="3">
+            <a:schemeClr val="accent1"/>
+          </a:fillRef>
+          <a:effectRef idx="2">
+            <a:schemeClr val="accent1"/>
+          </a:effectRef>
+          <a:fontRef idx="minor">
+            <a:schemeClr val="lt1"/>
+          </a:fontRef>
+        </p:style>
+        <p:txBody>
+          <a:bodyPr rtlCol="0" anchor="ctr"/>
+          <a:lstStyle/>
+          <a:p>
+            <a:pPr algn="ctr"/>
+          </a:p>
+        </p:txBody>
+      </p:sp>
+      <p:sp>
+        <p:nvSpPr>
+          <p:cNvPr id="6" name="TextBox 5"/>
           <p:cNvSpPr txBox="1"/>
           <p:nvPr/>
         </p:nvSpPr>
         <p:spPr>
           <a:xfrm>
-            <a:off x="640080" y="1508760"/>
-            <a:ext cx="10972800" cy="1097280"/>
-          </a:xfrm>
-          <a:prstGeom prst="rect">
-            <a:avLst/>
-          </a:prstGeom>
-          <a:noFill/>
-        </p:spPr>
-        <p:txBody>
-          <a:bodyPr wrap="none">
+            <a:off x="640080" y="868680"/>
+            <a:ext cx="9144000" cy="548640"/>
+          </a:xfrm>
+          <a:prstGeom prst="rect">
+            <a:avLst/>
+          </a:prstGeom>
+          <a:noFill/>
+        </p:spPr>
+        <p:txBody>
+          <a:bodyPr wrap="square" anchor="t">
             <a:spAutoFit/>
           </a:bodyPr>
           <a:lstStyle/>
           <a:p>
-            <a:pPr>
-              <a:defRPr sz="4000" b="1">
-                <a:solidFill>
-                  <a:srgbClr val="EEF1F6"/>
-                </a:solidFill>
-              </a:defRPr>
-            </a:pPr>
-            <a:r>
-              <a:t>ЧОО «Гюрза»</a:t>
-            </a:r>
-          </a:p>
-        </p:txBody>
-      </p:sp>
-      <p:sp>
-        <p:nvSpPr>
-          <p:cNvPr id="5" name="TextBox 4"/>
+            <a:pPr algn="l">
+              <a:spcAft>
+                <a:spcPts val="1400"/>
+              </a:spcAft>
+              <a:defRPr sz="3200" b="1">
+                <a:solidFill>
+                  <a:srgbClr val="D4AF37"/>
+                </a:solidFill>
+                <a:latin typeface="Calibri"/>
+              </a:defRPr>
+            </a:pPr>
+            <a:r>
+              <a:t>Брендинг</a:t>
+            </a:r>
+          </a:p>
+        </p:txBody>
+      </p:sp>
+      <p:sp>
+        <p:nvSpPr>
+          <p:cNvPr id="7" name="TextBox 6"/>
           <p:cNvSpPr txBox="1"/>
           <p:nvPr/>
         </p:nvSpPr>
         <p:spPr>
           <a:xfrm>
-            <a:off x="640080" y="2286000"/>
-            <a:ext cx="10515600" cy="4114800"/>
-          </a:xfrm>
-          <a:prstGeom prst="rect">
-            <a:avLst/>
-          </a:prstGeom>
-          <a:noFill/>
-        </p:spPr>
-        <p:txBody>
-          <a:bodyPr wrap="square">
+            <a:off x="640080" y="1325880"/>
+            <a:ext cx="9144000" cy="365760"/>
+          </a:xfrm>
+          <a:prstGeom prst="rect">
+            <a:avLst/>
+          </a:prstGeom>
+          <a:noFill/>
+        </p:spPr>
+        <p:txBody>
+          <a:bodyPr wrap="square" anchor="t">
             <a:spAutoFit/>
           </a:bodyPr>
           <a:lstStyle/>
           <a:p>
-            <a:pPr>
-              <a:spcAft>
-                <a:spcPts val="1000"/>
-              </a:spcAft>
-              <a:defRPr sz="2200">
-                <a:solidFill>
-                  <a:srgbClr val="EEF1F6"/>
-                </a:solidFill>
-              </a:defRPr>
-            </a:pPr>
-            <a:r>
-              <a:t>Сайт: gurza36.ru</a:t>
-            </a:r>
-          </a:p>
-          <a:p>
-            <a:pPr>
-              <a:spcAft>
-                <a:spcPts val="1000"/>
-              </a:spcAft>
-              <a:defRPr sz="2200">
-                <a:solidFill>
-                  <a:srgbClr val="EEF1F6"/>
-                </a:solidFill>
-              </a:defRPr>
-            </a:pPr>
-            <a:r>
-              <a:t>Тел: +7 (473) 278-51-47 · +7 (900) 954-43-12</a:t>
-            </a:r>
-          </a:p>
-          <a:p>
-            <a:pPr>
-              <a:spcAft>
-                <a:spcPts val="1000"/>
-              </a:spcAft>
-              <a:defRPr sz="2200">
-                <a:solidFill>
-                  <a:srgbClr val="EEF1F6"/>
-                </a:solidFill>
-              </a:defRPr>
-            </a:pPr>
-            <a:r>
-              <a:t>Email: mike1592@yandex.ru</a:t>
-            </a:r>
-          </a:p>
-          <a:p>
-            <a:pPr>
-              <a:spcAft>
-                <a:spcPts val="1000"/>
-              </a:spcAft>
-              <a:defRPr sz="2200">
-                <a:solidFill>
-                  <a:srgbClr val="EEF1F6"/>
-                </a:solidFill>
-              </a:defRPr>
-            </a:pPr>
-            <a:r>
-              <a:t>Адрес: 394016, г. Воронеж, ул. Солнечная, 17/1, офис 4</a:t>
-            </a:r>
-          </a:p>
-          <a:p>
-            <a:pPr>
-              <a:spcAft>
-                <a:spcPts val="1000"/>
-              </a:spcAft>
-              <a:defRPr sz="2200">
-                <a:solidFill>
-                  <a:srgbClr val="EEF1F6"/>
-                </a:solidFill>
-              </a:defRPr>
-            </a:pPr>
-            <a:r>
-              <a:t>Директор: Самофалов Михаил Иванович</a:t>
-            </a:r>
+            <a:pPr algn="l">
+              <a:spcAft>
+                <a:spcPts val="800"/>
+              </a:spcAft>
+              <a:defRPr sz="1600" b="0">
+                <a:solidFill>
+                  <a:srgbClr val="919BAF"/>
+                </a:solidFill>
+                <a:latin typeface="Calibri"/>
+              </a:defRPr>
+            </a:pPr>
+            <a:r>
+              <a:t>Золотая сота и змея-гюрза</a:t>
+            </a:r>
+          </a:p>
+        </p:txBody>
+      </p:sp>
+      <p:pic>
+        <p:nvPicPr>
+          <p:cNvPr id="8" name="Picture 7" descr="04-logo.png"/>
+          <p:cNvPicPr>
+            <a:picLocks noChangeAspect="1"/>
+          </p:cNvPicPr>
+          <p:nvPr/>
+        </p:nvPicPr>
+        <p:blipFill>
+          <a:blip r:embed="rId3"/>
+          <a:stretch>
+            <a:fillRect/>
+          </a:stretch>
+        </p:blipFill>
+        <p:spPr>
+          <a:xfrm>
+            <a:off x="411480" y="1691640"/>
+            <a:ext cx="11338560" cy="11312252"/>
+          </a:xfrm>
+          <a:prstGeom prst="rect">
+            <a:avLst/>
+          </a:prstGeom>
+        </p:spPr>
+      </p:pic>
+      <p:sp>
+        <p:nvSpPr>
+          <p:cNvPr id="9" name="Rectangle 8"/>
+          <p:cNvSpPr/>
+          <p:nvPr/>
+        </p:nvSpPr>
+        <p:spPr>
+          <a:xfrm>
+            <a:off x="411480" y="1691640"/>
+            <a:ext cx="11338560" cy="4709160"/>
+          </a:xfrm>
+          <a:prstGeom prst="rect">
+            <a:avLst/>
+          </a:prstGeom>
+          <a:noFill/>
+          <a:ln w="15875">
+            <a:solidFill>
+              <a:srgbClr val="D4AF37"/>
+            </a:solidFill>
+          </a:ln>
+        </p:spPr>
+        <p:style>
+          <a:lnRef idx="1">
+            <a:schemeClr val="accent1"/>
+          </a:lnRef>
+          <a:fillRef idx="3">
+            <a:schemeClr val="accent1"/>
+          </a:fillRef>
+          <a:effectRef idx="2">
+            <a:schemeClr val="accent1"/>
+          </a:effectRef>
+          <a:fontRef idx="minor">
+            <a:schemeClr val="lt1"/>
+          </a:fontRef>
+        </p:style>
+        <p:txBody>
+          <a:bodyPr rtlCol="0" anchor="ctr"/>
+          <a:lstStyle/>
+          <a:p>
+            <a:pPr algn="ctr"/>
           </a:p>
         </p:txBody>
       </p:sp>
@@ -3457,20 +3660,15 @@
   <p:clrMapOvr>
     <a:masterClrMapping/>
   </p:clrMapOvr>
+  <p:transition spd="med" advClick="1">
+    <p:fadeThroughBlack/>
+  </p:transition>
 </p:sld>
 </file>
 
-<file path=ppt/slides/slide2.xml><?xml version="1.0" encoding="utf-8"?>
+<file path=ppt/slides/slide11.xml><?xml version="1.0" encoding="utf-8"?>
 <p:sld xmlns:a="http://schemas.openxmlformats.org/drawingml/2006/main" xmlns:p="http://schemas.openxmlformats.org/presentationml/2006/main" xmlns:r="http://schemas.openxmlformats.org/officeDocument/2006/relationships">
   <p:cSld>
-    <p:bg>
-      <p:bgPr>
-        <a:solidFill>
-          <a:srgbClr val="0C1018"/>
-        </a:solidFill>
-        <a:effectLst/>
-      </p:bgPr>
-    </p:bg>
     <p:spTree>
       <p:nvGrpSpPr>
         <p:cNvPr id="1" name=""/>
@@ -3478,190 +3676,776 @@
         <p:nvPr/>
       </p:nvGrpSpPr>
       <p:grpSpPr/>
-      <p:sp>
-        <p:nvSpPr>
-          <p:cNvPr id="2" name="TextBox 1"/>
+      <p:pic>
+        <p:nvPicPr>
+          <p:cNvPr id="2" name="Picture 1" descr="bg-dark.png"/>
+          <p:cNvPicPr>
+            <a:picLocks noChangeAspect="1"/>
+          </p:cNvPicPr>
+          <p:nvPr/>
+        </p:nvPicPr>
+        <p:blipFill>
+          <a:blip r:embed="rId2"/>
+          <a:stretch>
+            <a:fillRect/>
+          </a:stretch>
+        </p:blipFill>
+        <p:spPr>
+          <a:xfrm>
+            <a:off x="0" y="0"/>
+            <a:ext cx="12191695" cy="6858000"/>
+          </a:xfrm>
+          <a:prstGeom prst="rect">
+            <a:avLst/>
+          </a:prstGeom>
+        </p:spPr>
+      </p:pic>
+      <p:sp>
+        <p:nvSpPr>
+          <p:cNvPr id="3" name="TextBox 2"/>
           <p:cNvSpPr txBox="1"/>
           <p:nvPr/>
         </p:nvSpPr>
         <p:spPr>
           <a:xfrm>
-            <a:off x="9601200" y="320040"/>
-            <a:ext cx="2286000" cy="274320"/>
-          </a:xfrm>
-          <a:prstGeom prst="rect">
-            <a:avLst/>
-          </a:prstGeom>
-          <a:noFill/>
-        </p:spPr>
-        <p:txBody>
-          <a:bodyPr wrap="none">
+            <a:off x="502920" y="320040"/>
+            <a:ext cx="3657600" cy="274320"/>
+          </a:xfrm>
+          <a:prstGeom prst="rect">
+            <a:avLst/>
+          </a:prstGeom>
+          <a:noFill/>
+        </p:spPr>
+        <p:txBody>
+          <a:bodyPr wrap="square" anchor="t">
             <a:spAutoFit/>
           </a:bodyPr>
           <a:lstStyle/>
           <a:p>
-            <a:pPr algn="r">
-              <a:defRPr sz="1200">
+            <a:pPr algn="l">
+              <a:spcAft>
+                <a:spcPts val="800"/>
+              </a:spcAft>
+              <a:defRPr sz="1100" b="1">
                 <a:solidFill>
                   <a:srgbClr val="D4AF37"/>
                 </a:solidFill>
-              </a:defRPr>
-            </a:pPr>
-            <a:r>
-              <a:t>gurza36.ru</a:t>
-            </a:r>
-          </a:p>
-        </p:txBody>
-      </p:sp>
-      <p:sp>
-        <p:nvSpPr>
-          <p:cNvPr id="3" name="TextBox 2"/>
+                <a:latin typeface="Calibri"/>
+              </a:defRPr>
+            </a:pPr>
+            <a:r>
+              <a:t>ЧОО «ГЮРЗА»</a:t>
+            </a:r>
+          </a:p>
+        </p:txBody>
+      </p:sp>
+      <p:sp>
+        <p:nvSpPr>
+          <p:cNvPr id="4" name="TextBox 3"/>
           <p:cNvSpPr txBox="1"/>
           <p:nvPr/>
         </p:nvSpPr>
         <p:spPr>
           <a:xfrm>
-            <a:off x="640080" y="548640"/>
-            <a:ext cx="10972800" cy="365760"/>
-          </a:xfrm>
-          <a:prstGeom prst="rect">
-            <a:avLst/>
-          </a:prstGeom>
-          <a:noFill/>
-        </p:spPr>
-        <p:txBody>
-          <a:bodyPr wrap="none">
+            <a:off x="8961120" y="320040"/>
+            <a:ext cx="2743200" cy="274320"/>
+          </a:xfrm>
+          <a:prstGeom prst="rect">
+            <a:avLst/>
+          </a:prstGeom>
+          <a:noFill/>
+        </p:spPr>
+        <p:txBody>
+          <a:bodyPr wrap="square" anchor="t">
             <a:spAutoFit/>
           </a:bodyPr>
           <a:lstStyle/>
           <a:p>
-            <a:pPr>
-              <a:defRPr sz="1400" b="1">
+            <a:pPr algn="r">
+              <a:spcAft>
+                <a:spcPts val="800"/>
+              </a:spcAft>
+              <a:defRPr sz="1100" b="1">
                 <a:solidFill>
                   <a:srgbClr val="D4AF37"/>
                 </a:solidFill>
-              </a:defRPr>
-            </a:pPr>
-            <a:r>
-              <a:t>О ГЛАВНОМ</a:t>
-            </a:r>
-          </a:p>
-        </p:txBody>
-      </p:sp>
-      <p:sp>
-        <p:nvSpPr>
-          <p:cNvPr id="4" name="TextBox 3"/>
+                <a:latin typeface="Calibri"/>
+              </a:defRPr>
+            </a:pPr>
+            <a:r>
+              <a:t>gurza36.ru</a:t>
+            </a:r>
+          </a:p>
+        </p:txBody>
+      </p:sp>
+      <p:sp>
+        <p:nvSpPr>
+          <p:cNvPr id="5" name="Rectangle 4"/>
+          <p:cNvSpPr/>
+          <p:nvPr/>
+        </p:nvSpPr>
+        <p:spPr>
+          <a:xfrm>
+            <a:off x="502920" y="658368"/>
+            <a:ext cx="11155680" cy="0"/>
+          </a:xfrm>
+          <a:prstGeom prst="rect">
+            <a:avLst/>
+          </a:prstGeom>
+          <a:ln w="9525">
+            <a:solidFill>
+              <a:srgbClr val="D4AF37"/>
+            </a:solidFill>
+          </a:ln>
+        </p:spPr>
+        <p:style>
+          <a:lnRef idx="1">
+            <a:schemeClr val="accent1"/>
+          </a:lnRef>
+          <a:fillRef idx="3">
+            <a:schemeClr val="accent1"/>
+          </a:fillRef>
+          <a:effectRef idx="2">
+            <a:schemeClr val="accent1"/>
+          </a:effectRef>
+          <a:fontRef idx="minor">
+            <a:schemeClr val="lt1"/>
+          </a:fontRef>
+        </p:style>
+        <p:txBody>
+          <a:bodyPr rtlCol="0" anchor="ctr"/>
+          <a:lstStyle/>
+          <a:p>
+            <a:pPr algn="ctr"/>
+          </a:p>
+        </p:txBody>
+      </p:sp>
+      <p:sp>
+        <p:nvSpPr>
+          <p:cNvPr id="6" name="TextBox 5"/>
           <p:cNvSpPr txBox="1"/>
           <p:nvPr/>
         </p:nvSpPr>
         <p:spPr>
           <a:xfrm>
-            <a:off x="640080" y="960120"/>
-            <a:ext cx="10972800" cy="1097280"/>
-          </a:xfrm>
-          <a:prstGeom prst="rect">
-            <a:avLst/>
-          </a:prstGeom>
-          <a:noFill/>
-        </p:spPr>
-        <p:txBody>
-          <a:bodyPr wrap="none">
+            <a:off x="640080" y="914400"/>
+            <a:ext cx="9144000" cy="457200"/>
+          </a:xfrm>
+          <a:prstGeom prst="rect">
+            <a:avLst/>
+          </a:prstGeom>
+          <a:noFill/>
+        </p:spPr>
+        <p:txBody>
+          <a:bodyPr wrap="square" anchor="t">
             <a:spAutoFit/>
           </a:bodyPr>
           <a:lstStyle/>
           <a:p>
-            <a:pPr>
-              <a:defRPr sz="4000" b="1">
-                <a:solidFill>
-                  <a:srgbClr val="EEF1F6"/>
-                </a:solidFill>
-              </a:defRPr>
-            </a:pPr>
-            <a:r>
-              <a:t>Суть проекта</a:t>
-            </a:r>
-          </a:p>
-        </p:txBody>
-      </p:sp>
-      <p:sp>
-        <p:nvSpPr>
-          <p:cNvPr id="5" name="TextBox 4"/>
+            <a:pPr algn="l">
+              <a:spcAft>
+                <a:spcPts val="800"/>
+              </a:spcAft>
+              <a:defRPr sz="1400" b="1">
+                <a:solidFill>
+                  <a:srgbClr val="D4AF37"/>
+                </a:solidFill>
+                <a:latin typeface="Calibri"/>
+              </a:defRPr>
+            </a:pPr>
+            <a:r>
+              <a:t>РОЛЬ САЙТА</a:t>
+            </a:r>
+          </a:p>
+        </p:txBody>
+      </p:sp>
+      <p:sp>
+        <p:nvSpPr>
+          <p:cNvPr id="7" name="TextBox 6"/>
           <p:cNvSpPr txBox="1"/>
           <p:nvPr/>
         </p:nvSpPr>
         <p:spPr>
           <a:xfrm>
-            <a:off x="640080" y="1828800"/>
-            <a:ext cx="10515600" cy="4114800"/>
-          </a:xfrm>
-          <a:prstGeom prst="rect">
-            <a:avLst/>
-          </a:prstGeom>
-          <a:noFill/>
-        </p:spPr>
-        <p:txBody>
-          <a:bodyPr wrap="square">
+            <a:off x="640080" y="1371600"/>
+            <a:ext cx="10058400" cy="640080"/>
+          </a:xfrm>
+          <a:prstGeom prst="rect">
+            <a:avLst/>
+          </a:prstGeom>
+          <a:noFill/>
+        </p:spPr>
+        <p:txBody>
+          <a:bodyPr wrap="square" anchor="t">
             <a:spAutoFit/>
           </a:bodyPr>
           <a:lstStyle/>
           <a:p>
+            <a:pPr algn="l">
+              <a:spcAft>
+                <a:spcPts val="1400"/>
+              </a:spcAft>
+              <a:defRPr sz="3600" b="1">
+                <a:solidFill>
+                  <a:srgbClr val="F5F7FA"/>
+                </a:solidFill>
+                <a:latin typeface="Calibri"/>
+              </a:defRPr>
+            </a:pPr>
+            <a:r>
+              <a:t>Воронка продаж</a:t>
+            </a:r>
+          </a:p>
+        </p:txBody>
+      </p:sp>
+      <p:sp>
+        <p:nvSpPr>
+          <p:cNvPr id="8" name="Rectangle 7"/>
+          <p:cNvSpPr/>
+          <p:nvPr/>
+        </p:nvSpPr>
+        <p:spPr>
+          <a:xfrm>
+            <a:off x="640080" y="2286000"/>
+            <a:ext cx="2468880" cy="822960"/>
+          </a:xfrm>
+          <a:prstGeom prst="rect">
+            <a:avLst/>
+          </a:prstGeom>
+          <a:solidFill>
+            <a:srgbClr val="121824"/>
+          </a:solidFill>
+          <a:ln>
+            <a:solidFill>
+              <a:srgbClr val="D4AF37"/>
+            </a:solidFill>
+          </a:ln>
+        </p:spPr>
+        <p:style>
+          <a:lnRef idx="1">
+            <a:schemeClr val="accent1"/>
+          </a:lnRef>
+          <a:fillRef idx="3">
+            <a:schemeClr val="accent1"/>
+          </a:fillRef>
+          <a:effectRef idx="2">
+            <a:schemeClr val="accent1"/>
+          </a:effectRef>
+          <a:fontRef idx="minor">
+            <a:schemeClr val="lt1"/>
+          </a:fontRef>
+        </p:style>
+        <p:txBody>
+          <a:bodyPr rtlCol="0" anchor="ctr"/>
+          <a:lstStyle/>
+          <a:p>
+            <a:pPr algn="ctr"/>
+          </a:p>
+        </p:txBody>
+      </p:sp>
+      <p:sp>
+        <p:nvSpPr>
+          <p:cNvPr id="9" name="TextBox 8"/>
+          <p:cNvSpPr txBox="1"/>
+          <p:nvPr/>
+        </p:nvSpPr>
+        <p:spPr>
+          <a:xfrm>
+            <a:off x="731519" y="2423160"/>
+            <a:ext cx="2286000" cy="548640"/>
+          </a:xfrm>
+          <a:prstGeom prst="rect">
+            <a:avLst/>
+          </a:prstGeom>
+          <a:noFill/>
+        </p:spPr>
+        <p:txBody>
+          <a:bodyPr wrap="square" anchor="t">
+            <a:spAutoFit/>
+          </a:bodyPr>
+          <a:lstStyle/>
+          <a:p>
+            <a:pPr algn="ctr">
+              <a:spcAft>
+                <a:spcPts val="800"/>
+              </a:spcAft>
+              <a:defRPr sz="1500" b="0">
+                <a:solidFill>
+                  <a:srgbClr val="F5F7FA"/>
+                </a:solidFill>
+                <a:latin typeface="Calibri"/>
+              </a:defRPr>
+            </a:pPr>
+            <a:r>
+              <a:t>Яндекс / Google / 2ГИС</a:t>
+            </a:r>
+          </a:p>
+        </p:txBody>
+      </p:sp>
+      <p:sp>
+        <p:nvSpPr>
+          <p:cNvPr id="10" name="TextBox 9"/>
+          <p:cNvSpPr txBox="1"/>
+          <p:nvPr/>
+        </p:nvSpPr>
+        <p:spPr>
+          <a:xfrm>
+            <a:off x="3154680" y="2487168"/>
+            <a:ext cx="365760" cy="365760"/>
+          </a:xfrm>
+          <a:prstGeom prst="rect">
+            <a:avLst/>
+          </a:prstGeom>
+          <a:noFill/>
+        </p:spPr>
+        <p:txBody>
+          <a:bodyPr wrap="square" anchor="t">
+            <a:spAutoFit/>
+          </a:bodyPr>
+          <a:lstStyle/>
+          <a:p>
+            <a:pPr algn="l">
+              <a:spcAft>
+                <a:spcPts val="800"/>
+              </a:spcAft>
+              <a:defRPr sz="2000" b="1">
+                <a:solidFill>
+                  <a:srgbClr val="D4AF37"/>
+                </a:solidFill>
+                <a:latin typeface="Calibri"/>
+              </a:defRPr>
+            </a:pPr>
+            <a:r>
+              <a:t>→</a:t>
+            </a:r>
+          </a:p>
+        </p:txBody>
+      </p:sp>
+      <p:sp>
+        <p:nvSpPr>
+          <p:cNvPr id="11" name="Rectangle 10"/>
+          <p:cNvSpPr/>
+          <p:nvPr/>
+        </p:nvSpPr>
+        <p:spPr>
+          <a:xfrm>
+            <a:off x="3474720" y="2286000"/>
+            <a:ext cx="2468880" cy="822960"/>
+          </a:xfrm>
+          <a:prstGeom prst="rect">
+            <a:avLst/>
+          </a:prstGeom>
+          <a:solidFill>
+            <a:srgbClr val="282212"/>
+          </a:solidFill>
+          <a:ln>
+            <a:solidFill>
+              <a:srgbClr val="D4AF37"/>
+            </a:solidFill>
+          </a:ln>
+        </p:spPr>
+        <p:style>
+          <a:lnRef idx="1">
+            <a:schemeClr val="accent1"/>
+          </a:lnRef>
+          <a:fillRef idx="3">
+            <a:schemeClr val="accent1"/>
+          </a:fillRef>
+          <a:effectRef idx="2">
+            <a:schemeClr val="accent1"/>
+          </a:effectRef>
+          <a:fontRef idx="minor">
+            <a:schemeClr val="lt1"/>
+          </a:fontRef>
+        </p:style>
+        <p:txBody>
+          <a:bodyPr rtlCol="0" anchor="ctr"/>
+          <a:lstStyle/>
+          <a:p>
+            <a:pPr algn="ctr"/>
+          </a:p>
+        </p:txBody>
+      </p:sp>
+      <p:sp>
+        <p:nvSpPr>
+          <p:cNvPr id="12" name="TextBox 11"/>
+          <p:cNvSpPr txBox="1"/>
+          <p:nvPr/>
+        </p:nvSpPr>
+        <p:spPr>
+          <a:xfrm>
+            <a:off x="3566160" y="2423160"/>
+            <a:ext cx="2286000" cy="548640"/>
+          </a:xfrm>
+          <a:prstGeom prst="rect">
+            <a:avLst/>
+          </a:prstGeom>
+          <a:noFill/>
+        </p:spPr>
+        <p:txBody>
+          <a:bodyPr wrap="square" anchor="t">
+            <a:spAutoFit/>
+          </a:bodyPr>
+          <a:lstStyle/>
+          <a:p>
+            <a:pPr algn="ctr">
+              <a:spcAft>
+                <a:spcPts val="800"/>
+              </a:spcAft>
+              <a:defRPr sz="1500" b="1">
+                <a:solidFill>
+                  <a:srgbClr val="F0D98C"/>
+                </a:solidFill>
+                <a:latin typeface="Calibri"/>
+              </a:defRPr>
+            </a:pPr>
+            <a:r>
+              <a:t>gurza36.ru</a:t>
+            </a:r>
+          </a:p>
+        </p:txBody>
+      </p:sp>
+      <p:sp>
+        <p:nvSpPr>
+          <p:cNvPr id="13" name="TextBox 12"/>
+          <p:cNvSpPr txBox="1"/>
+          <p:nvPr/>
+        </p:nvSpPr>
+        <p:spPr>
+          <a:xfrm>
+            <a:off x="5989320" y="2487168"/>
+            <a:ext cx="365760" cy="365760"/>
+          </a:xfrm>
+          <a:prstGeom prst="rect">
+            <a:avLst/>
+          </a:prstGeom>
+          <a:noFill/>
+        </p:spPr>
+        <p:txBody>
+          <a:bodyPr wrap="square" anchor="t">
+            <a:spAutoFit/>
+          </a:bodyPr>
+          <a:lstStyle/>
+          <a:p>
+            <a:pPr algn="l">
+              <a:spcAft>
+                <a:spcPts val="800"/>
+              </a:spcAft>
+              <a:defRPr sz="2000" b="1">
+                <a:solidFill>
+                  <a:srgbClr val="D4AF37"/>
+                </a:solidFill>
+                <a:latin typeface="Calibri"/>
+              </a:defRPr>
+            </a:pPr>
+            <a:r>
+              <a:t>→</a:t>
+            </a:r>
+          </a:p>
+        </p:txBody>
+      </p:sp>
+      <p:sp>
+        <p:nvSpPr>
+          <p:cNvPr id="14" name="Rectangle 13"/>
+          <p:cNvSpPr/>
+          <p:nvPr/>
+        </p:nvSpPr>
+        <p:spPr>
+          <a:xfrm>
+            <a:off x="6309360" y="2286000"/>
+            <a:ext cx="2468880" cy="822960"/>
+          </a:xfrm>
+          <a:prstGeom prst="rect">
+            <a:avLst/>
+          </a:prstGeom>
+          <a:solidFill>
+            <a:srgbClr val="121824"/>
+          </a:solidFill>
+          <a:ln>
+            <a:solidFill>
+              <a:srgbClr val="D4AF37"/>
+            </a:solidFill>
+          </a:ln>
+        </p:spPr>
+        <p:style>
+          <a:lnRef idx="1">
+            <a:schemeClr val="accent1"/>
+          </a:lnRef>
+          <a:fillRef idx="3">
+            <a:schemeClr val="accent1"/>
+          </a:fillRef>
+          <a:effectRef idx="2">
+            <a:schemeClr val="accent1"/>
+          </a:effectRef>
+          <a:fontRef idx="minor">
+            <a:schemeClr val="lt1"/>
+          </a:fontRef>
+        </p:style>
+        <p:txBody>
+          <a:bodyPr rtlCol="0" anchor="ctr"/>
+          <a:lstStyle/>
+          <a:p>
+            <a:pPr algn="ctr"/>
+          </a:p>
+        </p:txBody>
+      </p:sp>
+      <p:sp>
+        <p:nvSpPr>
+          <p:cNvPr id="15" name="TextBox 14"/>
+          <p:cNvSpPr txBox="1"/>
+          <p:nvPr/>
+        </p:nvSpPr>
+        <p:spPr>
+          <a:xfrm>
+            <a:off x="6400800" y="2423160"/>
+            <a:ext cx="2286000" cy="548640"/>
+          </a:xfrm>
+          <a:prstGeom prst="rect">
+            <a:avLst/>
+          </a:prstGeom>
+          <a:noFill/>
+        </p:spPr>
+        <p:txBody>
+          <a:bodyPr wrap="square" anchor="t">
+            <a:spAutoFit/>
+          </a:bodyPr>
+          <a:lstStyle/>
+          <a:p>
+            <a:pPr algn="ctr">
+              <a:spcAft>
+                <a:spcPts val="800"/>
+              </a:spcAft>
+              <a:defRPr sz="1500" b="0">
+                <a:solidFill>
+                  <a:srgbClr val="F5F7FA"/>
+                </a:solidFill>
+                <a:latin typeface="Calibri"/>
+              </a:defRPr>
+            </a:pPr>
+            <a:r>
+              <a:t>Звонок</a:t>
+            </a:r>
+          </a:p>
+        </p:txBody>
+      </p:sp>
+      <p:sp>
+        <p:nvSpPr>
+          <p:cNvPr id="16" name="TextBox 15"/>
+          <p:cNvSpPr txBox="1"/>
+          <p:nvPr/>
+        </p:nvSpPr>
+        <p:spPr>
+          <a:xfrm>
+            <a:off x="8823960" y="2487168"/>
+            <a:ext cx="365760" cy="365760"/>
+          </a:xfrm>
+          <a:prstGeom prst="rect">
+            <a:avLst/>
+          </a:prstGeom>
+          <a:noFill/>
+        </p:spPr>
+        <p:txBody>
+          <a:bodyPr wrap="square" anchor="t">
+            <a:spAutoFit/>
+          </a:bodyPr>
+          <a:lstStyle/>
+          <a:p>
+            <a:pPr algn="l">
+              <a:spcAft>
+                <a:spcPts val="800"/>
+              </a:spcAft>
+              <a:defRPr sz="2000" b="1">
+                <a:solidFill>
+                  <a:srgbClr val="D4AF37"/>
+                </a:solidFill>
+                <a:latin typeface="Calibri"/>
+              </a:defRPr>
+            </a:pPr>
+            <a:r>
+              <a:t>→</a:t>
+            </a:r>
+          </a:p>
+        </p:txBody>
+      </p:sp>
+      <p:sp>
+        <p:nvSpPr>
+          <p:cNvPr id="17" name="Rectangle 16"/>
+          <p:cNvSpPr/>
+          <p:nvPr/>
+        </p:nvSpPr>
+        <p:spPr>
+          <a:xfrm>
+            <a:off x="9144000" y="2286000"/>
+            <a:ext cx="2468880" cy="822960"/>
+          </a:xfrm>
+          <a:prstGeom prst="rect">
+            <a:avLst/>
+          </a:prstGeom>
+          <a:solidFill>
+            <a:srgbClr val="121824"/>
+          </a:solidFill>
+          <a:ln>
+            <a:solidFill>
+              <a:srgbClr val="D4AF37"/>
+            </a:solidFill>
+          </a:ln>
+        </p:spPr>
+        <p:style>
+          <a:lnRef idx="1">
+            <a:schemeClr val="accent1"/>
+          </a:lnRef>
+          <a:fillRef idx="3">
+            <a:schemeClr val="accent1"/>
+          </a:fillRef>
+          <a:effectRef idx="2">
+            <a:schemeClr val="accent1"/>
+          </a:effectRef>
+          <a:fontRef idx="minor">
+            <a:schemeClr val="lt1"/>
+          </a:fontRef>
+        </p:style>
+        <p:txBody>
+          <a:bodyPr rtlCol="0" anchor="ctr"/>
+          <a:lstStyle/>
+          <a:p>
+            <a:pPr algn="ctr"/>
+          </a:p>
+        </p:txBody>
+      </p:sp>
+      <p:sp>
+        <p:nvSpPr>
+          <p:cNvPr id="18" name="TextBox 17"/>
+          <p:cNvSpPr txBox="1"/>
+          <p:nvPr/>
+        </p:nvSpPr>
+        <p:spPr>
+          <a:xfrm>
+            <a:off x="9235440" y="2423160"/>
+            <a:ext cx="2286000" cy="548640"/>
+          </a:xfrm>
+          <a:prstGeom prst="rect">
+            <a:avLst/>
+          </a:prstGeom>
+          <a:noFill/>
+        </p:spPr>
+        <p:txBody>
+          <a:bodyPr wrap="square" anchor="t">
+            <a:spAutoFit/>
+          </a:bodyPr>
+          <a:lstStyle/>
+          <a:p>
+            <a:pPr algn="ctr">
+              <a:spcAft>
+                <a:spcPts val="800"/>
+              </a:spcAft>
+              <a:defRPr sz="1500" b="0">
+                <a:solidFill>
+                  <a:srgbClr val="F5F7FA"/>
+                </a:solidFill>
+                <a:latin typeface="Calibri"/>
+              </a:defRPr>
+            </a:pPr>
+            <a:r>
+              <a:t>Договор</a:t>
+            </a:r>
+          </a:p>
+        </p:txBody>
+      </p:sp>
+      <p:sp>
+        <p:nvSpPr>
+          <p:cNvPr id="19" name="TextBox 18"/>
+          <p:cNvSpPr txBox="1"/>
+          <p:nvPr/>
+        </p:nvSpPr>
+        <p:spPr>
+          <a:xfrm>
+            <a:off x="731520" y="3474720"/>
+            <a:ext cx="10515600" cy="4114800"/>
+          </a:xfrm>
+          <a:prstGeom prst="rect">
+            <a:avLst/>
+          </a:prstGeom>
+          <a:noFill/>
+        </p:spPr>
+        <p:txBody>
+          <a:bodyPr wrap="square" anchor="t">
+            <a:spAutoFit/>
+          </a:bodyPr>
+          <a:lstStyle/>
+          <a:p>
+            <a:pPr algn="l">
+              <a:spcBef>
+                <a:spcPts val="1000"/>
+              </a:spcBef>
+              <a:spcAft>
+                <a:spcPts val="600"/>
+              </a:spcAft>
+              <a:defRPr sz="1800">
+                <a:solidFill>
+                  <a:srgbClr val="F5F7FA"/>
+                </a:solidFill>
+                <a:latin typeface="Calibri"/>
+              </a:defRPr>
+            </a:pPr>
+            <a:r>
+              <a:t>◆  Лицо компании — профессиональный образ 24/7</a:t>
+            </a:r>
+          </a:p>
+          <a:p>
             <a:pPr>
-              <a:spcAft>
+              <a:spcBef>
                 <a:spcPts val="1000"/>
-              </a:spcAft>
-              <a:defRPr sz="2000">
-                <a:solidFill>
-                  <a:srgbClr val="EEF1F6"/>
-                </a:solidFill>
-              </a:defRPr>
-            </a:pPr>
-            <a:r>
-              <a:t>ЧОО «Гюрза» — частная охранная организация с 2011 года</a:t>
+              </a:spcBef>
+              <a:spcAft>
+                <a:spcPts val="600"/>
+              </a:spcAft>
+              <a:defRPr sz="1800">
+                <a:solidFill>
+                  <a:srgbClr val="F5F7FA"/>
+                </a:solidFill>
+                <a:latin typeface="Calibri"/>
+              </a:defRPr>
+            </a:pPr>
+            <a:r>
+              <a:t>◆  Единая ссылка для визиток, КП, тендеров</a:t>
             </a:r>
           </a:p>
           <a:p>
             <a:pPr>
-              <a:spcAft>
+              <a:spcBef>
                 <a:spcPts val="1000"/>
-              </a:spcAft>
-              <a:defRPr sz="2000">
-                <a:solidFill>
-                  <a:srgbClr val="EEF1F6"/>
-                </a:solidFill>
-              </a:defRPr>
-            </a:pPr>
-            <a:r>
-              <a:t>Охрана административных зданий, строек, складов, агропредприятий</a:t>
+              </a:spcBef>
+              <a:spcAft>
+                <a:spcPts val="600"/>
+              </a:spcAft>
+              <a:defRPr sz="1800">
+                <a:solidFill>
+                  <a:srgbClr val="F5F7FA"/>
+                </a:solidFill>
+                <a:latin typeface="Calibri"/>
+              </a:defRPr>
+            </a:pPr>
+            <a:r>
+              <a:t>◆  SEO по запросам: «охрана воронеж», «чоо», «охрана складов»</a:t>
             </a:r>
           </a:p>
           <a:p>
             <a:pPr>
-              <a:spcAft>
+              <a:spcBef>
                 <a:spcPts val="1000"/>
-              </a:spcAft>
-              <a:defRPr sz="2000">
-                <a:solidFill>
-                  <a:srgbClr val="EEF1F6"/>
-                </a:solidFill>
-              </a:defRPr>
-            </a:pPr>
-            <a:r>
-              <a:t>Сайт — инструмент доверия и продаж: клиент за 30 секунд понимает, кто вы и как связаться</a:t>
-            </a:r>
-          </a:p>
-          <a:p>
-            <a:pPr>
-              <a:spcAft>
-                <a:spcPts val="1000"/>
-              </a:spcAft>
-              <a:defRPr sz="2000">
-                <a:solidFill>
-                  <a:srgbClr val="EEF1F6"/>
-                </a:solidFill>
-              </a:defRPr>
-            </a:pPr>
-            <a:r>
-              <a:t>15+ лет на рынке · 24/7 · 6 направлений услуг · Воронеж и область</a:t>
+              </a:spcBef>
+              <a:spcAft>
+                <a:spcPts val="600"/>
+              </a:spcAft>
+              <a:defRPr sz="1800">
+                <a:solidFill>
+                  <a:srgbClr val="F5F7FA"/>
+                </a:solidFill>
+                <a:latin typeface="Calibri"/>
+              </a:defRPr>
+            </a:pPr>
+            <a:r>
+              <a:t>◆  Фильтр клиентов — сразу видно, подходите ли под задачу</a:t>
             </a:r>
           </a:p>
         </p:txBody>
@@ -3671,20 +4455,15 @@
   <p:clrMapOvr>
     <a:masterClrMapping/>
   </p:clrMapOvr>
+  <p:transition spd="med" advClick="1">
+    <p:fadeThroughBlack/>
+  </p:transition>
 </p:sld>
 </file>
 
-<file path=ppt/slides/slide3.xml><?xml version="1.0" encoding="utf-8"?>
+<file path=ppt/slides/slide12.xml><?xml version="1.0" encoding="utf-8"?>
 <p:sld xmlns:a="http://schemas.openxmlformats.org/drawingml/2006/main" xmlns:p="http://schemas.openxmlformats.org/presentationml/2006/main" xmlns:r="http://schemas.openxmlformats.org/officeDocument/2006/relationships">
   <p:cSld>
-    <p:bg>
-      <p:bgPr>
-        <a:solidFill>
-          <a:srgbClr val="0C1018"/>
-        </a:solidFill>
-        <a:effectLst/>
-      </p:bgPr>
-    </p:bg>
     <p:spTree>
       <p:nvGrpSpPr>
         <p:cNvPr id="1" name=""/>
@@ -3692,120 +4471,198 @@
         <p:nvPr/>
       </p:nvGrpSpPr>
       <p:grpSpPr/>
-      <p:sp>
-        <p:nvSpPr>
-          <p:cNvPr id="2" name="TextBox 1"/>
+      <p:pic>
+        <p:nvPicPr>
+          <p:cNvPr id="2" name="Picture 1" descr="bg-dark.png"/>
+          <p:cNvPicPr>
+            <a:picLocks noChangeAspect="1"/>
+          </p:cNvPicPr>
+          <p:nvPr/>
+        </p:nvPicPr>
+        <p:blipFill>
+          <a:blip r:embed="rId2"/>
+          <a:stretch>
+            <a:fillRect/>
+          </a:stretch>
+        </p:blipFill>
+        <p:spPr>
+          <a:xfrm>
+            <a:off x="0" y="0"/>
+            <a:ext cx="12191695" cy="6858000"/>
+          </a:xfrm>
+          <a:prstGeom prst="rect">
+            <a:avLst/>
+          </a:prstGeom>
+        </p:spPr>
+      </p:pic>
+      <p:sp>
+        <p:nvSpPr>
+          <p:cNvPr id="3" name="TextBox 2"/>
           <p:cNvSpPr txBox="1"/>
           <p:nvPr/>
         </p:nvSpPr>
         <p:spPr>
           <a:xfrm>
-            <a:off x="9601200" y="320040"/>
-            <a:ext cx="2286000" cy="274320"/>
-          </a:xfrm>
-          <a:prstGeom prst="rect">
-            <a:avLst/>
-          </a:prstGeom>
-          <a:noFill/>
-        </p:spPr>
-        <p:txBody>
-          <a:bodyPr wrap="none">
+            <a:off x="502920" y="320040"/>
+            <a:ext cx="3657600" cy="274320"/>
+          </a:xfrm>
+          <a:prstGeom prst="rect">
+            <a:avLst/>
+          </a:prstGeom>
+          <a:noFill/>
+        </p:spPr>
+        <p:txBody>
+          <a:bodyPr wrap="square" anchor="t">
             <a:spAutoFit/>
           </a:bodyPr>
           <a:lstStyle/>
           <a:p>
-            <a:pPr algn="r">
-              <a:defRPr sz="1200">
+            <a:pPr algn="l">
+              <a:spcAft>
+                <a:spcPts val="800"/>
+              </a:spcAft>
+              <a:defRPr sz="1100" b="1">
                 <a:solidFill>
                   <a:srgbClr val="D4AF37"/>
                 </a:solidFill>
-              </a:defRPr>
-            </a:pPr>
-            <a:r>
-              <a:t>gurza36.ru</a:t>
-            </a:r>
-          </a:p>
-        </p:txBody>
-      </p:sp>
-      <p:sp>
-        <p:nvSpPr>
-          <p:cNvPr id="3" name="TextBox 2"/>
+                <a:latin typeface="Calibri"/>
+              </a:defRPr>
+            </a:pPr>
+            <a:r>
+              <a:t>ЧОО «ГЮРЗА»</a:t>
+            </a:r>
+          </a:p>
+        </p:txBody>
+      </p:sp>
+      <p:sp>
+        <p:nvSpPr>
+          <p:cNvPr id="4" name="TextBox 3"/>
           <p:cNvSpPr txBox="1"/>
           <p:nvPr/>
         </p:nvSpPr>
         <p:spPr>
           <a:xfrm>
-            <a:off x="640080" y="548640"/>
-            <a:ext cx="10972800" cy="365760"/>
-          </a:xfrm>
-          <a:prstGeom prst="rect">
-            <a:avLst/>
-          </a:prstGeom>
-          <a:noFill/>
-        </p:spPr>
-        <p:txBody>
-          <a:bodyPr wrap="none">
+            <a:off x="8961120" y="320040"/>
+            <a:ext cx="2743200" cy="274320"/>
+          </a:xfrm>
+          <a:prstGeom prst="rect">
+            <a:avLst/>
+          </a:prstGeom>
+          <a:noFill/>
+        </p:spPr>
+        <p:txBody>
+          <a:bodyPr wrap="square" anchor="t">
             <a:spAutoFit/>
           </a:bodyPr>
           <a:lstStyle/>
           <a:p>
-            <a:pPr>
-              <a:defRPr sz="1400" b="1">
+            <a:pPr algn="r">
+              <a:spcAft>
+                <a:spcPts val="800"/>
+              </a:spcAft>
+              <a:defRPr sz="1100" b="1">
                 <a:solidFill>
                   <a:srgbClr val="D4AF37"/>
                 </a:solidFill>
-              </a:defRPr>
-            </a:pPr>
-            <a:r>
-              <a:t>ЧТО МЫ ДЕЛАЕМ</a:t>
-            </a:r>
-          </a:p>
-        </p:txBody>
-      </p:sp>
-      <p:sp>
-        <p:nvSpPr>
-          <p:cNvPr id="4" name="TextBox 3"/>
+                <a:latin typeface="Calibri"/>
+              </a:defRPr>
+            </a:pPr>
+            <a:r>
+              <a:t>gurza36.ru</a:t>
+            </a:r>
+          </a:p>
+        </p:txBody>
+      </p:sp>
+      <p:sp>
+        <p:nvSpPr>
+          <p:cNvPr id="5" name="Rectangle 4"/>
+          <p:cNvSpPr/>
+          <p:nvPr/>
+        </p:nvSpPr>
+        <p:spPr>
+          <a:xfrm>
+            <a:off x="502920" y="658368"/>
+            <a:ext cx="11155680" cy="0"/>
+          </a:xfrm>
+          <a:prstGeom prst="rect">
+            <a:avLst/>
+          </a:prstGeom>
+          <a:ln w="9525">
+            <a:solidFill>
+              <a:srgbClr val="D4AF37"/>
+            </a:solidFill>
+          </a:ln>
+        </p:spPr>
+        <p:style>
+          <a:lnRef idx="1">
+            <a:schemeClr val="accent1"/>
+          </a:lnRef>
+          <a:fillRef idx="3">
+            <a:schemeClr val="accent1"/>
+          </a:fillRef>
+          <a:effectRef idx="2">
+            <a:schemeClr val="accent1"/>
+          </a:effectRef>
+          <a:fontRef idx="minor">
+            <a:schemeClr val="lt1"/>
+          </a:fontRef>
+        </p:style>
+        <p:txBody>
+          <a:bodyPr rtlCol="0" anchor="ctr"/>
+          <a:lstStyle/>
+          <a:p>
+            <a:pPr algn="ctr"/>
+          </a:p>
+        </p:txBody>
+      </p:sp>
+      <p:sp>
+        <p:nvSpPr>
+          <p:cNvPr id="6" name="TextBox 5"/>
           <p:cNvSpPr txBox="1"/>
           <p:nvPr/>
         </p:nvSpPr>
         <p:spPr>
           <a:xfrm>
-            <a:off x="640080" y="960120"/>
-            <a:ext cx="10972800" cy="1097280"/>
-          </a:xfrm>
-          <a:prstGeom prst="rect">
-            <a:avLst/>
-          </a:prstGeom>
-          <a:noFill/>
-        </p:spPr>
-        <p:txBody>
-          <a:bodyPr wrap="none">
+            <a:off x="640080" y="914400"/>
+            <a:ext cx="9144000" cy="457200"/>
+          </a:xfrm>
+          <a:prstGeom prst="rect">
+            <a:avLst/>
+          </a:prstGeom>
+          <a:noFill/>
+        </p:spPr>
+        <p:txBody>
+          <a:bodyPr wrap="square" anchor="t">
             <a:spAutoFit/>
           </a:bodyPr>
           <a:lstStyle/>
           <a:p>
-            <a:pPr>
-              <a:defRPr sz="4000" b="1">
-                <a:solidFill>
-                  <a:srgbClr val="EEF1F6"/>
-                </a:solidFill>
-              </a:defRPr>
-            </a:pPr>
-            <a:r>
-              <a:t>Услуги на сайте</a:t>
-            </a:r>
-          </a:p>
-        </p:txBody>
-      </p:sp>
-      <p:sp>
-        <p:nvSpPr>
-          <p:cNvPr id="5" name="TextBox 4"/>
+            <a:pPr algn="l">
+              <a:spcAft>
+                <a:spcPts val="800"/>
+              </a:spcAft>
+              <a:defRPr sz="1400" b="1">
+                <a:solidFill>
+                  <a:srgbClr val="D4AF37"/>
+                </a:solidFill>
+                <a:latin typeface="Calibri"/>
+              </a:defRPr>
+            </a:pPr>
+            <a:r>
+              <a:t>ТЕХНОЛОГИИ И SEO</a:t>
+            </a:r>
+          </a:p>
+        </p:txBody>
+      </p:sp>
+      <p:sp>
+        <p:nvSpPr>
+          <p:cNvPr id="7" name="TextBox 6"/>
           <p:cNvSpPr txBox="1"/>
           <p:nvPr/>
         </p:nvSpPr>
         <p:spPr>
           <a:xfrm>
-            <a:off x="640080" y="1645920"/>
+            <a:off x="731520" y="1463040"/>
             <a:ext cx="10515600" cy="4114800"/>
           </a:xfrm>
           <a:prstGeom prst="rect">
@@ -3814,98 +4671,453 @@
           <a:noFill/>
         </p:spPr>
         <p:txBody>
-          <a:bodyPr wrap="square">
+          <a:bodyPr wrap="square" anchor="t">
             <a:spAutoFit/>
           </a:bodyPr>
           <a:lstStyle/>
           <a:p>
+            <a:pPr algn="l">
+              <a:spcBef>
+                <a:spcPts val="1000"/>
+              </a:spcBef>
+              <a:spcAft>
+                <a:spcPts val="600"/>
+              </a:spcAft>
+              <a:defRPr sz="1700">
+                <a:solidFill>
+                  <a:srgbClr val="F5F7FA"/>
+                </a:solidFill>
+                <a:latin typeface="Calibri"/>
+              </a:defRPr>
+            </a:pPr>
+            <a:r>
+              <a:t>◆  React 19 · TypeScript · Three.js · Framer Motion · Vercel CDN</a:t>
+            </a:r>
+          </a:p>
+          <a:p>
             <a:pPr>
-              <a:spcAft>
+              <a:spcBef>
                 <a:spcPts val="1000"/>
-              </a:spcAft>
-              <a:defRPr sz="1800">
-                <a:solidFill>
-                  <a:srgbClr val="EEF1F6"/>
-                </a:solidFill>
-              </a:defRPr>
-            </a:pPr>
-            <a:r>
-              <a:t>Административные здания — офисы, бизнес-центры</a:t>
+              </a:spcBef>
+              <a:spcAft>
+                <a:spcPts val="600"/>
+              </a:spcAft>
+              <a:defRPr sz="1700">
+                <a:solidFill>
+                  <a:srgbClr val="F5F7FA"/>
+                </a:solidFill>
+                <a:latin typeface="Calibri"/>
+              </a:defRPr>
+            </a:pPr>
+            <a:r>
+              <a:t>◆  Домен gurza36.ru + SSL · canonical · JSON-LD · robots.txt · sitemap</a:t>
             </a:r>
           </a:p>
           <a:p>
             <a:pPr>
-              <a:spcAft>
+              <a:spcBef>
                 <a:spcPts val="1000"/>
-              </a:spcAft>
-              <a:defRPr sz="1800">
-                <a:solidFill>
-                  <a:srgbClr val="EEF1F6"/>
-                </a:solidFill>
-              </a:defRPr>
-            </a:pPr>
-            <a:r>
-              <a:t>Строительные объекты — площадки, техника, материалы</a:t>
+              </a:spcBef>
+              <a:spcAft>
+                <a:spcPts val="600"/>
+              </a:spcAft>
+              <a:defRPr sz="1700">
+                <a:solidFill>
+                  <a:srgbClr val="F5F7FA"/>
+                </a:solidFill>
+                <a:latin typeface="Calibri"/>
+              </a:defRPr>
+            </a:pPr>
+            <a:r>
+              <a:t>◆  Open Graph — красивые превью в Telegram и VK</a:t>
             </a:r>
           </a:p>
           <a:p>
             <a:pPr>
-              <a:spcAft>
+              <a:spcBef>
                 <a:spcPts val="1000"/>
-              </a:spcAft>
-              <a:defRPr sz="1800">
-                <a:solidFill>
-                  <a:srgbClr val="EEF1F6"/>
-                </a:solidFill>
-              </a:defRPr>
-            </a:pPr>
-            <a:r>
-              <a:t>Складские помещения — ТМЦ, логистика</a:t>
-            </a:r>
-          </a:p>
-          <a:p>
-            <a:pPr>
-              <a:spcAft>
-                <a:spcPts val="1000"/>
-              </a:spcAft>
-              <a:defRPr sz="1800">
-                <a:solidFill>
-                  <a:srgbClr val="EEF1F6"/>
-                </a:solidFill>
-              </a:defRPr>
-            </a:pPr>
-            <a:r>
-              <a:t>Пропускной режим — КПП, контроль доступа</a:t>
-            </a:r>
-          </a:p>
-          <a:p>
-            <a:pPr>
-              <a:spcAft>
-                <a:spcPts val="1000"/>
-              </a:spcAft>
-              <a:defRPr sz="1800">
-                <a:solidFill>
-                  <a:srgbClr val="EEF1F6"/>
-                </a:solidFill>
-              </a:defRPr>
-            </a:pPr>
-            <a:r>
-              <a:t>Сельхозпредприятия — зерновые и масличные базы (специализация)</a:t>
-            </a:r>
-          </a:p>
-          <a:p>
-            <a:pPr>
-              <a:spcAft>
-                <a:spcPts val="1000"/>
-              </a:spcAft>
-              <a:defRPr sz="1800">
-                <a:solidFill>
-                  <a:srgbClr val="EEF1F6"/>
-                </a:solidFill>
-              </a:defRPr>
-            </a:pPr>
-            <a:r>
-              <a:t>Анализ угроз — экспертная оценка объекта</a:t>
+              </a:spcBef>
+              <a:spcAft>
+                <a:spcPts val="600"/>
+              </a:spcAft>
+              <a:defRPr sz="1700">
+                <a:solidFill>
+                  <a:srgbClr val="F5F7FA"/>
+                </a:solidFill>
+                <a:latin typeface="Calibri"/>
+              </a:defRPr>
+            </a:pPr>
+            <a:r>
+              <a:t>◆  Яндекс.Вебмастер + 2ГИС = ускорение индексации</a:t>
+            </a:r>
+          </a:p>
+        </p:txBody>
+      </p:sp>
+      <p:sp>
+        <p:nvSpPr>
+          <p:cNvPr id="8" name="Rectangle 7"/>
+          <p:cNvSpPr/>
+          <p:nvPr/>
+        </p:nvSpPr>
+        <p:spPr>
+          <a:xfrm>
+            <a:off x="640080" y="4114800"/>
+            <a:ext cx="3474720" cy="1417320"/>
+          </a:xfrm>
+          <a:prstGeom prst="rect">
+            <a:avLst/>
+          </a:prstGeom>
+          <a:solidFill>
+            <a:srgbClr val="121824"/>
+          </a:solidFill>
+          <a:ln w="6350">
+            <a:solidFill>
+              <a:srgbClr val="D4AF37"/>
+            </a:solidFill>
+          </a:ln>
+        </p:spPr>
+        <p:style>
+          <a:lnRef idx="1">
+            <a:schemeClr val="accent1"/>
+          </a:lnRef>
+          <a:fillRef idx="3">
+            <a:schemeClr val="accent1"/>
+          </a:fillRef>
+          <a:effectRef idx="2">
+            <a:schemeClr val="accent1"/>
+          </a:effectRef>
+          <a:fontRef idx="minor">
+            <a:schemeClr val="lt1"/>
+          </a:fontRef>
+        </p:style>
+        <p:txBody>
+          <a:bodyPr rtlCol="0" anchor="ctr"/>
+          <a:lstStyle/>
+          <a:p>
+            <a:pPr algn="ctr"/>
+          </a:p>
+        </p:txBody>
+      </p:sp>
+      <p:sp>
+        <p:nvSpPr>
+          <p:cNvPr id="9" name="TextBox 8"/>
+          <p:cNvSpPr txBox="1"/>
+          <p:nvPr/>
+        </p:nvSpPr>
+        <p:spPr>
+          <a:xfrm>
+            <a:off x="822959" y="4251960"/>
+            <a:ext cx="3108960" cy="640080"/>
+          </a:xfrm>
+          <a:prstGeom prst="rect">
+            <a:avLst/>
+          </a:prstGeom>
+          <a:noFill/>
+        </p:spPr>
+        <p:txBody>
+          <a:bodyPr wrap="square" anchor="t">
+            <a:spAutoFit/>
+          </a:bodyPr>
+          <a:lstStyle/>
+          <a:p>
+            <a:pPr algn="l">
+              <a:spcAft>
+                <a:spcPts val="1400"/>
+              </a:spcAft>
+              <a:defRPr sz="3600" b="1">
+                <a:solidFill>
+                  <a:srgbClr val="D4AF37"/>
+                </a:solidFill>
+                <a:latin typeface="Calibri"/>
+              </a:defRPr>
+            </a:pPr>
+            <a:r>
+              <a:t>1–2 мес</a:t>
+            </a:r>
+          </a:p>
+        </p:txBody>
+      </p:sp>
+      <p:sp>
+        <p:nvSpPr>
+          <p:cNvPr id="10" name="TextBox 9"/>
+          <p:cNvSpPr txBox="1"/>
+          <p:nvPr/>
+        </p:nvSpPr>
+        <p:spPr>
+          <a:xfrm>
+            <a:off x="822959" y="4892040"/>
+            <a:ext cx="3108960" cy="548640"/>
+          </a:xfrm>
+          <a:prstGeom prst="rect">
+            <a:avLst/>
+          </a:prstGeom>
+          <a:noFill/>
+        </p:spPr>
+        <p:txBody>
+          <a:bodyPr wrap="square" anchor="t">
+            <a:spAutoFit/>
+          </a:bodyPr>
+          <a:lstStyle/>
+          <a:p>
+            <a:pPr algn="l">
+              <a:spcAft>
+                <a:spcPts val="800"/>
+              </a:spcAft>
+              <a:defRPr sz="1300" b="0">
+                <a:solidFill>
+                  <a:srgbClr val="919BAF"/>
+                </a:solidFill>
+                <a:latin typeface="Calibri"/>
+              </a:defRPr>
+            </a:pPr>
+            <a:r>
+              <a:t>индекс по бренду</a:t>
+            </a:r>
+          </a:p>
+        </p:txBody>
+      </p:sp>
+      <p:sp>
+        <p:nvSpPr>
+          <p:cNvPr id="11" name="Rectangle 10"/>
+          <p:cNvSpPr/>
+          <p:nvPr/>
+        </p:nvSpPr>
+        <p:spPr>
+          <a:xfrm>
+            <a:off x="4251959" y="4114800"/>
+            <a:ext cx="3474720" cy="1417320"/>
+          </a:xfrm>
+          <a:prstGeom prst="rect">
+            <a:avLst/>
+          </a:prstGeom>
+          <a:solidFill>
+            <a:srgbClr val="121824"/>
+          </a:solidFill>
+          <a:ln w="6350">
+            <a:solidFill>
+              <a:srgbClr val="D4AF37"/>
+            </a:solidFill>
+          </a:ln>
+        </p:spPr>
+        <p:style>
+          <a:lnRef idx="1">
+            <a:schemeClr val="accent1"/>
+          </a:lnRef>
+          <a:fillRef idx="3">
+            <a:schemeClr val="accent1"/>
+          </a:fillRef>
+          <a:effectRef idx="2">
+            <a:schemeClr val="accent1"/>
+          </a:effectRef>
+          <a:fontRef idx="minor">
+            <a:schemeClr val="lt1"/>
+          </a:fontRef>
+        </p:style>
+        <p:txBody>
+          <a:bodyPr rtlCol="0" anchor="ctr"/>
+          <a:lstStyle/>
+          <a:p>
+            <a:pPr algn="ctr"/>
+          </a:p>
+        </p:txBody>
+      </p:sp>
+      <p:sp>
+        <p:nvSpPr>
+          <p:cNvPr id="12" name="TextBox 11"/>
+          <p:cNvSpPr txBox="1"/>
+          <p:nvPr/>
+        </p:nvSpPr>
+        <p:spPr>
+          <a:xfrm>
+            <a:off x="4434840" y="4251960"/>
+            <a:ext cx="3108960" cy="640080"/>
+          </a:xfrm>
+          <a:prstGeom prst="rect">
+            <a:avLst/>
+          </a:prstGeom>
+          <a:noFill/>
+        </p:spPr>
+        <p:txBody>
+          <a:bodyPr wrap="square" anchor="t">
+            <a:spAutoFit/>
+          </a:bodyPr>
+          <a:lstStyle/>
+          <a:p>
+            <a:pPr algn="l">
+              <a:spcAft>
+                <a:spcPts val="1400"/>
+              </a:spcAft>
+              <a:defRPr sz="3600" b="1">
+                <a:solidFill>
+                  <a:srgbClr val="D4AF37"/>
+                </a:solidFill>
+                <a:latin typeface="Calibri"/>
+              </a:defRPr>
+            </a:pPr>
+            <a:r>
+              <a:t>3–6 мес</a:t>
+            </a:r>
+          </a:p>
+        </p:txBody>
+      </p:sp>
+      <p:sp>
+        <p:nvSpPr>
+          <p:cNvPr id="13" name="TextBox 12"/>
+          <p:cNvSpPr txBox="1"/>
+          <p:nvPr/>
+        </p:nvSpPr>
+        <p:spPr>
+          <a:xfrm>
+            <a:off x="4434840" y="4892040"/>
+            <a:ext cx="3108960" cy="548640"/>
+          </a:xfrm>
+          <a:prstGeom prst="rect">
+            <a:avLst/>
+          </a:prstGeom>
+          <a:noFill/>
+        </p:spPr>
+        <p:txBody>
+          <a:bodyPr wrap="square" anchor="t">
+            <a:spAutoFit/>
+          </a:bodyPr>
+          <a:lstStyle/>
+          <a:p>
+            <a:pPr algn="l">
+              <a:spcAft>
+                <a:spcPts val="800"/>
+              </a:spcAft>
+              <a:defRPr sz="1300" b="0">
+                <a:solidFill>
+                  <a:srgbClr val="919BAF"/>
+                </a:solidFill>
+                <a:latin typeface="Calibri"/>
+              </a:defRPr>
+            </a:pPr>
+            <a:r>
+              <a:t>локальные запросы</a:t>
+            </a:r>
+          </a:p>
+        </p:txBody>
+      </p:sp>
+      <p:sp>
+        <p:nvSpPr>
+          <p:cNvPr id="14" name="Rectangle 13"/>
+          <p:cNvSpPr/>
+          <p:nvPr/>
+        </p:nvSpPr>
+        <p:spPr>
+          <a:xfrm>
+            <a:off x="7863840" y="4114800"/>
+            <a:ext cx="3474720" cy="1417320"/>
+          </a:xfrm>
+          <a:prstGeom prst="rect">
+            <a:avLst/>
+          </a:prstGeom>
+          <a:solidFill>
+            <a:srgbClr val="121824"/>
+          </a:solidFill>
+          <a:ln w="6350">
+            <a:solidFill>
+              <a:srgbClr val="D4AF37"/>
+            </a:solidFill>
+          </a:ln>
+        </p:spPr>
+        <p:style>
+          <a:lnRef idx="1">
+            <a:schemeClr val="accent1"/>
+          </a:lnRef>
+          <a:fillRef idx="3">
+            <a:schemeClr val="accent1"/>
+          </a:fillRef>
+          <a:effectRef idx="2">
+            <a:schemeClr val="accent1"/>
+          </a:effectRef>
+          <a:fontRef idx="minor">
+            <a:schemeClr val="lt1"/>
+          </a:fontRef>
+        </p:style>
+        <p:txBody>
+          <a:bodyPr rtlCol="0" anchor="ctr"/>
+          <a:lstStyle/>
+          <a:p>
+            <a:pPr algn="ctr"/>
+          </a:p>
+        </p:txBody>
+      </p:sp>
+      <p:sp>
+        <p:nvSpPr>
+          <p:cNvPr id="15" name="TextBox 14"/>
+          <p:cNvSpPr txBox="1"/>
+          <p:nvPr/>
+        </p:nvSpPr>
+        <p:spPr>
+          <a:xfrm>
+            <a:off x="8046719" y="4251960"/>
+            <a:ext cx="3108960" cy="640080"/>
+          </a:xfrm>
+          <a:prstGeom prst="rect">
+            <a:avLst/>
+          </a:prstGeom>
+          <a:noFill/>
+        </p:spPr>
+        <p:txBody>
+          <a:bodyPr wrap="square" anchor="t">
+            <a:spAutoFit/>
+          </a:bodyPr>
+          <a:lstStyle/>
+          <a:p>
+            <a:pPr algn="l">
+              <a:spcAft>
+                <a:spcPts val="1400"/>
+              </a:spcAft>
+              <a:defRPr sz="3600" b="1">
+                <a:solidFill>
+                  <a:srgbClr val="D4AF37"/>
+                </a:solidFill>
+                <a:latin typeface="Calibri"/>
+              </a:defRPr>
+            </a:pPr>
+            <a:r>
+              <a:t>∞</a:t>
+            </a:r>
+          </a:p>
+        </p:txBody>
+      </p:sp>
+      <p:sp>
+        <p:nvSpPr>
+          <p:cNvPr id="16" name="TextBox 15"/>
+          <p:cNvSpPr txBox="1"/>
+          <p:nvPr/>
+        </p:nvSpPr>
+        <p:spPr>
+          <a:xfrm>
+            <a:off x="8046719" y="4892040"/>
+            <a:ext cx="3108960" cy="548640"/>
+          </a:xfrm>
+          <a:prstGeom prst="rect">
+            <a:avLst/>
+          </a:prstGeom>
+          <a:noFill/>
+        </p:spPr>
+        <p:txBody>
+          <a:bodyPr wrap="square" anchor="t">
+            <a:spAutoFit/>
+          </a:bodyPr>
+          <a:lstStyle/>
+          <a:p>
+            <a:pPr algn="l">
+              <a:spcAft>
+                <a:spcPts val="800"/>
+              </a:spcAft>
+              <a:defRPr sz="1300" b="0">
+                <a:solidFill>
+                  <a:srgbClr val="919BAF"/>
+                </a:solidFill>
+                <a:latin typeface="Calibri"/>
+              </a:defRPr>
+            </a:pPr>
+            <a:r>
+              <a:t>заявки 24/7</a:t>
             </a:r>
           </a:p>
         </p:txBody>
@@ -3915,20 +5127,15 @@
   <p:clrMapOvr>
     <a:masterClrMapping/>
   </p:clrMapOvr>
+  <p:transition spd="med" advClick="1">
+    <p:fadeThroughBlack/>
+  </p:transition>
 </p:sld>
 </file>
 
-<file path=ppt/slides/slide4.xml><?xml version="1.0" encoding="utf-8"?>
+<file path=ppt/slides/slide13.xml><?xml version="1.0" encoding="utf-8"?>
 <p:sld xmlns:a="http://schemas.openxmlformats.org/drawingml/2006/main" xmlns:p="http://schemas.openxmlformats.org/presentationml/2006/main" xmlns:r="http://schemas.openxmlformats.org/officeDocument/2006/relationships">
   <p:cSld>
-    <p:bg>
-      <p:bgPr>
-        <a:solidFill>
-          <a:srgbClr val="0C1018"/>
-        </a:solidFill>
-        <a:effectLst/>
-      </p:bgPr>
-    </p:bg>
     <p:spTree>
       <p:nvGrpSpPr>
         <p:cNvPr id="1" name=""/>
@@ -3936,205 +5143,323 @@
         <p:nvPr/>
       </p:nvGrpSpPr>
       <p:grpSpPr/>
-      <p:sp>
-        <p:nvSpPr>
-          <p:cNvPr id="2" name="TextBox 1"/>
+      <p:pic>
+        <p:nvPicPr>
+          <p:cNvPr id="2" name="Picture 1" descr="bg-dark.png"/>
+          <p:cNvPicPr>
+            <a:picLocks noChangeAspect="1"/>
+          </p:cNvPicPr>
+          <p:nvPr/>
+        </p:nvPicPr>
+        <p:blipFill>
+          <a:blip r:embed="rId2"/>
+          <a:stretch>
+            <a:fillRect/>
+          </a:stretch>
+        </p:blipFill>
+        <p:spPr>
+          <a:xfrm>
+            <a:off x="0" y="0"/>
+            <a:ext cx="12191695" cy="6858000"/>
+          </a:xfrm>
+          <a:prstGeom prst="rect">
+            <a:avLst/>
+          </a:prstGeom>
+        </p:spPr>
+      </p:pic>
+      <p:sp>
+        <p:nvSpPr>
+          <p:cNvPr id="3" name="TextBox 2"/>
           <p:cNvSpPr txBox="1"/>
           <p:nvPr/>
         </p:nvSpPr>
         <p:spPr>
           <a:xfrm>
-            <a:off x="9601200" y="320040"/>
-            <a:ext cx="2286000" cy="274320"/>
-          </a:xfrm>
-          <a:prstGeom prst="rect">
-            <a:avLst/>
-          </a:prstGeom>
-          <a:noFill/>
-        </p:spPr>
-        <p:txBody>
-          <a:bodyPr wrap="none">
+            <a:off x="502920" y="320040"/>
+            <a:ext cx="3657600" cy="274320"/>
+          </a:xfrm>
+          <a:prstGeom prst="rect">
+            <a:avLst/>
+          </a:prstGeom>
+          <a:noFill/>
+        </p:spPr>
+        <p:txBody>
+          <a:bodyPr wrap="square" anchor="t">
             <a:spAutoFit/>
           </a:bodyPr>
           <a:lstStyle/>
           <a:p>
-            <a:pPr algn="r">
-              <a:defRPr sz="1200">
+            <a:pPr algn="l">
+              <a:spcAft>
+                <a:spcPts val="800"/>
+              </a:spcAft>
+              <a:defRPr sz="1100" b="1">
                 <a:solidFill>
                   <a:srgbClr val="D4AF37"/>
                 </a:solidFill>
-              </a:defRPr>
-            </a:pPr>
-            <a:r>
-              <a:t>gurza36.ru</a:t>
-            </a:r>
-          </a:p>
-        </p:txBody>
-      </p:sp>
-      <p:sp>
-        <p:nvSpPr>
-          <p:cNvPr id="3" name="TextBox 2"/>
+                <a:latin typeface="Calibri"/>
+              </a:defRPr>
+            </a:pPr>
+            <a:r>
+              <a:t>ЧОО «ГЮРЗА»</a:t>
+            </a:r>
+          </a:p>
+        </p:txBody>
+      </p:sp>
+      <p:sp>
+        <p:nvSpPr>
+          <p:cNvPr id="4" name="TextBox 3"/>
           <p:cNvSpPr txBox="1"/>
           <p:nvPr/>
         </p:nvSpPr>
         <p:spPr>
           <a:xfrm>
-            <a:off x="640080" y="548640"/>
-            <a:ext cx="10972800" cy="365760"/>
-          </a:xfrm>
-          <a:prstGeom prst="rect">
-            <a:avLst/>
-          </a:prstGeom>
-          <a:noFill/>
-        </p:spPr>
-        <p:txBody>
-          <a:bodyPr wrap="none">
+            <a:off x="8961120" y="320040"/>
+            <a:ext cx="2743200" cy="274320"/>
+          </a:xfrm>
+          <a:prstGeom prst="rect">
+            <a:avLst/>
+          </a:prstGeom>
+          <a:noFill/>
+        </p:spPr>
+        <p:txBody>
+          <a:bodyPr wrap="square" anchor="t">
             <a:spAutoFit/>
           </a:bodyPr>
           <a:lstStyle/>
           <a:p>
-            <a:pPr>
-              <a:defRPr sz="1400" b="1">
+            <a:pPr algn="r">
+              <a:spcAft>
+                <a:spcPts val="800"/>
+              </a:spcAft>
+              <a:defRPr sz="1100" b="1">
                 <a:solidFill>
                   <a:srgbClr val="D4AF37"/>
                 </a:solidFill>
-              </a:defRPr>
-            </a:pPr>
-            <a:r>
-              <a:t>РОЛЬ САЙТА</a:t>
-            </a:r>
-          </a:p>
-        </p:txBody>
-      </p:sp>
-      <p:sp>
-        <p:nvSpPr>
-          <p:cNvPr id="4" name="TextBox 3"/>
+                <a:latin typeface="Calibri"/>
+              </a:defRPr>
+            </a:pPr>
+            <a:r>
+              <a:t>gurza36.ru</a:t>
+            </a:r>
+          </a:p>
+        </p:txBody>
+      </p:sp>
+      <p:sp>
+        <p:nvSpPr>
+          <p:cNvPr id="5" name="Rectangle 4"/>
+          <p:cNvSpPr/>
+          <p:nvPr/>
+        </p:nvSpPr>
+        <p:spPr>
+          <a:xfrm>
+            <a:off x="502920" y="658368"/>
+            <a:ext cx="11155680" cy="0"/>
+          </a:xfrm>
+          <a:prstGeom prst="rect">
+            <a:avLst/>
+          </a:prstGeom>
+          <a:ln w="9525">
+            <a:solidFill>
+              <a:srgbClr val="D4AF37"/>
+            </a:solidFill>
+          </a:ln>
+        </p:spPr>
+        <p:style>
+          <a:lnRef idx="1">
+            <a:schemeClr val="accent1"/>
+          </a:lnRef>
+          <a:fillRef idx="3">
+            <a:schemeClr val="accent1"/>
+          </a:fillRef>
+          <a:effectRef idx="2">
+            <a:schemeClr val="accent1"/>
+          </a:effectRef>
+          <a:fontRef idx="minor">
+            <a:schemeClr val="lt1"/>
+          </a:fontRef>
+        </p:style>
+        <p:txBody>
+          <a:bodyPr rtlCol="0" anchor="ctr"/>
+          <a:lstStyle/>
+          <a:p>
+            <a:pPr algn="ctr"/>
+          </a:p>
+        </p:txBody>
+      </p:sp>
+      <p:sp>
+        <p:nvSpPr>
+          <p:cNvPr id="6" name="TextBox 5"/>
           <p:cNvSpPr txBox="1"/>
           <p:nvPr/>
         </p:nvSpPr>
         <p:spPr>
           <a:xfrm>
-            <a:off x="640080" y="960120"/>
-            <a:ext cx="10972800" cy="1097280"/>
-          </a:xfrm>
-          <a:prstGeom prst="rect">
-            <a:avLst/>
-          </a:prstGeom>
-          <a:noFill/>
-        </p:spPr>
-        <p:txBody>
-          <a:bodyPr wrap="none">
+            <a:off x="640080" y="914400"/>
+            <a:ext cx="9144000" cy="457200"/>
+          </a:xfrm>
+          <a:prstGeom prst="rect">
+            <a:avLst/>
+          </a:prstGeom>
+          <a:noFill/>
+        </p:spPr>
+        <p:txBody>
+          <a:bodyPr wrap="square" anchor="t">
             <a:spAutoFit/>
           </a:bodyPr>
           <a:lstStyle/>
           <a:p>
-            <a:pPr>
-              <a:defRPr sz="4000" b="1">
-                <a:solidFill>
-                  <a:srgbClr val="EEF1F6"/>
-                </a:solidFill>
-              </a:defRPr>
-            </a:pPr>
-            <a:r>
-              <a:t>Зачем он бизнесу</a:t>
-            </a:r>
-          </a:p>
-        </p:txBody>
-      </p:sp>
-      <p:sp>
-        <p:nvSpPr>
-          <p:cNvPr id="5" name="TextBox 4"/>
+            <a:pPr algn="l">
+              <a:spcAft>
+                <a:spcPts val="800"/>
+              </a:spcAft>
+              <a:defRPr sz="1400" b="1">
+                <a:solidFill>
+                  <a:srgbClr val="D4AF37"/>
+                </a:solidFill>
+                <a:latin typeface="Calibri"/>
+              </a:defRPr>
+            </a:pPr>
+            <a:r>
+              <a:t>БАЗА КЛИЕНТОВ</a:t>
+            </a:r>
+          </a:p>
+        </p:txBody>
+      </p:sp>
+      <p:sp>
+        <p:nvSpPr>
+          <p:cNvPr id="7" name="TextBox 6"/>
           <p:cNvSpPr txBox="1"/>
           <p:nvPr/>
         </p:nvSpPr>
         <p:spPr>
           <a:xfrm>
-            <a:off x="640080" y="1645920"/>
-            <a:ext cx="10515600" cy="4114800"/>
-          </a:xfrm>
-          <a:prstGeom prst="rect">
-            <a:avLst/>
-          </a:prstGeom>
-          <a:noFill/>
-        </p:spPr>
-        <p:txBody>
-          <a:bodyPr wrap="square">
+            <a:off x="640080" y="1371600"/>
+            <a:ext cx="10058400" cy="640080"/>
+          </a:xfrm>
+          <a:prstGeom prst="rect">
+            <a:avLst/>
+          </a:prstGeom>
+          <a:noFill/>
+        </p:spPr>
+        <p:txBody>
+          <a:bodyPr wrap="square" anchor="t">
             <a:spAutoFit/>
           </a:bodyPr>
           <a:lstStyle/>
           <a:p>
+            <a:pPr algn="l">
+              <a:spcAft>
+                <a:spcPts val="1400"/>
+              </a:spcAft>
+              <a:defRPr sz="3400" b="1">
+                <a:solidFill>
+                  <a:srgbClr val="F5F7FA"/>
+                </a:solidFill>
+                <a:latin typeface="Calibri"/>
+              </a:defRPr>
+            </a:pPr>
+            <a:r>
+              <a:t>Excel — 125+ компаний Воронежа</a:t>
+            </a:r>
+          </a:p>
+        </p:txBody>
+      </p:sp>
+      <p:sp>
+        <p:nvSpPr>
+          <p:cNvPr id="8" name="TextBox 7"/>
+          <p:cNvSpPr txBox="1"/>
+          <p:nvPr/>
+        </p:nvSpPr>
+        <p:spPr>
+          <a:xfrm>
+            <a:off x="731520" y="2194560"/>
+            <a:ext cx="10515600" cy="4114800"/>
+          </a:xfrm>
+          <a:prstGeom prst="rect">
+            <a:avLst/>
+          </a:prstGeom>
+          <a:noFill/>
+        </p:spPr>
+        <p:txBody>
+          <a:bodyPr wrap="square" anchor="t">
+            <a:spAutoFit/>
+          </a:bodyPr>
+          <a:lstStyle/>
+          <a:p>
+            <a:pPr algn="l">
+              <a:spcBef>
+                <a:spcPts val="1000"/>
+              </a:spcBef>
+              <a:spcAft>
+                <a:spcPts val="600"/>
+              </a:spcAft>
+              <a:defRPr sz="1800">
+                <a:solidFill>
+                  <a:srgbClr val="F5F7FA"/>
+                </a:solidFill>
+                <a:latin typeface="Calibri"/>
+              </a:defRPr>
+            </a:pPr>
+            <a:r>
+              <a:t>◆  Отрасли: стройка, склады, агро, бизнес-центры, логистика</a:t>
+            </a:r>
+          </a:p>
+          <a:p>
             <a:pPr>
-              <a:spcAft>
+              <a:spcBef>
                 <a:spcPts val="1000"/>
-              </a:spcAft>
-              <a:defRPr sz="2000">
-                <a:solidFill>
-                  <a:srgbClr val="EEF1F6"/>
-                </a:solidFill>
-              </a:defRPr>
-            </a:pPr>
-            <a:r>
-              <a:t>Поиск (Яндекс / Google / 2ГИС) → gurza36.ru → звонок → договор</a:t>
+              </a:spcBef>
+              <a:spcAft>
+                <a:spcPts val="600"/>
+              </a:spcAft>
+              <a:defRPr sz="1800">
+                <a:solidFill>
+                  <a:srgbClr val="F5F7FA"/>
+                </a:solidFill>
+                <a:latin typeface="Calibri"/>
+              </a:defRPr>
+            </a:pPr>
+            <a:r>
+              <a:t>◆  Колонки: компания, телефон, email, приоритет, услуга</a:t>
             </a:r>
           </a:p>
           <a:p>
             <a:pPr>
-              <a:spcAft>
+              <a:spcBef>
                 <a:spcPts val="1000"/>
-              </a:spcAft>
-              <a:defRPr sz="2000">
-                <a:solidFill>
-                  <a:srgbClr val="EEF1F6"/>
-                </a:solidFill>
-              </a:defRPr>
-            </a:pPr>
-            <a:r>
-              <a:t>Лицо компании — профессиональный образ вместо «просто телефона в 2ГИС»</a:t>
+              </a:spcBef>
+              <a:spcAft>
+                <a:spcPts val="600"/>
+              </a:spcAft>
+              <a:defRPr sz="1800">
+                <a:solidFill>
+                  <a:srgbClr val="F5F7FA"/>
+                </a:solidFill>
+                <a:latin typeface="Calibri"/>
+              </a:defRPr>
+            </a:pPr>
+            <a:r>
+              <a:t>◆  Высокий приоритет подсвечен — с чего начать обзвон</a:t>
             </a:r>
           </a:p>
           <a:p>
             <a:pPr>
-              <a:spcAft>
+              <a:spcBef>
                 <a:spcPts val="1000"/>
-              </a:spcAft>
-              <a:defRPr sz="2000">
-                <a:solidFill>
-                  <a:srgbClr val="EEF1F6"/>
-                </a:solidFill>
-              </a:defRPr>
-            </a:pPr>
-            <a:r>
-              <a:t>Круглосуточная витрина — работает, пока офис спит</a:t>
-            </a:r>
-          </a:p>
-          <a:p>
-            <a:pPr>
-              <a:spcAft>
-                <a:spcPts val="1000"/>
-              </a:spcAft>
-              <a:defRPr sz="2000">
-                <a:solidFill>
-                  <a:srgbClr val="EEF1F6"/>
-                </a:solidFill>
-              </a:defRPr>
-            </a:pPr>
-            <a:r>
-              <a:t>Единая ссылка для визиток, КП, тендеров и соцсетей</a:t>
-            </a:r>
-          </a:p>
-          <a:p>
-            <a:pPr>
-              <a:spcAft>
-                <a:spcPts val="1000"/>
-              </a:spcAft>
-              <a:defRPr sz="2000">
-                <a:solidFill>
-                  <a:srgbClr val="EEF1F6"/>
-                </a:solidFill>
-              </a:defRPr>
-            </a:pPr>
-            <a:r>
-              <a:t>SEO-магнит по запросам: «охрана воронеж», «чоо», «охрана складов»</a:t>
+              </a:spcBef>
+              <a:spcAft>
+                <a:spcPts val="600"/>
+              </a:spcAft>
+              <a:defRPr sz="1800">
+                <a:solidFill>
+                  <a:srgbClr val="F5F7FA"/>
+                </a:solidFill>
+                <a:latin typeface="Calibri"/>
+              </a:defRPr>
+            </a:pPr>
+            <a:r>
+              <a:t>◆  Файл: clients-voronezh-gyurza.xlsx</a:t>
             </a:r>
           </a:p>
         </p:txBody>
@@ -4144,20 +5469,15 @@
   <p:clrMapOvr>
     <a:masterClrMapping/>
   </p:clrMapOvr>
+  <p:transition spd="med" advClick="1">
+    <p:fadeThroughBlack/>
+  </p:transition>
 </p:sld>
 </file>
 
-<file path=ppt/slides/slide5.xml><?xml version="1.0" encoding="utf-8"?>
+<file path=ppt/slides/slide14.xml><?xml version="1.0" encoding="utf-8"?>
 <p:sld xmlns:a="http://schemas.openxmlformats.org/drawingml/2006/main" xmlns:p="http://schemas.openxmlformats.org/presentationml/2006/main" xmlns:r="http://schemas.openxmlformats.org/officeDocument/2006/relationships">
   <p:cSld>
-    <p:bg>
-      <p:bgPr>
-        <a:solidFill>
-          <a:srgbClr val="0C1018"/>
-        </a:solidFill>
-        <a:effectLst/>
-      </p:bgPr>
-    </p:bg>
     <p:spTree>
       <p:nvGrpSpPr>
         <p:cNvPr id="1" name=""/>
@@ -4165,114 +5485,9 @@
         <p:nvPr/>
       </p:nvGrpSpPr>
       <p:grpSpPr/>
-      <p:sp>
-        <p:nvSpPr>
-          <p:cNvPr id="2" name="TextBox 1"/>
-          <p:cNvSpPr txBox="1"/>
-          <p:nvPr/>
-        </p:nvSpPr>
-        <p:spPr>
-          <a:xfrm>
-            <a:off x="9601200" y="320040"/>
-            <a:ext cx="2286000" cy="274320"/>
-          </a:xfrm>
-          <a:prstGeom prst="rect">
-            <a:avLst/>
-          </a:prstGeom>
-          <a:noFill/>
-        </p:spPr>
-        <p:txBody>
-          <a:bodyPr wrap="none">
-            <a:spAutoFit/>
-          </a:bodyPr>
-          <a:lstStyle/>
-          <a:p>
-            <a:pPr algn="r">
-              <a:defRPr sz="1200">
-                <a:solidFill>
-                  <a:srgbClr val="D4AF37"/>
-                </a:solidFill>
-              </a:defRPr>
-            </a:pPr>
-            <a:r>
-              <a:t>gurza36.ru</a:t>
-            </a:r>
-          </a:p>
-        </p:txBody>
-      </p:sp>
-      <p:sp>
-        <p:nvSpPr>
-          <p:cNvPr id="3" name="TextBox 2"/>
-          <p:cNvSpPr txBox="1"/>
-          <p:nvPr/>
-        </p:nvSpPr>
-        <p:spPr>
-          <a:xfrm>
-            <a:off x="640080" y="320040"/>
-            <a:ext cx="10972800" cy="365760"/>
-          </a:xfrm>
-          <a:prstGeom prst="rect">
-            <a:avLst/>
-          </a:prstGeom>
-          <a:noFill/>
-        </p:spPr>
-        <p:txBody>
-          <a:bodyPr wrap="none">
-            <a:spAutoFit/>
-          </a:bodyPr>
-          <a:lstStyle/>
-          <a:p>
-            <a:pPr>
-              <a:defRPr sz="1400" b="1">
-                <a:solidFill>
-                  <a:srgbClr val="D4AF37"/>
-                </a:solidFill>
-              </a:defRPr>
-            </a:pPr>
-            <a:r>
-              <a:t>ГЛАВНАЯ СТРАНИЦА</a:t>
-            </a:r>
-          </a:p>
-        </p:txBody>
-      </p:sp>
-      <p:sp>
-        <p:nvSpPr>
-          <p:cNvPr id="4" name="TextBox 3"/>
-          <p:cNvSpPr txBox="1"/>
-          <p:nvPr/>
-        </p:nvSpPr>
-        <p:spPr>
-          <a:xfrm>
-            <a:off x="640080" y="731520"/>
-            <a:ext cx="10972800" cy="1097280"/>
-          </a:xfrm>
-          <a:prstGeom prst="rect">
-            <a:avLst/>
-          </a:prstGeom>
-          <a:noFill/>
-        </p:spPr>
-        <p:txBody>
-          <a:bodyPr wrap="none">
-            <a:spAutoFit/>
-          </a:bodyPr>
-          <a:lstStyle/>
-          <a:p>
-            <a:pPr>
-              <a:defRPr sz="4000" b="1">
-                <a:solidFill>
-                  <a:srgbClr val="EEF1F6"/>
-                </a:solidFill>
-              </a:defRPr>
-            </a:pPr>
-            <a:r>
-              <a:t>Первое впечатление</a:t>
-            </a:r>
-          </a:p>
-        </p:txBody>
-      </p:sp>
       <p:pic>
         <p:nvPicPr>
-          <p:cNvPr id="5" name="Picture 4" descr="01-main.png"/>
+          <p:cNvPr id="2" name="Picture 1" descr="bg-dark.png"/>
           <p:cNvPicPr>
             <a:picLocks noChangeAspect="1"/>
           </p:cNvPicPr>
@@ -4286,33 +5501,679 @@
         </p:blipFill>
         <p:spPr>
           <a:xfrm>
-            <a:off x="640080" y="1234440"/>
-            <a:ext cx="10881360" cy="6800850"/>
+            <a:off x="0" y="0"/>
+            <a:ext cx="12191695" cy="6858000"/>
           </a:xfrm>
           <a:prstGeom prst="rect">
             <a:avLst/>
           </a:prstGeom>
         </p:spPr>
       </p:pic>
+      <p:sp>
+        <p:nvSpPr>
+          <p:cNvPr id="3" name="TextBox 2"/>
+          <p:cNvSpPr txBox="1"/>
+          <p:nvPr/>
+        </p:nvSpPr>
+        <p:spPr>
+          <a:xfrm>
+            <a:off x="502920" y="320040"/>
+            <a:ext cx="3657600" cy="274320"/>
+          </a:xfrm>
+          <a:prstGeom prst="rect">
+            <a:avLst/>
+          </a:prstGeom>
+          <a:noFill/>
+        </p:spPr>
+        <p:txBody>
+          <a:bodyPr wrap="square" anchor="t">
+            <a:spAutoFit/>
+          </a:bodyPr>
+          <a:lstStyle/>
+          <a:p>
+            <a:pPr algn="l">
+              <a:spcAft>
+                <a:spcPts val="800"/>
+              </a:spcAft>
+              <a:defRPr sz="1100" b="1">
+                <a:solidFill>
+                  <a:srgbClr val="D4AF37"/>
+                </a:solidFill>
+                <a:latin typeface="Calibri"/>
+              </a:defRPr>
+            </a:pPr>
+            <a:r>
+              <a:t>ЧОО «ГЮРЗА»</a:t>
+            </a:r>
+          </a:p>
+        </p:txBody>
+      </p:sp>
+      <p:sp>
+        <p:nvSpPr>
+          <p:cNvPr id="4" name="TextBox 3"/>
+          <p:cNvSpPr txBox="1"/>
+          <p:nvPr/>
+        </p:nvSpPr>
+        <p:spPr>
+          <a:xfrm>
+            <a:off x="8961120" y="320040"/>
+            <a:ext cx="2743200" cy="274320"/>
+          </a:xfrm>
+          <a:prstGeom prst="rect">
+            <a:avLst/>
+          </a:prstGeom>
+          <a:noFill/>
+        </p:spPr>
+        <p:txBody>
+          <a:bodyPr wrap="square" anchor="t">
+            <a:spAutoFit/>
+          </a:bodyPr>
+          <a:lstStyle/>
+          <a:p>
+            <a:pPr algn="r">
+              <a:spcAft>
+                <a:spcPts val="800"/>
+              </a:spcAft>
+              <a:defRPr sz="1100" b="1">
+                <a:solidFill>
+                  <a:srgbClr val="D4AF37"/>
+                </a:solidFill>
+                <a:latin typeface="Calibri"/>
+              </a:defRPr>
+            </a:pPr>
+            <a:r>
+              <a:t>gurza36.ru</a:t>
+            </a:r>
+          </a:p>
+        </p:txBody>
+      </p:sp>
+      <p:sp>
+        <p:nvSpPr>
+          <p:cNvPr id="5" name="Rectangle 4"/>
+          <p:cNvSpPr/>
+          <p:nvPr/>
+        </p:nvSpPr>
+        <p:spPr>
+          <a:xfrm>
+            <a:off x="502920" y="658368"/>
+            <a:ext cx="11155680" cy="0"/>
+          </a:xfrm>
+          <a:prstGeom prst="rect">
+            <a:avLst/>
+          </a:prstGeom>
+          <a:ln w="9525">
+            <a:solidFill>
+              <a:srgbClr val="D4AF37"/>
+            </a:solidFill>
+          </a:ln>
+        </p:spPr>
+        <p:style>
+          <a:lnRef idx="1">
+            <a:schemeClr val="accent1"/>
+          </a:lnRef>
+          <a:fillRef idx="3">
+            <a:schemeClr val="accent1"/>
+          </a:fillRef>
+          <a:effectRef idx="2">
+            <a:schemeClr val="accent1"/>
+          </a:effectRef>
+          <a:fontRef idx="minor">
+            <a:schemeClr val="lt1"/>
+          </a:fontRef>
+        </p:style>
+        <p:txBody>
+          <a:bodyPr rtlCol="0" anchor="ctr"/>
+          <a:lstStyle/>
+          <a:p>
+            <a:pPr algn="ctr"/>
+          </a:p>
+        </p:txBody>
+      </p:sp>
+      <p:sp>
+        <p:nvSpPr>
+          <p:cNvPr id="6" name="TextBox 5"/>
+          <p:cNvSpPr txBox="1"/>
+          <p:nvPr/>
+        </p:nvSpPr>
+        <p:spPr>
+          <a:xfrm>
+            <a:off x="640080" y="914400"/>
+            <a:ext cx="9144000" cy="457200"/>
+          </a:xfrm>
+          <a:prstGeom prst="rect">
+            <a:avLst/>
+          </a:prstGeom>
+          <a:noFill/>
+        </p:spPr>
+        <p:txBody>
+          <a:bodyPr wrap="square" anchor="t">
+            <a:spAutoFit/>
+          </a:bodyPr>
+          <a:lstStyle/>
+          <a:p>
+            <a:pPr algn="l">
+              <a:spcAft>
+                <a:spcPts val="800"/>
+              </a:spcAft>
+              <a:defRPr sz="1400" b="1">
+                <a:solidFill>
+                  <a:srgbClr val="D4AF37"/>
+                </a:solidFill>
+                <a:latin typeface="Calibri"/>
+              </a:defRPr>
+            </a:pPr>
+            <a:r>
+              <a:t>ДОРОЖНАЯ КАРТА</a:t>
+            </a:r>
+          </a:p>
+        </p:txBody>
+      </p:sp>
+      <p:sp>
+        <p:nvSpPr>
+          <p:cNvPr id="7" name="Rectangle 6"/>
+          <p:cNvSpPr/>
+          <p:nvPr/>
+        </p:nvSpPr>
+        <p:spPr>
+          <a:xfrm>
+            <a:off x="640080" y="1554480"/>
+            <a:ext cx="3474720" cy="4114800"/>
+          </a:xfrm>
+          <a:prstGeom prst="rect">
+            <a:avLst/>
+          </a:prstGeom>
+          <a:solidFill>
+            <a:srgbClr val="121824"/>
+          </a:solidFill>
+          <a:ln>
+            <a:solidFill>
+              <a:srgbClr val="D4AF37"/>
+            </a:solidFill>
+          </a:ln>
+        </p:spPr>
+        <p:style>
+          <a:lnRef idx="1">
+            <a:schemeClr val="accent1"/>
+          </a:lnRef>
+          <a:fillRef idx="3">
+            <a:schemeClr val="accent1"/>
+          </a:fillRef>
+          <a:effectRef idx="2">
+            <a:schemeClr val="accent1"/>
+          </a:effectRef>
+          <a:fontRef idx="minor">
+            <a:schemeClr val="lt1"/>
+          </a:fontRef>
+        </p:style>
+        <p:txBody>
+          <a:bodyPr rtlCol="0" anchor="ctr"/>
+          <a:lstStyle/>
+          <a:p>
+            <a:pPr algn="ctr"/>
+          </a:p>
+        </p:txBody>
+      </p:sp>
+      <p:sp>
+        <p:nvSpPr>
+          <p:cNvPr id="8" name="TextBox 7"/>
+          <p:cNvSpPr txBox="1"/>
+          <p:nvPr/>
+        </p:nvSpPr>
+        <p:spPr>
+          <a:xfrm>
+            <a:off x="822959" y="1737360"/>
+            <a:ext cx="3108960" cy="457200"/>
+          </a:xfrm>
+          <a:prstGeom prst="rect">
+            <a:avLst/>
+          </a:prstGeom>
+          <a:noFill/>
+        </p:spPr>
+        <p:txBody>
+          <a:bodyPr wrap="square" anchor="t">
+            <a:spAutoFit/>
+          </a:bodyPr>
+          <a:lstStyle/>
+          <a:p>
+            <a:pPr algn="l">
+              <a:spcAft>
+                <a:spcPts val="800"/>
+              </a:spcAft>
+              <a:defRPr sz="2200" b="1">
+                <a:solidFill>
+                  <a:srgbClr val="D4AF37"/>
+                </a:solidFill>
+                <a:latin typeface="Calibri"/>
+              </a:defRPr>
+            </a:pPr>
+            <a:r>
+              <a:t>Сейчас</a:t>
+            </a:r>
+          </a:p>
+        </p:txBody>
+      </p:sp>
+      <p:sp>
+        <p:nvSpPr>
+          <p:cNvPr id="9" name="TextBox 8"/>
+          <p:cNvSpPr txBox="1"/>
+          <p:nvPr/>
+        </p:nvSpPr>
+        <p:spPr>
+          <a:xfrm>
+            <a:off x="777240" y="2286000"/>
+            <a:ext cx="3200400" cy="4114800"/>
+          </a:xfrm>
+          <a:prstGeom prst="rect">
+            <a:avLst/>
+          </a:prstGeom>
+          <a:noFill/>
+        </p:spPr>
+        <p:txBody>
+          <a:bodyPr wrap="square" anchor="t">
+            <a:spAutoFit/>
+          </a:bodyPr>
+          <a:lstStyle/>
+          <a:p>
+            <a:pPr algn="l">
+              <a:spcBef>
+                <a:spcPts val="1000"/>
+              </a:spcBef>
+              <a:spcAft>
+                <a:spcPts val="600"/>
+              </a:spcAft>
+              <a:defRPr sz="1500">
+                <a:solidFill>
+                  <a:srgbClr val="F5F7FA"/>
+                </a:solidFill>
+                <a:latin typeface="Calibri"/>
+              </a:defRPr>
+            </a:pPr>
+            <a:r>
+              <a:t>◆  Сайт live</a:t>
+            </a:r>
+          </a:p>
+          <a:p>
+            <a:pPr>
+              <a:spcBef>
+                <a:spcPts val="1000"/>
+              </a:spcBef>
+              <a:spcAft>
+                <a:spcPts val="600"/>
+              </a:spcAft>
+              <a:defRPr sz="1500">
+                <a:solidFill>
+                  <a:srgbClr val="F5F7FA"/>
+                </a:solidFill>
+                <a:latin typeface="Calibri"/>
+              </a:defRPr>
+            </a:pPr>
+            <a:r>
+              <a:t>◆  SEO готово</a:t>
+            </a:r>
+          </a:p>
+          <a:p>
+            <a:pPr>
+              <a:spcBef>
+                <a:spcPts val="1000"/>
+              </a:spcBef>
+              <a:spcAft>
+                <a:spcPts val="600"/>
+              </a:spcAft>
+              <a:defRPr sz="1500">
+                <a:solidFill>
+                  <a:srgbClr val="F5F7FA"/>
+                </a:solidFill>
+                <a:latin typeface="Calibri"/>
+              </a:defRPr>
+            </a:pPr>
+            <a:r>
+              <a:t>◆  База Excel</a:t>
+            </a:r>
+          </a:p>
+        </p:txBody>
+      </p:sp>
+      <p:sp>
+        <p:nvSpPr>
+          <p:cNvPr id="10" name="Rectangle 9"/>
+          <p:cNvSpPr/>
+          <p:nvPr/>
+        </p:nvSpPr>
+        <p:spPr>
+          <a:xfrm>
+            <a:off x="4389120" y="1554480"/>
+            <a:ext cx="3474720" cy="4114800"/>
+          </a:xfrm>
+          <a:prstGeom prst="rect">
+            <a:avLst/>
+          </a:prstGeom>
+          <a:solidFill>
+            <a:srgbClr val="121824"/>
+          </a:solidFill>
+          <a:ln>
+            <a:solidFill>
+              <a:srgbClr val="D4AF37"/>
+            </a:solidFill>
+          </a:ln>
+        </p:spPr>
+        <p:style>
+          <a:lnRef idx="1">
+            <a:schemeClr val="accent1"/>
+          </a:lnRef>
+          <a:fillRef idx="3">
+            <a:schemeClr val="accent1"/>
+          </a:fillRef>
+          <a:effectRef idx="2">
+            <a:schemeClr val="accent1"/>
+          </a:effectRef>
+          <a:fontRef idx="minor">
+            <a:schemeClr val="lt1"/>
+          </a:fontRef>
+        </p:style>
+        <p:txBody>
+          <a:bodyPr rtlCol="0" anchor="ctr"/>
+          <a:lstStyle/>
+          <a:p>
+            <a:pPr algn="ctr"/>
+          </a:p>
+        </p:txBody>
+      </p:sp>
+      <p:sp>
+        <p:nvSpPr>
+          <p:cNvPr id="11" name="TextBox 10"/>
+          <p:cNvSpPr txBox="1"/>
+          <p:nvPr/>
+        </p:nvSpPr>
+        <p:spPr>
+          <a:xfrm>
+            <a:off x="4572000" y="1737360"/>
+            <a:ext cx="3108960" cy="457200"/>
+          </a:xfrm>
+          <a:prstGeom prst="rect">
+            <a:avLst/>
+          </a:prstGeom>
+          <a:noFill/>
+        </p:spPr>
+        <p:txBody>
+          <a:bodyPr wrap="square" anchor="t">
+            <a:spAutoFit/>
+          </a:bodyPr>
+          <a:lstStyle/>
+          <a:p>
+            <a:pPr algn="l">
+              <a:spcAft>
+                <a:spcPts val="800"/>
+              </a:spcAft>
+              <a:defRPr sz="2200" b="1">
+                <a:solidFill>
+                  <a:srgbClr val="D4AF37"/>
+                </a:solidFill>
+                <a:latin typeface="Calibri"/>
+              </a:defRPr>
+            </a:pPr>
+            <a:r>
+              <a:t>Неделя</a:t>
+            </a:r>
+          </a:p>
+        </p:txBody>
+      </p:sp>
+      <p:sp>
+        <p:nvSpPr>
+          <p:cNvPr id="12" name="TextBox 11"/>
+          <p:cNvSpPr txBox="1"/>
+          <p:nvPr/>
+        </p:nvSpPr>
+        <p:spPr>
+          <a:xfrm>
+            <a:off x="4526280" y="2286000"/>
+            <a:ext cx="3200400" cy="4114800"/>
+          </a:xfrm>
+          <a:prstGeom prst="rect">
+            <a:avLst/>
+          </a:prstGeom>
+          <a:noFill/>
+        </p:spPr>
+        <p:txBody>
+          <a:bodyPr wrap="square" anchor="t">
+            <a:spAutoFit/>
+          </a:bodyPr>
+          <a:lstStyle/>
+          <a:p>
+            <a:pPr algn="l">
+              <a:spcBef>
+                <a:spcPts val="1000"/>
+              </a:spcBef>
+              <a:spcAft>
+                <a:spcPts val="600"/>
+              </a:spcAft>
+              <a:defRPr sz="1500">
+                <a:solidFill>
+                  <a:srgbClr val="F5F7FA"/>
+                </a:solidFill>
+                <a:latin typeface="Calibri"/>
+              </a:defRPr>
+            </a:pPr>
+            <a:r>
+              <a:t>◆  Яндекс.Вебмастер</a:t>
+            </a:r>
+          </a:p>
+          <a:p>
+            <a:pPr>
+              <a:spcBef>
+                <a:spcPts val="1000"/>
+              </a:spcBef>
+              <a:spcAft>
+                <a:spcPts val="600"/>
+              </a:spcAft>
+              <a:defRPr sz="1500">
+                <a:solidFill>
+                  <a:srgbClr val="F5F7FA"/>
+                </a:solidFill>
+                <a:latin typeface="Calibri"/>
+              </a:defRPr>
+            </a:pPr>
+            <a:r>
+              <a:t>◆  2ГИС / Я.Бизнес</a:t>
+            </a:r>
+          </a:p>
+          <a:p>
+            <a:pPr>
+              <a:spcBef>
+                <a:spcPts val="1000"/>
+              </a:spcBef>
+              <a:spcAft>
+                <a:spcPts val="600"/>
+              </a:spcAft>
+              <a:defRPr sz="1500">
+                <a:solidFill>
+                  <a:srgbClr val="F5F7FA"/>
+                </a:solidFill>
+                <a:latin typeface="Calibri"/>
+              </a:defRPr>
+            </a:pPr>
+            <a:r>
+              <a:t>◆  Обзвон</a:t>
+            </a:r>
+          </a:p>
+        </p:txBody>
+      </p:sp>
+      <p:sp>
+        <p:nvSpPr>
+          <p:cNvPr id="13" name="Rectangle 12"/>
+          <p:cNvSpPr/>
+          <p:nvPr/>
+        </p:nvSpPr>
+        <p:spPr>
+          <a:xfrm>
+            <a:off x="8138159" y="1554480"/>
+            <a:ext cx="3474720" cy="4114800"/>
+          </a:xfrm>
+          <a:prstGeom prst="rect">
+            <a:avLst/>
+          </a:prstGeom>
+          <a:solidFill>
+            <a:srgbClr val="121824"/>
+          </a:solidFill>
+          <a:ln>
+            <a:solidFill>
+              <a:srgbClr val="D4AF37"/>
+            </a:solidFill>
+          </a:ln>
+        </p:spPr>
+        <p:style>
+          <a:lnRef idx="1">
+            <a:schemeClr val="accent1"/>
+          </a:lnRef>
+          <a:fillRef idx="3">
+            <a:schemeClr val="accent1"/>
+          </a:fillRef>
+          <a:effectRef idx="2">
+            <a:schemeClr val="accent1"/>
+          </a:effectRef>
+          <a:fontRef idx="minor">
+            <a:schemeClr val="lt1"/>
+          </a:fontRef>
+        </p:style>
+        <p:txBody>
+          <a:bodyPr rtlCol="0" anchor="ctr"/>
+          <a:lstStyle/>
+          <a:p>
+            <a:pPr algn="ctr"/>
+          </a:p>
+        </p:txBody>
+      </p:sp>
+      <p:sp>
+        <p:nvSpPr>
+          <p:cNvPr id="14" name="TextBox 13"/>
+          <p:cNvSpPr txBox="1"/>
+          <p:nvPr/>
+        </p:nvSpPr>
+        <p:spPr>
+          <a:xfrm>
+            <a:off x="8321039" y="1737360"/>
+            <a:ext cx="3108960" cy="457200"/>
+          </a:xfrm>
+          <a:prstGeom prst="rect">
+            <a:avLst/>
+          </a:prstGeom>
+          <a:noFill/>
+        </p:spPr>
+        <p:txBody>
+          <a:bodyPr wrap="square" anchor="t">
+            <a:spAutoFit/>
+          </a:bodyPr>
+          <a:lstStyle/>
+          <a:p>
+            <a:pPr algn="l">
+              <a:spcAft>
+                <a:spcPts val="800"/>
+              </a:spcAft>
+              <a:defRPr sz="2200" b="1">
+                <a:solidFill>
+                  <a:srgbClr val="D4AF37"/>
+                </a:solidFill>
+                <a:latin typeface="Calibri"/>
+              </a:defRPr>
+            </a:pPr>
+            <a:r>
+              <a:t>Месяц</a:t>
+            </a:r>
+          </a:p>
+        </p:txBody>
+      </p:sp>
+      <p:sp>
+        <p:nvSpPr>
+          <p:cNvPr id="15" name="TextBox 14"/>
+          <p:cNvSpPr txBox="1"/>
+          <p:nvPr/>
+        </p:nvSpPr>
+        <p:spPr>
+          <a:xfrm>
+            <a:off x="8275319" y="2286000"/>
+            <a:ext cx="3200400" cy="4114800"/>
+          </a:xfrm>
+          <a:prstGeom prst="rect">
+            <a:avLst/>
+          </a:prstGeom>
+          <a:noFill/>
+        </p:spPr>
+        <p:txBody>
+          <a:bodyPr wrap="square" anchor="t">
+            <a:spAutoFit/>
+          </a:bodyPr>
+          <a:lstStyle/>
+          <a:p>
+            <a:pPr algn="l">
+              <a:spcBef>
+                <a:spcPts val="1000"/>
+              </a:spcBef>
+              <a:spcAft>
+                <a:spcPts val="600"/>
+              </a:spcAft>
+              <a:defRPr sz="1500">
+                <a:solidFill>
+                  <a:srgbClr val="F5F7FA"/>
+                </a:solidFill>
+                <a:latin typeface="Calibri"/>
+              </a:defRPr>
+            </a:pPr>
+            <a:r>
+              <a:t>◆  SEO-позиции</a:t>
+            </a:r>
+          </a:p>
+          <a:p>
+            <a:pPr>
+              <a:spcBef>
+                <a:spcPts val="1000"/>
+              </a:spcBef>
+              <a:spcAft>
+                <a:spcPts val="600"/>
+              </a:spcAft>
+              <a:defRPr sz="1500">
+                <a:solidFill>
+                  <a:srgbClr val="F5F7FA"/>
+                </a:solidFill>
+                <a:latin typeface="Calibri"/>
+              </a:defRPr>
+            </a:pPr>
+            <a:r>
+              <a:t>◆  Отзывы</a:t>
+            </a:r>
+          </a:p>
+          <a:p>
+            <a:pPr>
+              <a:spcBef>
+                <a:spcPts val="1000"/>
+              </a:spcBef>
+              <a:spcAft>
+                <a:spcPts val="600"/>
+              </a:spcAft>
+              <a:defRPr sz="1500">
+                <a:solidFill>
+                  <a:srgbClr val="F5F7FA"/>
+                </a:solidFill>
+                <a:latin typeface="Calibri"/>
+              </a:defRPr>
+            </a:pPr>
+            <a:r>
+              <a:t>◆  150+ клиентов</a:t>
+            </a:r>
+          </a:p>
+        </p:txBody>
+      </p:sp>
     </p:spTree>
   </p:cSld>
   <p:clrMapOvr>
     <a:masterClrMapping/>
   </p:clrMapOvr>
+  <p:transition spd="med" advClick="1">
+    <p:push dir="l"/>
+  </p:transition>
 </p:sld>
 </file>
 
-<file path=ppt/slides/slide6.xml><?xml version="1.0" encoding="utf-8"?>
+<file path=ppt/slides/slide15.xml><?xml version="1.0" encoding="utf-8"?>
 <p:sld xmlns:a="http://schemas.openxmlformats.org/drawingml/2006/main" xmlns:p="http://schemas.openxmlformats.org/presentationml/2006/main" xmlns:r="http://schemas.openxmlformats.org/officeDocument/2006/relationships">
   <p:cSld>
-    <p:bg>
-      <p:bgPr>
-        <a:solidFill>
-          <a:srgbClr val="0C1018"/>
-        </a:solidFill>
-        <a:effectLst/>
-      </p:bgPr>
-    </p:bg>
     <p:spTree>
       <p:nvGrpSpPr>
         <p:cNvPr id="1" name=""/>
@@ -4320,114 +6181,9 @@
         <p:nvPr/>
       </p:nvGrpSpPr>
       <p:grpSpPr/>
-      <p:sp>
-        <p:nvSpPr>
-          <p:cNvPr id="2" name="TextBox 1"/>
-          <p:cNvSpPr txBox="1"/>
-          <p:nvPr/>
-        </p:nvSpPr>
-        <p:spPr>
-          <a:xfrm>
-            <a:off x="9601200" y="320040"/>
-            <a:ext cx="2286000" cy="274320"/>
-          </a:xfrm>
-          <a:prstGeom prst="rect">
-            <a:avLst/>
-          </a:prstGeom>
-          <a:noFill/>
-        </p:spPr>
-        <p:txBody>
-          <a:bodyPr wrap="none">
-            <a:spAutoFit/>
-          </a:bodyPr>
-          <a:lstStyle/>
-          <a:p>
-            <a:pPr algn="r">
-              <a:defRPr sz="1200">
-                <a:solidFill>
-                  <a:srgbClr val="D4AF37"/>
-                </a:solidFill>
-              </a:defRPr>
-            </a:pPr>
-            <a:r>
-              <a:t>gurza36.ru</a:t>
-            </a:r>
-          </a:p>
-        </p:txBody>
-      </p:sp>
-      <p:sp>
-        <p:nvSpPr>
-          <p:cNvPr id="3" name="TextBox 2"/>
-          <p:cNvSpPr txBox="1"/>
-          <p:nvPr/>
-        </p:nvSpPr>
-        <p:spPr>
-          <a:xfrm>
-            <a:off x="640080" y="320040"/>
-            <a:ext cx="10972800" cy="365760"/>
-          </a:xfrm>
-          <a:prstGeom prst="rect">
-            <a:avLst/>
-          </a:prstGeom>
-          <a:noFill/>
-        </p:spPr>
-        <p:txBody>
-          <a:bodyPr wrap="none">
-            <a:spAutoFit/>
-          </a:bodyPr>
-          <a:lstStyle/>
-          <a:p>
-            <a:pPr>
-              <a:defRPr sz="1400" b="1">
-                <a:solidFill>
-                  <a:srgbClr val="D4AF37"/>
-                </a:solidFill>
-              </a:defRPr>
-            </a:pPr>
-            <a:r>
-              <a:t>О КОМПАНИИ</a:t>
-            </a:r>
-          </a:p>
-        </p:txBody>
-      </p:sp>
-      <p:sp>
-        <p:nvSpPr>
-          <p:cNvPr id="4" name="TextBox 3"/>
-          <p:cNvSpPr txBox="1"/>
-          <p:nvPr/>
-        </p:nvSpPr>
-        <p:spPr>
-          <a:xfrm>
-            <a:off x="640080" y="731520"/>
-            <a:ext cx="10972800" cy="1097280"/>
-          </a:xfrm>
-          <a:prstGeom prst="rect">
-            <a:avLst/>
-          </a:prstGeom>
-          <a:noFill/>
-        </p:spPr>
-        <p:txBody>
-          <a:bodyPr wrap="none">
-            <a:spAutoFit/>
-          </a:bodyPr>
-          <a:lstStyle/>
-          <a:p>
-            <a:pPr>
-              <a:defRPr sz="4000" b="1">
-                <a:solidFill>
-                  <a:srgbClr val="EEF1F6"/>
-                </a:solidFill>
-              </a:defRPr>
-            </a:pPr>
-            <a:r>
-              <a:t>История и специализация</a:t>
-            </a:r>
-          </a:p>
-        </p:txBody>
-      </p:sp>
       <p:pic>
         <p:nvPicPr>
-          <p:cNvPr id="5" name="Picture 4" descr="02-about.png"/>
+          <p:cNvPr id="2" name="Picture 1" descr="bg-dark.png"/>
           <p:cNvPicPr>
             <a:picLocks noChangeAspect="1"/>
           </p:cNvPicPr>
@@ -4441,33 +6197,178 @@
         </p:blipFill>
         <p:spPr>
           <a:xfrm>
-            <a:off x="640080" y="1234440"/>
-            <a:ext cx="10881360" cy="6800850"/>
+            <a:off x="0" y="0"/>
+            <a:ext cx="12191695" cy="6858000"/>
           </a:xfrm>
           <a:prstGeom prst="rect">
             <a:avLst/>
           </a:prstGeom>
         </p:spPr>
       </p:pic>
+      <p:pic>
+        <p:nvPicPr>
+          <p:cNvPr id="3" name="Picture 2" descr="04-logo.png"/>
+          <p:cNvPicPr>
+            <a:picLocks noChangeAspect="1"/>
+          </p:cNvPicPr>
+          <p:nvPr/>
+        </p:nvPicPr>
+        <p:blipFill>
+          <a:blip r:embed="rId3"/>
+          <a:stretch>
+            <a:fillRect/>
+          </a:stretch>
+        </p:blipFill>
+        <p:spPr>
+          <a:xfrm>
+            <a:off x="4846320" y="731520"/>
+            <a:ext cx="2377440" cy="2371924"/>
+          </a:xfrm>
+          <a:prstGeom prst="rect">
+            <a:avLst/>
+          </a:prstGeom>
+        </p:spPr>
+      </p:pic>
+      <p:sp>
+        <p:nvSpPr>
+          <p:cNvPr id="4" name="TextBox 3"/>
+          <p:cNvSpPr txBox="1"/>
+          <p:nvPr/>
+        </p:nvSpPr>
+        <p:spPr>
+          <a:xfrm>
+            <a:off x="685800" y="2926080"/>
+            <a:ext cx="10972800" cy="731520"/>
+          </a:xfrm>
+          <a:prstGeom prst="rect">
+            <a:avLst/>
+          </a:prstGeom>
+          <a:noFill/>
+        </p:spPr>
+        <p:txBody>
+          <a:bodyPr wrap="square" anchor="t">
+            <a:spAutoFit/>
+          </a:bodyPr>
+          <a:lstStyle/>
+          <a:p>
+            <a:pPr algn="ctr">
+              <a:spcAft>
+                <a:spcPts val="1400"/>
+              </a:spcAft>
+              <a:defRPr sz="4800" b="1">
+                <a:solidFill>
+                  <a:srgbClr val="D4AF37"/>
+                </a:solidFill>
+                <a:latin typeface="Calibri"/>
+              </a:defRPr>
+            </a:pPr>
+            <a:r>
+              <a:t>ЧОО «Гюрза»</a:t>
+            </a:r>
+          </a:p>
+        </p:txBody>
+      </p:sp>
+      <p:sp>
+        <p:nvSpPr>
+          <p:cNvPr id="5" name="TextBox 4"/>
+          <p:cNvSpPr txBox="1"/>
+          <p:nvPr/>
+        </p:nvSpPr>
+        <p:spPr>
+          <a:xfrm>
+            <a:off x="685800" y="3749039"/>
+            <a:ext cx="10972800" cy="1371600"/>
+          </a:xfrm>
+          <a:prstGeom prst="rect">
+            <a:avLst/>
+          </a:prstGeom>
+          <a:noFill/>
+        </p:spPr>
+        <p:txBody>
+          <a:bodyPr wrap="square" anchor="t">
+            <a:spAutoFit/>
+          </a:bodyPr>
+          <a:lstStyle/>
+          <a:p>
+            <a:pPr algn="ctr">
+              <a:spcAft>
+                <a:spcPts val="1400"/>
+              </a:spcAft>
+              <a:defRPr sz="2400" b="1">
+                <a:solidFill>
+                  <a:srgbClr val="F0D98C"/>
+                </a:solidFill>
+                <a:latin typeface="Calibri"/>
+              </a:defRPr>
+            </a:pPr>
+            <a:r>
+              <a:t>gurza36.ru</a:t>
+            </a:r>
+          </a:p>
+          <a:p>
+            <a:pPr>
+              <a:spcAft>
+                <a:spcPts val="800"/>
+              </a:spcAft>
+              <a:defRPr sz="1800" b="0">
+                <a:solidFill>
+                  <a:srgbClr val="F5F7FA"/>
+                </a:solidFill>
+                <a:latin typeface="Calibri"/>
+              </a:defRPr>
+            </a:pPr>
+            <a:r>
+              <a:t>+7 (473) 278-51-47  ·  +7 (900) 954-43-12</a:t>
+            </a:r>
+          </a:p>
+          <a:p>
+            <a:pPr>
+              <a:spcAft>
+                <a:spcPts val="800"/>
+              </a:spcAft>
+              <a:defRPr sz="1800" b="0">
+                <a:solidFill>
+                  <a:srgbClr val="F5F7FA"/>
+                </a:solidFill>
+                <a:latin typeface="Calibri"/>
+              </a:defRPr>
+            </a:pPr>
+            <a:r>
+              <a:t>mike1592@yandex.ru</a:t>
+            </a:r>
+          </a:p>
+          <a:p>
+            <a:pPr>
+              <a:spcAft>
+                <a:spcPts val="800"/>
+              </a:spcAft>
+              <a:defRPr sz="1600" b="0">
+                <a:solidFill>
+                  <a:srgbClr val="919BAF"/>
+                </a:solidFill>
+                <a:latin typeface="Calibri"/>
+              </a:defRPr>
+            </a:pPr>
+            <a:r>
+              <a:t>394016, г. Воронеж, ул. Солнечная, 17/1, офис 4</a:t>
+            </a:r>
+          </a:p>
+        </p:txBody>
+      </p:sp>
     </p:spTree>
   </p:cSld>
   <p:clrMapOvr>
     <a:masterClrMapping/>
   </p:clrMapOvr>
+  <p:transition spd="med" advClick="1">
+    <p:fadeThroughBlack/>
+  </p:transition>
 </p:sld>
 </file>
 
-<file path=ppt/slides/slide7.xml><?xml version="1.0" encoding="utf-8"?>
+<file path=ppt/slides/slide2.xml><?xml version="1.0" encoding="utf-8"?>
 <p:sld xmlns:a="http://schemas.openxmlformats.org/drawingml/2006/main" xmlns:p="http://schemas.openxmlformats.org/presentationml/2006/main" xmlns:r="http://schemas.openxmlformats.org/officeDocument/2006/relationships">
   <p:cSld>
-    <p:bg>
-      <p:bgPr>
-        <a:solidFill>
-          <a:srgbClr val="0C1018"/>
-        </a:solidFill>
-        <a:effectLst/>
-      </p:bgPr>
-    </p:bg>
     <p:spTree>
       <p:nvGrpSpPr>
         <p:cNvPr id="1" name=""/>
@@ -4475,114 +6376,9 @@
         <p:nvPr/>
       </p:nvGrpSpPr>
       <p:grpSpPr/>
-      <p:sp>
-        <p:nvSpPr>
-          <p:cNvPr id="2" name="TextBox 1"/>
-          <p:cNvSpPr txBox="1"/>
-          <p:nvPr/>
-        </p:nvSpPr>
-        <p:spPr>
-          <a:xfrm>
-            <a:off x="9601200" y="320040"/>
-            <a:ext cx="2286000" cy="274320"/>
-          </a:xfrm>
-          <a:prstGeom prst="rect">
-            <a:avLst/>
-          </a:prstGeom>
-          <a:noFill/>
-        </p:spPr>
-        <p:txBody>
-          <a:bodyPr wrap="none">
-            <a:spAutoFit/>
-          </a:bodyPr>
-          <a:lstStyle/>
-          <a:p>
-            <a:pPr algn="r">
-              <a:defRPr sz="1200">
-                <a:solidFill>
-                  <a:srgbClr val="D4AF37"/>
-                </a:solidFill>
-              </a:defRPr>
-            </a:pPr>
-            <a:r>
-              <a:t>gurza36.ru</a:t>
-            </a:r>
-          </a:p>
-        </p:txBody>
-      </p:sp>
-      <p:sp>
-        <p:nvSpPr>
-          <p:cNvPr id="3" name="TextBox 2"/>
-          <p:cNvSpPr txBox="1"/>
-          <p:nvPr/>
-        </p:nvSpPr>
-        <p:spPr>
-          <a:xfrm>
-            <a:off x="640080" y="320040"/>
-            <a:ext cx="10972800" cy="365760"/>
-          </a:xfrm>
-          <a:prstGeom prst="rect">
-            <a:avLst/>
-          </a:prstGeom>
-          <a:noFill/>
-        </p:spPr>
-        <p:txBody>
-          <a:bodyPr wrap="none">
-            <a:spAutoFit/>
-          </a:bodyPr>
-          <a:lstStyle/>
-          <a:p>
-            <a:pPr>
-              <a:defRPr sz="1400" b="1">
-                <a:solidFill>
-                  <a:srgbClr val="D4AF37"/>
-                </a:solidFill>
-              </a:defRPr>
-            </a:pPr>
-            <a:r>
-              <a:t>КОНТАКТЫ</a:t>
-            </a:r>
-          </a:p>
-        </p:txBody>
-      </p:sp>
-      <p:sp>
-        <p:nvSpPr>
-          <p:cNvPr id="4" name="TextBox 3"/>
-          <p:cNvSpPr txBox="1"/>
-          <p:nvPr/>
-        </p:nvSpPr>
-        <p:spPr>
-          <a:xfrm>
-            <a:off x="640080" y="731520"/>
-            <a:ext cx="10972800" cy="1097280"/>
-          </a:xfrm>
-          <a:prstGeom prst="rect">
-            <a:avLst/>
-          </a:prstGeom>
-          <a:noFill/>
-        </p:spPr>
-        <p:txBody>
-          <a:bodyPr wrap="none">
-            <a:spAutoFit/>
-          </a:bodyPr>
-          <a:lstStyle/>
-          <a:p>
-            <a:pPr>
-              <a:defRPr sz="4000" b="1">
-                <a:solidFill>
-                  <a:srgbClr val="EEF1F6"/>
-                </a:solidFill>
-              </a:defRPr>
-            </a:pPr>
-            <a:r>
-              <a:t>Визитка и CTA</a:t>
-            </a:r>
-          </a:p>
-        </p:txBody>
-      </p:sp>
       <p:pic>
         <p:nvPicPr>
-          <p:cNvPr id="5" name="Picture 4" descr="03-contacts.png"/>
+          <p:cNvPr id="2" name="Picture 1" descr="bg-section.png"/>
           <p:cNvPicPr>
             <a:picLocks noChangeAspect="1"/>
           </p:cNvPicPr>
@@ -4596,33 +6392,184 @@
         </p:blipFill>
         <p:spPr>
           <a:xfrm>
-            <a:off x="640080" y="1234440"/>
-            <a:ext cx="10881360" cy="6800850"/>
+            <a:off x="0" y="0"/>
+            <a:ext cx="12191695" cy="6858000"/>
           </a:xfrm>
           <a:prstGeom prst="rect">
             <a:avLst/>
           </a:prstGeom>
         </p:spPr>
       </p:pic>
+      <p:sp>
+        <p:nvSpPr>
+          <p:cNvPr id="3" name="TextBox 2"/>
+          <p:cNvSpPr txBox="1"/>
+          <p:nvPr/>
+        </p:nvSpPr>
+        <p:spPr>
+          <a:xfrm>
+            <a:off x="731520" y="2011680"/>
+            <a:ext cx="2743200" cy="1371600"/>
+          </a:xfrm>
+          <a:prstGeom prst="rect">
+            <a:avLst/>
+          </a:prstGeom>
+          <a:noFill/>
+        </p:spPr>
+        <p:txBody>
+          <a:bodyPr wrap="square" anchor="t">
+            <a:spAutoFit/>
+          </a:bodyPr>
+          <a:lstStyle/>
+          <a:p>
+            <a:pPr algn="l">
+              <a:spcAft>
+                <a:spcPts val="1400"/>
+              </a:spcAft>
+              <a:defRPr sz="12000" b="0">
+                <a:solidFill>
+                  <a:srgbClr val="D4AF37"/>
+                </a:solidFill>
+                <a:latin typeface="Calibri"/>
+              </a:defRPr>
+            </a:pPr>
+            <a:r>
+              <a:t>01</a:t>
+            </a:r>
+          </a:p>
+        </p:txBody>
+      </p:sp>
+      <p:sp>
+        <p:nvSpPr>
+          <p:cNvPr id="4" name="TextBox 3"/>
+          <p:cNvSpPr txBox="1"/>
+          <p:nvPr/>
+        </p:nvSpPr>
+        <p:spPr>
+          <a:xfrm>
+            <a:off x="731520" y="3657600"/>
+            <a:ext cx="10058400" cy="1097280"/>
+          </a:xfrm>
+          <a:prstGeom prst="rect">
+            <a:avLst/>
+          </a:prstGeom>
+          <a:noFill/>
+        </p:spPr>
+        <p:txBody>
+          <a:bodyPr wrap="square" anchor="t">
+            <a:spAutoFit/>
+          </a:bodyPr>
+          <a:lstStyle/>
+          <a:p>
+            <a:pPr algn="l">
+              <a:spcAft>
+                <a:spcPts val="1400"/>
+              </a:spcAft>
+              <a:defRPr sz="5400" b="1">
+                <a:solidFill>
+                  <a:srgbClr val="F5F7FA"/>
+                </a:solidFill>
+                <a:latin typeface="Calibri"/>
+              </a:defRPr>
+            </a:pPr>
+            <a:r>
+              <a:t>О проекте</a:t>
+            </a:r>
+          </a:p>
+        </p:txBody>
+      </p:sp>
+      <p:sp>
+        <p:nvSpPr>
+          <p:cNvPr id="5" name="TextBox 4"/>
+          <p:cNvSpPr txBox="1"/>
+          <p:nvPr/>
+        </p:nvSpPr>
+        <p:spPr>
+          <a:xfrm>
+            <a:off x="749808" y="4754880"/>
+            <a:ext cx="9144000" cy="731520"/>
+          </a:xfrm>
+          <a:prstGeom prst="rect">
+            <a:avLst/>
+          </a:prstGeom>
+          <a:noFill/>
+        </p:spPr>
+        <p:txBody>
+          <a:bodyPr wrap="square" anchor="t">
+            <a:spAutoFit/>
+          </a:bodyPr>
+          <a:lstStyle/>
+          <a:p>
+            <a:pPr algn="l">
+              <a:spcAft>
+                <a:spcPts val="800"/>
+              </a:spcAft>
+              <a:defRPr sz="2200" b="0">
+                <a:solidFill>
+                  <a:srgbClr val="919BAF"/>
+                </a:solidFill>
+                <a:latin typeface="Calibri"/>
+              </a:defRPr>
+            </a:pPr>
+            <a:r>
+              <a:t>Суть, миссия и позиционирование</a:t>
+            </a:r>
+          </a:p>
+        </p:txBody>
+      </p:sp>
+      <p:sp>
+        <p:nvSpPr>
+          <p:cNvPr id="6" name="TextBox 5"/>
+          <p:cNvSpPr txBox="1"/>
+          <p:nvPr/>
+        </p:nvSpPr>
+        <p:spPr>
+          <a:xfrm>
+            <a:off x="731520" y="6217920"/>
+            <a:ext cx="7315200" cy="365760"/>
+          </a:xfrm>
+          <a:prstGeom prst="rect">
+            <a:avLst/>
+          </a:prstGeom>
+          <a:noFill/>
+        </p:spPr>
+        <p:txBody>
+          <a:bodyPr wrap="square" anchor="t">
+            <a:spAutoFit/>
+          </a:bodyPr>
+          <a:lstStyle/>
+          <a:p>
+            <a:pPr algn="l">
+              <a:spcAft>
+                <a:spcPts val="800"/>
+              </a:spcAft>
+              <a:defRPr sz="1400" b="0">
+                <a:solidFill>
+                  <a:srgbClr val="919BAF"/>
+                </a:solidFill>
+                <a:latin typeface="Calibri"/>
+              </a:defRPr>
+            </a:pPr>
+            <a:r>
+              <a:t>Воронеж · 2026</a:t>
+            </a:r>
+          </a:p>
+        </p:txBody>
+      </p:sp>
     </p:spTree>
   </p:cSld>
   <p:clrMapOvr>
     <a:masterClrMapping/>
   </p:clrMapOvr>
+  <p:transition spd="med" advClick="1">
+    <p:push dir="l"/>
+  </p:transition>
 </p:sld>
 </file>
 
-<file path=ppt/slides/slide8.xml><?xml version="1.0" encoding="utf-8"?>
+<file path=ppt/slides/slide3.xml><?xml version="1.0" encoding="utf-8"?>
 <p:sld xmlns:a="http://schemas.openxmlformats.org/drawingml/2006/main" xmlns:p="http://schemas.openxmlformats.org/presentationml/2006/main" xmlns:r="http://schemas.openxmlformats.org/officeDocument/2006/relationships">
   <p:cSld>
-    <p:bg>
-      <p:bgPr>
-        <a:solidFill>
-          <a:srgbClr val="0C1018"/>
-        </a:solidFill>
-        <a:effectLst/>
-      </p:bgPr>
-    </p:bg>
     <p:spTree>
       <p:nvGrpSpPr>
         <p:cNvPr id="1" name=""/>
@@ -4630,114 +6577,9 @@
         <p:nvPr/>
       </p:nvGrpSpPr>
       <p:grpSpPr/>
-      <p:sp>
-        <p:nvSpPr>
-          <p:cNvPr id="2" name="TextBox 1"/>
-          <p:cNvSpPr txBox="1"/>
-          <p:nvPr/>
-        </p:nvSpPr>
-        <p:spPr>
-          <a:xfrm>
-            <a:off x="9601200" y="320040"/>
-            <a:ext cx="2286000" cy="274320"/>
-          </a:xfrm>
-          <a:prstGeom prst="rect">
-            <a:avLst/>
-          </a:prstGeom>
-          <a:noFill/>
-        </p:spPr>
-        <p:txBody>
-          <a:bodyPr wrap="none">
-            <a:spAutoFit/>
-          </a:bodyPr>
-          <a:lstStyle/>
-          <a:p>
-            <a:pPr algn="r">
-              <a:defRPr sz="1200">
-                <a:solidFill>
-                  <a:srgbClr val="D4AF37"/>
-                </a:solidFill>
-              </a:defRPr>
-            </a:pPr>
-            <a:r>
-              <a:t>gurza36.ru</a:t>
-            </a:r>
-          </a:p>
-        </p:txBody>
-      </p:sp>
-      <p:sp>
-        <p:nvSpPr>
-          <p:cNvPr id="3" name="TextBox 2"/>
-          <p:cNvSpPr txBox="1"/>
-          <p:nvPr/>
-        </p:nvSpPr>
-        <p:spPr>
-          <a:xfrm>
-            <a:off x="640080" y="457200"/>
-            <a:ext cx="10972800" cy="365760"/>
-          </a:xfrm>
-          <a:prstGeom prst="rect">
-            <a:avLst/>
-          </a:prstGeom>
-          <a:noFill/>
-        </p:spPr>
-        <p:txBody>
-          <a:bodyPr wrap="none">
-            <a:spAutoFit/>
-          </a:bodyPr>
-          <a:lstStyle/>
-          <a:p>
-            <a:pPr>
-              <a:defRPr sz="1400" b="1">
-                <a:solidFill>
-                  <a:srgbClr val="D4AF37"/>
-                </a:solidFill>
-              </a:defRPr>
-            </a:pPr>
-            <a:r>
-              <a:t>БРЕНДИНГ</a:t>
-            </a:r>
-          </a:p>
-        </p:txBody>
-      </p:sp>
-      <p:sp>
-        <p:nvSpPr>
-          <p:cNvPr id="4" name="TextBox 3"/>
-          <p:cNvSpPr txBox="1"/>
-          <p:nvPr/>
-        </p:nvSpPr>
-        <p:spPr>
-          <a:xfrm>
-            <a:off x="640080" y="868680"/>
-            <a:ext cx="10972800" cy="1097280"/>
-          </a:xfrm>
-          <a:prstGeom prst="rect">
-            <a:avLst/>
-          </a:prstGeom>
-          <a:noFill/>
-        </p:spPr>
-        <p:txBody>
-          <a:bodyPr wrap="none">
-            <a:spAutoFit/>
-          </a:bodyPr>
-          <a:lstStyle/>
-          <a:p>
-            <a:pPr>
-              <a:defRPr sz="4000" b="1">
-                <a:solidFill>
-                  <a:srgbClr val="EEF1F6"/>
-                </a:solidFill>
-              </a:defRPr>
-            </a:pPr>
-            <a:r>
-              <a:t>Логотип и фирменный стиль</a:t>
-            </a:r>
-          </a:p>
-        </p:txBody>
-      </p:sp>
       <p:pic>
         <p:nvPicPr>
-          <p:cNvPr id="5" name="Picture 4" descr="04-logo.png"/>
+          <p:cNvPr id="2" name="Picture 1" descr="bg-dark.png"/>
           <p:cNvPicPr>
             <a:picLocks noChangeAspect="1"/>
           </p:cNvPicPr>
@@ -4751,17 +6593,2268 @@
         </p:blipFill>
         <p:spPr>
           <a:xfrm>
-            <a:off x="914400" y="1371600"/>
-            <a:ext cx="4114800" cy="4105253"/>
+            <a:off x="0" y="0"/>
+            <a:ext cx="12191695" cy="6858000"/>
           </a:xfrm>
           <a:prstGeom prst="rect">
             <a:avLst/>
           </a:prstGeom>
         </p:spPr>
       </p:pic>
+      <p:sp>
+        <p:nvSpPr>
+          <p:cNvPr id="3" name="TextBox 2"/>
+          <p:cNvSpPr txBox="1"/>
+          <p:nvPr/>
+        </p:nvSpPr>
+        <p:spPr>
+          <a:xfrm>
+            <a:off x="502920" y="320040"/>
+            <a:ext cx="3657600" cy="274320"/>
+          </a:xfrm>
+          <a:prstGeom prst="rect">
+            <a:avLst/>
+          </a:prstGeom>
+          <a:noFill/>
+        </p:spPr>
+        <p:txBody>
+          <a:bodyPr wrap="square" anchor="t">
+            <a:spAutoFit/>
+          </a:bodyPr>
+          <a:lstStyle/>
+          <a:p>
+            <a:pPr algn="l">
+              <a:spcAft>
+                <a:spcPts val="800"/>
+              </a:spcAft>
+              <a:defRPr sz="1100" b="1">
+                <a:solidFill>
+                  <a:srgbClr val="D4AF37"/>
+                </a:solidFill>
+                <a:latin typeface="Calibri"/>
+              </a:defRPr>
+            </a:pPr>
+            <a:r>
+              <a:t>ЧОО «ГЮРЗА»</a:t>
+            </a:r>
+          </a:p>
+        </p:txBody>
+      </p:sp>
+      <p:sp>
+        <p:nvSpPr>
+          <p:cNvPr id="4" name="TextBox 3"/>
+          <p:cNvSpPr txBox="1"/>
+          <p:nvPr/>
+        </p:nvSpPr>
+        <p:spPr>
+          <a:xfrm>
+            <a:off x="8961120" y="320040"/>
+            <a:ext cx="2743200" cy="274320"/>
+          </a:xfrm>
+          <a:prstGeom prst="rect">
+            <a:avLst/>
+          </a:prstGeom>
+          <a:noFill/>
+        </p:spPr>
+        <p:txBody>
+          <a:bodyPr wrap="square" anchor="t">
+            <a:spAutoFit/>
+          </a:bodyPr>
+          <a:lstStyle/>
+          <a:p>
+            <a:pPr algn="r">
+              <a:spcAft>
+                <a:spcPts val="800"/>
+              </a:spcAft>
+              <a:defRPr sz="1100" b="1">
+                <a:solidFill>
+                  <a:srgbClr val="D4AF37"/>
+                </a:solidFill>
+                <a:latin typeface="Calibri"/>
+              </a:defRPr>
+            </a:pPr>
+            <a:r>
+              <a:t>gurza36.ru</a:t>
+            </a:r>
+          </a:p>
+        </p:txBody>
+      </p:sp>
+      <p:sp>
+        <p:nvSpPr>
+          <p:cNvPr id="5" name="Rectangle 4"/>
+          <p:cNvSpPr/>
+          <p:nvPr/>
+        </p:nvSpPr>
+        <p:spPr>
+          <a:xfrm>
+            <a:off x="502920" y="658368"/>
+            <a:ext cx="11155680" cy="0"/>
+          </a:xfrm>
+          <a:prstGeom prst="rect">
+            <a:avLst/>
+          </a:prstGeom>
+          <a:ln w="9525">
+            <a:solidFill>
+              <a:srgbClr val="D4AF37"/>
+            </a:solidFill>
+          </a:ln>
+        </p:spPr>
+        <p:style>
+          <a:lnRef idx="1">
+            <a:schemeClr val="accent1"/>
+          </a:lnRef>
+          <a:fillRef idx="3">
+            <a:schemeClr val="accent1"/>
+          </a:fillRef>
+          <a:effectRef idx="2">
+            <a:schemeClr val="accent1"/>
+          </a:effectRef>
+          <a:fontRef idx="minor">
+            <a:schemeClr val="lt1"/>
+          </a:fontRef>
+        </p:style>
+        <p:txBody>
+          <a:bodyPr rtlCol="0" anchor="ctr"/>
+          <a:lstStyle/>
+          <a:p>
+            <a:pPr algn="ctr"/>
+          </a:p>
+        </p:txBody>
+      </p:sp>
+      <p:sp>
+        <p:nvSpPr>
+          <p:cNvPr id="6" name="TextBox 5"/>
+          <p:cNvSpPr txBox="1"/>
+          <p:nvPr/>
+        </p:nvSpPr>
+        <p:spPr>
+          <a:xfrm>
+            <a:off x="640080" y="914400"/>
+            <a:ext cx="9144000" cy="457200"/>
+          </a:xfrm>
+          <a:prstGeom prst="rect">
+            <a:avLst/>
+          </a:prstGeom>
+          <a:noFill/>
+        </p:spPr>
+        <p:txBody>
+          <a:bodyPr wrap="square" anchor="t">
+            <a:spAutoFit/>
+          </a:bodyPr>
+          <a:lstStyle/>
+          <a:p>
+            <a:pPr algn="l">
+              <a:spcAft>
+                <a:spcPts val="800"/>
+              </a:spcAft>
+              <a:defRPr sz="1400" b="1">
+                <a:solidFill>
+                  <a:srgbClr val="D4AF37"/>
+                </a:solidFill>
+                <a:latin typeface="Calibri"/>
+              </a:defRPr>
+            </a:pPr>
+            <a:r>
+              <a:t>СУТЬ</a:t>
+            </a:r>
+          </a:p>
+        </p:txBody>
+      </p:sp>
+      <p:sp>
+        <p:nvSpPr>
+          <p:cNvPr id="7" name="TextBox 6"/>
+          <p:cNvSpPr txBox="1"/>
+          <p:nvPr/>
+        </p:nvSpPr>
+        <p:spPr>
+          <a:xfrm>
+            <a:off x="640080" y="1325880"/>
+            <a:ext cx="10058400" cy="731520"/>
+          </a:xfrm>
+          <a:prstGeom prst="rect">
+            <a:avLst/>
+          </a:prstGeom>
+          <a:noFill/>
+        </p:spPr>
+        <p:txBody>
+          <a:bodyPr wrap="square" anchor="t">
+            <a:spAutoFit/>
+          </a:bodyPr>
+          <a:lstStyle/>
+          <a:p>
+            <a:pPr algn="l">
+              <a:spcAft>
+                <a:spcPts val="1400"/>
+              </a:spcAft>
+              <a:defRPr sz="3800" b="1">
+                <a:solidFill>
+                  <a:srgbClr val="F5F7FA"/>
+                </a:solidFill>
+                <a:latin typeface="Calibri"/>
+              </a:defRPr>
+            </a:pPr>
+            <a:r>
+              <a:t>Безопасность, проверенная временем</a:t>
+            </a:r>
+          </a:p>
+        </p:txBody>
+      </p:sp>
+      <p:sp>
+        <p:nvSpPr>
+          <p:cNvPr id="8" name="TextBox 7"/>
+          <p:cNvSpPr txBox="1"/>
+          <p:nvPr/>
+        </p:nvSpPr>
+        <p:spPr>
+          <a:xfrm>
+            <a:off x="640080" y="2148840"/>
+            <a:ext cx="5669280" cy="1645920"/>
+          </a:xfrm>
+          <a:prstGeom prst="rect">
+            <a:avLst/>
+          </a:prstGeom>
+          <a:noFill/>
+        </p:spPr>
+        <p:txBody>
+          <a:bodyPr wrap="square" anchor="t">
+            <a:spAutoFit/>
+          </a:bodyPr>
+          <a:lstStyle/>
+          <a:p>
+            <a:pPr algn="l">
+              <a:spcAft>
+                <a:spcPts val="800"/>
+              </a:spcAft>
+              <a:defRPr sz="1800" b="0">
+                <a:solidFill>
+                  <a:srgbClr val="F5F7FA"/>
+                </a:solidFill>
+                <a:latin typeface="Calibri"/>
+              </a:defRPr>
+            </a:pPr>
+            <a:r>
+              <a:t>ЧОО «Гюрза» — частная охранная организация в Воронеже и области.</a:t>
+            </a:r>
+          </a:p>
+          <a:p>
+            <a:pPr>
+              <a:spcAft>
+                <a:spcPts val="800"/>
+              </a:spcAft>
+              <a:defRPr sz="800" b="0">
+                <a:solidFill>
+                  <a:srgbClr val="F5F7FA"/>
+                </a:solidFill>
+                <a:latin typeface="Calibri"/>
+              </a:defRPr>
+            </a:pPr>
+          </a:p>
+          <a:p>
+            <a:pPr>
+              <a:spcAft>
+                <a:spcPts val="800"/>
+              </a:spcAft>
+              <a:defRPr sz="1800" b="1">
+                <a:solidFill>
+                  <a:srgbClr val="F0D98C"/>
+                </a:solidFill>
+                <a:latin typeface="Calibri"/>
+              </a:defRPr>
+            </a:pPr>
+            <a:r>
+              <a:t>Сайт — не визитка ради галочки, а инструмент доверия и продаж.</a:t>
+            </a:r>
+          </a:p>
+          <a:p>
+            <a:pPr>
+              <a:spcAft>
+                <a:spcPts val="800"/>
+              </a:spcAft>
+              <a:defRPr sz="800" b="0">
+                <a:solidFill>
+                  <a:srgbClr val="F5F7FA"/>
+                </a:solidFill>
+                <a:latin typeface="Calibri"/>
+              </a:defRPr>
+            </a:pPr>
+          </a:p>
+          <a:p>
+            <a:pPr>
+              <a:spcAft>
+                <a:spcPts val="800"/>
+              </a:spcAft>
+              <a:defRPr sz="1700" b="0">
+                <a:solidFill>
+                  <a:srgbClr val="919BAF"/>
+                </a:solidFill>
+                <a:latin typeface="Calibri"/>
+              </a:defRPr>
+            </a:pPr>
+            <a:r>
+              <a:t>Клиент за 30 секунд понимает: кто вы, чем сильны, как связаться.</a:t>
+            </a:r>
+          </a:p>
+        </p:txBody>
+      </p:sp>
+      <p:sp>
+        <p:nvSpPr>
+          <p:cNvPr id="9" name="Rectangle 8"/>
+          <p:cNvSpPr/>
+          <p:nvPr/>
+        </p:nvSpPr>
+        <p:spPr>
+          <a:xfrm>
+            <a:off x="640080" y="4389120"/>
+            <a:ext cx="3474720" cy="1417320"/>
+          </a:xfrm>
+          <a:prstGeom prst="rect">
+            <a:avLst/>
+          </a:prstGeom>
+          <a:solidFill>
+            <a:srgbClr val="121824"/>
+          </a:solidFill>
+          <a:ln w="6350">
+            <a:solidFill>
+              <a:srgbClr val="D4AF37"/>
+            </a:solidFill>
+          </a:ln>
+        </p:spPr>
+        <p:style>
+          <a:lnRef idx="1">
+            <a:schemeClr val="accent1"/>
+          </a:lnRef>
+          <a:fillRef idx="3">
+            <a:schemeClr val="accent1"/>
+          </a:fillRef>
+          <a:effectRef idx="2">
+            <a:schemeClr val="accent1"/>
+          </a:effectRef>
+          <a:fontRef idx="minor">
+            <a:schemeClr val="lt1"/>
+          </a:fontRef>
+        </p:style>
+        <p:txBody>
+          <a:bodyPr rtlCol="0" anchor="ctr"/>
+          <a:lstStyle/>
+          <a:p>
+            <a:pPr algn="ctr"/>
+          </a:p>
+        </p:txBody>
+      </p:sp>
+      <p:sp>
+        <p:nvSpPr>
+          <p:cNvPr id="10" name="TextBox 9"/>
+          <p:cNvSpPr txBox="1"/>
+          <p:nvPr/>
+        </p:nvSpPr>
+        <p:spPr>
+          <a:xfrm>
+            <a:off x="822959" y="4526280"/>
+            <a:ext cx="3108960" cy="640080"/>
+          </a:xfrm>
+          <a:prstGeom prst="rect">
+            <a:avLst/>
+          </a:prstGeom>
+          <a:noFill/>
+        </p:spPr>
+        <p:txBody>
+          <a:bodyPr wrap="square" anchor="t">
+            <a:spAutoFit/>
+          </a:bodyPr>
+          <a:lstStyle/>
+          <a:p>
+            <a:pPr algn="l">
+              <a:spcAft>
+                <a:spcPts val="1400"/>
+              </a:spcAft>
+              <a:defRPr sz="3600" b="1">
+                <a:solidFill>
+                  <a:srgbClr val="D4AF37"/>
+                </a:solidFill>
+                <a:latin typeface="Calibri"/>
+              </a:defRPr>
+            </a:pPr>
+            <a:r>
+              <a:t>15+</a:t>
+            </a:r>
+          </a:p>
+        </p:txBody>
+      </p:sp>
+      <p:sp>
+        <p:nvSpPr>
+          <p:cNvPr id="11" name="TextBox 10"/>
+          <p:cNvSpPr txBox="1"/>
+          <p:nvPr/>
+        </p:nvSpPr>
+        <p:spPr>
+          <a:xfrm>
+            <a:off x="822959" y="5166359"/>
+            <a:ext cx="3108960" cy="548640"/>
+          </a:xfrm>
+          <a:prstGeom prst="rect">
+            <a:avLst/>
+          </a:prstGeom>
+          <a:noFill/>
+        </p:spPr>
+        <p:txBody>
+          <a:bodyPr wrap="square" anchor="t">
+            <a:spAutoFit/>
+          </a:bodyPr>
+          <a:lstStyle/>
+          <a:p>
+            <a:pPr algn="l">
+              <a:spcAft>
+                <a:spcPts val="800"/>
+              </a:spcAft>
+              <a:defRPr sz="1300" b="0">
+                <a:solidFill>
+                  <a:srgbClr val="919BAF"/>
+                </a:solidFill>
+                <a:latin typeface="Calibri"/>
+              </a:defRPr>
+            </a:pPr>
+            <a:r>
+              <a:t>лет на рынке</a:t>
+            </a:r>
+          </a:p>
+        </p:txBody>
+      </p:sp>
+      <p:sp>
+        <p:nvSpPr>
+          <p:cNvPr id="12" name="Rectangle 11"/>
+          <p:cNvSpPr/>
+          <p:nvPr/>
+        </p:nvSpPr>
+        <p:spPr>
+          <a:xfrm>
+            <a:off x="4251959" y="4389120"/>
+            <a:ext cx="3474720" cy="1417320"/>
+          </a:xfrm>
+          <a:prstGeom prst="rect">
+            <a:avLst/>
+          </a:prstGeom>
+          <a:solidFill>
+            <a:srgbClr val="121824"/>
+          </a:solidFill>
+          <a:ln w="6350">
+            <a:solidFill>
+              <a:srgbClr val="D4AF37"/>
+            </a:solidFill>
+          </a:ln>
+        </p:spPr>
+        <p:style>
+          <a:lnRef idx="1">
+            <a:schemeClr val="accent1"/>
+          </a:lnRef>
+          <a:fillRef idx="3">
+            <a:schemeClr val="accent1"/>
+          </a:fillRef>
+          <a:effectRef idx="2">
+            <a:schemeClr val="accent1"/>
+          </a:effectRef>
+          <a:fontRef idx="minor">
+            <a:schemeClr val="lt1"/>
+          </a:fontRef>
+        </p:style>
+        <p:txBody>
+          <a:bodyPr rtlCol="0" anchor="ctr"/>
+          <a:lstStyle/>
+          <a:p>
+            <a:pPr algn="ctr"/>
+          </a:p>
+        </p:txBody>
+      </p:sp>
+      <p:sp>
+        <p:nvSpPr>
+          <p:cNvPr id="13" name="TextBox 12"/>
+          <p:cNvSpPr txBox="1"/>
+          <p:nvPr/>
+        </p:nvSpPr>
+        <p:spPr>
+          <a:xfrm>
+            <a:off x="4434840" y="4526280"/>
+            <a:ext cx="3108960" cy="640080"/>
+          </a:xfrm>
+          <a:prstGeom prst="rect">
+            <a:avLst/>
+          </a:prstGeom>
+          <a:noFill/>
+        </p:spPr>
+        <p:txBody>
+          <a:bodyPr wrap="square" anchor="t">
+            <a:spAutoFit/>
+          </a:bodyPr>
+          <a:lstStyle/>
+          <a:p>
+            <a:pPr algn="l">
+              <a:spcAft>
+                <a:spcPts val="1400"/>
+              </a:spcAft>
+              <a:defRPr sz="3600" b="1">
+                <a:solidFill>
+                  <a:srgbClr val="D4AF37"/>
+                </a:solidFill>
+                <a:latin typeface="Calibri"/>
+              </a:defRPr>
+            </a:pPr>
+            <a:r>
+              <a:t>24/7</a:t>
+            </a:r>
+          </a:p>
+        </p:txBody>
+      </p:sp>
+      <p:sp>
+        <p:nvSpPr>
+          <p:cNvPr id="14" name="TextBox 13"/>
+          <p:cNvSpPr txBox="1"/>
+          <p:nvPr/>
+        </p:nvSpPr>
+        <p:spPr>
+          <a:xfrm>
+            <a:off x="4434840" y="5166359"/>
+            <a:ext cx="3108960" cy="548640"/>
+          </a:xfrm>
+          <a:prstGeom prst="rect">
+            <a:avLst/>
+          </a:prstGeom>
+          <a:noFill/>
+        </p:spPr>
+        <p:txBody>
+          <a:bodyPr wrap="square" anchor="t">
+            <a:spAutoFit/>
+          </a:bodyPr>
+          <a:lstStyle/>
+          <a:p>
+            <a:pPr algn="l">
+              <a:spcAft>
+                <a:spcPts val="800"/>
+              </a:spcAft>
+              <a:defRPr sz="1300" b="0">
+                <a:solidFill>
+                  <a:srgbClr val="919BAF"/>
+                </a:solidFill>
+                <a:latin typeface="Calibri"/>
+              </a:defRPr>
+            </a:pPr>
+            <a:r>
+              <a:t>охрана объектов</a:t>
+            </a:r>
+          </a:p>
+        </p:txBody>
+      </p:sp>
+      <p:sp>
+        <p:nvSpPr>
+          <p:cNvPr id="15" name="Rectangle 14"/>
+          <p:cNvSpPr/>
+          <p:nvPr/>
+        </p:nvSpPr>
+        <p:spPr>
+          <a:xfrm>
+            <a:off x="7863840" y="4389120"/>
+            <a:ext cx="3474720" cy="1417320"/>
+          </a:xfrm>
+          <a:prstGeom prst="rect">
+            <a:avLst/>
+          </a:prstGeom>
+          <a:solidFill>
+            <a:srgbClr val="121824"/>
+          </a:solidFill>
+          <a:ln w="6350">
+            <a:solidFill>
+              <a:srgbClr val="D4AF37"/>
+            </a:solidFill>
+          </a:ln>
+        </p:spPr>
+        <p:style>
+          <a:lnRef idx="1">
+            <a:schemeClr val="accent1"/>
+          </a:lnRef>
+          <a:fillRef idx="3">
+            <a:schemeClr val="accent1"/>
+          </a:fillRef>
+          <a:effectRef idx="2">
+            <a:schemeClr val="accent1"/>
+          </a:effectRef>
+          <a:fontRef idx="minor">
+            <a:schemeClr val="lt1"/>
+          </a:fontRef>
+        </p:style>
+        <p:txBody>
+          <a:bodyPr rtlCol="0" anchor="ctr"/>
+          <a:lstStyle/>
+          <a:p>
+            <a:pPr algn="ctr"/>
+          </a:p>
+        </p:txBody>
+      </p:sp>
+      <p:sp>
+        <p:nvSpPr>
+          <p:cNvPr id="16" name="TextBox 15"/>
+          <p:cNvSpPr txBox="1"/>
+          <p:nvPr/>
+        </p:nvSpPr>
+        <p:spPr>
+          <a:xfrm>
+            <a:off x="8046719" y="4526280"/>
+            <a:ext cx="3108960" cy="640080"/>
+          </a:xfrm>
+          <a:prstGeom prst="rect">
+            <a:avLst/>
+          </a:prstGeom>
+          <a:noFill/>
+        </p:spPr>
+        <p:txBody>
+          <a:bodyPr wrap="square" anchor="t">
+            <a:spAutoFit/>
+          </a:bodyPr>
+          <a:lstStyle/>
+          <a:p>
+            <a:pPr algn="l">
+              <a:spcAft>
+                <a:spcPts val="1400"/>
+              </a:spcAft>
+              <a:defRPr sz="3600" b="1">
+                <a:solidFill>
+                  <a:srgbClr val="D4AF37"/>
+                </a:solidFill>
+                <a:latin typeface="Calibri"/>
+              </a:defRPr>
+            </a:pPr>
+            <a:r>
+              <a:t>6</a:t>
+            </a:r>
+          </a:p>
+        </p:txBody>
+      </p:sp>
+      <p:sp>
+        <p:nvSpPr>
+          <p:cNvPr id="17" name="TextBox 16"/>
+          <p:cNvSpPr txBox="1"/>
+          <p:nvPr/>
+        </p:nvSpPr>
+        <p:spPr>
+          <a:xfrm>
+            <a:off x="8046719" y="5166359"/>
+            <a:ext cx="3108960" cy="548640"/>
+          </a:xfrm>
+          <a:prstGeom prst="rect">
+            <a:avLst/>
+          </a:prstGeom>
+          <a:noFill/>
+        </p:spPr>
+        <p:txBody>
+          <a:bodyPr wrap="square" anchor="t">
+            <a:spAutoFit/>
+          </a:bodyPr>
+          <a:lstStyle/>
+          <a:p>
+            <a:pPr algn="l">
+              <a:spcAft>
+                <a:spcPts val="800"/>
+              </a:spcAft>
+              <a:defRPr sz="1300" b="0">
+                <a:solidFill>
+                  <a:srgbClr val="919BAF"/>
+                </a:solidFill>
+                <a:latin typeface="Calibri"/>
+              </a:defRPr>
+            </a:pPr>
+            <a:r>
+              <a:t>направлений услуг</a:t>
+            </a:r>
+          </a:p>
+        </p:txBody>
+      </p:sp>
+    </p:spTree>
+  </p:cSld>
+  <p:clrMapOvr>
+    <a:masterClrMapping/>
+  </p:clrMapOvr>
+  <p:transition spd="med" advClick="1">
+    <p:fadeThroughBlack/>
+  </p:transition>
+</p:sld>
+</file>
+
+<file path=ppt/slides/slide4.xml><?xml version="1.0" encoding="utf-8"?>
+<p:sld xmlns:a="http://schemas.openxmlformats.org/drawingml/2006/main" xmlns:p="http://schemas.openxmlformats.org/presentationml/2006/main" xmlns:r="http://schemas.openxmlformats.org/officeDocument/2006/relationships">
+  <p:cSld>
+    <p:spTree>
+      <p:nvGrpSpPr>
+        <p:cNvPr id="1" name=""/>
+        <p:cNvGrpSpPr/>
+        <p:nvPr/>
+      </p:nvGrpSpPr>
+      <p:grpSpPr/>
       <p:pic>
         <p:nvPicPr>
-          <p:cNvPr id="6" name="Picture 5" descr="01-main.png"/>
+          <p:cNvPr id="2" name="Picture 1" descr="bg-section.png"/>
+          <p:cNvPicPr>
+            <a:picLocks noChangeAspect="1"/>
+          </p:cNvPicPr>
+          <p:nvPr/>
+        </p:nvPicPr>
+        <p:blipFill>
+          <a:blip r:embed="rId2"/>
+          <a:stretch>
+            <a:fillRect/>
+          </a:stretch>
+        </p:blipFill>
+        <p:spPr>
+          <a:xfrm>
+            <a:off x="0" y="0"/>
+            <a:ext cx="12191695" cy="6858000"/>
+          </a:xfrm>
+          <a:prstGeom prst="rect">
+            <a:avLst/>
+          </a:prstGeom>
+        </p:spPr>
+      </p:pic>
+      <p:sp>
+        <p:nvSpPr>
+          <p:cNvPr id="3" name="TextBox 2"/>
+          <p:cNvSpPr txBox="1"/>
+          <p:nvPr/>
+        </p:nvSpPr>
+        <p:spPr>
+          <a:xfrm>
+            <a:off x="731520" y="2011680"/>
+            <a:ext cx="2743200" cy="1371600"/>
+          </a:xfrm>
+          <a:prstGeom prst="rect">
+            <a:avLst/>
+          </a:prstGeom>
+          <a:noFill/>
+        </p:spPr>
+        <p:txBody>
+          <a:bodyPr wrap="square" anchor="t">
+            <a:spAutoFit/>
+          </a:bodyPr>
+          <a:lstStyle/>
+          <a:p>
+            <a:pPr algn="l">
+              <a:spcAft>
+                <a:spcPts val="1400"/>
+              </a:spcAft>
+              <a:defRPr sz="12000" b="0">
+                <a:solidFill>
+                  <a:srgbClr val="D4AF37"/>
+                </a:solidFill>
+                <a:latin typeface="Calibri"/>
+              </a:defRPr>
+            </a:pPr>
+            <a:r>
+              <a:t>02</a:t>
+            </a:r>
+          </a:p>
+        </p:txBody>
+      </p:sp>
+      <p:sp>
+        <p:nvSpPr>
+          <p:cNvPr id="4" name="TextBox 3"/>
+          <p:cNvSpPr txBox="1"/>
+          <p:nvPr/>
+        </p:nvSpPr>
+        <p:spPr>
+          <a:xfrm>
+            <a:off x="731520" y="3657600"/>
+            <a:ext cx="10058400" cy="1097280"/>
+          </a:xfrm>
+          <a:prstGeom prst="rect">
+            <a:avLst/>
+          </a:prstGeom>
+          <a:noFill/>
+        </p:spPr>
+        <p:txBody>
+          <a:bodyPr wrap="square" anchor="t">
+            <a:spAutoFit/>
+          </a:bodyPr>
+          <a:lstStyle/>
+          <a:p>
+            <a:pPr algn="l">
+              <a:spcAft>
+                <a:spcPts val="1400"/>
+              </a:spcAft>
+              <a:defRPr sz="5400" b="1">
+                <a:solidFill>
+                  <a:srgbClr val="F5F7FA"/>
+                </a:solidFill>
+                <a:latin typeface="Calibri"/>
+              </a:defRPr>
+            </a:pPr>
+            <a:r>
+              <a:t>Что мы делаем</a:t>
+            </a:r>
+          </a:p>
+        </p:txBody>
+      </p:sp>
+      <p:sp>
+        <p:nvSpPr>
+          <p:cNvPr id="5" name="TextBox 4"/>
+          <p:cNvSpPr txBox="1"/>
+          <p:nvPr/>
+        </p:nvSpPr>
+        <p:spPr>
+          <a:xfrm>
+            <a:off x="749808" y="4754880"/>
+            <a:ext cx="9144000" cy="731520"/>
+          </a:xfrm>
+          <a:prstGeom prst="rect">
+            <a:avLst/>
+          </a:prstGeom>
+          <a:noFill/>
+        </p:spPr>
+        <p:txBody>
+          <a:bodyPr wrap="square" anchor="t">
+            <a:spAutoFit/>
+          </a:bodyPr>
+          <a:lstStyle/>
+          <a:p>
+            <a:pPr algn="l">
+              <a:spcAft>
+                <a:spcPts val="800"/>
+              </a:spcAft>
+              <a:defRPr sz="2200" b="0">
+                <a:solidFill>
+                  <a:srgbClr val="919BAF"/>
+                </a:solidFill>
+                <a:latin typeface="Calibri"/>
+              </a:defRPr>
+            </a:pPr>
+            <a:r>
+              <a:t>Услуги и специализация</a:t>
+            </a:r>
+          </a:p>
+        </p:txBody>
+      </p:sp>
+      <p:sp>
+        <p:nvSpPr>
+          <p:cNvPr id="6" name="TextBox 5"/>
+          <p:cNvSpPr txBox="1"/>
+          <p:nvPr/>
+        </p:nvSpPr>
+        <p:spPr>
+          <a:xfrm>
+            <a:off x="731520" y="6217920"/>
+            <a:ext cx="7315200" cy="365760"/>
+          </a:xfrm>
+          <a:prstGeom prst="rect">
+            <a:avLst/>
+          </a:prstGeom>
+          <a:noFill/>
+        </p:spPr>
+        <p:txBody>
+          <a:bodyPr wrap="square" anchor="t">
+            <a:spAutoFit/>
+          </a:bodyPr>
+          <a:lstStyle/>
+          <a:p>
+            <a:pPr algn="l">
+              <a:spcAft>
+                <a:spcPts val="800"/>
+              </a:spcAft>
+              <a:defRPr sz="1400" b="0">
+                <a:solidFill>
+                  <a:srgbClr val="919BAF"/>
+                </a:solidFill>
+                <a:latin typeface="Calibri"/>
+              </a:defRPr>
+            </a:pPr>
+            <a:r>
+              <a:t>Воронеж · 2026</a:t>
+            </a:r>
+          </a:p>
+        </p:txBody>
+      </p:sp>
+    </p:spTree>
+  </p:cSld>
+  <p:clrMapOvr>
+    <a:masterClrMapping/>
+  </p:clrMapOvr>
+  <p:transition spd="med" advClick="1">
+    <p:push dir="l"/>
+  </p:transition>
+</p:sld>
+</file>
+
+<file path=ppt/slides/slide5.xml><?xml version="1.0" encoding="utf-8"?>
+<p:sld xmlns:a="http://schemas.openxmlformats.org/drawingml/2006/main" xmlns:p="http://schemas.openxmlformats.org/presentationml/2006/main" xmlns:r="http://schemas.openxmlformats.org/officeDocument/2006/relationships">
+  <p:cSld>
+    <p:spTree>
+      <p:nvGrpSpPr>
+        <p:cNvPr id="1" name=""/>
+        <p:cNvGrpSpPr/>
+        <p:nvPr/>
+      </p:nvGrpSpPr>
+      <p:grpSpPr/>
+      <p:pic>
+        <p:nvPicPr>
+          <p:cNvPr id="2" name="Picture 1" descr="bg-dark.png"/>
+          <p:cNvPicPr>
+            <a:picLocks noChangeAspect="1"/>
+          </p:cNvPicPr>
+          <p:nvPr/>
+        </p:nvPicPr>
+        <p:blipFill>
+          <a:blip r:embed="rId2"/>
+          <a:stretch>
+            <a:fillRect/>
+          </a:stretch>
+        </p:blipFill>
+        <p:spPr>
+          <a:xfrm>
+            <a:off x="0" y="0"/>
+            <a:ext cx="12191695" cy="6858000"/>
+          </a:xfrm>
+          <a:prstGeom prst="rect">
+            <a:avLst/>
+          </a:prstGeom>
+        </p:spPr>
+      </p:pic>
+      <p:sp>
+        <p:nvSpPr>
+          <p:cNvPr id="3" name="TextBox 2"/>
+          <p:cNvSpPr txBox="1"/>
+          <p:nvPr/>
+        </p:nvSpPr>
+        <p:spPr>
+          <a:xfrm>
+            <a:off x="502920" y="320040"/>
+            <a:ext cx="3657600" cy="274320"/>
+          </a:xfrm>
+          <a:prstGeom prst="rect">
+            <a:avLst/>
+          </a:prstGeom>
+          <a:noFill/>
+        </p:spPr>
+        <p:txBody>
+          <a:bodyPr wrap="square" anchor="t">
+            <a:spAutoFit/>
+          </a:bodyPr>
+          <a:lstStyle/>
+          <a:p>
+            <a:pPr algn="l">
+              <a:spcAft>
+                <a:spcPts val="800"/>
+              </a:spcAft>
+              <a:defRPr sz="1100" b="1">
+                <a:solidFill>
+                  <a:srgbClr val="D4AF37"/>
+                </a:solidFill>
+                <a:latin typeface="Calibri"/>
+              </a:defRPr>
+            </a:pPr>
+            <a:r>
+              <a:t>ЧОО «ГЮРЗА»</a:t>
+            </a:r>
+          </a:p>
+        </p:txBody>
+      </p:sp>
+      <p:sp>
+        <p:nvSpPr>
+          <p:cNvPr id="4" name="TextBox 3"/>
+          <p:cNvSpPr txBox="1"/>
+          <p:nvPr/>
+        </p:nvSpPr>
+        <p:spPr>
+          <a:xfrm>
+            <a:off x="8961120" y="320040"/>
+            <a:ext cx="2743200" cy="274320"/>
+          </a:xfrm>
+          <a:prstGeom prst="rect">
+            <a:avLst/>
+          </a:prstGeom>
+          <a:noFill/>
+        </p:spPr>
+        <p:txBody>
+          <a:bodyPr wrap="square" anchor="t">
+            <a:spAutoFit/>
+          </a:bodyPr>
+          <a:lstStyle/>
+          <a:p>
+            <a:pPr algn="r">
+              <a:spcAft>
+                <a:spcPts val="800"/>
+              </a:spcAft>
+              <a:defRPr sz="1100" b="1">
+                <a:solidFill>
+                  <a:srgbClr val="D4AF37"/>
+                </a:solidFill>
+                <a:latin typeface="Calibri"/>
+              </a:defRPr>
+            </a:pPr>
+            <a:r>
+              <a:t>gurza36.ru</a:t>
+            </a:r>
+          </a:p>
+        </p:txBody>
+      </p:sp>
+      <p:sp>
+        <p:nvSpPr>
+          <p:cNvPr id="5" name="Rectangle 4"/>
+          <p:cNvSpPr/>
+          <p:nvPr/>
+        </p:nvSpPr>
+        <p:spPr>
+          <a:xfrm>
+            <a:off x="502920" y="658368"/>
+            <a:ext cx="11155680" cy="0"/>
+          </a:xfrm>
+          <a:prstGeom prst="rect">
+            <a:avLst/>
+          </a:prstGeom>
+          <a:ln w="9525">
+            <a:solidFill>
+              <a:srgbClr val="D4AF37"/>
+            </a:solidFill>
+          </a:ln>
+        </p:spPr>
+        <p:style>
+          <a:lnRef idx="1">
+            <a:schemeClr val="accent1"/>
+          </a:lnRef>
+          <a:fillRef idx="3">
+            <a:schemeClr val="accent1"/>
+          </a:fillRef>
+          <a:effectRef idx="2">
+            <a:schemeClr val="accent1"/>
+          </a:effectRef>
+          <a:fontRef idx="minor">
+            <a:schemeClr val="lt1"/>
+          </a:fontRef>
+        </p:style>
+        <p:txBody>
+          <a:bodyPr rtlCol="0" anchor="ctr"/>
+          <a:lstStyle/>
+          <a:p>
+            <a:pPr algn="ctr"/>
+          </a:p>
+        </p:txBody>
+      </p:sp>
+      <p:sp>
+        <p:nvSpPr>
+          <p:cNvPr id="6" name="TextBox 5"/>
+          <p:cNvSpPr txBox="1"/>
+          <p:nvPr/>
+        </p:nvSpPr>
+        <p:spPr>
+          <a:xfrm>
+            <a:off x="640080" y="914400"/>
+            <a:ext cx="9144000" cy="548640"/>
+          </a:xfrm>
+          <a:prstGeom prst="rect">
+            <a:avLst/>
+          </a:prstGeom>
+          <a:noFill/>
+        </p:spPr>
+        <p:txBody>
+          <a:bodyPr wrap="square" anchor="t">
+            <a:spAutoFit/>
+          </a:bodyPr>
+          <a:lstStyle/>
+          <a:p>
+            <a:pPr algn="l">
+              <a:spcAft>
+                <a:spcPts val="800"/>
+              </a:spcAft>
+              <a:defRPr sz="1400" b="1">
+                <a:solidFill>
+                  <a:srgbClr val="D4AF37"/>
+                </a:solidFill>
+                <a:latin typeface="Calibri"/>
+              </a:defRPr>
+            </a:pPr>
+            <a:r>
+              <a:t>УСЛУГИ</a:t>
+            </a:r>
+          </a:p>
+        </p:txBody>
+      </p:sp>
+      <p:sp>
+        <p:nvSpPr>
+          <p:cNvPr id="7" name="Rectangle 6"/>
+          <p:cNvSpPr/>
+          <p:nvPr/>
+        </p:nvSpPr>
+        <p:spPr>
+          <a:xfrm>
+            <a:off x="640080" y="1554480"/>
+            <a:ext cx="5486400" cy="1325880"/>
+          </a:xfrm>
+          <a:prstGeom prst="rect">
+            <a:avLst/>
+          </a:prstGeom>
+          <a:solidFill>
+            <a:srgbClr val="121824"/>
+          </a:solidFill>
+          <a:ln>
+            <a:solidFill>
+              <a:srgbClr val="3C465A"/>
+            </a:solidFill>
+          </a:ln>
+        </p:spPr>
+        <p:style>
+          <a:lnRef idx="1">
+            <a:schemeClr val="accent1"/>
+          </a:lnRef>
+          <a:fillRef idx="3">
+            <a:schemeClr val="accent1"/>
+          </a:fillRef>
+          <a:effectRef idx="2">
+            <a:schemeClr val="accent1"/>
+          </a:effectRef>
+          <a:fontRef idx="minor">
+            <a:schemeClr val="lt1"/>
+          </a:fontRef>
+        </p:style>
+        <p:txBody>
+          <a:bodyPr rtlCol="0" anchor="ctr"/>
+          <a:lstStyle/>
+          <a:p>
+            <a:pPr algn="ctr"/>
+          </a:p>
+        </p:txBody>
+      </p:sp>
+      <p:sp>
+        <p:nvSpPr>
+          <p:cNvPr id="8" name="TextBox 7"/>
+          <p:cNvSpPr txBox="1"/>
+          <p:nvPr/>
+        </p:nvSpPr>
+        <p:spPr>
+          <a:xfrm>
+            <a:off x="777240" y="1664207"/>
+            <a:ext cx="5120640" cy="411480"/>
+          </a:xfrm>
+          <a:prstGeom prst="rect">
+            <a:avLst/>
+          </a:prstGeom>
+          <a:noFill/>
+        </p:spPr>
+        <p:txBody>
+          <a:bodyPr wrap="square" anchor="t">
+            <a:spAutoFit/>
+          </a:bodyPr>
+          <a:lstStyle/>
+          <a:p>
+            <a:pPr algn="l">
+              <a:spcAft>
+                <a:spcPts val="800"/>
+              </a:spcAft>
+              <a:defRPr sz="1700" b="1">
+                <a:solidFill>
+                  <a:srgbClr val="D4AF37"/>
+                </a:solidFill>
+                <a:latin typeface="Calibri"/>
+              </a:defRPr>
+            </a:pPr>
+            <a:r>
+              <a:t>Административные здания</a:t>
+            </a:r>
+          </a:p>
+        </p:txBody>
+      </p:sp>
+      <p:sp>
+        <p:nvSpPr>
+          <p:cNvPr id="9" name="TextBox 8"/>
+          <p:cNvSpPr txBox="1"/>
+          <p:nvPr/>
+        </p:nvSpPr>
+        <p:spPr>
+          <a:xfrm>
+            <a:off x="777240" y="2084831"/>
+            <a:ext cx="5120640" cy="640080"/>
+          </a:xfrm>
+          <a:prstGeom prst="rect">
+            <a:avLst/>
+          </a:prstGeom>
+          <a:noFill/>
+        </p:spPr>
+        <p:txBody>
+          <a:bodyPr wrap="square" anchor="t">
+            <a:spAutoFit/>
+          </a:bodyPr>
+          <a:lstStyle/>
+          <a:p>
+            <a:pPr algn="l">
+              <a:spcAft>
+                <a:spcPts val="800"/>
+              </a:spcAft>
+              <a:defRPr sz="1300" b="0">
+                <a:solidFill>
+                  <a:srgbClr val="919BAF"/>
+                </a:solidFill>
+                <a:latin typeface="Calibri"/>
+              </a:defRPr>
+            </a:pPr>
+            <a:r>
+              <a:t>Офисы, бизнес-центры, порядок и безопасность</a:t>
+            </a:r>
+          </a:p>
+        </p:txBody>
+      </p:sp>
+      <p:sp>
+        <p:nvSpPr>
+          <p:cNvPr id="10" name="Rectangle 9"/>
+          <p:cNvSpPr/>
+          <p:nvPr/>
+        </p:nvSpPr>
+        <p:spPr>
+          <a:xfrm>
+            <a:off x="6400800" y="1554480"/>
+            <a:ext cx="5486400" cy="1325880"/>
+          </a:xfrm>
+          <a:prstGeom prst="rect">
+            <a:avLst/>
+          </a:prstGeom>
+          <a:solidFill>
+            <a:srgbClr val="121824"/>
+          </a:solidFill>
+          <a:ln>
+            <a:solidFill>
+              <a:srgbClr val="3C465A"/>
+            </a:solidFill>
+          </a:ln>
+        </p:spPr>
+        <p:style>
+          <a:lnRef idx="1">
+            <a:schemeClr val="accent1"/>
+          </a:lnRef>
+          <a:fillRef idx="3">
+            <a:schemeClr val="accent1"/>
+          </a:fillRef>
+          <a:effectRef idx="2">
+            <a:schemeClr val="accent1"/>
+          </a:effectRef>
+          <a:fontRef idx="minor">
+            <a:schemeClr val="lt1"/>
+          </a:fontRef>
+        </p:style>
+        <p:txBody>
+          <a:bodyPr rtlCol="0" anchor="ctr"/>
+          <a:lstStyle/>
+          <a:p>
+            <a:pPr algn="ctr"/>
+          </a:p>
+        </p:txBody>
+      </p:sp>
+      <p:sp>
+        <p:nvSpPr>
+          <p:cNvPr id="11" name="TextBox 10"/>
+          <p:cNvSpPr txBox="1"/>
+          <p:nvPr/>
+        </p:nvSpPr>
+        <p:spPr>
+          <a:xfrm>
+            <a:off x="6537960" y="1664207"/>
+            <a:ext cx="5120640" cy="411480"/>
+          </a:xfrm>
+          <a:prstGeom prst="rect">
+            <a:avLst/>
+          </a:prstGeom>
+          <a:noFill/>
+        </p:spPr>
+        <p:txBody>
+          <a:bodyPr wrap="square" anchor="t">
+            <a:spAutoFit/>
+          </a:bodyPr>
+          <a:lstStyle/>
+          <a:p>
+            <a:pPr algn="l">
+              <a:spcAft>
+                <a:spcPts val="800"/>
+              </a:spcAft>
+              <a:defRPr sz="1700" b="1">
+                <a:solidFill>
+                  <a:srgbClr val="D4AF37"/>
+                </a:solidFill>
+                <a:latin typeface="Calibri"/>
+              </a:defRPr>
+            </a:pPr>
+            <a:r>
+              <a:t>Строительные объекты</a:t>
+            </a:r>
+          </a:p>
+        </p:txBody>
+      </p:sp>
+      <p:sp>
+        <p:nvSpPr>
+          <p:cNvPr id="12" name="TextBox 11"/>
+          <p:cNvSpPr txBox="1"/>
+          <p:nvPr/>
+        </p:nvSpPr>
+        <p:spPr>
+          <a:xfrm>
+            <a:off x="6537960" y="2084831"/>
+            <a:ext cx="5120640" cy="640080"/>
+          </a:xfrm>
+          <a:prstGeom prst="rect">
+            <a:avLst/>
+          </a:prstGeom>
+          <a:noFill/>
+        </p:spPr>
+        <p:txBody>
+          <a:bodyPr wrap="square" anchor="t">
+            <a:spAutoFit/>
+          </a:bodyPr>
+          <a:lstStyle/>
+          <a:p>
+            <a:pPr algn="l">
+              <a:spcAft>
+                <a:spcPts val="800"/>
+              </a:spcAft>
+              <a:defRPr sz="1300" b="0">
+                <a:solidFill>
+                  <a:srgbClr val="919BAF"/>
+                </a:solidFill>
+                <a:latin typeface="Calibri"/>
+              </a:defRPr>
+            </a:pPr>
+            <a:r>
+              <a:t>Площадки, техника, материалы</a:t>
+            </a:r>
+          </a:p>
+        </p:txBody>
+      </p:sp>
+      <p:sp>
+        <p:nvSpPr>
+          <p:cNvPr id="13" name="Rectangle 12"/>
+          <p:cNvSpPr/>
+          <p:nvPr/>
+        </p:nvSpPr>
+        <p:spPr>
+          <a:xfrm>
+            <a:off x="640080" y="3063239"/>
+            <a:ext cx="5486400" cy="1325880"/>
+          </a:xfrm>
+          <a:prstGeom prst="rect">
+            <a:avLst/>
+          </a:prstGeom>
+          <a:solidFill>
+            <a:srgbClr val="121824"/>
+          </a:solidFill>
+          <a:ln>
+            <a:solidFill>
+              <a:srgbClr val="3C465A"/>
+            </a:solidFill>
+          </a:ln>
+        </p:spPr>
+        <p:style>
+          <a:lnRef idx="1">
+            <a:schemeClr val="accent1"/>
+          </a:lnRef>
+          <a:fillRef idx="3">
+            <a:schemeClr val="accent1"/>
+          </a:fillRef>
+          <a:effectRef idx="2">
+            <a:schemeClr val="accent1"/>
+          </a:effectRef>
+          <a:fontRef idx="minor">
+            <a:schemeClr val="lt1"/>
+          </a:fontRef>
+        </p:style>
+        <p:txBody>
+          <a:bodyPr rtlCol="0" anchor="ctr"/>
+          <a:lstStyle/>
+          <a:p>
+            <a:pPr algn="ctr"/>
+          </a:p>
+        </p:txBody>
+      </p:sp>
+      <p:sp>
+        <p:nvSpPr>
+          <p:cNvPr id="14" name="TextBox 13"/>
+          <p:cNvSpPr txBox="1"/>
+          <p:nvPr/>
+        </p:nvSpPr>
+        <p:spPr>
+          <a:xfrm>
+            <a:off x="777240" y="3172968"/>
+            <a:ext cx="5120640" cy="411480"/>
+          </a:xfrm>
+          <a:prstGeom prst="rect">
+            <a:avLst/>
+          </a:prstGeom>
+          <a:noFill/>
+        </p:spPr>
+        <p:txBody>
+          <a:bodyPr wrap="square" anchor="t">
+            <a:spAutoFit/>
+          </a:bodyPr>
+          <a:lstStyle/>
+          <a:p>
+            <a:pPr algn="l">
+              <a:spcAft>
+                <a:spcPts val="800"/>
+              </a:spcAft>
+              <a:defRPr sz="1700" b="1">
+                <a:solidFill>
+                  <a:srgbClr val="D4AF37"/>
+                </a:solidFill>
+                <a:latin typeface="Calibri"/>
+              </a:defRPr>
+            </a:pPr>
+            <a:r>
+              <a:t>Складские помещения</a:t>
+            </a:r>
+          </a:p>
+        </p:txBody>
+      </p:sp>
+      <p:sp>
+        <p:nvSpPr>
+          <p:cNvPr id="15" name="TextBox 14"/>
+          <p:cNvSpPr txBox="1"/>
+          <p:nvPr/>
+        </p:nvSpPr>
+        <p:spPr>
+          <a:xfrm>
+            <a:off x="777240" y="3593591"/>
+            <a:ext cx="5120640" cy="640080"/>
+          </a:xfrm>
+          <a:prstGeom prst="rect">
+            <a:avLst/>
+          </a:prstGeom>
+          <a:noFill/>
+        </p:spPr>
+        <p:txBody>
+          <a:bodyPr wrap="square" anchor="t">
+            <a:spAutoFit/>
+          </a:bodyPr>
+          <a:lstStyle/>
+          <a:p>
+            <a:pPr algn="l">
+              <a:spcAft>
+                <a:spcPts val="800"/>
+              </a:spcAft>
+              <a:defRPr sz="1300" b="0">
+                <a:solidFill>
+                  <a:srgbClr val="919BAF"/>
+                </a:solidFill>
+                <a:latin typeface="Calibri"/>
+              </a:defRPr>
+            </a:pPr>
+            <a:r>
+              <a:t>ТМЦ, логистика, сохранность</a:t>
+            </a:r>
+          </a:p>
+        </p:txBody>
+      </p:sp>
+      <p:sp>
+        <p:nvSpPr>
+          <p:cNvPr id="16" name="Rectangle 15"/>
+          <p:cNvSpPr/>
+          <p:nvPr/>
+        </p:nvSpPr>
+        <p:spPr>
+          <a:xfrm>
+            <a:off x="6400800" y="3063239"/>
+            <a:ext cx="5486400" cy="1325880"/>
+          </a:xfrm>
+          <a:prstGeom prst="rect">
+            <a:avLst/>
+          </a:prstGeom>
+          <a:solidFill>
+            <a:srgbClr val="121824"/>
+          </a:solidFill>
+          <a:ln>
+            <a:solidFill>
+              <a:srgbClr val="3C465A"/>
+            </a:solidFill>
+          </a:ln>
+        </p:spPr>
+        <p:style>
+          <a:lnRef idx="1">
+            <a:schemeClr val="accent1"/>
+          </a:lnRef>
+          <a:fillRef idx="3">
+            <a:schemeClr val="accent1"/>
+          </a:fillRef>
+          <a:effectRef idx="2">
+            <a:schemeClr val="accent1"/>
+          </a:effectRef>
+          <a:fontRef idx="minor">
+            <a:schemeClr val="lt1"/>
+          </a:fontRef>
+        </p:style>
+        <p:txBody>
+          <a:bodyPr rtlCol="0" anchor="ctr"/>
+          <a:lstStyle/>
+          <a:p>
+            <a:pPr algn="ctr"/>
+          </a:p>
+        </p:txBody>
+      </p:sp>
+      <p:sp>
+        <p:nvSpPr>
+          <p:cNvPr id="17" name="TextBox 16"/>
+          <p:cNvSpPr txBox="1"/>
+          <p:nvPr/>
+        </p:nvSpPr>
+        <p:spPr>
+          <a:xfrm>
+            <a:off x="6537960" y="3172968"/>
+            <a:ext cx="5120640" cy="411480"/>
+          </a:xfrm>
+          <a:prstGeom prst="rect">
+            <a:avLst/>
+          </a:prstGeom>
+          <a:noFill/>
+        </p:spPr>
+        <p:txBody>
+          <a:bodyPr wrap="square" anchor="t">
+            <a:spAutoFit/>
+          </a:bodyPr>
+          <a:lstStyle/>
+          <a:p>
+            <a:pPr algn="l">
+              <a:spcAft>
+                <a:spcPts val="800"/>
+              </a:spcAft>
+              <a:defRPr sz="1700" b="1">
+                <a:solidFill>
+                  <a:srgbClr val="D4AF37"/>
+                </a:solidFill>
+                <a:latin typeface="Calibri"/>
+              </a:defRPr>
+            </a:pPr>
+            <a:r>
+              <a:t>Пропускной режим</a:t>
+            </a:r>
+          </a:p>
+        </p:txBody>
+      </p:sp>
+      <p:sp>
+        <p:nvSpPr>
+          <p:cNvPr id="18" name="TextBox 17"/>
+          <p:cNvSpPr txBox="1"/>
+          <p:nvPr/>
+        </p:nvSpPr>
+        <p:spPr>
+          <a:xfrm>
+            <a:off x="6537960" y="3593591"/>
+            <a:ext cx="5120640" cy="640080"/>
+          </a:xfrm>
+          <a:prstGeom prst="rect">
+            <a:avLst/>
+          </a:prstGeom>
+          <a:noFill/>
+        </p:spPr>
+        <p:txBody>
+          <a:bodyPr wrap="square" anchor="t">
+            <a:spAutoFit/>
+          </a:bodyPr>
+          <a:lstStyle/>
+          <a:p>
+            <a:pPr algn="l">
+              <a:spcAft>
+                <a:spcPts val="800"/>
+              </a:spcAft>
+              <a:defRPr sz="1300" b="0">
+                <a:solidFill>
+                  <a:srgbClr val="919BAF"/>
+                </a:solidFill>
+                <a:latin typeface="Calibri"/>
+              </a:defRPr>
+            </a:pPr>
+            <a:r>
+              <a:t>КПП, контроль доступа</a:t>
+            </a:r>
+          </a:p>
+        </p:txBody>
+      </p:sp>
+      <p:sp>
+        <p:nvSpPr>
+          <p:cNvPr id="19" name="Rectangle 18"/>
+          <p:cNvSpPr/>
+          <p:nvPr/>
+        </p:nvSpPr>
+        <p:spPr>
+          <a:xfrm>
+            <a:off x="640080" y="4572000"/>
+            <a:ext cx="5486400" cy="1325880"/>
+          </a:xfrm>
+          <a:prstGeom prst="rect">
+            <a:avLst/>
+          </a:prstGeom>
+          <a:solidFill>
+            <a:srgbClr val="121824"/>
+          </a:solidFill>
+          <a:ln>
+            <a:solidFill>
+              <a:srgbClr val="3C465A"/>
+            </a:solidFill>
+          </a:ln>
+        </p:spPr>
+        <p:style>
+          <a:lnRef idx="1">
+            <a:schemeClr val="accent1"/>
+          </a:lnRef>
+          <a:fillRef idx="3">
+            <a:schemeClr val="accent1"/>
+          </a:fillRef>
+          <a:effectRef idx="2">
+            <a:schemeClr val="accent1"/>
+          </a:effectRef>
+          <a:fontRef idx="minor">
+            <a:schemeClr val="lt1"/>
+          </a:fontRef>
+        </p:style>
+        <p:txBody>
+          <a:bodyPr rtlCol="0" anchor="ctr"/>
+          <a:lstStyle/>
+          <a:p>
+            <a:pPr algn="ctr"/>
+          </a:p>
+        </p:txBody>
+      </p:sp>
+      <p:sp>
+        <p:nvSpPr>
+          <p:cNvPr id="20" name="TextBox 19"/>
+          <p:cNvSpPr txBox="1"/>
+          <p:nvPr/>
+        </p:nvSpPr>
+        <p:spPr>
+          <a:xfrm>
+            <a:off x="777240" y="4681728"/>
+            <a:ext cx="5120640" cy="411480"/>
+          </a:xfrm>
+          <a:prstGeom prst="rect">
+            <a:avLst/>
+          </a:prstGeom>
+          <a:noFill/>
+        </p:spPr>
+        <p:txBody>
+          <a:bodyPr wrap="square" anchor="t">
+            <a:spAutoFit/>
+          </a:bodyPr>
+          <a:lstStyle/>
+          <a:p>
+            <a:pPr algn="l">
+              <a:spcAft>
+                <a:spcPts val="800"/>
+              </a:spcAft>
+              <a:defRPr sz="1700" b="1">
+                <a:solidFill>
+                  <a:srgbClr val="D4AF37"/>
+                </a:solidFill>
+                <a:latin typeface="Calibri"/>
+              </a:defRPr>
+            </a:pPr>
+            <a:r>
+              <a:t>Сельхозпредприятия</a:t>
+            </a:r>
+          </a:p>
+        </p:txBody>
+      </p:sp>
+      <p:sp>
+        <p:nvSpPr>
+          <p:cNvPr id="21" name="TextBox 20"/>
+          <p:cNvSpPr txBox="1"/>
+          <p:nvPr/>
+        </p:nvSpPr>
+        <p:spPr>
+          <a:xfrm>
+            <a:off x="777240" y="5102352"/>
+            <a:ext cx="5120640" cy="640080"/>
+          </a:xfrm>
+          <a:prstGeom prst="rect">
+            <a:avLst/>
+          </a:prstGeom>
+          <a:noFill/>
+        </p:spPr>
+        <p:txBody>
+          <a:bodyPr wrap="square" anchor="t">
+            <a:spAutoFit/>
+          </a:bodyPr>
+          <a:lstStyle/>
+          <a:p>
+            <a:pPr algn="l">
+              <a:spcAft>
+                <a:spcPts val="800"/>
+              </a:spcAft>
+              <a:defRPr sz="1300" b="0">
+                <a:solidFill>
+                  <a:srgbClr val="919BAF"/>
+                </a:solidFill>
+                <a:latin typeface="Calibri"/>
+              </a:defRPr>
+            </a:pPr>
+            <a:r>
+              <a:t>Зерновые и масличные базы — ключевая специализация</a:t>
+            </a:r>
+          </a:p>
+        </p:txBody>
+      </p:sp>
+      <p:sp>
+        <p:nvSpPr>
+          <p:cNvPr id="22" name="Rectangle 21"/>
+          <p:cNvSpPr/>
+          <p:nvPr/>
+        </p:nvSpPr>
+        <p:spPr>
+          <a:xfrm>
+            <a:off x="6400800" y="4572000"/>
+            <a:ext cx="5486400" cy="1325880"/>
+          </a:xfrm>
+          <a:prstGeom prst="rect">
+            <a:avLst/>
+          </a:prstGeom>
+          <a:solidFill>
+            <a:srgbClr val="121824"/>
+          </a:solidFill>
+          <a:ln>
+            <a:solidFill>
+              <a:srgbClr val="3C465A"/>
+            </a:solidFill>
+          </a:ln>
+        </p:spPr>
+        <p:style>
+          <a:lnRef idx="1">
+            <a:schemeClr val="accent1"/>
+          </a:lnRef>
+          <a:fillRef idx="3">
+            <a:schemeClr val="accent1"/>
+          </a:fillRef>
+          <a:effectRef idx="2">
+            <a:schemeClr val="accent1"/>
+          </a:effectRef>
+          <a:fontRef idx="minor">
+            <a:schemeClr val="lt1"/>
+          </a:fontRef>
+        </p:style>
+        <p:txBody>
+          <a:bodyPr rtlCol="0" anchor="ctr"/>
+          <a:lstStyle/>
+          <a:p>
+            <a:pPr algn="ctr"/>
+          </a:p>
+        </p:txBody>
+      </p:sp>
+      <p:sp>
+        <p:nvSpPr>
+          <p:cNvPr id="23" name="TextBox 22"/>
+          <p:cNvSpPr txBox="1"/>
+          <p:nvPr/>
+        </p:nvSpPr>
+        <p:spPr>
+          <a:xfrm>
+            <a:off x="6537960" y="4681728"/>
+            <a:ext cx="5120640" cy="411480"/>
+          </a:xfrm>
+          <a:prstGeom prst="rect">
+            <a:avLst/>
+          </a:prstGeom>
+          <a:noFill/>
+        </p:spPr>
+        <p:txBody>
+          <a:bodyPr wrap="square" anchor="t">
+            <a:spAutoFit/>
+          </a:bodyPr>
+          <a:lstStyle/>
+          <a:p>
+            <a:pPr algn="l">
+              <a:spcAft>
+                <a:spcPts val="800"/>
+              </a:spcAft>
+              <a:defRPr sz="1700" b="1">
+                <a:solidFill>
+                  <a:srgbClr val="D4AF37"/>
+                </a:solidFill>
+                <a:latin typeface="Calibri"/>
+              </a:defRPr>
+            </a:pPr>
+            <a:r>
+              <a:t>Анализ угроз</a:t>
+            </a:r>
+          </a:p>
+        </p:txBody>
+      </p:sp>
+      <p:sp>
+        <p:nvSpPr>
+          <p:cNvPr id="24" name="TextBox 23"/>
+          <p:cNvSpPr txBox="1"/>
+          <p:nvPr/>
+        </p:nvSpPr>
+        <p:spPr>
+          <a:xfrm>
+            <a:off x="6537960" y="5102352"/>
+            <a:ext cx="5120640" cy="640080"/>
+          </a:xfrm>
+          <a:prstGeom prst="rect">
+            <a:avLst/>
+          </a:prstGeom>
+          <a:noFill/>
+        </p:spPr>
+        <p:txBody>
+          <a:bodyPr wrap="square" anchor="t">
+            <a:spAutoFit/>
+          </a:bodyPr>
+          <a:lstStyle/>
+          <a:p>
+            <a:pPr algn="l">
+              <a:spcAft>
+                <a:spcPts val="800"/>
+              </a:spcAft>
+              <a:defRPr sz="1300" b="0">
+                <a:solidFill>
+                  <a:srgbClr val="919BAF"/>
+                </a:solidFill>
+                <a:latin typeface="Calibri"/>
+              </a:defRPr>
+            </a:pPr>
+            <a:r>
+              <a:t>Экспертная оценка и система охраны</a:t>
+            </a:r>
+          </a:p>
+        </p:txBody>
+      </p:sp>
+    </p:spTree>
+  </p:cSld>
+  <p:clrMapOvr>
+    <a:masterClrMapping/>
+  </p:clrMapOvr>
+  <p:transition spd="med" advClick="1">
+    <p:fadeThroughBlack/>
+  </p:transition>
+</p:sld>
+</file>
+
+<file path=ppt/slides/slide6.xml><?xml version="1.0" encoding="utf-8"?>
+<p:sld xmlns:a="http://schemas.openxmlformats.org/drawingml/2006/main" xmlns:p="http://schemas.openxmlformats.org/presentationml/2006/main" xmlns:r="http://schemas.openxmlformats.org/officeDocument/2006/relationships">
+  <p:cSld>
+    <p:spTree>
+      <p:nvGrpSpPr>
+        <p:cNvPr id="1" name=""/>
+        <p:cNvGrpSpPr/>
+        <p:nvPr/>
+      </p:nvGrpSpPr>
+      <p:grpSpPr/>
+      <p:pic>
+        <p:nvPicPr>
+          <p:cNvPr id="2" name="Picture 1" descr="bg-section.png"/>
+          <p:cNvPicPr>
+            <a:picLocks noChangeAspect="1"/>
+          </p:cNvPicPr>
+          <p:nvPr/>
+        </p:nvPicPr>
+        <p:blipFill>
+          <a:blip r:embed="rId2"/>
+          <a:stretch>
+            <a:fillRect/>
+          </a:stretch>
+        </p:blipFill>
+        <p:spPr>
+          <a:xfrm>
+            <a:off x="0" y="0"/>
+            <a:ext cx="12191695" cy="6858000"/>
+          </a:xfrm>
+          <a:prstGeom prst="rect">
+            <a:avLst/>
+          </a:prstGeom>
+        </p:spPr>
+      </p:pic>
+      <p:sp>
+        <p:nvSpPr>
+          <p:cNvPr id="3" name="TextBox 2"/>
+          <p:cNvSpPr txBox="1"/>
+          <p:nvPr/>
+        </p:nvSpPr>
+        <p:spPr>
+          <a:xfrm>
+            <a:off x="731520" y="2011680"/>
+            <a:ext cx="2743200" cy="1371600"/>
+          </a:xfrm>
+          <a:prstGeom prst="rect">
+            <a:avLst/>
+          </a:prstGeom>
+          <a:noFill/>
+        </p:spPr>
+        <p:txBody>
+          <a:bodyPr wrap="square" anchor="t">
+            <a:spAutoFit/>
+          </a:bodyPr>
+          <a:lstStyle/>
+          <a:p>
+            <a:pPr algn="l">
+              <a:spcAft>
+                <a:spcPts val="1400"/>
+              </a:spcAft>
+              <a:defRPr sz="12000" b="0">
+                <a:solidFill>
+                  <a:srgbClr val="D4AF37"/>
+                </a:solidFill>
+                <a:latin typeface="Calibri"/>
+              </a:defRPr>
+            </a:pPr>
+            <a:r>
+              <a:t>03</a:t>
+            </a:r>
+          </a:p>
+        </p:txBody>
+      </p:sp>
+      <p:sp>
+        <p:nvSpPr>
+          <p:cNvPr id="4" name="TextBox 3"/>
+          <p:cNvSpPr txBox="1"/>
+          <p:nvPr/>
+        </p:nvSpPr>
+        <p:spPr>
+          <a:xfrm>
+            <a:off x="731520" y="3657600"/>
+            <a:ext cx="10058400" cy="1097280"/>
+          </a:xfrm>
+          <a:prstGeom prst="rect">
+            <a:avLst/>
+          </a:prstGeom>
+          <a:noFill/>
+        </p:spPr>
+        <p:txBody>
+          <a:bodyPr wrap="square" anchor="t">
+            <a:spAutoFit/>
+          </a:bodyPr>
+          <a:lstStyle/>
+          <a:p>
+            <a:pPr algn="l">
+              <a:spcAft>
+                <a:spcPts val="1400"/>
+              </a:spcAft>
+              <a:defRPr sz="5400" b="1">
+                <a:solidFill>
+                  <a:srgbClr val="F5F7FA"/>
+                </a:solidFill>
+                <a:latin typeface="Calibri"/>
+              </a:defRPr>
+            </a:pPr>
+            <a:r>
+              <a:t>Сайт gurza36.ru</a:t>
+            </a:r>
+          </a:p>
+        </p:txBody>
+      </p:sp>
+      <p:sp>
+        <p:nvSpPr>
+          <p:cNvPr id="5" name="TextBox 4"/>
+          <p:cNvSpPr txBox="1"/>
+          <p:nvPr/>
+        </p:nvSpPr>
+        <p:spPr>
+          <a:xfrm>
+            <a:off x="749808" y="4754880"/>
+            <a:ext cx="9144000" cy="731520"/>
+          </a:xfrm>
+          <a:prstGeom prst="rect">
+            <a:avLst/>
+          </a:prstGeom>
+          <a:noFill/>
+        </p:spPr>
+        <p:txBody>
+          <a:bodyPr wrap="square" anchor="t">
+            <a:spAutoFit/>
+          </a:bodyPr>
+          <a:lstStyle/>
+          <a:p>
+            <a:pPr algn="l">
+              <a:spcAft>
+                <a:spcPts val="800"/>
+              </a:spcAft>
+              <a:defRPr sz="2200" b="0">
+                <a:solidFill>
+                  <a:srgbClr val="919BAF"/>
+                </a:solidFill>
+                <a:latin typeface="Calibri"/>
+              </a:defRPr>
+            </a:pPr>
+            <a:r>
+              <a:t>Дизайн, технологии, скриншоты</a:t>
+            </a:r>
+          </a:p>
+        </p:txBody>
+      </p:sp>
+      <p:sp>
+        <p:nvSpPr>
+          <p:cNvPr id="6" name="TextBox 5"/>
+          <p:cNvSpPr txBox="1"/>
+          <p:nvPr/>
+        </p:nvSpPr>
+        <p:spPr>
+          <a:xfrm>
+            <a:off x="731520" y="6217920"/>
+            <a:ext cx="7315200" cy="365760"/>
+          </a:xfrm>
+          <a:prstGeom prst="rect">
+            <a:avLst/>
+          </a:prstGeom>
+          <a:noFill/>
+        </p:spPr>
+        <p:txBody>
+          <a:bodyPr wrap="square" anchor="t">
+            <a:spAutoFit/>
+          </a:bodyPr>
+          <a:lstStyle/>
+          <a:p>
+            <a:pPr algn="l">
+              <a:spcAft>
+                <a:spcPts val="800"/>
+              </a:spcAft>
+              <a:defRPr sz="1400" b="0">
+                <a:solidFill>
+                  <a:srgbClr val="919BAF"/>
+                </a:solidFill>
+                <a:latin typeface="Calibri"/>
+              </a:defRPr>
+            </a:pPr>
+            <a:r>
+              <a:t>Воронеж · 2026</a:t>
+            </a:r>
+          </a:p>
+        </p:txBody>
+      </p:sp>
+    </p:spTree>
+  </p:cSld>
+  <p:clrMapOvr>
+    <a:masterClrMapping/>
+  </p:clrMapOvr>
+  <p:transition spd="med" advClick="1">
+    <p:push dir="l"/>
+  </p:transition>
+</p:sld>
+</file>
+
+<file path=ppt/slides/slide7.xml><?xml version="1.0" encoding="utf-8"?>
+<p:sld xmlns:a="http://schemas.openxmlformats.org/drawingml/2006/main" xmlns:p="http://schemas.openxmlformats.org/presentationml/2006/main" xmlns:r="http://schemas.openxmlformats.org/officeDocument/2006/relationships">
+  <p:cSld>
+    <p:spTree>
+      <p:nvGrpSpPr>
+        <p:cNvPr id="1" name=""/>
+        <p:cNvGrpSpPr/>
+        <p:nvPr/>
+      </p:nvGrpSpPr>
+      <p:grpSpPr/>
+      <p:pic>
+        <p:nvPicPr>
+          <p:cNvPr id="2" name="Picture 1" descr="bg-dark.png"/>
+          <p:cNvPicPr>
+            <a:picLocks noChangeAspect="1"/>
+          </p:cNvPicPr>
+          <p:nvPr/>
+        </p:nvPicPr>
+        <p:blipFill>
+          <a:blip r:embed="rId2"/>
+          <a:stretch>
+            <a:fillRect/>
+          </a:stretch>
+        </p:blipFill>
+        <p:spPr>
+          <a:xfrm>
+            <a:off x="0" y="0"/>
+            <a:ext cx="12191695" cy="6858000"/>
+          </a:xfrm>
+          <a:prstGeom prst="rect">
+            <a:avLst/>
+          </a:prstGeom>
+        </p:spPr>
+      </p:pic>
+      <p:sp>
+        <p:nvSpPr>
+          <p:cNvPr id="3" name="TextBox 2"/>
+          <p:cNvSpPr txBox="1"/>
+          <p:nvPr/>
+        </p:nvSpPr>
+        <p:spPr>
+          <a:xfrm>
+            <a:off x="502920" y="320040"/>
+            <a:ext cx="3657600" cy="274320"/>
+          </a:xfrm>
+          <a:prstGeom prst="rect">
+            <a:avLst/>
+          </a:prstGeom>
+          <a:noFill/>
+        </p:spPr>
+        <p:txBody>
+          <a:bodyPr wrap="square" anchor="t">
+            <a:spAutoFit/>
+          </a:bodyPr>
+          <a:lstStyle/>
+          <a:p>
+            <a:pPr algn="l">
+              <a:spcAft>
+                <a:spcPts val="800"/>
+              </a:spcAft>
+              <a:defRPr sz="1100" b="1">
+                <a:solidFill>
+                  <a:srgbClr val="D4AF37"/>
+                </a:solidFill>
+                <a:latin typeface="Calibri"/>
+              </a:defRPr>
+            </a:pPr>
+            <a:r>
+              <a:t>ЧОО «ГЮРЗА»</a:t>
+            </a:r>
+          </a:p>
+        </p:txBody>
+      </p:sp>
+      <p:sp>
+        <p:nvSpPr>
+          <p:cNvPr id="4" name="TextBox 3"/>
+          <p:cNvSpPr txBox="1"/>
+          <p:nvPr/>
+        </p:nvSpPr>
+        <p:spPr>
+          <a:xfrm>
+            <a:off x="8961120" y="320040"/>
+            <a:ext cx="2743200" cy="274320"/>
+          </a:xfrm>
+          <a:prstGeom prst="rect">
+            <a:avLst/>
+          </a:prstGeom>
+          <a:noFill/>
+        </p:spPr>
+        <p:txBody>
+          <a:bodyPr wrap="square" anchor="t">
+            <a:spAutoFit/>
+          </a:bodyPr>
+          <a:lstStyle/>
+          <a:p>
+            <a:pPr algn="r">
+              <a:spcAft>
+                <a:spcPts val="800"/>
+              </a:spcAft>
+              <a:defRPr sz="1100" b="1">
+                <a:solidFill>
+                  <a:srgbClr val="D4AF37"/>
+                </a:solidFill>
+                <a:latin typeface="Calibri"/>
+              </a:defRPr>
+            </a:pPr>
+            <a:r>
+              <a:t>gurza36.ru</a:t>
+            </a:r>
+          </a:p>
+        </p:txBody>
+      </p:sp>
+      <p:sp>
+        <p:nvSpPr>
+          <p:cNvPr id="5" name="Rectangle 4"/>
+          <p:cNvSpPr/>
+          <p:nvPr/>
+        </p:nvSpPr>
+        <p:spPr>
+          <a:xfrm>
+            <a:off x="502920" y="658368"/>
+            <a:ext cx="11155680" cy="0"/>
+          </a:xfrm>
+          <a:prstGeom prst="rect">
+            <a:avLst/>
+          </a:prstGeom>
+          <a:ln w="9525">
+            <a:solidFill>
+              <a:srgbClr val="D4AF37"/>
+            </a:solidFill>
+          </a:ln>
+        </p:spPr>
+        <p:style>
+          <a:lnRef idx="1">
+            <a:schemeClr val="accent1"/>
+          </a:lnRef>
+          <a:fillRef idx="3">
+            <a:schemeClr val="accent1"/>
+          </a:fillRef>
+          <a:effectRef idx="2">
+            <a:schemeClr val="accent1"/>
+          </a:effectRef>
+          <a:fontRef idx="minor">
+            <a:schemeClr val="lt1"/>
+          </a:fontRef>
+        </p:style>
+        <p:txBody>
+          <a:bodyPr rtlCol="0" anchor="ctr"/>
+          <a:lstStyle/>
+          <a:p>
+            <a:pPr algn="ctr"/>
+          </a:p>
+        </p:txBody>
+      </p:sp>
+      <p:sp>
+        <p:nvSpPr>
+          <p:cNvPr id="6" name="TextBox 5"/>
+          <p:cNvSpPr txBox="1"/>
+          <p:nvPr/>
+        </p:nvSpPr>
+        <p:spPr>
+          <a:xfrm>
+            <a:off x="640080" y="868680"/>
+            <a:ext cx="9144000" cy="548640"/>
+          </a:xfrm>
+          <a:prstGeom prst="rect">
+            <a:avLst/>
+          </a:prstGeom>
+          <a:noFill/>
+        </p:spPr>
+        <p:txBody>
+          <a:bodyPr wrap="square" anchor="t">
+            <a:spAutoFit/>
+          </a:bodyPr>
+          <a:lstStyle/>
+          <a:p>
+            <a:pPr algn="l">
+              <a:spcAft>
+                <a:spcPts val="1400"/>
+              </a:spcAft>
+              <a:defRPr sz="3200" b="1">
+                <a:solidFill>
+                  <a:srgbClr val="D4AF37"/>
+                </a:solidFill>
+                <a:latin typeface="Calibri"/>
+              </a:defRPr>
+            </a:pPr>
+            <a:r>
+              <a:t>Главная страница</a:t>
+            </a:r>
+          </a:p>
+        </p:txBody>
+      </p:sp>
+      <p:sp>
+        <p:nvSpPr>
+          <p:cNvPr id="7" name="TextBox 6"/>
+          <p:cNvSpPr txBox="1"/>
+          <p:nvPr/>
+        </p:nvSpPr>
+        <p:spPr>
+          <a:xfrm>
+            <a:off x="640080" y="1325880"/>
+            <a:ext cx="9144000" cy="365760"/>
+          </a:xfrm>
+          <a:prstGeom prst="rect">
+            <a:avLst/>
+          </a:prstGeom>
+          <a:noFill/>
+        </p:spPr>
+        <p:txBody>
+          <a:bodyPr wrap="square" anchor="t">
+            <a:spAutoFit/>
+          </a:bodyPr>
+          <a:lstStyle/>
+          <a:p>
+            <a:pPr algn="l">
+              <a:spcAft>
+                <a:spcPts val="800"/>
+              </a:spcAft>
+              <a:defRPr sz="1600" b="0">
+                <a:solidFill>
+                  <a:srgbClr val="919BAF"/>
+                </a:solidFill>
+                <a:latin typeface="Calibri"/>
+              </a:defRPr>
+            </a:pPr>
+            <a:r>
+              <a:t>3D-соты · золотой брендинг · CTA</a:t>
+            </a:r>
+          </a:p>
+        </p:txBody>
+      </p:sp>
+      <p:pic>
+        <p:nvPicPr>
+          <p:cNvPr id="8" name="Picture 7" descr="01-main.png"/>
           <p:cNvPicPr>
             <a:picLocks noChangeAspect="1"/>
           </p:cNvPicPr>
@@ -4775,8 +8868,8 @@
         </p:blipFill>
         <p:spPr>
           <a:xfrm>
-            <a:off x="5303520" y="1371600"/>
-            <a:ext cx="6217920" cy="3886200"/>
+            <a:off x="411480" y="1691640"/>
+            <a:ext cx="11338560" cy="7086600"/>
           </a:xfrm>
           <a:prstGeom prst="rect">
             <a:avLst/>
@@ -4785,69 +8878,44 @@
       </p:pic>
       <p:sp>
         <p:nvSpPr>
-          <p:cNvPr id="7" name="TextBox 6"/>
-          <p:cNvSpPr txBox="1"/>
-          <p:nvPr/>
-        </p:nvSpPr>
-        <p:spPr>
-          <a:xfrm>
-            <a:off x="914400" y="5303520"/>
-            <a:ext cx="10058400" cy="4114800"/>
-          </a:xfrm>
-          <a:prstGeom prst="rect">
-            <a:avLst/>
-          </a:prstGeom>
-          <a:noFill/>
-        </p:spPr>
-        <p:txBody>
-          <a:bodyPr wrap="square">
-            <a:spAutoFit/>
-          </a:bodyPr>
-          <a:lstStyle/>
-          <a:p>
-            <a:pPr>
-              <a:spcAft>
-                <a:spcPts val="1000"/>
-              </a:spcAft>
-              <a:defRPr sz="1600">
-                <a:solidFill>
-                  <a:srgbClr val="EEF1F6"/>
-                </a:solidFill>
-              </a:defRPr>
-            </a:pPr>
-            <a:r>
-              <a:t>Золотая сота + змея-гюрза — символ контроля и реакции</a:t>
-            </a:r>
-          </a:p>
-          <a:p>
-            <a:pPr>
-              <a:spcAft>
-                <a:spcPts val="1000"/>
-              </a:spcAft>
-              <a:defRPr sz="1600">
-                <a:solidFill>
-                  <a:srgbClr val="EEF1F6"/>
-                </a:solidFill>
-              </a:defRPr>
-            </a:pPr>
-            <a:r>
-              <a:t>Тёмная премиальная палитра — выделяет среди конкурентов</a:t>
-            </a:r>
-          </a:p>
-          <a:p>
-            <a:pPr>
-              <a:spcAft>
-                <a:spcPts val="1000"/>
-              </a:spcAft>
-              <a:defRPr sz="1600">
-                <a:solidFill>
-                  <a:srgbClr val="EEF1F6"/>
-                </a:solidFill>
-              </a:defRPr>
-            </a:pPr>
-            <a:r>
-              <a:t>3D-соты, анимации, адаптив под мобильные</a:t>
-            </a:r>
+          <p:cNvPr id="9" name="Rectangle 8"/>
+          <p:cNvSpPr/>
+          <p:nvPr/>
+        </p:nvSpPr>
+        <p:spPr>
+          <a:xfrm>
+            <a:off x="411480" y="1691640"/>
+            <a:ext cx="11338560" cy="4709160"/>
+          </a:xfrm>
+          <a:prstGeom prst="rect">
+            <a:avLst/>
+          </a:prstGeom>
+          <a:noFill/>
+          <a:ln w="15875">
+            <a:solidFill>
+              <a:srgbClr val="D4AF37"/>
+            </a:solidFill>
+          </a:ln>
+        </p:spPr>
+        <p:style>
+          <a:lnRef idx="1">
+            <a:schemeClr val="accent1"/>
+          </a:lnRef>
+          <a:fillRef idx="3">
+            <a:schemeClr val="accent1"/>
+          </a:fillRef>
+          <a:effectRef idx="2">
+            <a:schemeClr val="accent1"/>
+          </a:effectRef>
+          <a:fontRef idx="minor">
+            <a:schemeClr val="lt1"/>
+          </a:fontRef>
+        </p:style>
+        <p:txBody>
+          <a:bodyPr rtlCol="0" anchor="ctr"/>
+          <a:lstStyle/>
+          <a:p>
+            <a:pPr algn="ctr"/>
           </a:p>
         </p:txBody>
       </p:sp>
@@ -4856,20 +8924,15 @@
   <p:clrMapOvr>
     <a:masterClrMapping/>
   </p:clrMapOvr>
+  <p:transition spd="med" advClick="1">
+    <p:push dir="l"/>
+  </p:transition>
 </p:sld>
 </file>
 
-<file path=ppt/slides/slide9.xml><?xml version="1.0" encoding="utf-8"?>
+<file path=ppt/slides/slide8.xml><?xml version="1.0" encoding="utf-8"?>
 <p:sld xmlns:a="http://schemas.openxmlformats.org/drawingml/2006/main" xmlns:p="http://schemas.openxmlformats.org/presentationml/2006/main" xmlns:r="http://schemas.openxmlformats.org/officeDocument/2006/relationships">
   <p:cSld>
-    <p:bg>
-      <p:bgPr>
-        <a:solidFill>
-          <a:srgbClr val="0C1018"/>
-        </a:solidFill>
-        <a:effectLst/>
-      </p:bgPr>
-    </p:bg>
     <p:spTree>
       <p:nvGrpSpPr>
         <p:cNvPr id="1" name=""/>
@@ -4877,206 +8940,292 @@
         <p:nvPr/>
       </p:nvGrpSpPr>
       <p:grpSpPr/>
-      <p:sp>
-        <p:nvSpPr>
-          <p:cNvPr id="2" name="TextBox 1"/>
+      <p:pic>
+        <p:nvPicPr>
+          <p:cNvPr id="2" name="Picture 1" descr="bg-dark.png"/>
+          <p:cNvPicPr>
+            <a:picLocks noChangeAspect="1"/>
+          </p:cNvPicPr>
+          <p:nvPr/>
+        </p:nvPicPr>
+        <p:blipFill>
+          <a:blip r:embed="rId2"/>
+          <a:stretch>
+            <a:fillRect/>
+          </a:stretch>
+        </p:blipFill>
+        <p:spPr>
+          <a:xfrm>
+            <a:off x="0" y="0"/>
+            <a:ext cx="12191695" cy="6858000"/>
+          </a:xfrm>
+          <a:prstGeom prst="rect">
+            <a:avLst/>
+          </a:prstGeom>
+        </p:spPr>
+      </p:pic>
+      <p:sp>
+        <p:nvSpPr>
+          <p:cNvPr id="3" name="TextBox 2"/>
           <p:cNvSpPr txBox="1"/>
           <p:nvPr/>
         </p:nvSpPr>
         <p:spPr>
           <a:xfrm>
-            <a:off x="9601200" y="320040"/>
-            <a:ext cx="2286000" cy="274320"/>
-          </a:xfrm>
-          <a:prstGeom prst="rect">
-            <a:avLst/>
-          </a:prstGeom>
-          <a:noFill/>
-        </p:spPr>
-        <p:txBody>
-          <a:bodyPr wrap="none">
+            <a:off x="502920" y="320040"/>
+            <a:ext cx="3657600" cy="274320"/>
+          </a:xfrm>
+          <a:prstGeom prst="rect">
+            <a:avLst/>
+          </a:prstGeom>
+          <a:noFill/>
+        </p:spPr>
+        <p:txBody>
+          <a:bodyPr wrap="square" anchor="t">
             <a:spAutoFit/>
           </a:bodyPr>
           <a:lstStyle/>
           <a:p>
-            <a:pPr algn="r">
-              <a:defRPr sz="1200">
+            <a:pPr algn="l">
+              <a:spcAft>
+                <a:spcPts val="800"/>
+              </a:spcAft>
+              <a:defRPr sz="1100" b="1">
                 <a:solidFill>
                   <a:srgbClr val="D4AF37"/>
                 </a:solidFill>
-              </a:defRPr>
-            </a:pPr>
-            <a:r>
-              <a:t>gurza36.ru</a:t>
-            </a:r>
-          </a:p>
-        </p:txBody>
-      </p:sp>
-      <p:sp>
-        <p:nvSpPr>
-          <p:cNvPr id="3" name="TextBox 2"/>
+                <a:latin typeface="Calibri"/>
+              </a:defRPr>
+            </a:pPr>
+            <a:r>
+              <a:t>ЧОО «ГЮРЗА»</a:t>
+            </a:r>
+          </a:p>
+        </p:txBody>
+      </p:sp>
+      <p:sp>
+        <p:nvSpPr>
+          <p:cNvPr id="4" name="TextBox 3"/>
           <p:cNvSpPr txBox="1"/>
           <p:nvPr/>
         </p:nvSpPr>
         <p:spPr>
           <a:xfrm>
-            <a:off x="640080" y="548640"/>
-            <a:ext cx="10972800" cy="365760"/>
-          </a:xfrm>
-          <a:prstGeom prst="rect">
-            <a:avLst/>
-          </a:prstGeom>
-          <a:noFill/>
-        </p:spPr>
-        <p:txBody>
-          <a:bodyPr wrap="none">
+            <a:off x="8961120" y="320040"/>
+            <a:ext cx="2743200" cy="274320"/>
+          </a:xfrm>
+          <a:prstGeom prst="rect">
+            <a:avLst/>
+          </a:prstGeom>
+          <a:noFill/>
+        </p:spPr>
+        <p:txBody>
+          <a:bodyPr wrap="square" anchor="t">
             <a:spAutoFit/>
           </a:bodyPr>
           <a:lstStyle/>
           <a:p>
-            <a:pPr>
-              <a:defRPr sz="1400" b="1">
+            <a:pPr algn="r">
+              <a:spcAft>
+                <a:spcPts val="800"/>
+              </a:spcAft>
+              <a:defRPr sz="1100" b="1">
                 <a:solidFill>
                   <a:srgbClr val="D4AF37"/>
                 </a:solidFill>
-              </a:defRPr>
-            </a:pPr>
-            <a:r>
-              <a:t>ПОТЕНЦИАЛ</a:t>
-            </a:r>
-          </a:p>
-        </p:txBody>
-      </p:sp>
-      <p:sp>
-        <p:nvSpPr>
-          <p:cNvPr id="4" name="TextBox 3"/>
+                <a:latin typeface="Calibri"/>
+              </a:defRPr>
+            </a:pPr>
+            <a:r>
+              <a:t>gurza36.ru</a:t>
+            </a:r>
+          </a:p>
+        </p:txBody>
+      </p:sp>
+      <p:sp>
+        <p:nvSpPr>
+          <p:cNvPr id="5" name="Rectangle 4"/>
+          <p:cNvSpPr/>
+          <p:nvPr/>
+        </p:nvSpPr>
+        <p:spPr>
+          <a:xfrm>
+            <a:off x="502920" y="658368"/>
+            <a:ext cx="11155680" cy="0"/>
+          </a:xfrm>
+          <a:prstGeom prst="rect">
+            <a:avLst/>
+          </a:prstGeom>
+          <a:ln w="9525">
+            <a:solidFill>
+              <a:srgbClr val="D4AF37"/>
+            </a:solidFill>
+          </a:ln>
+        </p:spPr>
+        <p:style>
+          <a:lnRef idx="1">
+            <a:schemeClr val="accent1"/>
+          </a:lnRef>
+          <a:fillRef idx="3">
+            <a:schemeClr val="accent1"/>
+          </a:fillRef>
+          <a:effectRef idx="2">
+            <a:schemeClr val="accent1"/>
+          </a:effectRef>
+          <a:fontRef idx="minor">
+            <a:schemeClr val="lt1"/>
+          </a:fontRef>
+        </p:style>
+        <p:txBody>
+          <a:bodyPr rtlCol="0" anchor="ctr"/>
+          <a:lstStyle/>
+          <a:p>
+            <a:pPr algn="ctr"/>
+          </a:p>
+        </p:txBody>
+      </p:sp>
+      <p:sp>
+        <p:nvSpPr>
+          <p:cNvPr id="6" name="TextBox 5"/>
           <p:cNvSpPr txBox="1"/>
           <p:nvPr/>
         </p:nvSpPr>
         <p:spPr>
           <a:xfrm>
-            <a:off x="640080" y="960120"/>
-            <a:ext cx="10972800" cy="1097280"/>
-          </a:xfrm>
-          <a:prstGeom prst="rect">
-            <a:avLst/>
-          </a:prstGeom>
-          <a:noFill/>
-        </p:spPr>
-        <p:txBody>
-          <a:bodyPr wrap="none">
+            <a:off x="640080" y="868680"/>
+            <a:ext cx="9144000" cy="548640"/>
+          </a:xfrm>
+          <a:prstGeom prst="rect">
+            <a:avLst/>
+          </a:prstGeom>
+          <a:noFill/>
+        </p:spPr>
+        <p:txBody>
+          <a:bodyPr wrap="square" anchor="t">
             <a:spAutoFit/>
           </a:bodyPr>
           <a:lstStyle/>
           <a:p>
-            <a:pPr>
-              <a:defRPr sz="4000" b="1">
-                <a:solidFill>
-                  <a:srgbClr val="EEF1F6"/>
-                </a:solidFill>
-              </a:defRPr>
-            </a:pPr>
-            <a:r>
-              <a:t>Куда может вырасти</a:t>
-            </a:r>
-          </a:p>
-        </p:txBody>
-      </p:sp>
-      <p:sp>
-        <p:nvSpPr>
-          <p:cNvPr id="5" name="TextBox 4"/>
+            <a:pPr algn="l">
+              <a:spcAft>
+                <a:spcPts val="1400"/>
+              </a:spcAft>
+              <a:defRPr sz="3200" b="1">
+                <a:solidFill>
+                  <a:srgbClr val="D4AF37"/>
+                </a:solidFill>
+                <a:latin typeface="Calibri"/>
+              </a:defRPr>
+            </a:pPr>
+            <a:r>
+              <a:t>О компании</a:t>
+            </a:r>
+          </a:p>
+        </p:txBody>
+      </p:sp>
+      <p:sp>
+        <p:nvSpPr>
+          <p:cNvPr id="7" name="TextBox 6"/>
           <p:cNvSpPr txBox="1"/>
           <p:nvPr/>
         </p:nvSpPr>
         <p:spPr>
           <a:xfrm>
-            <a:off x="640080" y="1645920"/>
-            <a:ext cx="10515600" cy="4114800"/>
-          </a:xfrm>
-          <a:prstGeom prst="rect">
-            <a:avLst/>
-          </a:prstGeom>
-          <a:noFill/>
-        </p:spPr>
-        <p:txBody>
-          <a:bodyPr wrap="square">
+            <a:off x="640080" y="1325880"/>
+            <a:ext cx="9144000" cy="365760"/>
+          </a:xfrm>
+          <a:prstGeom prst="rect">
+            <a:avLst/>
+          </a:prstGeom>
+          <a:noFill/>
+        </p:spPr>
+        <p:txBody>
+          <a:bodyPr wrap="square" anchor="t">
             <a:spAutoFit/>
           </a:bodyPr>
           <a:lstStyle/>
           <a:p>
-            <a:pPr>
-              <a:spcAft>
-                <a:spcPts val="1000"/>
-              </a:spcAft>
-              <a:defRPr sz="1800">
-                <a:solidFill>
-                  <a:srgbClr val="EEF1F6"/>
-                </a:solidFill>
-              </a:defRPr>
-            </a:pPr>
-            <a:r>
-              <a:t>1–2 мес: индексация по бренду «Гюрза» в Яндексе и Google</a:t>
-            </a:r>
-          </a:p>
-          <a:p>
-            <a:pPr>
-              <a:spcAft>
-                <a:spcPts val="1000"/>
-              </a:spcAft>
-              <a:defRPr sz="1800">
-                <a:solidFill>
-                  <a:srgbClr val="EEF1F6"/>
-                </a:solidFill>
-              </a:defRPr>
-            </a:pPr>
-            <a:r>
-              <a:t>3–6 мес: запросы «охрана воронеж», «чоо воронеж»</a:t>
-            </a:r>
-          </a:p>
-          <a:p>
-            <a:pPr>
-              <a:spcAft>
-                <a:spcPts val="1000"/>
-              </a:spcAft>
-              <a:defRPr sz="1800">
-                <a:solidFill>
-                  <a:srgbClr val="EEF1F6"/>
-                </a:solidFill>
-              </a:defRPr>
-            </a:pPr>
-            <a:r>
-              <a:t>Заявки 24/7 без участия менеджера</a:t>
-            </a:r>
-          </a:p>
-          <a:p>
-            <a:pPr>
-              <a:spcAft>
-                <a:spcPts val="1000"/>
-              </a:spcAft>
-              <a:defRPr sz="1800">
-                <a:solidFill>
-                  <a:srgbClr val="EEF1F6"/>
-                </a:solidFill>
-              </a:defRPr>
-            </a:pPr>
-            <a:r>
-              <a:t>B2B: КП, тендеры, обзвон по базе Excel (125+ компаний)</a:t>
-            </a:r>
-          </a:p>
-          <a:p>
-            <a:pPr>
-              <a:spcAft>
-                <a:spcPts val="1000"/>
-              </a:spcAft>
-              <a:defRPr sz="1800">
-                <a:solidFill>
-                  <a:srgbClr val="EEF1F6"/>
-                </a:solidFill>
-              </a:defRPr>
-            </a:pPr>
-            <a:r>
-              <a:t>Яндекс.Бизнес + 2ГИС + отзывы = локальный топ</a:t>
-            </a:r>
+            <a:pPr algn="l">
+              <a:spcAft>
+                <a:spcPts val="800"/>
+              </a:spcAft>
+              <a:defRPr sz="1600" b="0">
+                <a:solidFill>
+                  <a:srgbClr val="919BAF"/>
+                </a:solidFill>
+                <a:latin typeface="Calibri"/>
+              </a:defRPr>
+            </a:pPr>
+            <a:r>
+              <a:t>История · доверие · специализация на агро</a:t>
+            </a:r>
+          </a:p>
+        </p:txBody>
+      </p:sp>
+      <p:pic>
+        <p:nvPicPr>
+          <p:cNvPr id="8" name="Picture 7" descr="02-about.png"/>
+          <p:cNvPicPr>
+            <a:picLocks noChangeAspect="1"/>
+          </p:cNvPicPr>
+          <p:nvPr/>
+        </p:nvPicPr>
+        <p:blipFill>
+          <a:blip r:embed="rId3"/>
+          <a:stretch>
+            <a:fillRect/>
+          </a:stretch>
+        </p:blipFill>
+        <p:spPr>
+          <a:xfrm>
+            <a:off x="411480" y="1691640"/>
+            <a:ext cx="11338560" cy="7086600"/>
+          </a:xfrm>
+          <a:prstGeom prst="rect">
+            <a:avLst/>
+          </a:prstGeom>
+        </p:spPr>
+      </p:pic>
+      <p:sp>
+        <p:nvSpPr>
+          <p:cNvPr id="9" name="Rectangle 8"/>
+          <p:cNvSpPr/>
+          <p:nvPr/>
+        </p:nvSpPr>
+        <p:spPr>
+          <a:xfrm>
+            <a:off x="411480" y="1691640"/>
+            <a:ext cx="11338560" cy="4709160"/>
+          </a:xfrm>
+          <a:prstGeom prst="rect">
+            <a:avLst/>
+          </a:prstGeom>
+          <a:noFill/>
+          <a:ln w="15875">
+            <a:solidFill>
+              <a:srgbClr val="D4AF37"/>
+            </a:solidFill>
+          </a:ln>
+        </p:spPr>
+        <p:style>
+          <a:lnRef idx="1">
+            <a:schemeClr val="accent1"/>
+          </a:lnRef>
+          <a:fillRef idx="3">
+            <a:schemeClr val="accent1"/>
+          </a:fillRef>
+          <a:effectRef idx="2">
+            <a:schemeClr val="accent1"/>
+          </a:effectRef>
+          <a:fontRef idx="minor">
+            <a:schemeClr val="lt1"/>
+          </a:fontRef>
+        </p:style>
+        <p:txBody>
+          <a:bodyPr rtlCol="0" anchor="ctr"/>
+          <a:lstStyle/>
+          <a:p>
+            <a:pPr algn="ctr"/>
           </a:p>
         </p:txBody>
       </p:sp>
@@ -5085,6 +9234,319 @@
   <p:clrMapOvr>
     <a:masterClrMapping/>
   </p:clrMapOvr>
+  <p:transition spd="med" advClick="1">
+    <p:fadeThroughBlack/>
+  </p:transition>
+</p:sld>
+</file>
+
+<file path=ppt/slides/slide9.xml><?xml version="1.0" encoding="utf-8"?>
+<p:sld xmlns:a="http://schemas.openxmlformats.org/drawingml/2006/main" xmlns:p="http://schemas.openxmlformats.org/presentationml/2006/main" xmlns:r="http://schemas.openxmlformats.org/officeDocument/2006/relationships">
+  <p:cSld>
+    <p:spTree>
+      <p:nvGrpSpPr>
+        <p:cNvPr id="1" name=""/>
+        <p:cNvGrpSpPr/>
+        <p:nvPr/>
+      </p:nvGrpSpPr>
+      <p:grpSpPr/>
+      <p:pic>
+        <p:nvPicPr>
+          <p:cNvPr id="2" name="Picture 1" descr="bg-dark.png"/>
+          <p:cNvPicPr>
+            <a:picLocks noChangeAspect="1"/>
+          </p:cNvPicPr>
+          <p:nvPr/>
+        </p:nvPicPr>
+        <p:blipFill>
+          <a:blip r:embed="rId2"/>
+          <a:stretch>
+            <a:fillRect/>
+          </a:stretch>
+        </p:blipFill>
+        <p:spPr>
+          <a:xfrm>
+            <a:off x="0" y="0"/>
+            <a:ext cx="12191695" cy="6858000"/>
+          </a:xfrm>
+          <a:prstGeom prst="rect">
+            <a:avLst/>
+          </a:prstGeom>
+        </p:spPr>
+      </p:pic>
+      <p:sp>
+        <p:nvSpPr>
+          <p:cNvPr id="3" name="TextBox 2"/>
+          <p:cNvSpPr txBox="1"/>
+          <p:nvPr/>
+        </p:nvSpPr>
+        <p:spPr>
+          <a:xfrm>
+            <a:off x="502920" y="320040"/>
+            <a:ext cx="3657600" cy="274320"/>
+          </a:xfrm>
+          <a:prstGeom prst="rect">
+            <a:avLst/>
+          </a:prstGeom>
+          <a:noFill/>
+        </p:spPr>
+        <p:txBody>
+          <a:bodyPr wrap="square" anchor="t">
+            <a:spAutoFit/>
+          </a:bodyPr>
+          <a:lstStyle/>
+          <a:p>
+            <a:pPr algn="l">
+              <a:spcAft>
+                <a:spcPts val="800"/>
+              </a:spcAft>
+              <a:defRPr sz="1100" b="1">
+                <a:solidFill>
+                  <a:srgbClr val="D4AF37"/>
+                </a:solidFill>
+                <a:latin typeface="Calibri"/>
+              </a:defRPr>
+            </a:pPr>
+            <a:r>
+              <a:t>ЧОО «ГЮРЗА»</a:t>
+            </a:r>
+          </a:p>
+        </p:txBody>
+      </p:sp>
+      <p:sp>
+        <p:nvSpPr>
+          <p:cNvPr id="4" name="TextBox 3"/>
+          <p:cNvSpPr txBox="1"/>
+          <p:nvPr/>
+        </p:nvSpPr>
+        <p:spPr>
+          <a:xfrm>
+            <a:off x="8961120" y="320040"/>
+            <a:ext cx="2743200" cy="274320"/>
+          </a:xfrm>
+          <a:prstGeom prst="rect">
+            <a:avLst/>
+          </a:prstGeom>
+          <a:noFill/>
+        </p:spPr>
+        <p:txBody>
+          <a:bodyPr wrap="square" anchor="t">
+            <a:spAutoFit/>
+          </a:bodyPr>
+          <a:lstStyle/>
+          <a:p>
+            <a:pPr algn="r">
+              <a:spcAft>
+                <a:spcPts val="800"/>
+              </a:spcAft>
+              <a:defRPr sz="1100" b="1">
+                <a:solidFill>
+                  <a:srgbClr val="D4AF37"/>
+                </a:solidFill>
+                <a:latin typeface="Calibri"/>
+              </a:defRPr>
+            </a:pPr>
+            <a:r>
+              <a:t>gurza36.ru</a:t>
+            </a:r>
+          </a:p>
+        </p:txBody>
+      </p:sp>
+      <p:sp>
+        <p:nvSpPr>
+          <p:cNvPr id="5" name="Rectangle 4"/>
+          <p:cNvSpPr/>
+          <p:nvPr/>
+        </p:nvSpPr>
+        <p:spPr>
+          <a:xfrm>
+            <a:off x="502920" y="658368"/>
+            <a:ext cx="11155680" cy="0"/>
+          </a:xfrm>
+          <a:prstGeom prst="rect">
+            <a:avLst/>
+          </a:prstGeom>
+          <a:ln w="9525">
+            <a:solidFill>
+              <a:srgbClr val="D4AF37"/>
+            </a:solidFill>
+          </a:ln>
+        </p:spPr>
+        <p:style>
+          <a:lnRef idx="1">
+            <a:schemeClr val="accent1"/>
+          </a:lnRef>
+          <a:fillRef idx="3">
+            <a:schemeClr val="accent1"/>
+          </a:fillRef>
+          <a:effectRef idx="2">
+            <a:schemeClr val="accent1"/>
+          </a:effectRef>
+          <a:fontRef idx="minor">
+            <a:schemeClr val="lt1"/>
+          </a:fontRef>
+        </p:style>
+        <p:txBody>
+          <a:bodyPr rtlCol="0" anchor="ctr"/>
+          <a:lstStyle/>
+          <a:p>
+            <a:pPr algn="ctr"/>
+          </a:p>
+        </p:txBody>
+      </p:sp>
+      <p:sp>
+        <p:nvSpPr>
+          <p:cNvPr id="6" name="TextBox 5"/>
+          <p:cNvSpPr txBox="1"/>
+          <p:nvPr/>
+        </p:nvSpPr>
+        <p:spPr>
+          <a:xfrm>
+            <a:off x="640080" y="868680"/>
+            <a:ext cx="9144000" cy="548640"/>
+          </a:xfrm>
+          <a:prstGeom prst="rect">
+            <a:avLst/>
+          </a:prstGeom>
+          <a:noFill/>
+        </p:spPr>
+        <p:txBody>
+          <a:bodyPr wrap="square" anchor="t">
+            <a:spAutoFit/>
+          </a:bodyPr>
+          <a:lstStyle/>
+          <a:p>
+            <a:pPr algn="l">
+              <a:spcAft>
+                <a:spcPts val="1400"/>
+              </a:spcAft>
+              <a:defRPr sz="3200" b="1">
+                <a:solidFill>
+                  <a:srgbClr val="D4AF37"/>
+                </a:solidFill>
+                <a:latin typeface="Calibri"/>
+              </a:defRPr>
+            </a:pPr>
+            <a:r>
+              <a:t>Контакты</a:t>
+            </a:r>
+          </a:p>
+        </p:txBody>
+      </p:sp>
+      <p:sp>
+        <p:nvSpPr>
+          <p:cNvPr id="7" name="TextBox 6"/>
+          <p:cNvSpPr txBox="1"/>
+          <p:nvPr/>
+        </p:nvSpPr>
+        <p:spPr>
+          <a:xfrm>
+            <a:off x="640080" y="1325880"/>
+            <a:ext cx="9144000" cy="365760"/>
+          </a:xfrm>
+          <a:prstGeom prst="rect">
+            <a:avLst/>
+          </a:prstGeom>
+          <a:noFill/>
+        </p:spPr>
+        <p:txBody>
+          <a:bodyPr wrap="square" anchor="t">
+            <a:spAutoFit/>
+          </a:bodyPr>
+          <a:lstStyle/>
+          <a:p>
+            <a:pPr algn="l">
+              <a:spcAft>
+                <a:spcPts val="800"/>
+              </a:spcAft>
+              <a:defRPr sz="1600" b="0">
+                <a:solidFill>
+                  <a:srgbClr val="919BAF"/>
+                </a:solidFill>
+                <a:latin typeface="Calibri"/>
+              </a:defRPr>
+            </a:pPr>
+            <a:r>
+              <a:t>Цифровая визитка директора · прямой набор</a:t>
+            </a:r>
+          </a:p>
+        </p:txBody>
+      </p:sp>
+      <p:pic>
+        <p:nvPicPr>
+          <p:cNvPr id="8" name="Picture 7" descr="03-contacts.png"/>
+          <p:cNvPicPr>
+            <a:picLocks noChangeAspect="1"/>
+          </p:cNvPicPr>
+          <p:nvPr/>
+        </p:nvPicPr>
+        <p:blipFill>
+          <a:blip r:embed="rId3"/>
+          <a:stretch>
+            <a:fillRect/>
+          </a:stretch>
+        </p:blipFill>
+        <p:spPr>
+          <a:xfrm>
+            <a:off x="411480" y="1691640"/>
+            <a:ext cx="11338560" cy="7086600"/>
+          </a:xfrm>
+          <a:prstGeom prst="rect">
+            <a:avLst/>
+          </a:prstGeom>
+        </p:spPr>
+      </p:pic>
+      <p:sp>
+        <p:nvSpPr>
+          <p:cNvPr id="9" name="Rectangle 8"/>
+          <p:cNvSpPr/>
+          <p:nvPr/>
+        </p:nvSpPr>
+        <p:spPr>
+          <a:xfrm>
+            <a:off x="411480" y="1691640"/>
+            <a:ext cx="11338560" cy="4709160"/>
+          </a:xfrm>
+          <a:prstGeom prst="rect">
+            <a:avLst/>
+          </a:prstGeom>
+          <a:noFill/>
+          <a:ln w="15875">
+            <a:solidFill>
+              <a:srgbClr val="D4AF37"/>
+            </a:solidFill>
+          </a:ln>
+        </p:spPr>
+        <p:style>
+          <a:lnRef idx="1">
+            <a:schemeClr val="accent1"/>
+          </a:lnRef>
+          <a:fillRef idx="3">
+            <a:schemeClr val="accent1"/>
+          </a:fillRef>
+          <a:effectRef idx="2">
+            <a:schemeClr val="accent1"/>
+          </a:effectRef>
+          <a:fontRef idx="minor">
+            <a:schemeClr val="lt1"/>
+          </a:fontRef>
+        </p:style>
+        <p:txBody>
+          <a:bodyPr rtlCol="0" anchor="ctr"/>
+          <a:lstStyle/>
+          <a:p>
+            <a:pPr algn="ctr"/>
+          </a:p>
+        </p:txBody>
+      </p:sp>
+    </p:spTree>
+  </p:cSld>
+  <p:clrMapOvr>
+    <a:masterClrMapping/>
+  </p:clrMapOvr>
+  <p:transition spd="med" advClick="1">
+    <p:push dir="l"/>
+  </p:transition>
 </p:sld>
 </file>
 

--- a/presentation/gyurza-presentation.pptx
+++ b/presentation/gyurza-presentation.pptx
@@ -17,9 +17,6 @@
     <p:sldId id="265" r:id="rId16"/>
     <p:sldId id="266" r:id="rId17"/>
     <p:sldId id="267" r:id="rId18"/>
-    <p:sldId id="268" r:id="rId19"/>
-    <p:sldId id="269" r:id="rId20"/>
-    <p:sldId id="270" r:id="rId21"/>
   </p:sldIdLst>
   <p:sldSz cx="12191695" cy="6858000" type="screen4x3"/>
   <p:notesSz cx="6858000" cy="9144000"/>
@@ -3223,7 +3220,7 @@
               </a:defRPr>
             </a:pPr>
             <a:r>
-              <a:t>Цифровое лицо</a:t>
+              <a:t>Частная охранная</a:t>
             </a:r>
           </a:p>
         </p:txBody>
@@ -3262,7 +3259,7 @@
               </a:defRPr>
             </a:pPr>
             <a:r>
-              <a:t>охранной компании</a:t>
+              <a:t>организация</a:t>
             </a:r>
           </a:p>
         </p:txBody>
@@ -3301,7 +3298,7 @@
               </a:defRPr>
             </a:pPr>
             <a:r>
-              <a:t>Частная охранная организация · Воронеж · с 2011</a:t>
+              <a:t>Воронеж и Воронежская область · с 2011 года</a:t>
             </a:r>
           </a:p>
         </p:txBody>
@@ -3332,7 +3329,7 @@
               <a:spcAft>
                 <a:spcPts val="800"/>
               </a:spcAft>
-              <a:defRPr sz="2200" b="1">
+              <a:defRPr sz="2000" b="1">
                 <a:solidFill>
                   <a:srgbClr val="F0D98C"/>
                 </a:solidFill>
@@ -3340,7 +3337,7 @@
               </a:defRPr>
             </a:pPr>
             <a:r>
-              <a:t>gurza36.ru</a:t>
+              <a:t>Безопасность, проверенная временем</a:t>
             </a:r>
           </a:p>
         </p:txBody>
@@ -3518,8 +3515,8 @@
         </p:nvSpPr>
         <p:spPr>
           <a:xfrm>
-            <a:off x="640080" y="868680"/>
-            <a:ext cx="9144000" cy="548640"/>
+            <a:off x="640080" y="914400"/>
+            <a:ext cx="9144000" cy="457200"/>
           </a:xfrm>
           <a:prstGeom prst="rect">
             <a:avLst/>
@@ -3534,9 +3531,9 @@
           <a:p>
             <a:pPr algn="l">
               <a:spcAft>
-                <a:spcPts val="1400"/>
-              </a:spcAft>
-              <a:defRPr sz="3200" b="1">
+                <a:spcPts val="800"/>
+              </a:spcAft>
+              <a:defRPr sz="1400" b="1">
                 <a:solidFill>
                   <a:srgbClr val="D4AF37"/>
                 </a:solidFill>
@@ -3544,7 +3541,7 @@
               </a:defRPr>
             </a:pPr>
             <a:r>
-              <a:t>Брендинг</a:t>
+              <a:t>КОНТАКТЫ</a:t>
             </a:r>
           </a:p>
         </p:txBody>
@@ -3558,7 +3555,7 @@
         <p:spPr>
           <a:xfrm>
             <a:off x="640080" y="1325880"/>
-            <a:ext cx="9144000" cy="365760"/>
+            <a:ext cx="10058400" cy="640080"/>
           </a:xfrm>
           <a:prstGeom prst="rect">
             <a:avLst/>
@@ -3573,6 +3570,45 @@
           <a:p>
             <a:pPr algn="l">
               <a:spcAft>
+                <a:spcPts val="1400"/>
+              </a:spcAft>
+              <a:defRPr sz="3600" b="1">
+                <a:solidFill>
+                  <a:srgbClr val="F5F7FA"/>
+                </a:solidFill>
+                <a:latin typeface="Calibri"/>
+              </a:defRPr>
+            </a:pPr>
+            <a:r>
+              <a:t>Связаться с нами</a:t>
+            </a:r>
+          </a:p>
+        </p:txBody>
+      </p:sp>
+      <p:sp>
+        <p:nvSpPr>
+          <p:cNvPr id="8" name="TextBox 7"/>
+          <p:cNvSpPr txBox="1"/>
+          <p:nvPr/>
+        </p:nvSpPr>
+        <p:spPr>
+          <a:xfrm>
+            <a:off x="640080" y="2103120"/>
+            <a:ext cx="5303520" cy="2560320"/>
+          </a:xfrm>
+          <a:prstGeom prst="rect">
+            <a:avLst/>
+          </a:prstGeom>
+          <a:noFill/>
+        </p:spPr>
+        <p:txBody>
+          <a:bodyPr wrap="square" anchor="t">
+            <a:spAutoFit/>
+          </a:bodyPr>
+          <a:lstStyle/>
+          <a:p>
+            <a:pPr algn="l">
+              <a:spcAft>
                 <a:spcPts val="800"/>
               </a:spcAft>
               <a:defRPr sz="1600" b="0">
@@ -3583,14 +3619,175 @@
               </a:defRPr>
             </a:pPr>
             <a:r>
-              <a:t>Золотая сота и змея-гюрза</a:t>
+              <a:t>Официальный сайт:</a:t>
+            </a:r>
+          </a:p>
+          <a:p>
+            <a:pPr>
+              <a:spcAft>
+                <a:spcPts val="1400"/>
+              </a:spcAft>
+              <a:defRPr sz="2800" b="1">
+                <a:solidFill>
+                  <a:srgbClr val="F0D98C"/>
+                </a:solidFill>
+                <a:latin typeface="Calibri"/>
+              </a:defRPr>
+            </a:pPr>
+            <a:r>
+              <a:t>gurza36.ru</a:t>
+            </a:r>
+          </a:p>
+          <a:p>
+            <a:pPr>
+              <a:spcAft>
+                <a:spcPts val="800"/>
+              </a:spcAft>
+              <a:defRPr sz="800" b="0">
+                <a:solidFill>
+                  <a:srgbClr val="F5F7FA"/>
+                </a:solidFill>
+                <a:latin typeface="Calibri"/>
+              </a:defRPr>
+            </a:pPr>
+          </a:p>
+          <a:p>
+            <a:pPr>
+              <a:spcAft>
+                <a:spcPts val="800"/>
+              </a:spcAft>
+              <a:defRPr sz="1600" b="0">
+                <a:solidFill>
+                  <a:srgbClr val="919BAF"/>
+                </a:solidFill>
+                <a:latin typeface="Calibri"/>
+              </a:defRPr>
+            </a:pPr>
+            <a:r>
+              <a:t>Телефоны:</a:t>
+            </a:r>
+          </a:p>
+          <a:p>
+            <a:pPr>
+              <a:spcAft>
+                <a:spcPts val="800"/>
+              </a:spcAft>
+              <a:defRPr sz="2000" b="1">
+                <a:solidFill>
+                  <a:srgbClr val="F5F7FA"/>
+                </a:solidFill>
+                <a:latin typeface="Calibri"/>
+              </a:defRPr>
+            </a:pPr>
+            <a:r>
+              <a:t>+7 (473) 278-51-47</a:t>
+            </a:r>
+          </a:p>
+          <a:p>
+            <a:pPr>
+              <a:spcAft>
+                <a:spcPts val="800"/>
+              </a:spcAft>
+              <a:defRPr sz="2000" b="1">
+                <a:solidFill>
+                  <a:srgbClr val="F5F7FA"/>
+                </a:solidFill>
+                <a:latin typeface="Calibri"/>
+              </a:defRPr>
+            </a:pPr>
+            <a:r>
+              <a:t>+7 (900) 954-43-12</a:t>
+            </a:r>
+          </a:p>
+          <a:p>
+            <a:pPr>
+              <a:spcAft>
+                <a:spcPts val="800"/>
+              </a:spcAft>
+              <a:defRPr sz="800" b="0">
+                <a:solidFill>
+                  <a:srgbClr val="F5F7FA"/>
+                </a:solidFill>
+                <a:latin typeface="Calibri"/>
+              </a:defRPr>
+            </a:pPr>
+          </a:p>
+          <a:p>
+            <a:pPr>
+              <a:spcAft>
+                <a:spcPts val="800"/>
+              </a:spcAft>
+              <a:defRPr sz="1700" b="0">
+                <a:solidFill>
+                  <a:srgbClr val="F5F7FA"/>
+                </a:solidFill>
+                <a:latin typeface="Calibri"/>
+              </a:defRPr>
+            </a:pPr>
+            <a:r>
+              <a:t>Email: mike1592@yandex.ru</a:t>
+            </a:r>
+          </a:p>
+        </p:txBody>
+      </p:sp>
+      <p:sp>
+        <p:nvSpPr>
+          <p:cNvPr id="9" name="TextBox 8"/>
+          <p:cNvSpPr txBox="1"/>
+          <p:nvPr/>
+        </p:nvSpPr>
+        <p:spPr>
+          <a:xfrm>
+            <a:off x="640080" y="4754880"/>
+            <a:ext cx="5486400" cy="1097280"/>
+          </a:xfrm>
+          <a:prstGeom prst="rect">
+            <a:avLst/>
+          </a:prstGeom>
+          <a:noFill/>
+        </p:spPr>
+        <p:txBody>
+          <a:bodyPr wrap="square" anchor="t">
+            <a:spAutoFit/>
+          </a:bodyPr>
+          <a:lstStyle/>
+          <a:p>
+            <a:pPr algn="l">
+              <a:spcAft>
+                <a:spcPts val="800"/>
+              </a:spcAft>
+              <a:defRPr sz="1600" b="0">
+                <a:solidFill>
+                  <a:srgbClr val="919BAF"/>
+                </a:solidFill>
+                <a:latin typeface="Calibri"/>
+              </a:defRPr>
+            </a:pPr>
+            <a:r>
+              <a:t>394016, г. Воронеж,</a:t>
+            </a:r>
+          </a:p>
+          <a:p>
+            <a:pPr>
+              <a:spcAft>
+                <a:spcPts val="800"/>
+              </a:spcAft>
+              <a:defRPr sz="1600" b="0">
+                <a:solidFill>
+                  <a:srgbClr val="919BAF"/>
+                </a:solidFill>
+                <a:latin typeface="Calibri"/>
+              </a:defRPr>
+            </a:pPr>
+            <a:r>
+              <a:t>ул. Солнечная, 17/1, офис 4</a:t>
             </a:r>
           </a:p>
         </p:txBody>
       </p:sp>
       <p:pic>
         <p:nvPicPr>
-          <p:cNvPr id="8" name="Picture 7" descr="04-logo.png"/>
+          <p:cNvPr id="10" name="Picture 9" descr="03-contacts.png"/>
           <p:cNvPicPr>
             <a:picLocks noChangeAspect="1"/>
           </p:cNvPicPr>
@@ -3604,57 +3801,14 @@
         </p:blipFill>
         <p:spPr>
           <a:xfrm>
-            <a:off x="411480" y="1691640"/>
-            <a:ext cx="11338560" cy="11312252"/>
+            <a:off x="6217920" y="1737360"/>
+            <a:ext cx="5486400" cy="3429000"/>
           </a:xfrm>
           <a:prstGeom prst="rect">
             <a:avLst/>
           </a:prstGeom>
         </p:spPr>
       </p:pic>
-      <p:sp>
-        <p:nvSpPr>
-          <p:cNvPr id="9" name="Rectangle 8"/>
-          <p:cNvSpPr/>
-          <p:nvPr/>
-        </p:nvSpPr>
-        <p:spPr>
-          <a:xfrm>
-            <a:off x="411480" y="1691640"/>
-            <a:ext cx="11338560" cy="4709160"/>
-          </a:xfrm>
-          <a:prstGeom prst="rect">
-            <a:avLst/>
-          </a:prstGeom>
-          <a:noFill/>
-          <a:ln w="15875">
-            <a:solidFill>
-              <a:srgbClr val="D4AF37"/>
-            </a:solidFill>
-          </a:ln>
-        </p:spPr>
-        <p:style>
-          <a:lnRef idx="1">
-            <a:schemeClr val="accent1"/>
-          </a:lnRef>
-          <a:fillRef idx="3">
-            <a:schemeClr val="accent1"/>
-          </a:fillRef>
-          <a:effectRef idx="2">
-            <a:schemeClr val="accent1"/>
-          </a:effectRef>
-          <a:fontRef idx="minor">
-            <a:schemeClr val="lt1"/>
-          </a:fontRef>
-        </p:style>
-        <p:txBody>
-          <a:bodyPr rtlCol="0" anchor="ctr"/>
-          <a:lstStyle/>
-          <a:p>
-            <a:pPr algn="ctr"/>
-          </a:p>
-        </p:txBody>
-      </p:sp>
     </p:spTree>
   </p:cSld>
   <p:clrMapOvr>
@@ -3854,7 +4008,7 @@
               </a:defRPr>
             </a:pPr>
             <a:r>
-              <a:t>РОЛЬ САЙТА</a:t>
+              <a:t>РУКОВОДСТВО</a:t>
             </a:r>
           </a:p>
         </p:txBody>
@@ -3867,8 +4021,8 @@
         </p:nvSpPr>
         <p:spPr>
           <a:xfrm>
-            <a:off x="640080" y="1371600"/>
-            <a:ext cx="10058400" cy="640080"/>
+            <a:off x="640080" y="1645920"/>
+            <a:ext cx="10058400" cy="731520"/>
           </a:xfrm>
           <a:prstGeom prst="rect">
             <a:avLst/>
@@ -3893,66 +4047,21 @@
               </a:defRPr>
             </a:pPr>
             <a:r>
-              <a:t>Воронка продаж</a:t>
-            </a:r>
-          </a:p>
-        </p:txBody>
-      </p:sp>
-      <p:sp>
-        <p:nvSpPr>
-          <p:cNvPr id="8" name="Rectangle 7"/>
-          <p:cNvSpPr/>
-          <p:nvPr/>
-        </p:nvSpPr>
-        <p:spPr>
-          <a:xfrm>
-            <a:off x="640080" y="2286000"/>
-            <a:ext cx="2468880" cy="822960"/>
-          </a:xfrm>
-          <a:prstGeom prst="rect">
-            <a:avLst/>
-          </a:prstGeom>
-          <a:solidFill>
-            <a:srgbClr val="121824"/>
-          </a:solidFill>
-          <a:ln>
-            <a:solidFill>
-              <a:srgbClr val="D4AF37"/>
-            </a:solidFill>
-          </a:ln>
-        </p:spPr>
-        <p:style>
-          <a:lnRef idx="1">
-            <a:schemeClr val="accent1"/>
-          </a:lnRef>
-          <a:fillRef idx="3">
-            <a:schemeClr val="accent1"/>
-          </a:fillRef>
-          <a:effectRef idx="2">
-            <a:schemeClr val="accent1"/>
-          </a:effectRef>
-          <a:fontRef idx="minor">
-            <a:schemeClr val="lt1"/>
-          </a:fontRef>
-        </p:style>
-        <p:txBody>
-          <a:bodyPr rtlCol="0" anchor="ctr"/>
-          <a:lstStyle/>
-          <a:p>
-            <a:pPr algn="ctr"/>
-          </a:p>
-        </p:txBody>
-      </p:sp>
-      <p:sp>
-        <p:nvSpPr>
-          <p:cNvPr id="9" name="TextBox 8"/>
+              <a:t>Самофалов Михаил Иванович</a:t>
+            </a:r>
+          </a:p>
+        </p:txBody>
+      </p:sp>
+      <p:sp>
+        <p:nvSpPr>
+          <p:cNvPr id="8" name="TextBox 7"/>
           <p:cNvSpPr txBox="1"/>
           <p:nvPr/>
         </p:nvSpPr>
         <p:spPr>
           <a:xfrm>
-            <a:off x="731519" y="2423160"/>
-            <a:ext cx="2286000" cy="548640"/>
+            <a:off x="640080" y="2468880"/>
+            <a:ext cx="10058400" cy="457200"/>
           </a:xfrm>
           <a:prstGeom prst="rect">
             <a:avLst/>
@@ -3965,33 +4074,33 @@
           </a:bodyPr>
           <a:lstStyle/>
           <a:p>
-            <a:pPr algn="ctr">
+            <a:pPr algn="l">
               <a:spcAft>
                 <a:spcPts val="800"/>
               </a:spcAft>
-              <a:defRPr sz="1500" b="0">
-                <a:solidFill>
-                  <a:srgbClr val="F5F7FA"/>
-                </a:solidFill>
-                <a:latin typeface="Calibri"/>
-              </a:defRPr>
-            </a:pPr>
-            <a:r>
-              <a:t>Яндекс / Google / 2ГИС</a:t>
-            </a:r>
-          </a:p>
-        </p:txBody>
-      </p:sp>
-      <p:sp>
-        <p:nvSpPr>
-          <p:cNvPr id="10" name="TextBox 9"/>
+              <a:defRPr sz="2200" b="1">
+                <a:solidFill>
+                  <a:srgbClr val="D4AF37"/>
+                </a:solidFill>
+                <a:latin typeface="Calibri"/>
+              </a:defRPr>
+            </a:pPr>
+            <a:r>
+              <a:t>Директор ООО ЧОО «Гюрза»</a:t>
+            </a:r>
+          </a:p>
+        </p:txBody>
+      </p:sp>
+      <p:sp>
+        <p:nvSpPr>
+          <p:cNvPr id="9" name="TextBox 8"/>
           <p:cNvSpPr txBox="1"/>
           <p:nvPr/>
         </p:nvSpPr>
         <p:spPr>
           <a:xfrm>
-            <a:off x="3154680" y="2487168"/>
-            <a:ext cx="365760" cy="365760"/>
+            <a:off x="640080" y="3200400"/>
+            <a:ext cx="9144000" cy="1371600"/>
           </a:xfrm>
           <a:prstGeom prst="rect">
             <a:avLst/>
@@ -4008,358 +4117,60 @@
               <a:spcAft>
                 <a:spcPts val="800"/>
               </a:spcAft>
-              <a:defRPr sz="2000" b="1">
-                <a:solidFill>
-                  <a:srgbClr val="D4AF37"/>
-                </a:solidFill>
-                <a:latin typeface="Calibri"/>
-              </a:defRPr>
-            </a:pPr>
-            <a:r>
-              <a:t>→</a:t>
-            </a:r>
-          </a:p>
-        </p:txBody>
-      </p:sp>
-      <p:sp>
-        <p:nvSpPr>
-          <p:cNvPr id="11" name="Rectangle 10"/>
-          <p:cNvSpPr/>
-          <p:nvPr/>
-        </p:nvSpPr>
-        <p:spPr>
-          <a:xfrm>
-            <a:off x="3474720" y="2286000"/>
-            <a:ext cx="2468880" cy="822960"/>
-          </a:xfrm>
-          <a:prstGeom prst="rect">
-            <a:avLst/>
-          </a:prstGeom>
-          <a:solidFill>
-            <a:srgbClr val="282212"/>
-          </a:solidFill>
-          <a:ln>
-            <a:solidFill>
-              <a:srgbClr val="D4AF37"/>
-            </a:solidFill>
-          </a:ln>
-        </p:spPr>
-        <p:style>
-          <a:lnRef idx="1">
-            <a:schemeClr val="accent1"/>
-          </a:lnRef>
-          <a:fillRef idx="3">
-            <a:schemeClr val="accent1"/>
-          </a:fillRef>
-          <a:effectRef idx="2">
-            <a:schemeClr val="accent1"/>
-          </a:effectRef>
-          <a:fontRef idx="minor">
-            <a:schemeClr val="lt1"/>
-          </a:fontRef>
-        </p:style>
-        <p:txBody>
-          <a:bodyPr rtlCol="0" anchor="ctr"/>
-          <a:lstStyle/>
-          <a:p>
-            <a:pPr algn="ctr"/>
-          </a:p>
-        </p:txBody>
-      </p:sp>
-      <p:sp>
-        <p:nvSpPr>
-          <p:cNvPr id="12" name="TextBox 11"/>
+              <a:defRPr sz="1800" b="0">
+                <a:solidFill>
+                  <a:srgbClr val="F5F7FA"/>
+                </a:solidFill>
+                <a:latin typeface="Calibri"/>
+              </a:defRPr>
+            </a:pPr>
+            <a:r>
+              <a:t>Готовы обсудить охрану вашего объекта,</a:t>
+            </a:r>
+          </a:p>
+          <a:p>
+            <a:pPr>
+              <a:spcAft>
+                <a:spcPts val="800"/>
+              </a:spcAft>
+              <a:defRPr sz="1800" b="0">
+                <a:solidFill>
+                  <a:srgbClr val="F5F7FA"/>
+                </a:solidFill>
+                <a:latin typeface="Calibri"/>
+              </a:defRPr>
+            </a:pPr>
+            <a:r>
+              <a:t>провести экспертную оценку и предложить</a:t>
+            </a:r>
+          </a:p>
+          <a:p>
+            <a:pPr>
+              <a:spcAft>
+                <a:spcPts val="800"/>
+              </a:spcAft>
+              <a:defRPr sz="1800" b="0">
+                <a:solidFill>
+                  <a:srgbClr val="F5F7FA"/>
+                </a:solidFill>
+                <a:latin typeface="Calibri"/>
+              </a:defRPr>
+            </a:pPr>
+            <a:r>
+              <a:t>оптимальный вариант охраны под ваш бюджет.</a:t>
+            </a:r>
+          </a:p>
+        </p:txBody>
+      </p:sp>
+      <p:sp>
+        <p:nvSpPr>
+          <p:cNvPr id="10" name="TextBox 9"/>
           <p:cNvSpPr txBox="1"/>
           <p:nvPr/>
         </p:nvSpPr>
         <p:spPr>
           <a:xfrm>
-            <a:off x="3566160" y="2423160"/>
-            <a:ext cx="2286000" cy="548640"/>
-          </a:xfrm>
-          <a:prstGeom prst="rect">
-            <a:avLst/>
-          </a:prstGeom>
-          <a:noFill/>
-        </p:spPr>
-        <p:txBody>
-          <a:bodyPr wrap="square" anchor="t">
-            <a:spAutoFit/>
-          </a:bodyPr>
-          <a:lstStyle/>
-          <a:p>
-            <a:pPr algn="ctr">
-              <a:spcAft>
-                <a:spcPts val="800"/>
-              </a:spcAft>
-              <a:defRPr sz="1500" b="1">
-                <a:solidFill>
-                  <a:srgbClr val="F0D98C"/>
-                </a:solidFill>
-                <a:latin typeface="Calibri"/>
-              </a:defRPr>
-            </a:pPr>
-            <a:r>
-              <a:t>gurza36.ru</a:t>
-            </a:r>
-          </a:p>
-        </p:txBody>
-      </p:sp>
-      <p:sp>
-        <p:nvSpPr>
-          <p:cNvPr id="13" name="TextBox 12"/>
-          <p:cNvSpPr txBox="1"/>
-          <p:nvPr/>
-        </p:nvSpPr>
-        <p:spPr>
-          <a:xfrm>
-            <a:off x="5989320" y="2487168"/>
-            <a:ext cx="365760" cy="365760"/>
-          </a:xfrm>
-          <a:prstGeom prst="rect">
-            <a:avLst/>
-          </a:prstGeom>
-          <a:noFill/>
-        </p:spPr>
-        <p:txBody>
-          <a:bodyPr wrap="square" anchor="t">
-            <a:spAutoFit/>
-          </a:bodyPr>
-          <a:lstStyle/>
-          <a:p>
-            <a:pPr algn="l">
-              <a:spcAft>
-                <a:spcPts val="800"/>
-              </a:spcAft>
-              <a:defRPr sz="2000" b="1">
-                <a:solidFill>
-                  <a:srgbClr val="D4AF37"/>
-                </a:solidFill>
-                <a:latin typeface="Calibri"/>
-              </a:defRPr>
-            </a:pPr>
-            <a:r>
-              <a:t>→</a:t>
-            </a:r>
-          </a:p>
-        </p:txBody>
-      </p:sp>
-      <p:sp>
-        <p:nvSpPr>
-          <p:cNvPr id="14" name="Rectangle 13"/>
-          <p:cNvSpPr/>
-          <p:nvPr/>
-        </p:nvSpPr>
-        <p:spPr>
-          <a:xfrm>
-            <a:off x="6309360" y="2286000"/>
-            <a:ext cx="2468880" cy="822960"/>
-          </a:xfrm>
-          <a:prstGeom prst="rect">
-            <a:avLst/>
-          </a:prstGeom>
-          <a:solidFill>
-            <a:srgbClr val="121824"/>
-          </a:solidFill>
-          <a:ln>
-            <a:solidFill>
-              <a:srgbClr val="D4AF37"/>
-            </a:solidFill>
-          </a:ln>
-        </p:spPr>
-        <p:style>
-          <a:lnRef idx="1">
-            <a:schemeClr val="accent1"/>
-          </a:lnRef>
-          <a:fillRef idx="3">
-            <a:schemeClr val="accent1"/>
-          </a:fillRef>
-          <a:effectRef idx="2">
-            <a:schemeClr val="accent1"/>
-          </a:effectRef>
-          <a:fontRef idx="minor">
-            <a:schemeClr val="lt1"/>
-          </a:fontRef>
-        </p:style>
-        <p:txBody>
-          <a:bodyPr rtlCol="0" anchor="ctr"/>
-          <a:lstStyle/>
-          <a:p>
-            <a:pPr algn="ctr"/>
-          </a:p>
-        </p:txBody>
-      </p:sp>
-      <p:sp>
-        <p:nvSpPr>
-          <p:cNvPr id="15" name="TextBox 14"/>
-          <p:cNvSpPr txBox="1"/>
-          <p:nvPr/>
-        </p:nvSpPr>
-        <p:spPr>
-          <a:xfrm>
-            <a:off x="6400800" y="2423160"/>
-            <a:ext cx="2286000" cy="548640"/>
-          </a:xfrm>
-          <a:prstGeom prst="rect">
-            <a:avLst/>
-          </a:prstGeom>
-          <a:noFill/>
-        </p:spPr>
-        <p:txBody>
-          <a:bodyPr wrap="square" anchor="t">
-            <a:spAutoFit/>
-          </a:bodyPr>
-          <a:lstStyle/>
-          <a:p>
-            <a:pPr algn="ctr">
-              <a:spcAft>
-                <a:spcPts val="800"/>
-              </a:spcAft>
-              <a:defRPr sz="1500" b="0">
-                <a:solidFill>
-                  <a:srgbClr val="F5F7FA"/>
-                </a:solidFill>
-                <a:latin typeface="Calibri"/>
-              </a:defRPr>
-            </a:pPr>
-            <a:r>
-              <a:t>Звонок</a:t>
-            </a:r>
-          </a:p>
-        </p:txBody>
-      </p:sp>
-      <p:sp>
-        <p:nvSpPr>
-          <p:cNvPr id="16" name="TextBox 15"/>
-          <p:cNvSpPr txBox="1"/>
-          <p:nvPr/>
-        </p:nvSpPr>
-        <p:spPr>
-          <a:xfrm>
-            <a:off x="8823960" y="2487168"/>
-            <a:ext cx="365760" cy="365760"/>
-          </a:xfrm>
-          <a:prstGeom prst="rect">
-            <a:avLst/>
-          </a:prstGeom>
-          <a:noFill/>
-        </p:spPr>
-        <p:txBody>
-          <a:bodyPr wrap="square" anchor="t">
-            <a:spAutoFit/>
-          </a:bodyPr>
-          <a:lstStyle/>
-          <a:p>
-            <a:pPr algn="l">
-              <a:spcAft>
-                <a:spcPts val="800"/>
-              </a:spcAft>
-              <a:defRPr sz="2000" b="1">
-                <a:solidFill>
-                  <a:srgbClr val="D4AF37"/>
-                </a:solidFill>
-                <a:latin typeface="Calibri"/>
-              </a:defRPr>
-            </a:pPr>
-            <a:r>
-              <a:t>→</a:t>
-            </a:r>
-          </a:p>
-        </p:txBody>
-      </p:sp>
-      <p:sp>
-        <p:nvSpPr>
-          <p:cNvPr id="17" name="Rectangle 16"/>
-          <p:cNvSpPr/>
-          <p:nvPr/>
-        </p:nvSpPr>
-        <p:spPr>
-          <a:xfrm>
-            <a:off x="9144000" y="2286000"/>
-            <a:ext cx="2468880" cy="822960"/>
-          </a:xfrm>
-          <a:prstGeom prst="rect">
-            <a:avLst/>
-          </a:prstGeom>
-          <a:solidFill>
-            <a:srgbClr val="121824"/>
-          </a:solidFill>
-          <a:ln>
-            <a:solidFill>
-              <a:srgbClr val="D4AF37"/>
-            </a:solidFill>
-          </a:ln>
-        </p:spPr>
-        <p:style>
-          <a:lnRef idx="1">
-            <a:schemeClr val="accent1"/>
-          </a:lnRef>
-          <a:fillRef idx="3">
-            <a:schemeClr val="accent1"/>
-          </a:fillRef>
-          <a:effectRef idx="2">
-            <a:schemeClr val="accent1"/>
-          </a:effectRef>
-          <a:fontRef idx="minor">
-            <a:schemeClr val="lt1"/>
-          </a:fontRef>
-        </p:style>
-        <p:txBody>
-          <a:bodyPr rtlCol="0" anchor="ctr"/>
-          <a:lstStyle/>
-          <a:p>
-            <a:pPr algn="ctr"/>
-          </a:p>
-        </p:txBody>
-      </p:sp>
-      <p:sp>
-        <p:nvSpPr>
-          <p:cNvPr id="18" name="TextBox 17"/>
-          <p:cNvSpPr txBox="1"/>
-          <p:nvPr/>
-        </p:nvSpPr>
-        <p:spPr>
-          <a:xfrm>
-            <a:off x="9235440" y="2423160"/>
-            <a:ext cx="2286000" cy="548640"/>
-          </a:xfrm>
-          <a:prstGeom prst="rect">
-            <a:avLst/>
-          </a:prstGeom>
-          <a:noFill/>
-        </p:spPr>
-        <p:txBody>
-          <a:bodyPr wrap="square" anchor="t">
-            <a:spAutoFit/>
-          </a:bodyPr>
-          <a:lstStyle/>
-          <a:p>
-            <a:pPr algn="ctr">
-              <a:spcAft>
-                <a:spcPts val="800"/>
-              </a:spcAft>
-              <a:defRPr sz="1500" b="0">
-                <a:solidFill>
-                  <a:srgbClr val="F5F7FA"/>
-                </a:solidFill>
-                <a:latin typeface="Calibri"/>
-              </a:defRPr>
-            </a:pPr>
-            <a:r>
-              <a:t>Договор</a:t>
-            </a:r>
-          </a:p>
-        </p:txBody>
-      </p:sp>
-      <p:sp>
-        <p:nvSpPr>
-          <p:cNvPr id="19" name="TextBox 18"/>
-          <p:cNvSpPr txBox="1"/>
-          <p:nvPr/>
-        </p:nvSpPr>
-        <p:spPr>
-          <a:xfrm>
-            <a:off x="731520" y="3474720"/>
+            <a:off x="731520" y="4389120"/>
             <a:ext cx="10515600" cy="4114800"/>
           </a:xfrm>
           <a:prstGeom prst="rect">
@@ -4388,7 +4199,7 @@
               </a:defRPr>
             </a:pPr>
             <a:r>
-              <a:t>◆  Лицо компании — профессиональный образ 24/7</a:t>
+              <a:t>◆  Звоните — проконсультируем и ответим на все вопросы</a:t>
             </a:r>
           </a:p>
           <a:p>
@@ -4407,7 +4218,7 @@
               </a:defRPr>
             </a:pPr>
             <a:r>
-              <a:t>◆  Единая ссылка для визиток, КП, тендеров</a:t>
+              <a:t>◆  Выезд на объект для оценки угроз</a:t>
             </a:r>
           </a:p>
           <a:p>
@@ -4426,26 +4237,7 @@
               </a:defRPr>
             </a:pPr>
             <a:r>
-              <a:t>◆  SEO по запросам: «охрана воронеж», «чоо», «охрана складов»</a:t>
-            </a:r>
-          </a:p>
-          <a:p>
-            <a:pPr>
-              <a:spcBef>
-                <a:spcPts val="1000"/>
-              </a:spcBef>
-              <a:spcAft>
-                <a:spcPts val="600"/>
-              </a:spcAft>
-              <a:defRPr sz="1800">
-                <a:solidFill>
-                  <a:srgbClr val="F5F7FA"/>
-                </a:solidFill>
-                <a:latin typeface="Calibri"/>
-              </a:defRPr>
-            </a:pPr>
-            <a:r>
-              <a:t>◆  Фильтр клиентов — сразу видно, подходите ли под задачу</a:t>
+              <a:t>◆  Гибкие условия: разовые и долгосрочные договоры</a:t>
             </a:r>
           </a:p>
         </p:txBody>
@@ -4495,1716 +4287,6 @@
           </a:prstGeom>
         </p:spPr>
       </p:pic>
-      <p:sp>
-        <p:nvSpPr>
-          <p:cNvPr id="3" name="TextBox 2"/>
-          <p:cNvSpPr txBox="1"/>
-          <p:nvPr/>
-        </p:nvSpPr>
-        <p:spPr>
-          <a:xfrm>
-            <a:off x="502920" y="320040"/>
-            <a:ext cx="3657600" cy="274320"/>
-          </a:xfrm>
-          <a:prstGeom prst="rect">
-            <a:avLst/>
-          </a:prstGeom>
-          <a:noFill/>
-        </p:spPr>
-        <p:txBody>
-          <a:bodyPr wrap="square" anchor="t">
-            <a:spAutoFit/>
-          </a:bodyPr>
-          <a:lstStyle/>
-          <a:p>
-            <a:pPr algn="l">
-              <a:spcAft>
-                <a:spcPts val="800"/>
-              </a:spcAft>
-              <a:defRPr sz="1100" b="1">
-                <a:solidFill>
-                  <a:srgbClr val="D4AF37"/>
-                </a:solidFill>
-                <a:latin typeface="Calibri"/>
-              </a:defRPr>
-            </a:pPr>
-            <a:r>
-              <a:t>ЧОО «ГЮРЗА»</a:t>
-            </a:r>
-          </a:p>
-        </p:txBody>
-      </p:sp>
-      <p:sp>
-        <p:nvSpPr>
-          <p:cNvPr id="4" name="TextBox 3"/>
-          <p:cNvSpPr txBox="1"/>
-          <p:nvPr/>
-        </p:nvSpPr>
-        <p:spPr>
-          <a:xfrm>
-            <a:off x="8961120" y="320040"/>
-            <a:ext cx="2743200" cy="274320"/>
-          </a:xfrm>
-          <a:prstGeom prst="rect">
-            <a:avLst/>
-          </a:prstGeom>
-          <a:noFill/>
-        </p:spPr>
-        <p:txBody>
-          <a:bodyPr wrap="square" anchor="t">
-            <a:spAutoFit/>
-          </a:bodyPr>
-          <a:lstStyle/>
-          <a:p>
-            <a:pPr algn="r">
-              <a:spcAft>
-                <a:spcPts val="800"/>
-              </a:spcAft>
-              <a:defRPr sz="1100" b="1">
-                <a:solidFill>
-                  <a:srgbClr val="D4AF37"/>
-                </a:solidFill>
-                <a:latin typeface="Calibri"/>
-              </a:defRPr>
-            </a:pPr>
-            <a:r>
-              <a:t>gurza36.ru</a:t>
-            </a:r>
-          </a:p>
-        </p:txBody>
-      </p:sp>
-      <p:sp>
-        <p:nvSpPr>
-          <p:cNvPr id="5" name="Rectangle 4"/>
-          <p:cNvSpPr/>
-          <p:nvPr/>
-        </p:nvSpPr>
-        <p:spPr>
-          <a:xfrm>
-            <a:off x="502920" y="658368"/>
-            <a:ext cx="11155680" cy="0"/>
-          </a:xfrm>
-          <a:prstGeom prst="rect">
-            <a:avLst/>
-          </a:prstGeom>
-          <a:ln w="9525">
-            <a:solidFill>
-              <a:srgbClr val="D4AF37"/>
-            </a:solidFill>
-          </a:ln>
-        </p:spPr>
-        <p:style>
-          <a:lnRef idx="1">
-            <a:schemeClr val="accent1"/>
-          </a:lnRef>
-          <a:fillRef idx="3">
-            <a:schemeClr val="accent1"/>
-          </a:fillRef>
-          <a:effectRef idx="2">
-            <a:schemeClr val="accent1"/>
-          </a:effectRef>
-          <a:fontRef idx="minor">
-            <a:schemeClr val="lt1"/>
-          </a:fontRef>
-        </p:style>
-        <p:txBody>
-          <a:bodyPr rtlCol="0" anchor="ctr"/>
-          <a:lstStyle/>
-          <a:p>
-            <a:pPr algn="ctr"/>
-          </a:p>
-        </p:txBody>
-      </p:sp>
-      <p:sp>
-        <p:nvSpPr>
-          <p:cNvPr id="6" name="TextBox 5"/>
-          <p:cNvSpPr txBox="1"/>
-          <p:nvPr/>
-        </p:nvSpPr>
-        <p:spPr>
-          <a:xfrm>
-            <a:off x="640080" y="914400"/>
-            <a:ext cx="9144000" cy="457200"/>
-          </a:xfrm>
-          <a:prstGeom prst="rect">
-            <a:avLst/>
-          </a:prstGeom>
-          <a:noFill/>
-        </p:spPr>
-        <p:txBody>
-          <a:bodyPr wrap="square" anchor="t">
-            <a:spAutoFit/>
-          </a:bodyPr>
-          <a:lstStyle/>
-          <a:p>
-            <a:pPr algn="l">
-              <a:spcAft>
-                <a:spcPts val="800"/>
-              </a:spcAft>
-              <a:defRPr sz="1400" b="1">
-                <a:solidFill>
-                  <a:srgbClr val="D4AF37"/>
-                </a:solidFill>
-                <a:latin typeface="Calibri"/>
-              </a:defRPr>
-            </a:pPr>
-            <a:r>
-              <a:t>ТЕХНОЛОГИИ И SEO</a:t>
-            </a:r>
-          </a:p>
-        </p:txBody>
-      </p:sp>
-      <p:sp>
-        <p:nvSpPr>
-          <p:cNvPr id="7" name="TextBox 6"/>
-          <p:cNvSpPr txBox="1"/>
-          <p:nvPr/>
-        </p:nvSpPr>
-        <p:spPr>
-          <a:xfrm>
-            <a:off x="731520" y="1463040"/>
-            <a:ext cx="10515600" cy="4114800"/>
-          </a:xfrm>
-          <a:prstGeom prst="rect">
-            <a:avLst/>
-          </a:prstGeom>
-          <a:noFill/>
-        </p:spPr>
-        <p:txBody>
-          <a:bodyPr wrap="square" anchor="t">
-            <a:spAutoFit/>
-          </a:bodyPr>
-          <a:lstStyle/>
-          <a:p>
-            <a:pPr algn="l">
-              <a:spcBef>
-                <a:spcPts val="1000"/>
-              </a:spcBef>
-              <a:spcAft>
-                <a:spcPts val="600"/>
-              </a:spcAft>
-              <a:defRPr sz="1700">
-                <a:solidFill>
-                  <a:srgbClr val="F5F7FA"/>
-                </a:solidFill>
-                <a:latin typeface="Calibri"/>
-              </a:defRPr>
-            </a:pPr>
-            <a:r>
-              <a:t>◆  React 19 · TypeScript · Three.js · Framer Motion · Vercel CDN</a:t>
-            </a:r>
-          </a:p>
-          <a:p>
-            <a:pPr>
-              <a:spcBef>
-                <a:spcPts val="1000"/>
-              </a:spcBef>
-              <a:spcAft>
-                <a:spcPts val="600"/>
-              </a:spcAft>
-              <a:defRPr sz="1700">
-                <a:solidFill>
-                  <a:srgbClr val="F5F7FA"/>
-                </a:solidFill>
-                <a:latin typeface="Calibri"/>
-              </a:defRPr>
-            </a:pPr>
-            <a:r>
-              <a:t>◆  Домен gurza36.ru + SSL · canonical · JSON-LD · robots.txt · sitemap</a:t>
-            </a:r>
-          </a:p>
-          <a:p>
-            <a:pPr>
-              <a:spcBef>
-                <a:spcPts val="1000"/>
-              </a:spcBef>
-              <a:spcAft>
-                <a:spcPts val="600"/>
-              </a:spcAft>
-              <a:defRPr sz="1700">
-                <a:solidFill>
-                  <a:srgbClr val="F5F7FA"/>
-                </a:solidFill>
-                <a:latin typeface="Calibri"/>
-              </a:defRPr>
-            </a:pPr>
-            <a:r>
-              <a:t>◆  Open Graph — красивые превью в Telegram и VK</a:t>
-            </a:r>
-          </a:p>
-          <a:p>
-            <a:pPr>
-              <a:spcBef>
-                <a:spcPts val="1000"/>
-              </a:spcBef>
-              <a:spcAft>
-                <a:spcPts val="600"/>
-              </a:spcAft>
-              <a:defRPr sz="1700">
-                <a:solidFill>
-                  <a:srgbClr val="F5F7FA"/>
-                </a:solidFill>
-                <a:latin typeface="Calibri"/>
-              </a:defRPr>
-            </a:pPr>
-            <a:r>
-              <a:t>◆  Яндекс.Вебмастер + 2ГИС = ускорение индексации</a:t>
-            </a:r>
-          </a:p>
-        </p:txBody>
-      </p:sp>
-      <p:sp>
-        <p:nvSpPr>
-          <p:cNvPr id="8" name="Rectangle 7"/>
-          <p:cNvSpPr/>
-          <p:nvPr/>
-        </p:nvSpPr>
-        <p:spPr>
-          <a:xfrm>
-            <a:off x="640080" y="4114800"/>
-            <a:ext cx="3474720" cy="1417320"/>
-          </a:xfrm>
-          <a:prstGeom prst="rect">
-            <a:avLst/>
-          </a:prstGeom>
-          <a:solidFill>
-            <a:srgbClr val="121824"/>
-          </a:solidFill>
-          <a:ln w="6350">
-            <a:solidFill>
-              <a:srgbClr val="D4AF37"/>
-            </a:solidFill>
-          </a:ln>
-        </p:spPr>
-        <p:style>
-          <a:lnRef idx="1">
-            <a:schemeClr val="accent1"/>
-          </a:lnRef>
-          <a:fillRef idx="3">
-            <a:schemeClr val="accent1"/>
-          </a:fillRef>
-          <a:effectRef idx="2">
-            <a:schemeClr val="accent1"/>
-          </a:effectRef>
-          <a:fontRef idx="minor">
-            <a:schemeClr val="lt1"/>
-          </a:fontRef>
-        </p:style>
-        <p:txBody>
-          <a:bodyPr rtlCol="0" anchor="ctr"/>
-          <a:lstStyle/>
-          <a:p>
-            <a:pPr algn="ctr"/>
-          </a:p>
-        </p:txBody>
-      </p:sp>
-      <p:sp>
-        <p:nvSpPr>
-          <p:cNvPr id="9" name="TextBox 8"/>
-          <p:cNvSpPr txBox="1"/>
-          <p:nvPr/>
-        </p:nvSpPr>
-        <p:spPr>
-          <a:xfrm>
-            <a:off x="822959" y="4251960"/>
-            <a:ext cx="3108960" cy="640080"/>
-          </a:xfrm>
-          <a:prstGeom prst="rect">
-            <a:avLst/>
-          </a:prstGeom>
-          <a:noFill/>
-        </p:spPr>
-        <p:txBody>
-          <a:bodyPr wrap="square" anchor="t">
-            <a:spAutoFit/>
-          </a:bodyPr>
-          <a:lstStyle/>
-          <a:p>
-            <a:pPr algn="l">
-              <a:spcAft>
-                <a:spcPts val="1400"/>
-              </a:spcAft>
-              <a:defRPr sz="3600" b="1">
-                <a:solidFill>
-                  <a:srgbClr val="D4AF37"/>
-                </a:solidFill>
-                <a:latin typeface="Calibri"/>
-              </a:defRPr>
-            </a:pPr>
-            <a:r>
-              <a:t>1–2 мес</a:t>
-            </a:r>
-          </a:p>
-        </p:txBody>
-      </p:sp>
-      <p:sp>
-        <p:nvSpPr>
-          <p:cNvPr id="10" name="TextBox 9"/>
-          <p:cNvSpPr txBox="1"/>
-          <p:nvPr/>
-        </p:nvSpPr>
-        <p:spPr>
-          <a:xfrm>
-            <a:off x="822959" y="4892040"/>
-            <a:ext cx="3108960" cy="548640"/>
-          </a:xfrm>
-          <a:prstGeom prst="rect">
-            <a:avLst/>
-          </a:prstGeom>
-          <a:noFill/>
-        </p:spPr>
-        <p:txBody>
-          <a:bodyPr wrap="square" anchor="t">
-            <a:spAutoFit/>
-          </a:bodyPr>
-          <a:lstStyle/>
-          <a:p>
-            <a:pPr algn="l">
-              <a:spcAft>
-                <a:spcPts val="800"/>
-              </a:spcAft>
-              <a:defRPr sz="1300" b="0">
-                <a:solidFill>
-                  <a:srgbClr val="919BAF"/>
-                </a:solidFill>
-                <a:latin typeface="Calibri"/>
-              </a:defRPr>
-            </a:pPr>
-            <a:r>
-              <a:t>индекс по бренду</a:t>
-            </a:r>
-          </a:p>
-        </p:txBody>
-      </p:sp>
-      <p:sp>
-        <p:nvSpPr>
-          <p:cNvPr id="11" name="Rectangle 10"/>
-          <p:cNvSpPr/>
-          <p:nvPr/>
-        </p:nvSpPr>
-        <p:spPr>
-          <a:xfrm>
-            <a:off x="4251959" y="4114800"/>
-            <a:ext cx="3474720" cy="1417320"/>
-          </a:xfrm>
-          <a:prstGeom prst="rect">
-            <a:avLst/>
-          </a:prstGeom>
-          <a:solidFill>
-            <a:srgbClr val="121824"/>
-          </a:solidFill>
-          <a:ln w="6350">
-            <a:solidFill>
-              <a:srgbClr val="D4AF37"/>
-            </a:solidFill>
-          </a:ln>
-        </p:spPr>
-        <p:style>
-          <a:lnRef idx="1">
-            <a:schemeClr val="accent1"/>
-          </a:lnRef>
-          <a:fillRef idx="3">
-            <a:schemeClr val="accent1"/>
-          </a:fillRef>
-          <a:effectRef idx="2">
-            <a:schemeClr val="accent1"/>
-          </a:effectRef>
-          <a:fontRef idx="minor">
-            <a:schemeClr val="lt1"/>
-          </a:fontRef>
-        </p:style>
-        <p:txBody>
-          <a:bodyPr rtlCol="0" anchor="ctr"/>
-          <a:lstStyle/>
-          <a:p>
-            <a:pPr algn="ctr"/>
-          </a:p>
-        </p:txBody>
-      </p:sp>
-      <p:sp>
-        <p:nvSpPr>
-          <p:cNvPr id="12" name="TextBox 11"/>
-          <p:cNvSpPr txBox="1"/>
-          <p:nvPr/>
-        </p:nvSpPr>
-        <p:spPr>
-          <a:xfrm>
-            <a:off x="4434840" y="4251960"/>
-            <a:ext cx="3108960" cy="640080"/>
-          </a:xfrm>
-          <a:prstGeom prst="rect">
-            <a:avLst/>
-          </a:prstGeom>
-          <a:noFill/>
-        </p:spPr>
-        <p:txBody>
-          <a:bodyPr wrap="square" anchor="t">
-            <a:spAutoFit/>
-          </a:bodyPr>
-          <a:lstStyle/>
-          <a:p>
-            <a:pPr algn="l">
-              <a:spcAft>
-                <a:spcPts val="1400"/>
-              </a:spcAft>
-              <a:defRPr sz="3600" b="1">
-                <a:solidFill>
-                  <a:srgbClr val="D4AF37"/>
-                </a:solidFill>
-                <a:latin typeface="Calibri"/>
-              </a:defRPr>
-            </a:pPr>
-            <a:r>
-              <a:t>3–6 мес</a:t>
-            </a:r>
-          </a:p>
-        </p:txBody>
-      </p:sp>
-      <p:sp>
-        <p:nvSpPr>
-          <p:cNvPr id="13" name="TextBox 12"/>
-          <p:cNvSpPr txBox="1"/>
-          <p:nvPr/>
-        </p:nvSpPr>
-        <p:spPr>
-          <a:xfrm>
-            <a:off x="4434840" y="4892040"/>
-            <a:ext cx="3108960" cy="548640"/>
-          </a:xfrm>
-          <a:prstGeom prst="rect">
-            <a:avLst/>
-          </a:prstGeom>
-          <a:noFill/>
-        </p:spPr>
-        <p:txBody>
-          <a:bodyPr wrap="square" anchor="t">
-            <a:spAutoFit/>
-          </a:bodyPr>
-          <a:lstStyle/>
-          <a:p>
-            <a:pPr algn="l">
-              <a:spcAft>
-                <a:spcPts val="800"/>
-              </a:spcAft>
-              <a:defRPr sz="1300" b="0">
-                <a:solidFill>
-                  <a:srgbClr val="919BAF"/>
-                </a:solidFill>
-                <a:latin typeface="Calibri"/>
-              </a:defRPr>
-            </a:pPr>
-            <a:r>
-              <a:t>локальные запросы</a:t>
-            </a:r>
-          </a:p>
-        </p:txBody>
-      </p:sp>
-      <p:sp>
-        <p:nvSpPr>
-          <p:cNvPr id="14" name="Rectangle 13"/>
-          <p:cNvSpPr/>
-          <p:nvPr/>
-        </p:nvSpPr>
-        <p:spPr>
-          <a:xfrm>
-            <a:off x="7863840" y="4114800"/>
-            <a:ext cx="3474720" cy="1417320"/>
-          </a:xfrm>
-          <a:prstGeom prst="rect">
-            <a:avLst/>
-          </a:prstGeom>
-          <a:solidFill>
-            <a:srgbClr val="121824"/>
-          </a:solidFill>
-          <a:ln w="6350">
-            <a:solidFill>
-              <a:srgbClr val="D4AF37"/>
-            </a:solidFill>
-          </a:ln>
-        </p:spPr>
-        <p:style>
-          <a:lnRef idx="1">
-            <a:schemeClr val="accent1"/>
-          </a:lnRef>
-          <a:fillRef idx="3">
-            <a:schemeClr val="accent1"/>
-          </a:fillRef>
-          <a:effectRef idx="2">
-            <a:schemeClr val="accent1"/>
-          </a:effectRef>
-          <a:fontRef idx="minor">
-            <a:schemeClr val="lt1"/>
-          </a:fontRef>
-        </p:style>
-        <p:txBody>
-          <a:bodyPr rtlCol="0" anchor="ctr"/>
-          <a:lstStyle/>
-          <a:p>
-            <a:pPr algn="ctr"/>
-          </a:p>
-        </p:txBody>
-      </p:sp>
-      <p:sp>
-        <p:nvSpPr>
-          <p:cNvPr id="15" name="TextBox 14"/>
-          <p:cNvSpPr txBox="1"/>
-          <p:nvPr/>
-        </p:nvSpPr>
-        <p:spPr>
-          <a:xfrm>
-            <a:off x="8046719" y="4251960"/>
-            <a:ext cx="3108960" cy="640080"/>
-          </a:xfrm>
-          <a:prstGeom prst="rect">
-            <a:avLst/>
-          </a:prstGeom>
-          <a:noFill/>
-        </p:spPr>
-        <p:txBody>
-          <a:bodyPr wrap="square" anchor="t">
-            <a:spAutoFit/>
-          </a:bodyPr>
-          <a:lstStyle/>
-          <a:p>
-            <a:pPr algn="l">
-              <a:spcAft>
-                <a:spcPts val="1400"/>
-              </a:spcAft>
-              <a:defRPr sz="3600" b="1">
-                <a:solidFill>
-                  <a:srgbClr val="D4AF37"/>
-                </a:solidFill>
-                <a:latin typeface="Calibri"/>
-              </a:defRPr>
-            </a:pPr>
-            <a:r>
-              <a:t>∞</a:t>
-            </a:r>
-          </a:p>
-        </p:txBody>
-      </p:sp>
-      <p:sp>
-        <p:nvSpPr>
-          <p:cNvPr id="16" name="TextBox 15"/>
-          <p:cNvSpPr txBox="1"/>
-          <p:nvPr/>
-        </p:nvSpPr>
-        <p:spPr>
-          <a:xfrm>
-            <a:off x="8046719" y="4892040"/>
-            <a:ext cx="3108960" cy="548640"/>
-          </a:xfrm>
-          <a:prstGeom prst="rect">
-            <a:avLst/>
-          </a:prstGeom>
-          <a:noFill/>
-        </p:spPr>
-        <p:txBody>
-          <a:bodyPr wrap="square" anchor="t">
-            <a:spAutoFit/>
-          </a:bodyPr>
-          <a:lstStyle/>
-          <a:p>
-            <a:pPr algn="l">
-              <a:spcAft>
-                <a:spcPts val="800"/>
-              </a:spcAft>
-              <a:defRPr sz="1300" b="0">
-                <a:solidFill>
-                  <a:srgbClr val="919BAF"/>
-                </a:solidFill>
-                <a:latin typeface="Calibri"/>
-              </a:defRPr>
-            </a:pPr>
-            <a:r>
-              <a:t>заявки 24/7</a:t>
-            </a:r>
-          </a:p>
-        </p:txBody>
-      </p:sp>
-    </p:spTree>
-  </p:cSld>
-  <p:clrMapOvr>
-    <a:masterClrMapping/>
-  </p:clrMapOvr>
-  <p:transition spd="med" advClick="1">
-    <p:fadeThroughBlack/>
-  </p:transition>
-</p:sld>
-</file>
-
-<file path=ppt/slides/slide13.xml><?xml version="1.0" encoding="utf-8"?>
-<p:sld xmlns:a="http://schemas.openxmlformats.org/drawingml/2006/main" xmlns:p="http://schemas.openxmlformats.org/presentationml/2006/main" xmlns:r="http://schemas.openxmlformats.org/officeDocument/2006/relationships">
-  <p:cSld>
-    <p:spTree>
-      <p:nvGrpSpPr>
-        <p:cNvPr id="1" name=""/>
-        <p:cNvGrpSpPr/>
-        <p:nvPr/>
-      </p:nvGrpSpPr>
-      <p:grpSpPr/>
-      <p:pic>
-        <p:nvPicPr>
-          <p:cNvPr id="2" name="Picture 1" descr="bg-dark.png"/>
-          <p:cNvPicPr>
-            <a:picLocks noChangeAspect="1"/>
-          </p:cNvPicPr>
-          <p:nvPr/>
-        </p:nvPicPr>
-        <p:blipFill>
-          <a:blip r:embed="rId2"/>
-          <a:stretch>
-            <a:fillRect/>
-          </a:stretch>
-        </p:blipFill>
-        <p:spPr>
-          <a:xfrm>
-            <a:off x="0" y="0"/>
-            <a:ext cx="12191695" cy="6858000"/>
-          </a:xfrm>
-          <a:prstGeom prst="rect">
-            <a:avLst/>
-          </a:prstGeom>
-        </p:spPr>
-      </p:pic>
-      <p:sp>
-        <p:nvSpPr>
-          <p:cNvPr id="3" name="TextBox 2"/>
-          <p:cNvSpPr txBox="1"/>
-          <p:nvPr/>
-        </p:nvSpPr>
-        <p:spPr>
-          <a:xfrm>
-            <a:off x="502920" y="320040"/>
-            <a:ext cx="3657600" cy="274320"/>
-          </a:xfrm>
-          <a:prstGeom prst="rect">
-            <a:avLst/>
-          </a:prstGeom>
-          <a:noFill/>
-        </p:spPr>
-        <p:txBody>
-          <a:bodyPr wrap="square" anchor="t">
-            <a:spAutoFit/>
-          </a:bodyPr>
-          <a:lstStyle/>
-          <a:p>
-            <a:pPr algn="l">
-              <a:spcAft>
-                <a:spcPts val="800"/>
-              </a:spcAft>
-              <a:defRPr sz="1100" b="1">
-                <a:solidFill>
-                  <a:srgbClr val="D4AF37"/>
-                </a:solidFill>
-                <a:latin typeface="Calibri"/>
-              </a:defRPr>
-            </a:pPr>
-            <a:r>
-              <a:t>ЧОО «ГЮРЗА»</a:t>
-            </a:r>
-          </a:p>
-        </p:txBody>
-      </p:sp>
-      <p:sp>
-        <p:nvSpPr>
-          <p:cNvPr id="4" name="TextBox 3"/>
-          <p:cNvSpPr txBox="1"/>
-          <p:nvPr/>
-        </p:nvSpPr>
-        <p:spPr>
-          <a:xfrm>
-            <a:off x="8961120" y="320040"/>
-            <a:ext cx="2743200" cy="274320"/>
-          </a:xfrm>
-          <a:prstGeom prst="rect">
-            <a:avLst/>
-          </a:prstGeom>
-          <a:noFill/>
-        </p:spPr>
-        <p:txBody>
-          <a:bodyPr wrap="square" anchor="t">
-            <a:spAutoFit/>
-          </a:bodyPr>
-          <a:lstStyle/>
-          <a:p>
-            <a:pPr algn="r">
-              <a:spcAft>
-                <a:spcPts val="800"/>
-              </a:spcAft>
-              <a:defRPr sz="1100" b="1">
-                <a:solidFill>
-                  <a:srgbClr val="D4AF37"/>
-                </a:solidFill>
-                <a:latin typeface="Calibri"/>
-              </a:defRPr>
-            </a:pPr>
-            <a:r>
-              <a:t>gurza36.ru</a:t>
-            </a:r>
-          </a:p>
-        </p:txBody>
-      </p:sp>
-      <p:sp>
-        <p:nvSpPr>
-          <p:cNvPr id="5" name="Rectangle 4"/>
-          <p:cNvSpPr/>
-          <p:nvPr/>
-        </p:nvSpPr>
-        <p:spPr>
-          <a:xfrm>
-            <a:off x="502920" y="658368"/>
-            <a:ext cx="11155680" cy="0"/>
-          </a:xfrm>
-          <a:prstGeom prst="rect">
-            <a:avLst/>
-          </a:prstGeom>
-          <a:ln w="9525">
-            <a:solidFill>
-              <a:srgbClr val="D4AF37"/>
-            </a:solidFill>
-          </a:ln>
-        </p:spPr>
-        <p:style>
-          <a:lnRef idx="1">
-            <a:schemeClr val="accent1"/>
-          </a:lnRef>
-          <a:fillRef idx="3">
-            <a:schemeClr val="accent1"/>
-          </a:fillRef>
-          <a:effectRef idx="2">
-            <a:schemeClr val="accent1"/>
-          </a:effectRef>
-          <a:fontRef idx="minor">
-            <a:schemeClr val="lt1"/>
-          </a:fontRef>
-        </p:style>
-        <p:txBody>
-          <a:bodyPr rtlCol="0" anchor="ctr"/>
-          <a:lstStyle/>
-          <a:p>
-            <a:pPr algn="ctr"/>
-          </a:p>
-        </p:txBody>
-      </p:sp>
-      <p:sp>
-        <p:nvSpPr>
-          <p:cNvPr id="6" name="TextBox 5"/>
-          <p:cNvSpPr txBox="1"/>
-          <p:nvPr/>
-        </p:nvSpPr>
-        <p:spPr>
-          <a:xfrm>
-            <a:off x="640080" y="914400"/>
-            <a:ext cx="9144000" cy="457200"/>
-          </a:xfrm>
-          <a:prstGeom prst="rect">
-            <a:avLst/>
-          </a:prstGeom>
-          <a:noFill/>
-        </p:spPr>
-        <p:txBody>
-          <a:bodyPr wrap="square" anchor="t">
-            <a:spAutoFit/>
-          </a:bodyPr>
-          <a:lstStyle/>
-          <a:p>
-            <a:pPr algn="l">
-              <a:spcAft>
-                <a:spcPts val="800"/>
-              </a:spcAft>
-              <a:defRPr sz="1400" b="1">
-                <a:solidFill>
-                  <a:srgbClr val="D4AF37"/>
-                </a:solidFill>
-                <a:latin typeface="Calibri"/>
-              </a:defRPr>
-            </a:pPr>
-            <a:r>
-              <a:t>БАЗА КЛИЕНТОВ</a:t>
-            </a:r>
-          </a:p>
-        </p:txBody>
-      </p:sp>
-      <p:sp>
-        <p:nvSpPr>
-          <p:cNvPr id="7" name="TextBox 6"/>
-          <p:cNvSpPr txBox="1"/>
-          <p:nvPr/>
-        </p:nvSpPr>
-        <p:spPr>
-          <a:xfrm>
-            <a:off x="640080" y="1371600"/>
-            <a:ext cx="10058400" cy="640080"/>
-          </a:xfrm>
-          <a:prstGeom prst="rect">
-            <a:avLst/>
-          </a:prstGeom>
-          <a:noFill/>
-        </p:spPr>
-        <p:txBody>
-          <a:bodyPr wrap="square" anchor="t">
-            <a:spAutoFit/>
-          </a:bodyPr>
-          <a:lstStyle/>
-          <a:p>
-            <a:pPr algn="l">
-              <a:spcAft>
-                <a:spcPts val="1400"/>
-              </a:spcAft>
-              <a:defRPr sz="3400" b="1">
-                <a:solidFill>
-                  <a:srgbClr val="F5F7FA"/>
-                </a:solidFill>
-                <a:latin typeface="Calibri"/>
-              </a:defRPr>
-            </a:pPr>
-            <a:r>
-              <a:t>Excel — 125+ компаний Воронежа</a:t>
-            </a:r>
-          </a:p>
-        </p:txBody>
-      </p:sp>
-      <p:sp>
-        <p:nvSpPr>
-          <p:cNvPr id="8" name="TextBox 7"/>
-          <p:cNvSpPr txBox="1"/>
-          <p:nvPr/>
-        </p:nvSpPr>
-        <p:spPr>
-          <a:xfrm>
-            <a:off x="731520" y="2194560"/>
-            <a:ext cx="10515600" cy="4114800"/>
-          </a:xfrm>
-          <a:prstGeom prst="rect">
-            <a:avLst/>
-          </a:prstGeom>
-          <a:noFill/>
-        </p:spPr>
-        <p:txBody>
-          <a:bodyPr wrap="square" anchor="t">
-            <a:spAutoFit/>
-          </a:bodyPr>
-          <a:lstStyle/>
-          <a:p>
-            <a:pPr algn="l">
-              <a:spcBef>
-                <a:spcPts val="1000"/>
-              </a:spcBef>
-              <a:spcAft>
-                <a:spcPts val="600"/>
-              </a:spcAft>
-              <a:defRPr sz="1800">
-                <a:solidFill>
-                  <a:srgbClr val="F5F7FA"/>
-                </a:solidFill>
-                <a:latin typeface="Calibri"/>
-              </a:defRPr>
-            </a:pPr>
-            <a:r>
-              <a:t>◆  Отрасли: стройка, склады, агро, бизнес-центры, логистика</a:t>
-            </a:r>
-          </a:p>
-          <a:p>
-            <a:pPr>
-              <a:spcBef>
-                <a:spcPts val="1000"/>
-              </a:spcBef>
-              <a:spcAft>
-                <a:spcPts val="600"/>
-              </a:spcAft>
-              <a:defRPr sz="1800">
-                <a:solidFill>
-                  <a:srgbClr val="F5F7FA"/>
-                </a:solidFill>
-                <a:latin typeface="Calibri"/>
-              </a:defRPr>
-            </a:pPr>
-            <a:r>
-              <a:t>◆  Колонки: компания, телефон, email, приоритет, услуга</a:t>
-            </a:r>
-          </a:p>
-          <a:p>
-            <a:pPr>
-              <a:spcBef>
-                <a:spcPts val="1000"/>
-              </a:spcBef>
-              <a:spcAft>
-                <a:spcPts val="600"/>
-              </a:spcAft>
-              <a:defRPr sz="1800">
-                <a:solidFill>
-                  <a:srgbClr val="F5F7FA"/>
-                </a:solidFill>
-                <a:latin typeface="Calibri"/>
-              </a:defRPr>
-            </a:pPr>
-            <a:r>
-              <a:t>◆  Высокий приоритет подсвечен — с чего начать обзвон</a:t>
-            </a:r>
-          </a:p>
-          <a:p>
-            <a:pPr>
-              <a:spcBef>
-                <a:spcPts val="1000"/>
-              </a:spcBef>
-              <a:spcAft>
-                <a:spcPts val="600"/>
-              </a:spcAft>
-              <a:defRPr sz="1800">
-                <a:solidFill>
-                  <a:srgbClr val="F5F7FA"/>
-                </a:solidFill>
-                <a:latin typeface="Calibri"/>
-              </a:defRPr>
-            </a:pPr>
-            <a:r>
-              <a:t>◆  Файл: clients-voronezh-gyurza.xlsx</a:t>
-            </a:r>
-          </a:p>
-        </p:txBody>
-      </p:sp>
-    </p:spTree>
-  </p:cSld>
-  <p:clrMapOvr>
-    <a:masterClrMapping/>
-  </p:clrMapOvr>
-  <p:transition spd="med" advClick="1">
-    <p:fadeThroughBlack/>
-  </p:transition>
-</p:sld>
-</file>
-
-<file path=ppt/slides/slide14.xml><?xml version="1.0" encoding="utf-8"?>
-<p:sld xmlns:a="http://schemas.openxmlformats.org/drawingml/2006/main" xmlns:p="http://schemas.openxmlformats.org/presentationml/2006/main" xmlns:r="http://schemas.openxmlformats.org/officeDocument/2006/relationships">
-  <p:cSld>
-    <p:spTree>
-      <p:nvGrpSpPr>
-        <p:cNvPr id="1" name=""/>
-        <p:cNvGrpSpPr/>
-        <p:nvPr/>
-      </p:nvGrpSpPr>
-      <p:grpSpPr/>
-      <p:pic>
-        <p:nvPicPr>
-          <p:cNvPr id="2" name="Picture 1" descr="bg-dark.png"/>
-          <p:cNvPicPr>
-            <a:picLocks noChangeAspect="1"/>
-          </p:cNvPicPr>
-          <p:nvPr/>
-        </p:nvPicPr>
-        <p:blipFill>
-          <a:blip r:embed="rId2"/>
-          <a:stretch>
-            <a:fillRect/>
-          </a:stretch>
-        </p:blipFill>
-        <p:spPr>
-          <a:xfrm>
-            <a:off x="0" y="0"/>
-            <a:ext cx="12191695" cy="6858000"/>
-          </a:xfrm>
-          <a:prstGeom prst="rect">
-            <a:avLst/>
-          </a:prstGeom>
-        </p:spPr>
-      </p:pic>
-      <p:sp>
-        <p:nvSpPr>
-          <p:cNvPr id="3" name="TextBox 2"/>
-          <p:cNvSpPr txBox="1"/>
-          <p:nvPr/>
-        </p:nvSpPr>
-        <p:spPr>
-          <a:xfrm>
-            <a:off x="502920" y="320040"/>
-            <a:ext cx="3657600" cy="274320"/>
-          </a:xfrm>
-          <a:prstGeom prst="rect">
-            <a:avLst/>
-          </a:prstGeom>
-          <a:noFill/>
-        </p:spPr>
-        <p:txBody>
-          <a:bodyPr wrap="square" anchor="t">
-            <a:spAutoFit/>
-          </a:bodyPr>
-          <a:lstStyle/>
-          <a:p>
-            <a:pPr algn="l">
-              <a:spcAft>
-                <a:spcPts val="800"/>
-              </a:spcAft>
-              <a:defRPr sz="1100" b="1">
-                <a:solidFill>
-                  <a:srgbClr val="D4AF37"/>
-                </a:solidFill>
-                <a:latin typeface="Calibri"/>
-              </a:defRPr>
-            </a:pPr>
-            <a:r>
-              <a:t>ЧОО «ГЮРЗА»</a:t>
-            </a:r>
-          </a:p>
-        </p:txBody>
-      </p:sp>
-      <p:sp>
-        <p:nvSpPr>
-          <p:cNvPr id="4" name="TextBox 3"/>
-          <p:cNvSpPr txBox="1"/>
-          <p:nvPr/>
-        </p:nvSpPr>
-        <p:spPr>
-          <a:xfrm>
-            <a:off x="8961120" y="320040"/>
-            <a:ext cx="2743200" cy="274320"/>
-          </a:xfrm>
-          <a:prstGeom prst="rect">
-            <a:avLst/>
-          </a:prstGeom>
-          <a:noFill/>
-        </p:spPr>
-        <p:txBody>
-          <a:bodyPr wrap="square" anchor="t">
-            <a:spAutoFit/>
-          </a:bodyPr>
-          <a:lstStyle/>
-          <a:p>
-            <a:pPr algn="r">
-              <a:spcAft>
-                <a:spcPts val="800"/>
-              </a:spcAft>
-              <a:defRPr sz="1100" b="1">
-                <a:solidFill>
-                  <a:srgbClr val="D4AF37"/>
-                </a:solidFill>
-                <a:latin typeface="Calibri"/>
-              </a:defRPr>
-            </a:pPr>
-            <a:r>
-              <a:t>gurza36.ru</a:t>
-            </a:r>
-          </a:p>
-        </p:txBody>
-      </p:sp>
-      <p:sp>
-        <p:nvSpPr>
-          <p:cNvPr id="5" name="Rectangle 4"/>
-          <p:cNvSpPr/>
-          <p:nvPr/>
-        </p:nvSpPr>
-        <p:spPr>
-          <a:xfrm>
-            <a:off x="502920" y="658368"/>
-            <a:ext cx="11155680" cy="0"/>
-          </a:xfrm>
-          <a:prstGeom prst="rect">
-            <a:avLst/>
-          </a:prstGeom>
-          <a:ln w="9525">
-            <a:solidFill>
-              <a:srgbClr val="D4AF37"/>
-            </a:solidFill>
-          </a:ln>
-        </p:spPr>
-        <p:style>
-          <a:lnRef idx="1">
-            <a:schemeClr val="accent1"/>
-          </a:lnRef>
-          <a:fillRef idx="3">
-            <a:schemeClr val="accent1"/>
-          </a:fillRef>
-          <a:effectRef idx="2">
-            <a:schemeClr val="accent1"/>
-          </a:effectRef>
-          <a:fontRef idx="minor">
-            <a:schemeClr val="lt1"/>
-          </a:fontRef>
-        </p:style>
-        <p:txBody>
-          <a:bodyPr rtlCol="0" anchor="ctr"/>
-          <a:lstStyle/>
-          <a:p>
-            <a:pPr algn="ctr"/>
-          </a:p>
-        </p:txBody>
-      </p:sp>
-      <p:sp>
-        <p:nvSpPr>
-          <p:cNvPr id="6" name="TextBox 5"/>
-          <p:cNvSpPr txBox="1"/>
-          <p:nvPr/>
-        </p:nvSpPr>
-        <p:spPr>
-          <a:xfrm>
-            <a:off x="640080" y="914400"/>
-            <a:ext cx="9144000" cy="457200"/>
-          </a:xfrm>
-          <a:prstGeom prst="rect">
-            <a:avLst/>
-          </a:prstGeom>
-          <a:noFill/>
-        </p:spPr>
-        <p:txBody>
-          <a:bodyPr wrap="square" anchor="t">
-            <a:spAutoFit/>
-          </a:bodyPr>
-          <a:lstStyle/>
-          <a:p>
-            <a:pPr algn="l">
-              <a:spcAft>
-                <a:spcPts val="800"/>
-              </a:spcAft>
-              <a:defRPr sz="1400" b="1">
-                <a:solidFill>
-                  <a:srgbClr val="D4AF37"/>
-                </a:solidFill>
-                <a:latin typeface="Calibri"/>
-              </a:defRPr>
-            </a:pPr>
-            <a:r>
-              <a:t>ДОРОЖНАЯ КАРТА</a:t>
-            </a:r>
-          </a:p>
-        </p:txBody>
-      </p:sp>
-      <p:sp>
-        <p:nvSpPr>
-          <p:cNvPr id="7" name="Rectangle 6"/>
-          <p:cNvSpPr/>
-          <p:nvPr/>
-        </p:nvSpPr>
-        <p:spPr>
-          <a:xfrm>
-            <a:off x="640080" y="1554480"/>
-            <a:ext cx="3474720" cy="4114800"/>
-          </a:xfrm>
-          <a:prstGeom prst="rect">
-            <a:avLst/>
-          </a:prstGeom>
-          <a:solidFill>
-            <a:srgbClr val="121824"/>
-          </a:solidFill>
-          <a:ln>
-            <a:solidFill>
-              <a:srgbClr val="D4AF37"/>
-            </a:solidFill>
-          </a:ln>
-        </p:spPr>
-        <p:style>
-          <a:lnRef idx="1">
-            <a:schemeClr val="accent1"/>
-          </a:lnRef>
-          <a:fillRef idx="3">
-            <a:schemeClr val="accent1"/>
-          </a:fillRef>
-          <a:effectRef idx="2">
-            <a:schemeClr val="accent1"/>
-          </a:effectRef>
-          <a:fontRef idx="minor">
-            <a:schemeClr val="lt1"/>
-          </a:fontRef>
-        </p:style>
-        <p:txBody>
-          <a:bodyPr rtlCol="0" anchor="ctr"/>
-          <a:lstStyle/>
-          <a:p>
-            <a:pPr algn="ctr"/>
-          </a:p>
-        </p:txBody>
-      </p:sp>
-      <p:sp>
-        <p:nvSpPr>
-          <p:cNvPr id="8" name="TextBox 7"/>
-          <p:cNvSpPr txBox="1"/>
-          <p:nvPr/>
-        </p:nvSpPr>
-        <p:spPr>
-          <a:xfrm>
-            <a:off x="822959" y="1737360"/>
-            <a:ext cx="3108960" cy="457200"/>
-          </a:xfrm>
-          <a:prstGeom prst="rect">
-            <a:avLst/>
-          </a:prstGeom>
-          <a:noFill/>
-        </p:spPr>
-        <p:txBody>
-          <a:bodyPr wrap="square" anchor="t">
-            <a:spAutoFit/>
-          </a:bodyPr>
-          <a:lstStyle/>
-          <a:p>
-            <a:pPr algn="l">
-              <a:spcAft>
-                <a:spcPts val="800"/>
-              </a:spcAft>
-              <a:defRPr sz="2200" b="1">
-                <a:solidFill>
-                  <a:srgbClr val="D4AF37"/>
-                </a:solidFill>
-                <a:latin typeface="Calibri"/>
-              </a:defRPr>
-            </a:pPr>
-            <a:r>
-              <a:t>Сейчас</a:t>
-            </a:r>
-          </a:p>
-        </p:txBody>
-      </p:sp>
-      <p:sp>
-        <p:nvSpPr>
-          <p:cNvPr id="9" name="TextBox 8"/>
-          <p:cNvSpPr txBox="1"/>
-          <p:nvPr/>
-        </p:nvSpPr>
-        <p:spPr>
-          <a:xfrm>
-            <a:off x="777240" y="2286000"/>
-            <a:ext cx="3200400" cy="4114800"/>
-          </a:xfrm>
-          <a:prstGeom prst="rect">
-            <a:avLst/>
-          </a:prstGeom>
-          <a:noFill/>
-        </p:spPr>
-        <p:txBody>
-          <a:bodyPr wrap="square" anchor="t">
-            <a:spAutoFit/>
-          </a:bodyPr>
-          <a:lstStyle/>
-          <a:p>
-            <a:pPr algn="l">
-              <a:spcBef>
-                <a:spcPts val="1000"/>
-              </a:spcBef>
-              <a:spcAft>
-                <a:spcPts val="600"/>
-              </a:spcAft>
-              <a:defRPr sz="1500">
-                <a:solidFill>
-                  <a:srgbClr val="F5F7FA"/>
-                </a:solidFill>
-                <a:latin typeface="Calibri"/>
-              </a:defRPr>
-            </a:pPr>
-            <a:r>
-              <a:t>◆  Сайт live</a:t>
-            </a:r>
-          </a:p>
-          <a:p>
-            <a:pPr>
-              <a:spcBef>
-                <a:spcPts val="1000"/>
-              </a:spcBef>
-              <a:spcAft>
-                <a:spcPts val="600"/>
-              </a:spcAft>
-              <a:defRPr sz="1500">
-                <a:solidFill>
-                  <a:srgbClr val="F5F7FA"/>
-                </a:solidFill>
-                <a:latin typeface="Calibri"/>
-              </a:defRPr>
-            </a:pPr>
-            <a:r>
-              <a:t>◆  SEO готово</a:t>
-            </a:r>
-          </a:p>
-          <a:p>
-            <a:pPr>
-              <a:spcBef>
-                <a:spcPts val="1000"/>
-              </a:spcBef>
-              <a:spcAft>
-                <a:spcPts val="600"/>
-              </a:spcAft>
-              <a:defRPr sz="1500">
-                <a:solidFill>
-                  <a:srgbClr val="F5F7FA"/>
-                </a:solidFill>
-                <a:latin typeface="Calibri"/>
-              </a:defRPr>
-            </a:pPr>
-            <a:r>
-              <a:t>◆  База Excel</a:t>
-            </a:r>
-          </a:p>
-        </p:txBody>
-      </p:sp>
-      <p:sp>
-        <p:nvSpPr>
-          <p:cNvPr id="10" name="Rectangle 9"/>
-          <p:cNvSpPr/>
-          <p:nvPr/>
-        </p:nvSpPr>
-        <p:spPr>
-          <a:xfrm>
-            <a:off x="4389120" y="1554480"/>
-            <a:ext cx="3474720" cy="4114800"/>
-          </a:xfrm>
-          <a:prstGeom prst="rect">
-            <a:avLst/>
-          </a:prstGeom>
-          <a:solidFill>
-            <a:srgbClr val="121824"/>
-          </a:solidFill>
-          <a:ln>
-            <a:solidFill>
-              <a:srgbClr val="D4AF37"/>
-            </a:solidFill>
-          </a:ln>
-        </p:spPr>
-        <p:style>
-          <a:lnRef idx="1">
-            <a:schemeClr val="accent1"/>
-          </a:lnRef>
-          <a:fillRef idx="3">
-            <a:schemeClr val="accent1"/>
-          </a:fillRef>
-          <a:effectRef idx="2">
-            <a:schemeClr val="accent1"/>
-          </a:effectRef>
-          <a:fontRef idx="minor">
-            <a:schemeClr val="lt1"/>
-          </a:fontRef>
-        </p:style>
-        <p:txBody>
-          <a:bodyPr rtlCol="0" anchor="ctr"/>
-          <a:lstStyle/>
-          <a:p>
-            <a:pPr algn="ctr"/>
-          </a:p>
-        </p:txBody>
-      </p:sp>
-      <p:sp>
-        <p:nvSpPr>
-          <p:cNvPr id="11" name="TextBox 10"/>
-          <p:cNvSpPr txBox="1"/>
-          <p:nvPr/>
-        </p:nvSpPr>
-        <p:spPr>
-          <a:xfrm>
-            <a:off x="4572000" y="1737360"/>
-            <a:ext cx="3108960" cy="457200"/>
-          </a:xfrm>
-          <a:prstGeom prst="rect">
-            <a:avLst/>
-          </a:prstGeom>
-          <a:noFill/>
-        </p:spPr>
-        <p:txBody>
-          <a:bodyPr wrap="square" anchor="t">
-            <a:spAutoFit/>
-          </a:bodyPr>
-          <a:lstStyle/>
-          <a:p>
-            <a:pPr algn="l">
-              <a:spcAft>
-                <a:spcPts val="800"/>
-              </a:spcAft>
-              <a:defRPr sz="2200" b="1">
-                <a:solidFill>
-                  <a:srgbClr val="D4AF37"/>
-                </a:solidFill>
-                <a:latin typeface="Calibri"/>
-              </a:defRPr>
-            </a:pPr>
-            <a:r>
-              <a:t>Неделя</a:t>
-            </a:r>
-          </a:p>
-        </p:txBody>
-      </p:sp>
-      <p:sp>
-        <p:nvSpPr>
-          <p:cNvPr id="12" name="TextBox 11"/>
-          <p:cNvSpPr txBox="1"/>
-          <p:nvPr/>
-        </p:nvSpPr>
-        <p:spPr>
-          <a:xfrm>
-            <a:off x="4526280" y="2286000"/>
-            <a:ext cx="3200400" cy="4114800"/>
-          </a:xfrm>
-          <a:prstGeom prst="rect">
-            <a:avLst/>
-          </a:prstGeom>
-          <a:noFill/>
-        </p:spPr>
-        <p:txBody>
-          <a:bodyPr wrap="square" anchor="t">
-            <a:spAutoFit/>
-          </a:bodyPr>
-          <a:lstStyle/>
-          <a:p>
-            <a:pPr algn="l">
-              <a:spcBef>
-                <a:spcPts val="1000"/>
-              </a:spcBef>
-              <a:spcAft>
-                <a:spcPts val="600"/>
-              </a:spcAft>
-              <a:defRPr sz="1500">
-                <a:solidFill>
-                  <a:srgbClr val="F5F7FA"/>
-                </a:solidFill>
-                <a:latin typeface="Calibri"/>
-              </a:defRPr>
-            </a:pPr>
-            <a:r>
-              <a:t>◆  Яндекс.Вебмастер</a:t>
-            </a:r>
-          </a:p>
-          <a:p>
-            <a:pPr>
-              <a:spcBef>
-                <a:spcPts val="1000"/>
-              </a:spcBef>
-              <a:spcAft>
-                <a:spcPts val="600"/>
-              </a:spcAft>
-              <a:defRPr sz="1500">
-                <a:solidFill>
-                  <a:srgbClr val="F5F7FA"/>
-                </a:solidFill>
-                <a:latin typeface="Calibri"/>
-              </a:defRPr>
-            </a:pPr>
-            <a:r>
-              <a:t>◆  2ГИС / Я.Бизнес</a:t>
-            </a:r>
-          </a:p>
-          <a:p>
-            <a:pPr>
-              <a:spcBef>
-                <a:spcPts val="1000"/>
-              </a:spcBef>
-              <a:spcAft>
-                <a:spcPts val="600"/>
-              </a:spcAft>
-              <a:defRPr sz="1500">
-                <a:solidFill>
-                  <a:srgbClr val="F5F7FA"/>
-                </a:solidFill>
-                <a:latin typeface="Calibri"/>
-              </a:defRPr>
-            </a:pPr>
-            <a:r>
-              <a:t>◆  Обзвон</a:t>
-            </a:r>
-          </a:p>
-        </p:txBody>
-      </p:sp>
-      <p:sp>
-        <p:nvSpPr>
-          <p:cNvPr id="13" name="Rectangle 12"/>
-          <p:cNvSpPr/>
-          <p:nvPr/>
-        </p:nvSpPr>
-        <p:spPr>
-          <a:xfrm>
-            <a:off x="8138159" y="1554480"/>
-            <a:ext cx="3474720" cy="4114800"/>
-          </a:xfrm>
-          <a:prstGeom prst="rect">
-            <a:avLst/>
-          </a:prstGeom>
-          <a:solidFill>
-            <a:srgbClr val="121824"/>
-          </a:solidFill>
-          <a:ln>
-            <a:solidFill>
-              <a:srgbClr val="D4AF37"/>
-            </a:solidFill>
-          </a:ln>
-        </p:spPr>
-        <p:style>
-          <a:lnRef idx="1">
-            <a:schemeClr val="accent1"/>
-          </a:lnRef>
-          <a:fillRef idx="3">
-            <a:schemeClr val="accent1"/>
-          </a:fillRef>
-          <a:effectRef idx="2">
-            <a:schemeClr val="accent1"/>
-          </a:effectRef>
-          <a:fontRef idx="minor">
-            <a:schemeClr val="lt1"/>
-          </a:fontRef>
-        </p:style>
-        <p:txBody>
-          <a:bodyPr rtlCol="0" anchor="ctr"/>
-          <a:lstStyle/>
-          <a:p>
-            <a:pPr algn="ctr"/>
-          </a:p>
-        </p:txBody>
-      </p:sp>
-      <p:sp>
-        <p:nvSpPr>
-          <p:cNvPr id="14" name="TextBox 13"/>
-          <p:cNvSpPr txBox="1"/>
-          <p:nvPr/>
-        </p:nvSpPr>
-        <p:spPr>
-          <a:xfrm>
-            <a:off x="8321039" y="1737360"/>
-            <a:ext cx="3108960" cy="457200"/>
-          </a:xfrm>
-          <a:prstGeom prst="rect">
-            <a:avLst/>
-          </a:prstGeom>
-          <a:noFill/>
-        </p:spPr>
-        <p:txBody>
-          <a:bodyPr wrap="square" anchor="t">
-            <a:spAutoFit/>
-          </a:bodyPr>
-          <a:lstStyle/>
-          <a:p>
-            <a:pPr algn="l">
-              <a:spcAft>
-                <a:spcPts val="800"/>
-              </a:spcAft>
-              <a:defRPr sz="2200" b="1">
-                <a:solidFill>
-                  <a:srgbClr val="D4AF37"/>
-                </a:solidFill>
-                <a:latin typeface="Calibri"/>
-              </a:defRPr>
-            </a:pPr>
-            <a:r>
-              <a:t>Месяц</a:t>
-            </a:r>
-          </a:p>
-        </p:txBody>
-      </p:sp>
-      <p:sp>
-        <p:nvSpPr>
-          <p:cNvPr id="15" name="TextBox 14"/>
-          <p:cNvSpPr txBox="1"/>
-          <p:nvPr/>
-        </p:nvSpPr>
-        <p:spPr>
-          <a:xfrm>
-            <a:off x="8275319" y="2286000"/>
-            <a:ext cx="3200400" cy="4114800"/>
-          </a:xfrm>
-          <a:prstGeom prst="rect">
-            <a:avLst/>
-          </a:prstGeom>
-          <a:noFill/>
-        </p:spPr>
-        <p:txBody>
-          <a:bodyPr wrap="square" anchor="t">
-            <a:spAutoFit/>
-          </a:bodyPr>
-          <a:lstStyle/>
-          <a:p>
-            <a:pPr algn="l">
-              <a:spcBef>
-                <a:spcPts val="1000"/>
-              </a:spcBef>
-              <a:spcAft>
-                <a:spcPts val="600"/>
-              </a:spcAft>
-              <a:defRPr sz="1500">
-                <a:solidFill>
-                  <a:srgbClr val="F5F7FA"/>
-                </a:solidFill>
-                <a:latin typeface="Calibri"/>
-              </a:defRPr>
-            </a:pPr>
-            <a:r>
-              <a:t>◆  SEO-позиции</a:t>
-            </a:r>
-          </a:p>
-          <a:p>
-            <a:pPr>
-              <a:spcBef>
-                <a:spcPts val="1000"/>
-              </a:spcBef>
-              <a:spcAft>
-                <a:spcPts val="600"/>
-              </a:spcAft>
-              <a:defRPr sz="1500">
-                <a:solidFill>
-                  <a:srgbClr val="F5F7FA"/>
-                </a:solidFill>
-                <a:latin typeface="Calibri"/>
-              </a:defRPr>
-            </a:pPr>
-            <a:r>
-              <a:t>◆  Отзывы</a:t>
-            </a:r>
-          </a:p>
-          <a:p>
-            <a:pPr>
-              <a:spcBef>
-                <a:spcPts val="1000"/>
-              </a:spcBef>
-              <a:spcAft>
-                <a:spcPts val="600"/>
-              </a:spcAft>
-              <a:defRPr sz="1500">
-                <a:solidFill>
-                  <a:srgbClr val="F5F7FA"/>
-                </a:solidFill>
-                <a:latin typeface="Calibri"/>
-              </a:defRPr>
-            </a:pPr>
-            <a:r>
-              <a:t>◆  150+ клиентов</a:t>
-            </a:r>
-          </a:p>
-        </p:txBody>
-      </p:sp>
-    </p:spTree>
-  </p:cSld>
-  <p:clrMapOvr>
-    <a:masterClrMapping/>
-  </p:clrMapOvr>
-  <p:transition spd="med" advClick="1">
-    <p:push dir="l"/>
-  </p:transition>
-</p:sld>
-</file>
-
-<file path=ppt/slides/slide15.xml><?xml version="1.0" encoding="utf-8"?>
-<p:sld xmlns:a="http://schemas.openxmlformats.org/drawingml/2006/main" xmlns:p="http://schemas.openxmlformats.org/presentationml/2006/main" xmlns:r="http://schemas.openxmlformats.org/officeDocument/2006/relationships">
-  <p:cSld>
-    <p:spTree>
-      <p:nvGrpSpPr>
-        <p:cNvPr id="1" name=""/>
-        <p:cNvGrpSpPr/>
-        <p:nvPr/>
-      </p:nvGrpSpPr>
-      <p:grpSpPr/>
-      <p:pic>
-        <p:nvPicPr>
-          <p:cNvPr id="2" name="Picture 1" descr="bg-dark.png"/>
-          <p:cNvPicPr>
-            <a:picLocks noChangeAspect="1"/>
-          </p:cNvPicPr>
-          <p:nvPr/>
-        </p:nvPicPr>
-        <p:blipFill>
-          <a:blip r:embed="rId2"/>
-          <a:stretch>
-            <a:fillRect/>
-          </a:stretch>
-        </p:blipFill>
-        <p:spPr>
-          <a:xfrm>
-            <a:off x="0" y="0"/>
-            <a:ext cx="12191695" cy="6858000"/>
-          </a:xfrm>
-          <a:prstGeom prst="rect">
-            <a:avLst/>
-          </a:prstGeom>
-        </p:spPr>
-      </p:pic>
       <p:pic>
         <p:nvPicPr>
           <p:cNvPr id="3" name="Picture 2" descr="04-logo.png"/>
@@ -6292,9 +4374,25 @@
           <a:p>
             <a:pPr algn="ctr">
               <a:spcAft>
-                <a:spcPts val="1400"/>
-              </a:spcAft>
-              <a:defRPr sz="2400" b="1">
+                <a:spcPts val="800"/>
+              </a:spcAft>
+              <a:defRPr sz="1800" b="0">
+                <a:solidFill>
+                  <a:srgbClr val="F5F7FA"/>
+                </a:solidFill>
+                <a:latin typeface="Calibri"/>
+              </a:defRPr>
+            </a:pPr>
+            <a:r>
+              <a:t>+7 (473) 278-51-47  ·  +7 (900) 954-43-12</a:t>
+            </a:r>
+          </a:p>
+          <a:p>
+            <a:pPr>
+              <a:spcAft>
+                <a:spcPts val="800"/>
+              </a:spcAft>
+              <a:defRPr sz="1800" b="0">
                 <a:solidFill>
                   <a:srgbClr val="F0D98C"/>
                 </a:solidFill>
@@ -6302,39 +4400,7 @@
               </a:defRPr>
             </a:pPr>
             <a:r>
-              <a:t>gurza36.ru</a:t>
-            </a:r>
-          </a:p>
-          <a:p>
-            <a:pPr>
-              <a:spcAft>
-                <a:spcPts val="800"/>
-              </a:spcAft>
-              <a:defRPr sz="1800" b="0">
-                <a:solidFill>
-                  <a:srgbClr val="F5F7FA"/>
-                </a:solidFill>
-                <a:latin typeface="Calibri"/>
-              </a:defRPr>
-            </a:pPr>
-            <a:r>
-              <a:t>+7 (473) 278-51-47  ·  +7 (900) 954-43-12</a:t>
-            </a:r>
-          </a:p>
-          <a:p>
-            <a:pPr>
-              <a:spcAft>
-                <a:spcPts val="800"/>
-              </a:spcAft>
-              <a:defRPr sz="1800" b="0">
-                <a:solidFill>
-                  <a:srgbClr val="F5F7FA"/>
-                </a:solidFill>
-                <a:latin typeface="Calibri"/>
-              </a:defRPr>
-            </a:pPr>
-            <a:r>
-              <a:t>mike1592@yandex.ru</a:t>
+              <a:t>mike1592@yandex.ru  ·  gurza36.ru</a:t>
             </a:r>
           </a:p>
           <a:p>
@@ -6473,7 +4539,7 @@
               </a:defRPr>
             </a:pPr>
             <a:r>
-              <a:t>О проекте</a:t>
+              <a:t>О компании</a:t>
             </a:r>
           </a:p>
         </p:txBody>
@@ -6512,7 +4578,7 @@
               </a:defRPr>
             </a:pPr>
             <a:r>
-              <a:t>Суть, миссия и позиционирование</a:t>
+              <a:t>Кто мы и чем занимаемся</a:t>
             </a:r>
           </a:p>
         </p:txBody>
@@ -6755,7 +4821,7 @@
               </a:defRPr>
             </a:pPr>
             <a:r>
-              <a:t>СУТЬ</a:t>
+              <a:t>О КОМПАНИИ</a:t>
             </a:r>
           </a:p>
         </p:txBody>
@@ -6786,7 +4852,7 @@
               <a:spcAft>
                 <a:spcPts val="1400"/>
               </a:spcAft>
-              <a:defRPr sz="3800" b="1">
+              <a:defRPr sz="3400" b="1">
                 <a:solidFill>
                   <a:srgbClr val="F5F7FA"/>
                 </a:solidFill>
@@ -6794,7 +4860,7 @@
               </a:defRPr>
             </a:pPr>
             <a:r>
-              <a:t>Безопасность, проверенная временем</a:t>
+              <a:t>Работаем с 2011 года — и знаем цену доверию</a:t>
             </a:r>
           </a:p>
         </p:txBody>
@@ -6807,8 +4873,8 @@
         </p:nvSpPr>
         <p:spPr>
           <a:xfrm>
-            <a:off x="640080" y="2148840"/>
-            <a:ext cx="5669280" cy="1645920"/>
+            <a:off x="640080" y="2286000"/>
+            <a:ext cx="10058400" cy="2011680"/>
           </a:xfrm>
           <a:prstGeom prst="rect">
             <a:avLst/>
@@ -6833,7 +4899,7 @@
               </a:defRPr>
             </a:pPr>
             <a:r>
-              <a:t>ЧОО «Гюрза» — частная охранная организация в Воронеже и области.</a:t>
+              <a:t>ООО ЧОО «Гюрза» оказывает услуги частной охраны высокого качества</a:t>
             </a:r>
           </a:p>
           <a:p>
@@ -6841,6 +4907,22 @@
               <a:spcAft>
                 <a:spcPts val="800"/>
               </a:spcAft>
+              <a:defRPr sz="1800" b="0">
+                <a:solidFill>
+                  <a:srgbClr val="F5F7FA"/>
+                </a:solidFill>
+                <a:latin typeface="Calibri"/>
+              </a:defRPr>
+            </a:pPr>
+            <a:r>
+              <a:t>по доступным ценам — для физических и юридических лиц.</a:t>
+            </a:r>
+          </a:p>
+          <a:p>
+            <a:pPr>
+              <a:spcAft>
+                <a:spcPts val="800"/>
+              </a:spcAft>
               <a:defRPr sz="800" b="0">
                 <a:solidFill>
                   <a:srgbClr val="F5F7FA"/>
@@ -6854,7 +4936,36 @@
               <a:spcAft>
                 <a:spcPts val="800"/>
               </a:spcAft>
-              <a:defRPr sz="1800" b="1">
+              <a:defRPr sz="1700" b="0">
+                <a:solidFill>
+                  <a:srgbClr val="919BAF"/>
+                </a:solidFill>
+                <a:latin typeface="Calibri"/>
+              </a:defRPr>
+            </a:pPr>
+            <a:r>
+              <a:t>Разовые задачи и долгосрочные договоры. Воронеж и область.</a:t>
+            </a:r>
+          </a:p>
+          <a:p>
+            <a:pPr>
+              <a:spcAft>
+                <a:spcPts val="800"/>
+              </a:spcAft>
+              <a:defRPr sz="800" b="0">
+                <a:solidFill>
+                  <a:srgbClr val="F5F7FA"/>
+                </a:solidFill>
+                <a:latin typeface="Calibri"/>
+              </a:defRPr>
+            </a:pPr>
+          </a:p>
+          <a:p>
+            <a:pPr>
+              <a:spcAft>
+                <a:spcPts val="800"/>
+              </a:spcAft>
+              <a:defRPr sz="1700" b="1">
                 <a:solidFill>
                   <a:srgbClr val="F0D98C"/>
                 </a:solidFill>
@@ -6862,36 +4973,7 @@
               </a:defRPr>
             </a:pPr>
             <a:r>
-              <a:t>Сайт — не визитка ради галочки, а инструмент доверия и продаж.</a:t>
-            </a:r>
-          </a:p>
-          <a:p>
-            <a:pPr>
-              <a:spcAft>
-                <a:spcPts val="800"/>
-              </a:spcAft>
-              <a:defRPr sz="800" b="0">
-                <a:solidFill>
-                  <a:srgbClr val="F5F7FA"/>
-                </a:solidFill>
-                <a:latin typeface="Calibri"/>
-              </a:defRPr>
-            </a:pPr>
-          </a:p>
-          <a:p>
-            <a:pPr>
-              <a:spcAft>
-                <a:spcPts val="800"/>
-              </a:spcAft>
-              <a:defRPr sz="1700" b="0">
-                <a:solidFill>
-                  <a:srgbClr val="919BAF"/>
-                </a:solidFill>
-                <a:latin typeface="Calibri"/>
-              </a:defRPr>
-            </a:pPr>
-            <a:r>
-              <a:t>Клиент за 30 секунд понимает: кто вы, чем сильны, как связаться.</a:t>
+              <a:t>Гюрза — символ молниеносной реакции и абсолютного контроля территории.</a:t>
             </a:r>
           </a:p>
         </p:txBody>
@@ -6904,7 +4986,7 @@
         </p:nvSpPr>
         <p:spPr>
           <a:xfrm>
-            <a:off x="640080" y="4389120"/>
+            <a:off x="640080" y="4572000"/>
             <a:ext cx="3474720" cy="1417320"/>
           </a:xfrm>
           <a:prstGeom prst="rect">
@@ -6949,7 +5031,7 @@
         </p:nvSpPr>
         <p:spPr>
           <a:xfrm>
-            <a:off x="822959" y="4526280"/>
+            <a:off x="822959" y="4709160"/>
             <a:ext cx="3108960" cy="640080"/>
           </a:xfrm>
           <a:prstGeom prst="rect">
@@ -6975,7 +5057,7 @@
               </a:defRPr>
             </a:pPr>
             <a:r>
-              <a:t>15+</a:t>
+              <a:t>2011</a:t>
             </a:r>
           </a:p>
         </p:txBody>
@@ -6988,7 +5070,7 @@
         </p:nvSpPr>
         <p:spPr>
           <a:xfrm>
-            <a:off x="822959" y="5166359"/>
+            <a:off x="822959" y="5349240"/>
             <a:ext cx="3108960" cy="548640"/>
           </a:xfrm>
           <a:prstGeom prst="rect">
@@ -7014,7 +5096,7 @@
               </a:defRPr>
             </a:pPr>
             <a:r>
-              <a:t>лет на рынке</a:t>
+              <a:t>год основания</a:t>
             </a:r>
           </a:p>
         </p:txBody>
@@ -7027,7 +5109,7 @@
         </p:nvSpPr>
         <p:spPr>
           <a:xfrm>
-            <a:off x="4251959" y="4389120"/>
+            <a:off x="4251959" y="4572000"/>
             <a:ext cx="3474720" cy="1417320"/>
           </a:xfrm>
           <a:prstGeom prst="rect">
@@ -7072,7 +5154,7 @@
         </p:nvSpPr>
         <p:spPr>
           <a:xfrm>
-            <a:off x="4434840" y="4526280"/>
+            <a:off x="4434840" y="4709160"/>
             <a:ext cx="3108960" cy="640080"/>
           </a:xfrm>
           <a:prstGeom prst="rect">
@@ -7111,7 +5193,7 @@
         </p:nvSpPr>
         <p:spPr>
           <a:xfrm>
-            <a:off x="4434840" y="5166359"/>
+            <a:off x="4434840" y="5349240"/>
             <a:ext cx="3108960" cy="548640"/>
           </a:xfrm>
           <a:prstGeom prst="rect">
@@ -7150,7 +5232,7 @@
         </p:nvSpPr>
         <p:spPr>
           <a:xfrm>
-            <a:off x="7863840" y="4389120"/>
+            <a:off x="7863840" y="4572000"/>
             <a:ext cx="3474720" cy="1417320"/>
           </a:xfrm>
           <a:prstGeom prst="rect">
@@ -7195,7 +5277,7 @@
         </p:nvSpPr>
         <p:spPr>
           <a:xfrm>
-            <a:off x="8046719" y="4526280"/>
+            <a:off x="8046719" y="4709160"/>
             <a:ext cx="3108960" cy="640080"/>
           </a:xfrm>
           <a:prstGeom prst="rect">
@@ -7221,7 +5303,7 @@
               </a:defRPr>
             </a:pPr>
             <a:r>
-              <a:t>6</a:t>
+              <a:t>100%</a:t>
             </a:r>
           </a:p>
         </p:txBody>
@@ -7234,7 +5316,7 @@
         </p:nvSpPr>
         <p:spPr>
           <a:xfrm>
-            <a:off x="8046719" y="5166359"/>
+            <a:off x="8046719" y="5349240"/>
             <a:ext cx="3108960" cy="548640"/>
           </a:xfrm>
           <a:prstGeom prst="rect">
@@ -7260,7 +5342,7 @@
               </a:defRPr>
             </a:pPr>
             <a:r>
-              <a:t>направлений услуг</a:t>
+              <a:t>опытные специалисты</a:t>
             </a:r>
           </a:p>
         </p:txBody>
@@ -7383,7 +5465,7 @@
               </a:defRPr>
             </a:pPr>
             <a:r>
-              <a:t>Что мы делаем</a:t>
+              <a:t>Услуги</a:t>
             </a:r>
           </a:p>
         </p:txBody>
@@ -7422,7 +5504,7 @@
               </a:defRPr>
             </a:pPr>
             <a:r>
-              <a:t>Услуги и специализация</a:t>
+              <a:t>Что мы охраняем</a:t>
             </a:r>
           </a:p>
         </p:txBody>
@@ -7665,7 +5747,7 @@
               </a:defRPr>
             </a:pPr>
             <a:r>
-              <a:t>УСЛУГИ</a:t>
+              <a:t>УСЛУГИ ПОД КЛЮЧ</a:t>
             </a:r>
           </a:p>
         </p:txBody>
@@ -7788,7 +5870,7 @@
               </a:defRPr>
             </a:pPr>
             <a:r>
-              <a:t>Офисы, бизнес-центры, порядок и безопасность</a:t>
+              <a:t>Офисы, бизнес-центры, порядок и безопасность персонала</a:t>
             </a:r>
           </a:p>
         </p:txBody>
@@ -7911,7 +5993,7 @@
               </a:defRPr>
             </a:pPr>
             <a:r>
-              <a:t>Площадки, техника, материалы</a:t>
+              <a:t>Площадки, техника, материалы на всех этапах</a:t>
             </a:r>
           </a:p>
         </p:txBody>
@@ -8034,7 +6116,7 @@
               </a:defRPr>
             </a:pPr>
             <a:r>
-              <a:t>ТМЦ, логистика, сохранность</a:t>
+              <a:t>ТМЦ, логистика, сохранность грузов</a:t>
             </a:r>
           </a:p>
         </p:txBody>
@@ -8157,7 +6239,7 @@
               </a:defRPr>
             </a:pPr>
             <a:r>
-              <a:t>КПП, контроль доступа</a:t>
+              <a:t>КПП, контроль доступа, внутриобъектовый режим</a:t>
             </a:r>
           </a:p>
         </p:txBody>
@@ -8280,7 +6362,7 @@
               </a:defRPr>
             </a:pPr>
             <a:r>
-              <a:t>Зерновые и масличные базы — ключевая специализация</a:t>
+              <a:t>Зерновые и масличные базы — наша специализация</a:t>
             </a:r>
           </a:p>
         </p:txBody>
@@ -8403,7 +6485,7 @@
               </a:defRPr>
             </a:pPr>
             <a:r>
-              <a:t>Экспертная оценка и система охраны</a:t>
+              <a:t>Оценка объекта и индивидуальная система охраны</a:t>
             </a:r>
           </a:p>
         </p:txBody>
@@ -8526,7 +6608,7 @@
               </a:defRPr>
             </a:pPr>
             <a:r>
-              <a:t>Сайт gurza36.ru</a:t>
+              <a:t>Преимущества</a:t>
             </a:r>
           </a:p>
         </p:txBody>
@@ -8565,7 +6647,7 @@
               </a:defRPr>
             </a:pPr>
             <a:r>
-              <a:t>Дизайн, технологии, скриншоты</a:t>
+              <a:t>Почему выбирают нас</a:t>
             </a:r>
           </a:p>
         </p:txBody>
@@ -8782,8 +6864,8 @@
         </p:nvSpPr>
         <p:spPr>
           <a:xfrm>
-            <a:off x="640080" y="868680"/>
-            <a:ext cx="9144000" cy="548640"/>
+            <a:off x="640080" y="914400"/>
+            <a:ext cx="9144000" cy="457200"/>
           </a:xfrm>
           <a:prstGeom prst="rect">
             <a:avLst/>
@@ -8798,9 +6880,9 @@
           <a:p>
             <a:pPr algn="l">
               <a:spcAft>
-                <a:spcPts val="1400"/>
-              </a:spcAft>
-              <a:defRPr sz="3200" b="1">
+                <a:spcPts val="800"/>
+              </a:spcAft>
+              <a:defRPr sz="1400" b="1">
                 <a:solidFill>
                   <a:srgbClr val="D4AF37"/>
                 </a:solidFill>
@@ -8808,7 +6890,7 @@
               </a:defRPr>
             </a:pPr>
             <a:r>
-              <a:t>Главная страница</a:t>
+              <a:t>ПРЕИМУЩЕСТВА</a:t>
             </a:r>
           </a:p>
         </p:txBody>
@@ -8821,8 +6903,8 @@
         </p:nvSpPr>
         <p:spPr>
           <a:xfrm>
-            <a:off x="640080" y="1325880"/>
-            <a:ext cx="9144000" cy="365760"/>
+            <a:off x="640080" y="1371600"/>
+            <a:ext cx="10058400" cy="640080"/>
           </a:xfrm>
           <a:prstGeom prst="rect">
             <a:avLst/>
@@ -8837,61 +6919,39 @@
           <a:p>
             <a:pPr algn="l">
               <a:spcAft>
-                <a:spcPts val="800"/>
-              </a:spcAft>
-              <a:defRPr sz="1600" b="0">
-                <a:solidFill>
-                  <a:srgbClr val="919BAF"/>
-                </a:solidFill>
-                <a:latin typeface="Calibri"/>
-              </a:defRPr>
-            </a:pPr>
-            <a:r>
-              <a:t>3D-соты · золотой брендинг · CTA</a:t>
-            </a:r>
-          </a:p>
-        </p:txBody>
-      </p:sp>
-      <p:pic>
-        <p:nvPicPr>
-          <p:cNvPr id="8" name="Picture 7" descr="01-main.png"/>
-          <p:cNvPicPr>
-            <a:picLocks noChangeAspect="1"/>
-          </p:cNvPicPr>
-          <p:nvPr/>
-        </p:nvPicPr>
-        <p:blipFill>
-          <a:blip r:embed="rId3"/>
-          <a:stretch>
-            <a:fillRect/>
-          </a:stretch>
-        </p:blipFill>
-        <p:spPr>
-          <a:xfrm>
-            <a:off x="411480" y="1691640"/>
-            <a:ext cx="11338560" cy="7086600"/>
-          </a:xfrm>
-          <a:prstGeom prst="rect">
-            <a:avLst/>
-          </a:prstGeom>
-        </p:spPr>
-      </p:pic>
-      <p:sp>
-        <p:nvSpPr>
-          <p:cNvPr id="9" name="Rectangle 8"/>
+                <a:spcPts val="1400"/>
+              </a:spcAft>
+              <a:defRPr sz="3200" b="1">
+                <a:solidFill>
+                  <a:srgbClr val="F5F7FA"/>
+                </a:solidFill>
+                <a:latin typeface="Calibri"/>
+              </a:defRPr>
+            </a:pPr>
+            <a:r>
+              <a:t>Сотрудничая с нами, вы получаете</a:t>
+            </a:r>
+          </a:p>
+        </p:txBody>
+      </p:sp>
+      <p:sp>
+        <p:nvSpPr>
+          <p:cNvPr id="8" name="Rectangle 7"/>
           <p:cNvSpPr/>
           <p:nvPr/>
         </p:nvSpPr>
         <p:spPr>
           <a:xfrm>
-            <a:off x="411480" y="1691640"/>
-            <a:ext cx="11338560" cy="4709160"/>
-          </a:xfrm>
-          <a:prstGeom prst="rect">
-            <a:avLst/>
-          </a:prstGeom>
-          <a:noFill/>
-          <a:ln w="15875">
+            <a:off x="640080" y="2286000"/>
+            <a:ext cx="3474720" cy="1417320"/>
+          </a:xfrm>
+          <a:prstGeom prst="rect">
+            <a:avLst/>
+          </a:prstGeom>
+          <a:solidFill>
+            <a:srgbClr val="121824"/>
+          </a:solidFill>
+          <a:ln w="6350">
             <a:solidFill>
               <a:srgbClr val="D4AF37"/>
             </a:solidFill>
@@ -8919,13 +6979,436 @@
           </a:p>
         </p:txBody>
       </p:sp>
+      <p:sp>
+        <p:nvSpPr>
+          <p:cNvPr id="9" name="TextBox 8"/>
+          <p:cNvSpPr txBox="1"/>
+          <p:nvPr/>
+        </p:nvSpPr>
+        <p:spPr>
+          <a:xfrm>
+            <a:off x="822959" y="2423160"/>
+            <a:ext cx="3108960" cy="640080"/>
+          </a:xfrm>
+          <a:prstGeom prst="rect">
+            <a:avLst/>
+          </a:prstGeom>
+          <a:noFill/>
+        </p:spPr>
+        <p:txBody>
+          <a:bodyPr wrap="square" anchor="t">
+            <a:spAutoFit/>
+          </a:bodyPr>
+          <a:lstStyle/>
+          <a:p>
+            <a:pPr algn="l">
+              <a:spcAft>
+                <a:spcPts val="1400"/>
+              </a:spcAft>
+              <a:defRPr sz="3600" b="1">
+                <a:solidFill>
+                  <a:srgbClr val="D4AF37"/>
+                </a:solidFill>
+                <a:latin typeface="Calibri"/>
+              </a:defRPr>
+            </a:pPr>
+            <a:r>
+              <a:t>15+</a:t>
+            </a:r>
+          </a:p>
+        </p:txBody>
+      </p:sp>
+      <p:sp>
+        <p:nvSpPr>
+          <p:cNvPr id="10" name="TextBox 9"/>
+          <p:cNvSpPr txBox="1"/>
+          <p:nvPr/>
+        </p:nvSpPr>
+        <p:spPr>
+          <a:xfrm>
+            <a:off x="822959" y="3063240"/>
+            <a:ext cx="3108960" cy="548640"/>
+          </a:xfrm>
+          <a:prstGeom prst="rect">
+            <a:avLst/>
+          </a:prstGeom>
+          <a:noFill/>
+        </p:spPr>
+        <p:txBody>
+          <a:bodyPr wrap="square" anchor="t">
+            <a:spAutoFit/>
+          </a:bodyPr>
+          <a:lstStyle/>
+          <a:p>
+            <a:pPr algn="l">
+              <a:spcAft>
+                <a:spcPts val="800"/>
+              </a:spcAft>
+              <a:defRPr sz="1300" b="0">
+                <a:solidFill>
+                  <a:srgbClr val="919BAF"/>
+                </a:solidFill>
+                <a:latin typeface="Calibri"/>
+              </a:defRPr>
+            </a:pPr>
+            <a:r>
+              <a:t>лет на рынке охранных услуг</a:t>
+            </a:r>
+          </a:p>
+        </p:txBody>
+      </p:sp>
+      <p:sp>
+        <p:nvSpPr>
+          <p:cNvPr id="11" name="Rectangle 10"/>
+          <p:cNvSpPr/>
+          <p:nvPr/>
+        </p:nvSpPr>
+        <p:spPr>
+          <a:xfrm>
+            <a:off x="4251959" y="2286000"/>
+            <a:ext cx="3474720" cy="1417320"/>
+          </a:xfrm>
+          <a:prstGeom prst="rect">
+            <a:avLst/>
+          </a:prstGeom>
+          <a:solidFill>
+            <a:srgbClr val="121824"/>
+          </a:solidFill>
+          <a:ln w="6350">
+            <a:solidFill>
+              <a:srgbClr val="D4AF37"/>
+            </a:solidFill>
+          </a:ln>
+        </p:spPr>
+        <p:style>
+          <a:lnRef idx="1">
+            <a:schemeClr val="accent1"/>
+          </a:lnRef>
+          <a:fillRef idx="3">
+            <a:schemeClr val="accent1"/>
+          </a:fillRef>
+          <a:effectRef idx="2">
+            <a:schemeClr val="accent1"/>
+          </a:effectRef>
+          <a:fontRef idx="minor">
+            <a:schemeClr val="lt1"/>
+          </a:fontRef>
+        </p:style>
+        <p:txBody>
+          <a:bodyPr rtlCol="0" anchor="ctr"/>
+          <a:lstStyle/>
+          <a:p>
+            <a:pPr algn="ctr"/>
+          </a:p>
+        </p:txBody>
+      </p:sp>
+      <p:sp>
+        <p:nvSpPr>
+          <p:cNvPr id="12" name="TextBox 11"/>
+          <p:cNvSpPr txBox="1"/>
+          <p:nvPr/>
+        </p:nvSpPr>
+        <p:spPr>
+          <a:xfrm>
+            <a:off x="4434840" y="2423160"/>
+            <a:ext cx="3108960" cy="640080"/>
+          </a:xfrm>
+          <a:prstGeom prst="rect">
+            <a:avLst/>
+          </a:prstGeom>
+          <a:noFill/>
+        </p:spPr>
+        <p:txBody>
+          <a:bodyPr wrap="square" anchor="t">
+            <a:spAutoFit/>
+          </a:bodyPr>
+          <a:lstStyle/>
+          <a:p>
+            <a:pPr algn="l">
+              <a:spcAft>
+                <a:spcPts val="1400"/>
+              </a:spcAft>
+              <a:defRPr sz="3600" b="1">
+                <a:solidFill>
+                  <a:srgbClr val="D4AF37"/>
+                </a:solidFill>
+                <a:latin typeface="Calibri"/>
+              </a:defRPr>
+            </a:pPr>
+            <a:r>
+              <a:t>100%</a:t>
+            </a:r>
+          </a:p>
+        </p:txBody>
+      </p:sp>
+      <p:sp>
+        <p:nvSpPr>
+          <p:cNvPr id="13" name="TextBox 12"/>
+          <p:cNvSpPr txBox="1"/>
+          <p:nvPr/>
+        </p:nvSpPr>
+        <p:spPr>
+          <a:xfrm>
+            <a:off x="4434840" y="3063240"/>
+            <a:ext cx="3108960" cy="548640"/>
+          </a:xfrm>
+          <a:prstGeom prst="rect">
+            <a:avLst/>
+          </a:prstGeom>
+          <a:noFill/>
+        </p:spPr>
+        <p:txBody>
+          <a:bodyPr wrap="square" anchor="t">
+            <a:spAutoFit/>
+          </a:bodyPr>
+          <a:lstStyle/>
+          <a:p>
+            <a:pPr algn="l">
+              <a:spcAft>
+                <a:spcPts val="800"/>
+              </a:spcAft>
+              <a:defRPr sz="1300" b="0">
+                <a:solidFill>
+                  <a:srgbClr val="919BAF"/>
+                </a:solidFill>
+                <a:latin typeface="Calibri"/>
+              </a:defRPr>
+            </a:pPr>
+            <a:r>
+              <a:t>специалисты высокого класса</a:t>
+            </a:r>
+          </a:p>
+        </p:txBody>
+      </p:sp>
+      <p:sp>
+        <p:nvSpPr>
+          <p:cNvPr id="14" name="Rectangle 13"/>
+          <p:cNvSpPr/>
+          <p:nvPr/>
+        </p:nvSpPr>
+        <p:spPr>
+          <a:xfrm>
+            <a:off x="7863840" y="2286000"/>
+            <a:ext cx="3474720" cy="1417320"/>
+          </a:xfrm>
+          <a:prstGeom prst="rect">
+            <a:avLst/>
+          </a:prstGeom>
+          <a:solidFill>
+            <a:srgbClr val="121824"/>
+          </a:solidFill>
+          <a:ln w="6350">
+            <a:solidFill>
+              <a:srgbClr val="D4AF37"/>
+            </a:solidFill>
+          </a:ln>
+        </p:spPr>
+        <p:style>
+          <a:lnRef idx="1">
+            <a:schemeClr val="accent1"/>
+          </a:lnRef>
+          <a:fillRef idx="3">
+            <a:schemeClr val="accent1"/>
+          </a:fillRef>
+          <a:effectRef idx="2">
+            <a:schemeClr val="accent1"/>
+          </a:effectRef>
+          <a:fontRef idx="minor">
+            <a:schemeClr val="lt1"/>
+          </a:fontRef>
+        </p:style>
+        <p:txBody>
+          <a:bodyPr rtlCol="0" anchor="ctr"/>
+          <a:lstStyle/>
+          <a:p>
+            <a:pPr algn="ctr"/>
+          </a:p>
+        </p:txBody>
+      </p:sp>
+      <p:sp>
+        <p:nvSpPr>
+          <p:cNvPr id="15" name="TextBox 14"/>
+          <p:cNvSpPr txBox="1"/>
+          <p:nvPr/>
+        </p:nvSpPr>
+        <p:spPr>
+          <a:xfrm>
+            <a:off x="8046719" y="2423160"/>
+            <a:ext cx="3108960" cy="640080"/>
+          </a:xfrm>
+          <a:prstGeom prst="rect">
+            <a:avLst/>
+          </a:prstGeom>
+          <a:noFill/>
+        </p:spPr>
+        <p:txBody>
+          <a:bodyPr wrap="square" anchor="t">
+            <a:spAutoFit/>
+          </a:bodyPr>
+          <a:lstStyle/>
+          <a:p>
+            <a:pPr algn="l">
+              <a:spcAft>
+                <a:spcPts val="1400"/>
+              </a:spcAft>
+              <a:defRPr sz="3600" b="1">
+                <a:solidFill>
+                  <a:srgbClr val="D4AF37"/>
+                </a:solidFill>
+                <a:latin typeface="Calibri"/>
+              </a:defRPr>
+            </a:pPr>
+            <a:r>
+              <a:t>24/7</a:t>
+            </a:r>
+          </a:p>
+        </p:txBody>
+      </p:sp>
+      <p:sp>
+        <p:nvSpPr>
+          <p:cNvPr id="16" name="TextBox 15"/>
+          <p:cNvSpPr txBox="1"/>
+          <p:nvPr/>
+        </p:nvSpPr>
+        <p:spPr>
+          <a:xfrm>
+            <a:off x="8046719" y="3063240"/>
+            <a:ext cx="3108960" cy="548640"/>
+          </a:xfrm>
+          <a:prstGeom prst="rect">
+            <a:avLst/>
+          </a:prstGeom>
+          <a:noFill/>
+        </p:spPr>
+        <p:txBody>
+          <a:bodyPr wrap="square" anchor="t">
+            <a:spAutoFit/>
+          </a:bodyPr>
+          <a:lstStyle/>
+          <a:p>
+            <a:pPr algn="l">
+              <a:spcAft>
+                <a:spcPts val="800"/>
+              </a:spcAft>
+              <a:defRPr sz="1300" b="0">
+                <a:solidFill>
+                  <a:srgbClr val="919BAF"/>
+                </a:solidFill>
+                <a:latin typeface="Calibri"/>
+              </a:defRPr>
+            </a:pPr>
+            <a:r>
+              <a:t>непрерывная охрана</a:t>
+            </a:r>
+          </a:p>
+        </p:txBody>
+      </p:sp>
+      <p:sp>
+        <p:nvSpPr>
+          <p:cNvPr id="17" name="TextBox 16"/>
+          <p:cNvSpPr txBox="1"/>
+          <p:nvPr/>
+        </p:nvSpPr>
+        <p:spPr>
+          <a:xfrm>
+            <a:off x="731520" y="3931920"/>
+            <a:ext cx="10515600" cy="4114800"/>
+          </a:xfrm>
+          <a:prstGeom prst="rect">
+            <a:avLst/>
+          </a:prstGeom>
+          <a:noFill/>
+        </p:spPr>
+        <p:txBody>
+          <a:bodyPr wrap="square" anchor="t">
+            <a:spAutoFit/>
+          </a:bodyPr>
+          <a:lstStyle/>
+          <a:p>
+            <a:pPr algn="l">
+              <a:spcBef>
+                <a:spcPts val="1000"/>
+              </a:spcBef>
+              <a:spcAft>
+                <a:spcPts val="600"/>
+              </a:spcAft>
+              <a:defRPr sz="1800">
+                <a:solidFill>
+                  <a:srgbClr val="F5F7FA"/>
+                </a:solidFill>
+                <a:latin typeface="Calibri"/>
+              </a:defRPr>
+            </a:pPr>
+            <a:r>
+              <a:t>◆  Любой бюджет — от экономного до высокобюджетного решения</a:t>
+            </a:r>
+          </a:p>
+          <a:p>
+            <a:pPr>
+              <a:spcBef>
+                <a:spcPts val="1000"/>
+              </a:spcBef>
+              <a:spcAft>
+                <a:spcPts val="600"/>
+              </a:spcAft>
+              <a:defRPr sz="1800">
+                <a:solidFill>
+                  <a:srgbClr val="F5F7FA"/>
+                </a:solidFill>
+                <a:latin typeface="Calibri"/>
+              </a:defRPr>
+            </a:pPr>
+            <a:r>
+              <a:t>◆  Индивидуальный подход к каждому объекту</a:t>
+            </a:r>
+          </a:p>
+          <a:p>
+            <a:pPr>
+              <a:spcBef>
+                <a:spcPts val="1000"/>
+              </a:spcBef>
+              <a:spcAft>
+                <a:spcPts val="600"/>
+              </a:spcAft>
+              <a:defRPr sz="1800">
+                <a:solidFill>
+                  <a:srgbClr val="F5F7FA"/>
+                </a:solidFill>
+                <a:latin typeface="Calibri"/>
+              </a:defRPr>
+            </a:pPr>
+            <a:r>
+              <a:t>◆  Оперативная реакция и чёткий контроль территории</a:t>
+            </a:r>
+          </a:p>
+          <a:p>
+            <a:pPr>
+              <a:spcBef>
+                <a:spcPts val="1000"/>
+              </a:spcBef>
+              <a:spcAft>
+                <a:spcPts val="600"/>
+              </a:spcAft>
+              <a:defRPr sz="1800">
+                <a:solidFill>
+                  <a:srgbClr val="F5F7FA"/>
+                </a:solidFill>
+                <a:latin typeface="Calibri"/>
+              </a:defRPr>
+            </a:pPr>
+            <a:r>
+              <a:t>◆  Профессиональная оценка рисков перед началом работы</a:t>
+            </a:r>
+          </a:p>
+        </p:txBody>
+      </p:sp>
     </p:spTree>
   </p:cSld>
   <p:clrMapOvr>
     <a:masterClrMapping/>
   </p:clrMapOvr>
   <p:transition spd="med" advClick="1">
-    <p:push dir="l"/>
+    <p:fadeThroughBlack/>
   </p:transition>
 </p:sld>
 </file>
@@ -9092,8 +7575,8 @@
         </p:nvSpPr>
         <p:spPr>
           <a:xfrm>
-            <a:off x="640080" y="868680"/>
-            <a:ext cx="9144000" cy="548640"/>
+            <a:off x="640080" y="914400"/>
+            <a:ext cx="9144000" cy="457200"/>
           </a:xfrm>
           <a:prstGeom prst="rect">
             <a:avLst/>
@@ -9108,9 +7591,9 @@
           <a:p>
             <a:pPr algn="l">
               <a:spcAft>
-                <a:spcPts val="1400"/>
-              </a:spcAft>
-              <a:defRPr sz="3200" b="1">
+                <a:spcPts val="800"/>
+              </a:spcAft>
+              <a:defRPr sz="1400" b="1">
                 <a:solidFill>
                   <a:srgbClr val="D4AF37"/>
                 </a:solidFill>
@@ -9118,7 +7601,7 @@
               </a:defRPr>
             </a:pPr>
             <a:r>
-              <a:t>О компании</a:t>
+              <a:t>СПЕЦИАЛИЗАЦИЯ</a:t>
             </a:r>
           </a:p>
         </p:txBody>
@@ -9132,7 +7615,7 @@
         <p:spPr>
           <a:xfrm>
             <a:off x="640080" y="1325880"/>
-            <a:ext cx="9144000" cy="365760"/>
+            <a:ext cx="10058400" cy="731520"/>
           </a:xfrm>
           <a:prstGeom prst="rect">
             <a:avLst/>
@@ -9147,9 +7630,109 @@
           <a:p>
             <a:pPr algn="l">
               <a:spcAft>
+                <a:spcPts val="1400"/>
+              </a:spcAft>
+              <a:defRPr sz="3400" b="1">
+                <a:solidFill>
+                  <a:srgbClr val="F5F7FA"/>
+                </a:solidFill>
+                <a:latin typeface="Calibri"/>
+              </a:defRPr>
+            </a:pPr>
+            <a:r>
+              <a:t>Охрана агропредприятий и зерновых баз</a:t>
+            </a:r>
+          </a:p>
+        </p:txBody>
+      </p:sp>
+      <p:sp>
+        <p:nvSpPr>
+          <p:cNvPr id="8" name="TextBox 7"/>
+          <p:cNvSpPr txBox="1"/>
+          <p:nvPr/>
+        </p:nvSpPr>
+        <p:spPr>
+          <a:xfrm>
+            <a:off x="640080" y="2286000"/>
+            <a:ext cx="5943600" cy="2286000"/>
+          </a:xfrm>
+          <a:prstGeom prst="rect">
+            <a:avLst/>
+          </a:prstGeom>
+          <a:noFill/>
+        </p:spPr>
+        <p:txBody>
+          <a:bodyPr wrap="square" anchor="t">
+            <a:spAutoFit/>
+          </a:bodyPr>
+          <a:lstStyle/>
+          <a:p>
+            <a:pPr algn="l">
+              <a:spcAft>
                 <a:spcPts val="800"/>
               </a:spcAft>
-              <a:defRPr sz="1600" b="0">
+              <a:defRPr sz="1800" b="0">
+                <a:solidFill>
+                  <a:srgbClr val="F5F7FA"/>
+                </a:solidFill>
+                <a:latin typeface="Calibri"/>
+              </a:defRPr>
+            </a:pPr>
+            <a:r>
+              <a:t>Особая компетенция — охрана сельхозпредприятий и баз</a:t>
+            </a:r>
+          </a:p>
+          <a:p>
+            <a:pPr>
+              <a:spcAft>
+                <a:spcPts val="800"/>
+              </a:spcAft>
+              <a:defRPr sz="1800" b="0">
+                <a:solidFill>
+                  <a:srgbClr val="F5F7FA"/>
+                </a:solidFill>
+                <a:latin typeface="Calibri"/>
+              </a:defRPr>
+            </a:pPr>
+            <a:r>
+              <a:t>по приёмке, подработке, хранению и отпуску</a:t>
+            </a:r>
+          </a:p>
+          <a:p>
+            <a:pPr>
+              <a:spcAft>
+                <a:spcPts val="800"/>
+              </a:spcAft>
+              <a:defRPr sz="1800" b="1">
+                <a:solidFill>
+                  <a:srgbClr val="F0D98C"/>
+                </a:solidFill>
+                <a:latin typeface="Calibri"/>
+              </a:defRPr>
+            </a:pPr>
+            <a:r>
+              <a:t>зерновых и масличной продукции.</a:t>
+            </a:r>
+          </a:p>
+          <a:p>
+            <a:pPr>
+              <a:spcAft>
+                <a:spcPts val="800"/>
+              </a:spcAft>
+              <a:defRPr sz="1000" b="0">
+                <a:solidFill>
+                  <a:srgbClr val="F5F7FA"/>
+                </a:solidFill>
+                <a:latin typeface="Calibri"/>
+              </a:defRPr>
+            </a:pPr>
+          </a:p>
+          <a:p>
+            <a:pPr>
+              <a:spcAft>
+                <a:spcPts val="800"/>
+              </a:spcAft>
+              <a:defRPr sz="1700" b="0">
                 <a:solidFill>
                   <a:srgbClr val="919BAF"/>
                 </a:solidFill>
@@ -9157,14 +7740,30 @@
               </a:defRPr>
             </a:pPr>
             <a:r>
-              <a:t>История · доверие · специализация на агро</a:t>
+              <a:t>Понимаем специфику сезонных рисков, логистики и</a:t>
+            </a:r>
+          </a:p>
+          <a:p>
+            <a:pPr>
+              <a:spcAft>
+                <a:spcPts val="800"/>
+              </a:spcAft>
+              <a:defRPr sz="1700" b="0">
+                <a:solidFill>
+                  <a:srgbClr val="919BAF"/>
+                </a:solidFill>
+                <a:latin typeface="Calibri"/>
+              </a:defRPr>
+            </a:pPr>
+            <a:r>
+              <a:t>сохранности урожая — работаем точечно под задачу.</a:t>
             </a:r>
           </a:p>
         </p:txBody>
       </p:sp>
       <p:pic>
         <p:nvPicPr>
-          <p:cNvPr id="8" name="Picture 7" descr="02-about.png"/>
+          <p:cNvPr id="9" name="Picture 8" descr="02-about.png"/>
           <p:cNvPicPr>
             <a:picLocks noChangeAspect="1"/>
           </p:cNvPicPr>
@@ -9178,57 +7777,14 @@
         </p:blipFill>
         <p:spPr>
           <a:xfrm>
-            <a:off x="411480" y="1691640"/>
-            <a:ext cx="11338560" cy="7086600"/>
+            <a:off x="6675120" y="1645920"/>
+            <a:ext cx="5029200" cy="3143250"/>
           </a:xfrm>
           <a:prstGeom prst="rect">
             <a:avLst/>
           </a:prstGeom>
         </p:spPr>
       </p:pic>
-      <p:sp>
-        <p:nvSpPr>
-          <p:cNvPr id="9" name="Rectangle 8"/>
-          <p:cNvSpPr/>
-          <p:nvPr/>
-        </p:nvSpPr>
-        <p:spPr>
-          <a:xfrm>
-            <a:off x="411480" y="1691640"/>
-            <a:ext cx="11338560" cy="4709160"/>
-          </a:xfrm>
-          <a:prstGeom prst="rect">
-            <a:avLst/>
-          </a:prstGeom>
-          <a:noFill/>
-          <a:ln w="15875">
-            <a:solidFill>
-              <a:srgbClr val="D4AF37"/>
-            </a:solidFill>
-          </a:ln>
-        </p:spPr>
-        <p:style>
-          <a:lnRef idx="1">
-            <a:schemeClr val="accent1"/>
-          </a:lnRef>
-          <a:fillRef idx="3">
-            <a:schemeClr val="accent1"/>
-          </a:fillRef>
-          <a:effectRef idx="2">
-            <a:schemeClr val="accent1"/>
-          </a:effectRef>
-          <a:fontRef idx="minor">
-            <a:schemeClr val="lt1"/>
-          </a:fontRef>
-        </p:style>
-        <p:txBody>
-          <a:bodyPr rtlCol="0" anchor="ctr"/>
-          <a:lstStyle/>
-          <a:p>
-            <a:pPr algn="ctr"/>
-          </a:p>
-        </p:txBody>
-      </p:sp>
     </p:spTree>
   </p:cSld>
   <p:clrMapOvr>
@@ -9402,8 +7958,8 @@
         </p:nvSpPr>
         <p:spPr>
           <a:xfrm>
-            <a:off x="640080" y="868680"/>
-            <a:ext cx="9144000" cy="548640"/>
+            <a:off x="640080" y="914400"/>
+            <a:ext cx="9144000" cy="457200"/>
           </a:xfrm>
           <a:prstGeom prst="rect">
             <a:avLst/>
@@ -9418,9 +7974,9 @@
           <a:p>
             <a:pPr algn="l">
               <a:spcAft>
-                <a:spcPts val="1400"/>
-              </a:spcAft>
-              <a:defRPr sz="3200" b="1">
+                <a:spcPts val="800"/>
+              </a:spcAft>
+              <a:defRPr sz="1400" b="1">
                 <a:solidFill>
                   <a:srgbClr val="D4AF37"/>
                 </a:solidFill>
@@ -9428,7 +7984,7 @@
               </a:defRPr>
             </a:pPr>
             <a:r>
-              <a:t>Контакты</a:t>
+              <a:t>ГЕОГРАФИЯ</a:t>
             </a:r>
           </a:p>
         </p:txBody>
@@ -9442,7 +7998,7 @@
         <p:spPr>
           <a:xfrm>
             <a:off x="640080" y="1325880"/>
-            <a:ext cx="9144000" cy="365760"/>
+            <a:ext cx="10058400" cy="640080"/>
           </a:xfrm>
           <a:prstGeom prst="rect">
             <a:avLst/>
@@ -9457,85 +8013,136 @@
           <a:p>
             <a:pPr algn="l">
               <a:spcAft>
-                <a:spcPts val="800"/>
-              </a:spcAft>
-              <a:defRPr sz="1600" b="0">
-                <a:solidFill>
-                  <a:srgbClr val="919BAF"/>
-                </a:solidFill>
-                <a:latin typeface="Calibri"/>
-              </a:defRPr>
-            </a:pPr>
-            <a:r>
-              <a:t>Цифровая визитка директора · прямой набор</a:t>
-            </a:r>
-          </a:p>
-        </p:txBody>
-      </p:sp>
-      <p:pic>
-        <p:nvPicPr>
-          <p:cNvPr id="8" name="Picture 7" descr="03-contacts.png"/>
-          <p:cNvPicPr>
-            <a:picLocks noChangeAspect="1"/>
-          </p:cNvPicPr>
-          <p:nvPr/>
-        </p:nvPicPr>
-        <p:blipFill>
-          <a:blip r:embed="rId3"/>
-          <a:stretch>
-            <a:fillRect/>
-          </a:stretch>
-        </p:blipFill>
-        <p:spPr>
-          <a:xfrm>
-            <a:off x="411480" y="1691640"/>
-            <a:ext cx="11338560" cy="7086600"/>
-          </a:xfrm>
-          <a:prstGeom prst="rect">
-            <a:avLst/>
-          </a:prstGeom>
-        </p:spPr>
-      </p:pic>
-      <p:sp>
-        <p:nvSpPr>
-          <p:cNvPr id="9" name="Rectangle 8"/>
-          <p:cNvSpPr/>
-          <p:nvPr/>
-        </p:nvSpPr>
-        <p:spPr>
-          <a:xfrm>
-            <a:off x="411480" y="1691640"/>
-            <a:ext cx="11338560" cy="4709160"/>
+                <a:spcPts val="1400"/>
+              </a:spcAft>
+              <a:defRPr sz="3600" b="1">
+                <a:solidFill>
+                  <a:srgbClr val="F5F7FA"/>
+                </a:solidFill>
+                <a:latin typeface="Calibri"/>
+              </a:defRPr>
+            </a:pPr>
+            <a:r>
+              <a:t>Воронеж и Воронежская область</a:t>
+            </a:r>
+          </a:p>
+        </p:txBody>
+      </p:sp>
+      <p:sp>
+        <p:nvSpPr>
+          <p:cNvPr id="8" name="TextBox 7"/>
+          <p:cNvSpPr txBox="1"/>
+          <p:nvPr/>
+        </p:nvSpPr>
+        <p:spPr>
+          <a:xfrm>
+            <a:off x="731520" y="2194560"/>
+            <a:ext cx="10515600" cy="4114800"/>
           </a:xfrm>
           <a:prstGeom prst="rect">
             <a:avLst/>
           </a:prstGeom>
           <a:noFill/>
-          <a:ln w="15875">
-            <a:solidFill>
-              <a:srgbClr val="D4AF37"/>
-            </a:solidFill>
-          </a:ln>
-        </p:spPr>
-        <p:style>
-          <a:lnRef idx="1">
-            <a:schemeClr val="accent1"/>
-          </a:lnRef>
-          <a:fillRef idx="3">
-            <a:schemeClr val="accent1"/>
-          </a:fillRef>
-          <a:effectRef idx="2">
-            <a:schemeClr val="accent1"/>
-          </a:effectRef>
-          <a:fontRef idx="minor">
-            <a:schemeClr val="lt1"/>
-          </a:fontRef>
-        </p:style>
-        <p:txBody>
-          <a:bodyPr rtlCol="0" anchor="ctr"/>
-          <a:lstStyle/>
-          <a:p>
-            <a:pPr algn="ctr"/>
+        </p:spPr>
+        <p:txBody>
+          <a:bodyPr wrap="square" anchor="t">
+            <a:spAutoFit/>
+          </a:bodyPr>
+          <a:lstStyle/>
+          <a:p>
+            <a:pPr algn="l">
+              <a:spcBef>
+                <a:spcPts val="1000"/>
+              </a:spcBef>
+              <a:spcAft>
+                <a:spcPts val="600"/>
+              </a:spcAft>
+              <a:defRPr sz="1900">
+                <a:solidFill>
+                  <a:srgbClr val="F5F7FA"/>
+                </a:solidFill>
+                <a:latin typeface="Calibri"/>
+              </a:defRPr>
+            </a:pPr>
+            <a:r>
+              <a:t>◆  Административные и офисные здания</a:t>
+            </a:r>
+          </a:p>
+          <a:p>
+            <a:pPr>
+              <a:spcBef>
+                <a:spcPts val="1000"/>
+              </a:spcBef>
+              <a:spcAft>
+                <a:spcPts val="600"/>
+              </a:spcAft>
+              <a:defRPr sz="1900">
+                <a:solidFill>
+                  <a:srgbClr val="F5F7FA"/>
+                </a:solidFill>
+                <a:latin typeface="Calibri"/>
+              </a:defRPr>
+            </a:pPr>
+            <a:r>
+              <a:t>◆  Строительные площадки и объекты на всех стадиях</a:t>
+            </a:r>
+          </a:p>
+          <a:p>
+            <a:pPr>
+              <a:spcBef>
+                <a:spcPts val="1000"/>
+              </a:spcBef>
+              <a:spcAft>
+                <a:spcPts val="600"/>
+              </a:spcAft>
+              <a:defRPr sz="1900">
+                <a:solidFill>
+                  <a:srgbClr val="F5F7FA"/>
+                </a:solidFill>
+                <a:latin typeface="Calibri"/>
+              </a:defRPr>
+            </a:pPr>
+            <a:r>
+              <a:t>◆  Склады, логистические и производственные комплексы</a:t>
+            </a:r>
+          </a:p>
+          <a:p>
+            <a:pPr>
+              <a:spcBef>
+                <a:spcPts val="1000"/>
+              </a:spcBef>
+              <a:spcAft>
+                <a:spcPts val="600"/>
+              </a:spcAft>
+              <a:defRPr sz="1900">
+                <a:solidFill>
+                  <a:srgbClr val="F5F7FA"/>
+                </a:solidFill>
+                <a:latin typeface="Calibri"/>
+              </a:defRPr>
+            </a:pPr>
+            <a:r>
+              <a:t>◆  Сельхозпредприятия, элеваторы, зерновые базы</a:t>
+            </a:r>
+          </a:p>
+          <a:p>
+            <a:pPr>
+              <a:spcBef>
+                <a:spcPts val="1000"/>
+              </a:spcBef>
+              <a:spcAft>
+                <a:spcPts val="600"/>
+              </a:spcAft>
+              <a:defRPr sz="1900">
+                <a:solidFill>
+                  <a:srgbClr val="F5F7FA"/>
+                </a:solidFill>
+                <a:latin typeface="Calibri"/>
+              </a:defRPr>
+            </a:pPr>
+            <a:r>
+              <a:t>◆  Объекты с пропускным и внутриобъектовым режимом</a:t>
+            </a:r>
           </a:p>
         </p:txBody>
       </p:sp>
@@ -9545,7 +8152,7 @@
     <a:masterClrMapping/>
   </p:clrMapOvr>
   <p:transition spd="med" advClick="1">
-    <p:push dir="l"/>
+    <p:fadeThroughBlack/>
   </p:transition>
 </p:sld>
 </file>

--- a/presentation/gyurza-presentation.pptx
+++ b/presentation/gyurza-presentation.pptx
@@ -14,9 +14,6 @@
     <p:sldId id="262" r:id="rId13"/>
     <p:sldId id="263" r:id="rId14"/>
     <p:sldId id="264" r:id="rId15"/>
-    <p:sldId id="265" r:id="rId16"/>
-    <p:sldId id="266" r:id="rId17"/>
-    <p:sldId id="267" r:id="rId18"/>
   </p:sldIdLst>
   <p:sldSz cx="12191695" cy="6858000" type="screen4x3"/>
   <p:notesSz cx="6858000" cy="9144000"/>
@@ -3353,7 +3350,7 @@
 </p:sld>
 </file>
 
-<file path=ppt/slides/slide10.xml><?xml version="1.0" encoding="utf-8"?>
+<file path=ppt/slides/slide2.xml><?xml version="1.0" encoding="utf-8"?>
 <p:sld xmlns:a="http://schemas.openxmlformats.org/drawingml/2006/main" xmlns:p="http://schemas.openxmlformats.org/presentationml/2006/main" xmlns:r="http://schemas.openxmlformats.org/officeDocument/2006/relationships">
   <p:cSld>
     <p:spTree>
@@ -3365,7 +3362,7 @@
       <p:grpSpPr/>
       <p:pic>
         <p:nvPicPr>
-          <p:cNvPr id="2" name="Picture 1" descr="bg-dark.png"/>
+          <p:cNvPr id="2" name="Picture 1" descr="bg-dark_alt.png"/>
           <p:cNvPicPr>
             <a:picLocks noChangeAspect="1"/>
           </p:cNvPicPr>
@@ -3413,9 +3410,9 @@
               <a:spcAft>
                 <a:spcPts val="800"/>
               </a:spcAft>
-              <a:defRPr sz="1100" b="1">
-                <a:solidFill>
-                  <a:srgbClr val="D4AF37"/>
+              <a:defRPr sz="1000" b="1">
+                <a:solidFill>
+                  <a:srgbClr val="AA9146"/>
                 </a:solidFill>
                 <a:latin typeface="Calibri"/>
               </a:defRPr>
@@ -3452,7 +3449,46 @@
               <a:spcAft>
                 <a:spcPts val="800"/>
               </a:spcAft>
-              <a:defRPr sz="1100" b="1">
+              <a:defRPr sz="1000" b="0">
+                <a:solidFill>
+                  <a:srgbClr val="919BAF"/>
+                </a:solidFill>
+                <a:latin typeface="Calibri"/>
+              </a:defRPr>
+            </a:pPr>
+            <a:r>
+              <a:t>gurza36.ru</a:t>
+            </a:r>
+          </a:p>
+        </p:txBody>
+      </p:sp>
+      <p:sp>
+        <p:nvSpPr>
+          <p:cNvPr id="5" name="TextBox 4"/>
+          <p:cNvSpPr txBox="1"/>
+          <p:nvPr/>
+        </p:nvSpPr>
+        <p:spPr>
+          <a:xfrm>
+            <a:off x="640080" y="914400"/>
+            <a:ext cx="9144000" cy="457200"/>
+          </a:xfrm>
+          <a:prstGeom prst="rect">
+            <a:avLst/>
+          </a:prstGeom>
+          <a:noFill/>
+        </p:spPr>
+        <p:txBody>
+          <a:bodyPr wrap="square" anchor="t">
+            <a:spAutoFit/>
+          </a:bodyPr>
+          <a:lstStyle/>
+          <a:p>
+            <a:pPr algn="l">
+              <a:spcAft>
+                <a:spcPts val="800"/>
+              </a:spcAft>
+              <a:defRPr sz="1400" b="1">
                 <a:solidFill>
                   <a:srgbClr val="D4AF37"/>
                 </a:solidFill>
@@ -3460,28 +3496,183 @@
               </a:defRPr>
             </a:pPr>
             <a:r>
-              <a:t>gurza36.ru</a:t>
-            </a:r>
-          </a:p>
-        </p:txBody>
-      </p:sp>
-      <p:sp>
-        <p:nvSpPr>
-          <p:cNvPr id="5" name="Rectangle 4"/>
+              <a:t>О КОМПАНИИ</a:t>
+            </a:r>
+          </a:p>
+        </p:txBody>
+      </p:sp>
+      <p:sp>
+        <p:nvSpPr>
+          <p:cNvPr id="6" name="TextBox 5"/>
+          <p:cNvSpPr txBox="1"/>
+          <p:nvPr/>
+        </p:nvSpPr>
+        <p:spPr>
+          <a:xfrm>
+            <a:off x="640080" y="1325880"/>
+            <a:ext cx="10058400" cy="731520"/>
+          </a:xfrm>
+          <a:prstGeom prst="rect">
+            <a:avLst/>
+          </a:prstGeom>
+          <a:noFill/>
+        </p:spPr>
+        <p:txBody>
+          <a:bodyPr wrap="square" anchor="t">
+            <a:spAutoFit/>
+          </a:bodyPr>
+          <a:lstStyle/>
+          <a:p>
+            <a:pPr algn="l">
+              <a:spcAft>
+                <a:spcPts val="1400"/>
+              </a:spcAft>
+              <a:defRPr sz="3400" b="1">
+                <a:solidFill>
+                  <a:srgbClr val="F5F7FA"/>
+                </a:solidFill>
+                <a:latin typeface="Calibri"/>
+              </a:defRPr>
+            </a:pPr>
+            <a:r>
+              <a:t>Работаем с 2011 года — и знаем цену доверию</a:t>
+            </a:r>
+          </a:p>
+        </p:txBody>
+      </p:sp>
+      <p:sp>
+        <p:nvSpPr>
+          <p:cNvPr id="7" name="TextBox 6"/>
+          <p:cNvSpPr txBox="1"/>
+          <p:nvPr/>
+        </p:nvSpPr>
+        <p:spPr>
+          <a:xfrm>
+            <a:off x="640080" y="2286000"/>
+            <a:ext cx="10058400" cy="2011680"/>
+          </a:xfrm>
+          <a:prstGeom prst="rect">
+            <a:avLst/>
+          </a:prstGeom>
+          <a:noFill/>
+        </p:spPr>
+        <p:txBody>
+          <a:bodyPr wrap="square" anchor="t">
+            <a:spAutoFit/>
+          </a:bodyPr>
+          <a:lstStyle/>
+          <a:p>
+            <a:pPr algn="l">
+              <a:spcAft>
+                <a:spcPts val="800"/>
+              </a:spcAft>
+              <a:defRPr sz="1800" b="0">
+                <a:solidFill>
+                  <a:srgbClr val="F5F7FA"/>
+                </a:solidFill>
+                <a:latin typeface="Calibri"/>
+              </a:defRPr>
+            </a:pPr>
+            <a:r>
+              <a:t>ООО ЧОО «Гюрза» оказывает услуги частной охраны высокого качества</a:t>
+            </a:r>
+          </a:p>
+          <a:p>
+            <a:pPr>
+              <a:spcAft>
+                <a:spcPts val="800"/>
+              </a:spcAft>
+              <a:defRPr sz="1800" b="0">
+                <a:solidFill>
+                  <a:srgbClr val="F5F7FA"/>
+                </a:solidFill>
+                <a:latin typeface="Calibri"/>
+              </a:defRPr>
+            </a:pPr>
+            <a:r>
+              <a:t>по доступным ценам — для физических и юридических лиц.</a:t>
+            </a:r>
+          </a:p>
+          <a:p>
+            <a:pPr>
+              <a:spcAft>
+                <a:spcPts val="800"/>
+              </a:spcAft>
+              <a:defRPr sz="800" b="0">
+                <a:solidFill>
+                  <a:srgbClr val="F5F7FA"/>
+                </a:solidFill>
+                <a:latin typeface="Calibri"/>
+              </a:defRPr>
+            </a:pPr>
+          </a:p>
+          <a:p>
+            <a:pPr>
+              <a:spcAft>
+                <a:spcPts val="800"/>
+              </a:spcAft>
+              <a:defRPr sz="1700" b="0">
+                <a:solidFill>
+                  <a:srgbClr val="919BAF"/>
+                </a:solidFill>
+                <a:latin typeface="Calibri"/>
+              </a:defRPr>
+            </a:pPr>
+            <a:r>
+              <a:t>Разовые задачи и долгосрочные договоры. Воронеж и область.</a:t>
+            </a:r>
+          </a:p>
+          <a:p>
+            <a:pPr>
+              <a:spcAft>
+                <a:spcPts val="800"/>
+              </a:spcAft>
+              <a:defRPr sz="800" b="0">
+                <a:solidFill>
+                  <a:srgbClr val="F5F7FA"/>
+                </a:solidFill>
+                <a:latin typeface="Calibri"/>
+              </a:defRPr>
+            </a:pPr>
+          </a:p>
+          <a:p>
+            <a:pPr>
+              <a:spcAft>
+                <a:spcPts val="800"/>
+              </a:spcAft>
+              <a:defRPr sz="1700" b="1">
+                <a:solidFill>
+                  <a:srgbClr val="F0D98C"/>
+                </a:solidFill>
+                <a:latin typeface="Calibri"/>
+              </a:defRPr>
+            </a:pPr>
+            <a:r>
+              <a:t>Гюрза — символ молниеносной реакции и абсолютного контроля территории.</a:t>
+            </a:r>
+          </a:p>
+        </p:txBody>
+      </p:sp>
+      <p:sp>
+        <p:nvSpPr>
+          <p:cNvPr id="8" name="Rectangle 7"/>
           <p:cNvSpPr/>
           <p:nvPr/>
         </p:nvSpPr>
         <p:spPr>
           <a:xfrm>
-            <a:off x="502920" y="658368"/>
-            <a:ext cx="11155680" cy="0"/>
-          </a:xfrm>
-          <a:prstGeom prst="rect">
-            <a:avLst/>
-          </a:prstGeom>
+            <a:off x="640080" y="4572000"/>
+            <a:ext cx="3474720" cy="1417320"/>
+          </a:xfrm>
+          <a:prstGeom prst="rect">
+            <a:avLst/>
+          </a:prstGeom>
+          <a:solidFill>
+            <a:srgbClr val="0E121A"/>
+          </a:solidFill>
           <a:ln w="9525">
             <a:solidFill>
-              <a:srgbClr val="D4AF37"/>
+              <a:srgbClr val="373C48"/>
             </a:solidFill>
           </a:ln>
         </p:spPr>
@@ -3509,14 +3700,14 @@
       </p:sp>
       <p:sp>
         <p:nvSpPr>
-          <p:cNvPr id="6" name="TextBox 5"/>
+          <p:cNvPr id="9" name="TextBox 8"/>
           <p:cNvSpPr txBox="1"/>
           <p:nvPr/>
         </p:nvSpPr>
         <p:spPr>
           <a:xfrm>
-            <a:off x="640080" y="914400"/>
-            <a:ext cx="9144000" cy="457200"/>
+            <a:off x="822959" y="4709160"/>
+            <a:ext cx="3108960" cy="640080"/>
           </a:xfrm>
           <a:prstGeom prst="rect">
             <a:avLst/>
@@ -3531,9 +3722,9 @@
           <a:p>
             <a:pPr algn="l">
               <a:spcAft>
-                <a:spcPts val="800"/>
-              </a:spcAft>
-              <a:defRPr sz="1400" b="1">
+                <a:spcPts val="1400"/>
+              </a:spcAft>
+              <a:defRPr sz="3600" b="1">
                 <a:solidFill>
                   <a:srgbClr val="D4AF37"/>
                 </a:solidFill>
@@ -3541,21 +3732,21 @@
               </a:defRPr>
             </a:pPr>
             <a:r>
-              <a:t>КОНТАКТЫ</a:t>
-            </a:r>
-          </a:p>
-        </p:txBody>
-      </p:sp>
-      <p:sp>
-        <p:nvSpPr>
-          <p:cNvPr id="7" name="TextBox 6"/>
+              <a:t>2011</a:t>
+            </a:r>
+          </a:p>
+        </p:txBody>
+      </p:sp>
+      <p:sp>
+        <p:nvSpPr>
+          <p:cNvPr id="10" name="TextBox 9"/>
           <p:cNvSpPr txBox="1"/>
           <p:nvPr/>
         </p:nvSpPr>
         <p:spPr>
           <a:xfrm>
-            <a:off x="640080" y="1325880"/>
-            <a:ext cx="10058400" cy="640080"/>
+            <a:off x="822959" y="5349240"/>
+            <a:ext cx="3108960" cy="548640"/>
           </a:xfrm>
           <a:prstGeom prst="rect">
             <a:avLst/>
@@ -3570,48 +3761,9 @@
           <a:p>
             <a:pPr algn="l">
               <a:spcAft>
-                <a:spcPts val="1400"/>
-              </a:spcAft>
-              <a:defRPr sz="3600" b="1">
-                <a:solidFill>
-                  <a:srgbClr val="F5F7FA"/>
-                </a:solidFill>
-                <a:latin typeface="Calibri"/>
-              </a:defRPr>
-            </a:pPr>
-            <a:r>
-              <a:t>Связаться с нами</a:t>
-            </a:r>
-          </a:p>
-        </p:txBody>
-      </p:sp>
-      <p:sp>
-        <p:nvSpPr>
-          <p:cNvPr id="8" name="TextBox 7"/>
-          <p:cNvSpPr txBox="1"/>
-          <p:nvPr/>
-        </p:nvSpPr>
-        <p:spPr>
-          <a:xfrm>
-            <a:off x="640080" y="2103120"/>
-            <a:ext cx="5303520" cy="2560320"/>
-          </a:xfrm>
-          <a:prstGeom prst="rect">
-            <a:avLst/>
-          </a:prstGeom>
-          <a:noFill/>
-        </p:spPr>
-        <p:txBody>
-          <a:bodyPr wrap="square" anchor="t">
-            <a:spAutoFit/>
-          </a:bodyPr>
-          <a:lstStyle/>
-          <a:p>
-            <a:pPr algn="l">
-              <a:spcAft>
                 <a:spcPts val="800"/>
               </a:spcAft>
-              <a:defRPr sz="1600" b="0">
+              <a:defRPr sz="1300" b="0">
                 <a:solidFill>
                   <a:srgbClr val="919BAF"/>
                 </a:solidFill>
@@ -3619,336 +3771,31 @@
               </a:defRPr>
             </a:pPr>
             <a:r>
-              <a:t>Официальный сайт:</a:t>
-            </a:r>
-          </a:p>
-          <a:p>
-            <a:pPr>
-              <a:spcAft>
-                <a:spcPts val="1400"/>
-              </a:spcAft>
-              <a:defRPr sz="2800" b="1">
-                <a:solidFill>
-                  <a:srgbClr val="F0D98C"/>
-                </a:solidFill>
-                <a:latin typeface="Calibri"/>
-              </a:defRPr>
-            </a:pPr>
-            <a:r>
-              <a:t>gurza36.ru</a:t>
-            </a:r>
-          </a:p>
-          <a:p>
-            <a:pPr>
-              <a:spcAft>
-                <a:spcPts val="800"/>
-              </a:spcAft>
-              <a:defRPr sz="800" b="0">
-                <a:solidFill>
-                  <a:srgbClr val="F5F7FA"/>
-                </a:solidFill>
-                <a:latin typeface="Calibri"/>
-              </a:defRPr>
-            </a:pPr>
-          </a:p>
-          <a:p>
-            <a:pPr>
-              <a:spcAft>
-                <a:spcPts val="800"/>
-              </a:spcAft>
-              <a:defRPr sz="1600" b="0">
-                <a:solidFill>
-                  <a:srgbClr val="919BAF"/>
-                </a:solidFill>
-                <a:latin typeface="Calibri"/>
-              </a:defRPr>
-            </a:pPr>
-            <a:r>
-              <a:t>Телефоны:</a:t>
-            </a:r>
-          </a:p>
-          <a:p>
-            <a:pPr>
-              <a:spcAft>
-                <a:spcPts val="800"/>
-              </a:spcAft>
-              <a:defRPr sz="2000" b="1">
-                <a:solidFill>
-                  <a:srgbClr val="F5F7FA"/>
-                </a:solidFill>
-                <a:latin typeface="Calibri"/>
-              </a:defRPr>
-            </a:pPr>
-            <a:r>
-              <a:t>+7 (473) 278-51-47</a:t>
-            </a:r>
-          </a:p>
-          <a:p>
-            <a:pPr>
-              <a:spcAft>
-                <a:spcPts val="800"/>
-              </a:spcAft>
-              <a:defRPr sz="2000" b="1">
-                <a:solidFill>
-                  <a:srgbClr val="F5F7FA"/>
-                </a:solidFill>
-                <a:latin typeface="Calibri"/>
-              </a:defRPr>
-            </a:pPr>
-            <a:r>
-              <a:t>+7 (900) 954-43-12</a:t>
-            </a:r>
-          </a:p>
-          <a:p>
-            <a:pPr>
-              <a:spcAft>
-                <a:spcPts val="800"/>
-              </a:spcAft>
-              <a:defRPr sz="800" b="0">
-                <a:solidFill>
-                  <a:srgbClr val="F5F7FA"/>
-                </a:solidFill>
-                <a:latin typeface="Calibri"/>
-              </a:defRPr>
-            </a:pPr>
-          </a:p>
-          <a:p>
-            <a:pPr>
-              <a:spcAft>
-                <a:spcPts val="800"/>
-              </a:spcAft>
-              <a:defRPr sz="1700" b="0">
-                <a:solidFill>
-                  <a:srgbClr val="F5F7FA"/>
-                </a:solidFill>
-                <a:latin typeface="Calibri"/>
-              </a:defRPr>
-            </a:pPr>
-            <a:r>
-              <a:t>Email: mike1592@yandex.ru</a:t>
-            </a:r>
-          </a:p>
-        </p:txBody>
-      </p:sp>
-      <p:sp>
-        <p:nvSpPr>
-          <p:cNvPr id="9" name="TextBox 8"/>
-          <p:cNvSpPr txBox="1"/>
-          <p:nvPr/>
-        </p:nvSpPr>
-        <p:spPr>
-          <a:xfrm>
-            <a:off x="640080" y="4754880"/>
-            <a:ext cx="5486400" cy="1097280"/>
-          </a:xfrm>
-          <a:prstGeom prst="rect">
-            <a:avLst/>
-          </a:prstGeom>
-          <a:noFill/>
-        </p:spPr>
-        <p:txBody>
-          <a:bodyPr wrap="square" anchor="t">
-            <a:spAutoFit/>
-          </a:bodyPr>
-          <a:lstStyle/>
-          <a:p>
-            <a:pPr algn="l">
-              <a:spcAft>
-                <a:spcPts val="800"/>
-              </a:spcAft>
-              <a:defRPr sz="1600" b="0">
-                <a:solidFill>
-                  <a:srgbClr val="919BAF"/>
-                </a:solidFill>
-                <a:latin typeface="Calibri"/>
-              </a:defRPr>
-            </a:pPr>
-            <a:r>
-              <a:t>394016, г. Воронеж,</a:t>
-            </a:r>
-          </a:p>
-          <a:p>
-            <a:pPr>
-              <a:spcAft>
-                <a:spcPts val="800"/>
-              </a:spcAft>
-              <a:defRPr sz="1600" b="0">
-                <a:solidFill>
-                  <a:srgbClr val="919BAF"/>
-                </a:solidFill>
-                <a:latin typeface="Calibri"/>
-              </a:defRPr>
-            </a:pPr>
-            <a:r>
-              <a:t>ул. Солнечная, 17/1, офис 4</a:t>
-            </a:r>
-          </a:p>
-        </p:txBody>
-      </p:sp>
-      <p:pic>
-        <p:nvPicPr>
-          <p:cNvPr id="10" name="Picture 9" descr="03-contacts.png"/>
-          <p:cNvPicPr>
-            <a:picLocks noChangeAspect="1"/>
-          </p:cNvPicPr>
-          <p:nvPr/>
-        </p:nvPicPr>
-        <p:blipFill>
-          <a:blip r:embed="rId3"/>
-          <a:stretch>
-            <a:fillRect/>
-          </a:stretch>
-        </p:blipFill>
-        <p:spPr>
-          <a:xfrm>
-            <a:off x="6217920" y="1737360"/>
-            <a:ext cx="5486400" cy="3429000"/>
-          </a:xfrm>
-          <a:prstGeom prst="rect">
-            <a:avLst/>
-          </a:prstGeom>
-        </p:spPr>
-      </p:pic>
-    </p:spTree>
-  </p:cSld>
-  <p:clrMapOvr>
-    <a:masterClrMapping/>
-  </p:clrMapOvr>
-  <p:transition spd="med" advClick="1">
-    <p:fadeThroughBlack/>
-  </p:transition>
-</p:sld>
-</file>
-
-<file path=ppt/slides/slide11.xml><?xml version="1.0" encoding="utf-8"?>
-<p:sld xmlns:a="http://schemas.openxmlformats.org/drawingml/2006/main" xmlns:p="http://schemas.openxmlformats.org/presentationml/2006/main" xmlns:r="http://schemas.openxmlformats.org/officeDocument/2006/relationships">
-  <p:cSld>
-    <p:spTree>
-      <p:nvGrpSpPr>
-        <p:cNvPr id="1" name=""/>
-        <p:cNvGrpSpPr/>
-        <p:nvPr/>
-      </p:nvGrpSpPr>
-      <p:grpSpPr/>
-      <p:pic>
-        <p:nvPicPr>
-          <p:cNvPr id="2" name="Picture 1" descr="bg-dark.png"/>
-          <p:cNvPicPr>
-            <a:picLocks noChangeAspect="1"/>
-          </p:cNvPicPr>
-          <p:nvPr/>
-        </p:nvPicPr>
-        <p:blipFill>
-          <a:blip r:embed="rId2"/>
-          <a:stretch>
-            <a:fillRect/>
-          </a:stretch>
-        </p:blipFill>
-        <p:spPr>
-          <a:xfrm>
-            <a:off x="0" y="0"/>
-            <a:ext cx="12191695" cy="6858000"/>
-          </a:xfrm>
-          <a:prstGeom prst="rect">
-            <a:avLst/>
-          </a:prstGeom>
-        </p:spPr>
-      </p:pic>
-      <p:sp>
-        <p:nvSpPr>
-          <p:cNvPr id="3" name="TextBox 2"/>
-          <p:cNvSpPr txBox="1"/>
-          <p:nvPr/>
-        </p:nvSpPr>
-        <p:spPr>
-          <a:xfrm>
-            <a:off x="502920" y="320040"/>
-            <a:ext cx="3657600" cy="274320"/>
-          </a:xfrm>
-          <a:prstGeom prst="rect">
-            <a:avLst/>
-          </a:prstGeom>
-          <a:noFill/>
-        </p:spPr>
-        <p:txBody>
-          <a:bodyPr wrap="square" anchor="t">
-            <a:spAutoFit/>
-          </a:bodyPr>
-          <a:lstStyle/>
-          <a:p>
-            <a:pPr algn="l">
-              <a:spcAft>
-                <a:spcPts val="800"/>
-              </a:spcAft>
-              <a:defRPr sz="1100" b="1">
-                <a:solidFill>
-                  <a:srgbClr val="D4AF37"/>
-                </a:solidFill>
-                <a:latin typeface="Calibri"/>
-              </a:defRPr>
-            </a:pPr>
-            <a:r>
-              <a:t>ЧОО «ГЮРЗА»</a:t>
-            </a:r>
-          </a:p>
-        </p:txBody>
-      </p:sp>
-      <p:sp>
-        <p:nvSpPr>
-          <p:cNvPr id="4" name="TextBox 3"/>
-          <p:cNvSpPr txBox="1"/>
-          <p:nvPr/>
-        </p:nvSpPr>
-        <p:spPr>
-          <a:xfrm>
-            <a:off x="8961120" y="320040"/>
-            <a:ext cx="2743200" cy="274320"/>
-          </a:xfrm>
-          <a:prstGeom prst="rect">
-            <a:avLst/>
-          </a:prstGeom>
-          <a:noFill/>
-        </p:spPr>
-        <p:txBody>
-          <a:bodyPr wrap="square" anchor="t">
-            <a:spAutoFit/>
-          </a:bodyPr>
-          <a:lstStyle/>
-          <a:p>
-            <a:pPr algn="r">
-              <a:spcAft>
-                <a:spcPts val="800"/>
-              </a:spcAft>
-              <a:defRPr sz="1100" b="1">
-                <a:solidFill>
-                  <a:srgbClr val="D4AF37"/>
-                </a:solidFill>
-                <a:latin typeface="Calibri"/>
-              </a:defRPr>
-            </a:pPr>
-            <a:r>
-              <a:t>gurza36.ru</a:t>
-            </a:r>
-          </a:p>
-        </p:txBody>
-      </p:sp>
-      <p:sp>
-        <p:nvSpPr>
-          <p:cNvPr id="5" name="Rectangle 4"/>
+              <a:t>год основания</a:t>
+            </a:r>
+          </a:p>
+        </p:txBody>
+      </p:sp>
+      <p:sp>
+        <p:nvSpPr>
+          <p:cNvPr id="11" name="Rectangle 10"/>
           <p:cNvSpPr/>
           <p:nvPr/>
         </p:nvSpPr>
         <p:spPr>
           <a:xfrm>
-            <a:off x="502920" y="658368"/>
-            <a:ext cx="11155680" cy="0"/>
-          </a:xfrm>
-          <a:prstGeom prst="rect">
-            <a:avLst/>
-          </a:prstGeom>
+            <a:off x="4251959" y="4572000"/>
+            <a:ext cx="3474720" cy="1417320"/>
+          </a:xfrm>
+          <a:prstGeom prst="rect">
+            <a:avLst/>
+          </a:prstGeom>
+          <a:solidFill>
+            <a:srgbClr val="0E121A"/>
+          </a:solidFill>
           <a:ln w="9525">
             <a:solidFill>
-              <a:srgbClr val="D4AF37"/>
+              <a:srgbClr val="373C48"/>
             </a:solidFill>
           </a:ln>
         </p:spPr>
@@ -3976,14 +3823,14 @@
       </p:sp>
       <p:sp>
         <p:nvSpPr>
-          <p:cNvPr id="6" name="TextBox 5"/>
+          <p:cNvPr id="12" name="TextBox 11"/>
           <p:cNvSpPr txBox="1"/>
           <p:nvPr/>
         </p:nvSpPr>
         <p:spPr>
           <a:xfrm>
-            <a:off x="640080" y="914400"/>
-            <a:ext cx="9144000" cy="457200"/>
+            <a:off x="4434840" y="4709160"/>
+            <a:ext cx="3108960" cy="640080"/>
           </a:xfrm>
           <a:prstGeom prst="rect">
             <a:avLst/>
@@ -3998,9 +3845,9 @@
           <a:p>
             <a:pPr algn="l">
               <a:spcAft>
-                <a:spcPts val="800"/>
-              </a:spcAft>
-              <a:defRPr sz="1400" b="1">
+                <a:spcPts val="1400"/>
+              </a:spcAft>
+              <a:defRPr sz="3600" b="1">
                 <a:solidFill>
                   <a:srgbClr val="D4AF37"/>
                 </a:solidFill>
@@ -4008,21 +3855,21 @@
               </a:defRPr>
             </a:pPr>
             <a:r>
-              <a:t>РУКОВОДСТВО</a:t>
-            </a:r>
-          </a:p>
-        </p:txBody>
-      </p:sp>
-      <p:sp>
-        <p:nvSpPr>
-          <p:cNvPr id="7" name="TextBox 6"/>
+              <a:t>24/7</a:t>
+            </a:r>
+          </a:p>
+        </p:txBody>
+      </p:sp>
+      <p:sp>
+        <p:nvSpPr>
+          <p:cNvPr id="13" name="TextBox 12"/>
           <p:cNvSpPr txBox="1"/>
           <p:nvPr/>
         </p:nvSpPr>
         <p:spPr>
           <a:xfrm>
-            <a:off x="640080" y="1645920"/>
-            <a:ext cx="10058400" cy="731520"/>
+            <a:off x="4434840" y="5349240"/>
+            <a:ext cx="3108960" cy="548640"/>
           </a:xfrm>
           <a:prstGeom prst="rect">
             <a:avLst/>
@@ -4037,31 +3884,76 @@
           <a:p>
             <a:pPr algn="l">
               <a:spcAft>
-                <a:spcPts val="1400"/>
-              </a:spcAft>
-              <a:defRPr sz="3600" b="1">
-                <a:solidFill>
-                  <a:srgbClr val="F5F7FA"/>
-                </a:solidFill>
-                <a:latin typeface="Calibri"/>
-              </a:defRPr>
-            </a:pPr>
-            <a:r>
-              <a:t>Самофалов Михаил Иванович</a:t>
-            </a:r>
-          </a:p>
-        </p:txBody>
-      </p:sp>
-      <p:sp>
-        <p:nvSpPr>
-          <p:cNvPr id="8" name="TextBox 7"/>
+                <a:spcPts val="800"/>
+              </a:spcAft>
+              <a:defRPr sz="1300" b="0">
+                <a:solidFill>
+                  <a:srgbClr val="919BAF"/>
+                </a:solidFill>
+                <a:latin typeface="Calibri"/>
+              </a:defRPr>
+            </a:pPr>
+            <a:r>
+              <a:t>охрана объектов</a:t>
+            </a:r>
+          </a:p>
+        </p:txBody>
+      </p:sp>
+      <p:sp>
+        <p:nvSpPr>
+          <p:cNvPr id="14" name="Rectangle 13"/>
+          <p:cNvSpPr/>
+          <p:nvPr/>
+        </p:nvSpPr>
+        <p:spPr>
+          <a:xfrm>
+            <a:off x="7863840" y="4572000"/>
+            <a:ext cx="3474720" cy="1417320"/>
+          </a:xfrm>
+          <a:prstGeom prst="rect">
+            <a:avLst/>
+          </a:prstGeom>
+          <a:solidFill>
+            <a:srgbClr val="0E121A"/>
+          </a:solidFill>
+          <a:ln w="9525">
+            <a:solidFill>
+              <a:srgbClr val="373C48"/>
+            </a:solidFill>
+          </a:ln>
+        </p:spPr>
+        <p:style>
+          <a:lnRef idx="1">
+            <a:schemeClr val="accent1"/>
+          </a:lnRef>
+          <a:fillRef idx="3">
+            <a:schemeClr val="accent1"/>
+          </a:fillRef>
+          <a:effectRef idx="2">
+            <a:schemeClr val="accent1"/>
+          </a:effectRef>
+          <a:fontRef idx="minor">
+            <a:schemeClr val="lt1"/>
+          </a:fontRef>
+        </p:style>
+        <p:txBody>
+          <a:bodyPr rtlCol="0" anchor="ctr"/>
+          <a:lstStyle/>
+          <a:p>
+            <a:pPr algn="ctr"/>
+          </a:p>
+        </p:txBody>
+      </p:sp>
+      <p:sp>
+        <p:nvSpPr>
+          <p:cNvPr id="15" name="TextBox 14"/>
           <p:cNvSpPr txBox="1"/>
           <p:nvPr/>
         </p:nvSpPr>
         <p:spPr>
           <a:xfrm>
-            <a:off x="640080" y="2468880"/>
-            <a:ext cx="10058400" cy="457200"/>
+            <a:off x="8046719" y="4709160"/>
+            <a:ext cx="3108960" cy="640080"/>
           </a:xfrm>
           <a:prstGeom prst="rect">
             <a:avLst/>
@@ -4076,9 +3968,9 @@
           <a:p>
             <a:pPr algn="l">
               <a:spcAft>
-                <a:spcPts val="800"/>
-              </a:spcAft>
-              <a:defRPr sz="2200" b="1">
+                <a:spcPts val="1400"/>
+              </a:spcAft>
+              <a:defRPr sz="3600" b="1">
                 <a:solidFill>
                   <a:srgbClr val="D4AF37"/>
                 </a:solidFill>
@@ -4086,21 +3978,21 @@
               </a:defRPr>
             </a:pPr>
             <a:r>
-              <a:t>Директор ООО ЧОО «Гюрза»</a:t>
-            </a:r>
-          </a:p>
-        </p:txBody>
-      </p:sp>
-      <p:sp>
-        <p:nvSpPr>
-          <p:cNvPr id="9" name="TextBox 8"/>
+              <a:t>100%</a:t>
+            </a:r>
+          </a:p>
+        </p:txBody>
+      </p:sp>
+      <p:sp>
+        <p:nvSpPr>
+          <p:cNvPr id="16" name="TextBox 15"/>
           <p:cNvSpPr txBox="1"/>
           <p:nvPr/>
         </p:nvSpPr>
         <p:spPr>
           <a:xfrm>
-            <a:off x="640080" y="3200400"/>
-            <a:ext cx="9144000" cy="1371600"/>
+            <a:off x="8046719" y="5349240"/>
+            <a:ext cx="3108960" cy="548640"/>
           </a:xfrm>
           <a:prstGeom prst="rect">
             <a:avLst/>
@@ -4117,127 +4009,15 @@
               <a:spcAft>
                 <a:spcPts val="800"/>
               </a:spcAft>
-              <a:defRPr sz="1800" b="0">
-                <a:solidFill>
-                  <a:srgbClr val="F5F7FA"/>
-                </a:solidFill>
-                <a:latin typeface="Calibri"/>
-              </a:defRPr>
-            </a:pPr>
-            <a:r>
-              <a:t>Готовы обсудить охрану вашего объекта,</a:t>
-            </a:r>
-          </a:p>
-          <a:p>
-            <a:pPr>
-              <a:spcAft>
-                <a:spcPts val="800"/>
-              </a:spcAft>
-              <a:defRPr sz="1800" b="0">
-                <a:solidFill>
-                  <a:srgbClr val="F5F7FA"/>
-                </a:solidFill>
-                <a:latin typeface="Calibri"/>
-              </a:defRPr>
-            </a:pPr>
-            <a:r>
-              <a:t>провести экспертную оценку и предложить</a:t>
-            </a:r>
-          </a:p>
-          <a:p>
-            <a:pPr>
-              <a:spcAft>
-                <a:spcPts val="800"/>
-              </a:spcAft>
-              <a:defRPr sz="1800" b="0">
-                <a:solidFill>
-                  <a:srgbClr val="F5F7FA"/>
-                </a:solidFill>
-                <a:latin typeface="Calibri"/>
-              </a:defRPr>
-            </a:pPr>
-            <a:r>
-              <a:t>оптимальный вариант охраны под ваш бюджет.</a:t>
-            </a:r>
-          </a:p>
-        </p:txBody>
-      </p:sp>
-      <p:sp>
-        <p:nvSpPr>
-          <p:cNvPr id="10" name="TextBox 9"/>
-          <p:cNvSpPr txBox="1"/>
-          <p:nvPr/>
-        </p:nvSpPr>
-        <p:spPr>
-          <a:xfrm>
-            <a:off x="731520" y="4389120"/>
-            <a:ext cx="10515600" cy="4114800"/>
-          </a:xfrm>
-          <a:prstGeom prst="rect">
-            <a:avLst/>
-          </a:prstGeom>
-          <a:noFill/>
-        </p:spPr>
-        <p:txBody>
-          <a:bodyPr wrap="square" anchor="t">
-            <a:spAutoFit/>
-          </a:bodyPr>
-          <a:lstStyle/>
-          <a:p>
-            <a:pPr algn="l">
-              <a:spcBef>
-                <a:spcPts val="1000"/>
-              </a:spcBef>
-              <a:spcAft>
-                <a:spcPts val="600"/>
-              </a:spcAft>
-              <a:defRPr sz="1800">
-                <a:solidFill>
-                  <a:srgbClr val="F5F7FA"/>
-                </a:solidFill>
-                <a:latin typeface="Calibri"/>
-              </a:defRPr>
-            </a:pPr>
-            <a:r>
-              <a:t>◆  Звоните — проконсультируем и ответим на все вопросы</a:t>
-            </a:r>
-          </a:p>
-          <a:p>
-            <a:pPr>
-              <a:spcBef>
-                <a:spcPts val="1000"/>
-              </a:spcBef>
-              <a:spcAft>
-                <a:spcPts val="600"/>
-              </a:spcAft>
-              <a:defRPr sz="1800">
-                <a:solidFill>
-                  <a:srgbClr val="F5F7FA"/>
-                </a:solidFill>
-                <a:latin typeface="Calibri"/>
-              </a:defRPr>
-            </a:pPr>
-            <a:r>
-              <a:t>◆  Выезд на объект для оценки угроз</a:t>
-            </a:r>
-          </a:p>
-          <a:p>
-            <a:pPr>
-              <a:spcBef>
-                <a:spcPts val="1000"/>
-              </a:spcBef>
-              <a:spcAft>
-                <a:spcPts val="600"/>
-              </a:spcAft>
-              <a:defRPr sz="1800">
-                <a:solidFill>
-                  <a:srgbClr val="F5F7FA"/>
-                </a:solidFill>
-                <a:latin typeface="Calibri"/>
-              </a:defRPr>
-            </a:pPr>
-            <a:r>
-              <a:t>◆  Гибкие условия: разовые и долгосрочные договоры</a:t>
+              <a:defRPr sz="1300" b="0">
+                <a:solidFill>
+                  <a:srgbClr val="919BAF"/>
+                </a:solidFill>
+                <a:latin typeface="Calibri"/>
+              </a:defRPr>
+            </a:pPr>
+            <a:r>
+              <a:t>опытные специалисты</a:t>
             </a:r>
           </a:p>
         </p:txBody>
@@ -4249,386 +4029,6 @@
   </p:clrMapOvr>
   <p:transition spd="med" advClick="1">
     <p:fadeThroughBlack/>
-  </p:transition>
-</p:sld>
-</file>
-
-<file path=ppt/slides/slide12.xml><?xml version="1.0" encoding="utf-8"?>
-<p:sld xmlns:a="http://schemas.openxmlformats.org/drawingml/2006/main" xmlns:p="http://schemas.openxmlformats.org/presentationml/2006/main" xmlns:r="http://schemas.openxmlformats.org/officeDocument/2006/relationships">
-  <p:cSld>
-    <p:spTree>
-      <p:nvGrpSpPr>
-        <p:cNvPr id="1" name=""/>
-        <p:cNvGrpSpPr/>
-        <p:nvPr/>
-      </p:nvGrpSpPr>
-      <p:grpSpPr/>
-      <p:pic>
-        <p:nvPicPr>
-          <p:cNvPr id="2" name="Picture 1" descr="bg-dark.png"/>
-          <p:cNvPicPr>
-            <a:picLocks noChangeAspect="1"/>
-          </p:cNvPicPr>
-          <p:nvPr/>
-        </p:nvPicPr>
-        <p:blipFill>
-          <a:blip r:embed="rId2"/>
-          <a:stretch>
-            <a:fillRect/>
-          </a:stretch>
-        </p:blipFill>
-        <p:spPr>
-          <a:xfrm>
-            <a:off x="0" y="0"/>
-            <a:ext cx="12191695" cy="6858000"/>
-          </a:xfrm>
-          <a:prstGeom prst="rect">
-            <a:avLst/>
-          </a:prstGeom>
-        </p:spPr>
-      </p:pic>
-      <p:pic>
-        <p:nvPicPr>
-          <p:cNvPr id="3" name="Picture 2" descr="04-logo.png"/>
-          <p:cNvPicPr>
-            <a:picLocks noChangeAspect="1"/>
-          </p:cNvPicPr>
-          <p:nvPr/>
-        </p:nvPicPr>
-        <p:blipFill>
-          <a:blip r:embed="rId3"/>
-          <a:stretch>
-            <a:fillRect/>
-          </a:stretch>
-        </p:blipFill>
-        <p:spPr>
-          <a:xfrm>
-            <a:off x="4846320" y="731520"/>
-            <a:ext cx="2377440" cy="2371924"/>
-          </a:xfrm>
-          <a:prstGeom prst="rect">
-            <a:avLst/>
-          </a:prstGeom>
-        </p:spPr>
-      </p:pic>
-      <p:sp>
-        <p:nvSpPr>
-          <p:cNvPr id="4" name="TextBox 3"/>
-          <p:cNvSpPr txBox="1"/>
-          <p:nvPr/>
-        </p:nvSpPr>
-        <p:spPr>
-          <a:xfrm>
-            <a:off x="685800" y="2926080"/>
-            <a:ext cx="10972800" cy="731520"/>
-          </a:xfrm>
-          <a:prstGeom prst="rect">
-            <a:avLst/>
-          </a:prstGeom>
-          <a:noFill/>
-        </p:spPr>
-        <p:txBody>
-          <a:bodyPr wrap="square" anchor="t">
-            <a:spAutoFit/>
-          </a:bodyPr>
-          <a:lstStyle/>
-          <a:p>
-            <a:pPr algn="ctr">
-              <a:spcAft>
-                <a:spcPts val="1400"/>
-              </a:spcAft>
-              <a:defRPr sz="4800" b="1">
-                <a:solidFill>
-                  <a:srgbClr val="D4AF37"/>
-                </a:solidFill>
-                <a:latin typeface="Calibri"/>
-              </a:defRPr>
-            </a:pPr>
-            <a:r>
-              <a:t>ЧОО «Гюрза»</a:t>
-            </a:r>
-          </a:p>
-        </p:txBody>
-      </p:sp>
-      <p:sp>
-        <p:nvSpPr>
-          <p:cNvPr id="5" name="TextBox 4"/>
-          <p:cNvSpPr txBox="1"/>
-          <p:nvPr/>
-        </p:nvSpPr>
-        <p:spPr>
-          <a:xfrm>
-            <a:off x="685800" y="3749039"/>
-            <a:ext cx="10972800" cy="1371600"/>
-          </a:xfrm>
-          <a:prstGeom prst="rect">
-            <a:avLst/>
-          </a:prstGeom>
-          <a:noFill/>
-        </p:spPr>
-        <p:txBody>
-          <a:bodyPr wrap="square" anchor="t">
-            <a:spAutoFit/>
-          </a:bodyPr>
-          <a:lstStyle/>
-          <a:p>
-            <a:pPr algn="ctr">
-              <a:spcAft>
-                <a:spcPts val="800"/>
-              </a:spcAft>
-              <a:defRPr sz="1800" b="0">
-                <a:solidFill>
-                  <a:srgbClr val="F5F7FA"/>
-                </a:solidFill>
-                <a:latin typeface="Calibri"/>
-              </a:defRPr>
-            </a:pPr>
-            <a:r>
-              <a:t>+7 (473) 278-51-47  ·  +7 (900) 954-43-12</a:t>
-            </a:r>
-          </a:p>
-          <a:p>
-            <a:pPr>
-              <a:spcAft>
-                <a:spcPts val="800"/>
-              </a:spcAft>
-              <a:defRPr sz="1800" b="0">
-                <a:solidFill>
-                  <a:srgbClr val="F0D98C"/>
-                </a:solidFill>
-                <a:latin typeface="Calibri"/>
-              </a:defRPr>
-            </a:pPr>
-            <a:r>
-              <a:t>mike1592@yandex.ru  ·  gurza36.ru</a:t>
-            </a:r>
-          </a:p>
-          <a:p>
-            <a:pPr>
-              <a:spcAft>
-                <a:spcPts val="800"/>
-              </a:spcAft>
-              <a:defRPr sz="1600" b="0">
-                <a:solidFill>
-                  <a:srgbClr val="919BAF"/>
-                </a:solidFill>
-                <a:latin typeface="Calibri"/>
-              </a:defRPr>
-            </a:pPr>
-            <a:r>
-              <a:t>394016, г. Воронеж, ул. Солнечная, 17/1, офис 4</a:t>
-            </a:r>
-          </a:p>
-        </p:txBody>
-      </p:sp>
-    </p:spTree>
-  </p:cSld>
-  <p:clrMapOvr>
-    <a:masterClrMapping/>
-  </p:clrMapOvr>
-  <p:transition spd="med" advClick="1">
-    <p:fadeThroughBlack/>
-  </p:transition>
-</p:sld>
-</file>
-
-<file path=ppt/slides/slide2.xml><?xml version="1.0" encoding="utf-8"?>
-<p:sld xmlns:a="http://schemas.openxmlformats.org/drawingml/2006/main" xmlns:p="http://schemas.openxmlformats.org/presentationml/2006/main" xmlns:r="http://schemas.openxmlformats.org/officeDocument/2006/relationships">
-  <p:cSld>
-    <p:spTree>
-      <p:nvGrpSpPr>
-        <p:cNvPr id="1" name=""/>
-        <p:cNvGrpSpPr/>
-        <p:nvPr/>
-      </p:nvGrpSpPr>
-      <p:grpSpPr/>
-      <p:pic>
-        <p:nvPicPr>
-          <p:cNvPr id="2" name="Picture 1" descr="bg-section.png"/>
-          <p:cNvPicPr>
-            <a:picLocks noChangeAspect="1"/>
-          </p:cNvPicPr>
-          <p:nvPr/>
-        </p:nvPicPr>
-        <p:blipFill>
-          <a:blip r:embed="rId2"/>
-          <a:stretch>
-            <a:fillRect/>
-          </a:stretch>
-        </p:blipFill>
-        <p:spPr>
-          <a:xfrm>
-            <a:off x="0" y="0"/>
-            <a:ext cx="12191695" cy="6858000"/>
-          </a:xfrm>
-          <a:prstGeom prst="rect">
-            <a:avLst/>
-          </a:prstGeom>
-        </p:spPr>
-      </p:pic>
-      <p:sp>
-        <p:nvSpPr>
-          <p:cNvPr id="3" name="TextBox 2"/>
-          <p:cNvSpPr txBox="1"/>
-          <p:nvPr/>
-        </p:nvSpPr>
-        <p:spPr>
-          <a:xfrm>
-            <a:off x="731520" y="2011680"/>
-            <a:ext cx="2743200" cy="1371600"/>
-          </a:xfrm>
-          <a:prstGeom prst="rect">
-            <a:avLst/>
-          </a:prstGeom>
-          <a:noFill/>
-        </p:spPr>
-        <p:txBody>
-          <a:bodyPr wrap="square" anchor="t">
-            <a:spAutoFit/>
-          </a:bodyPr>
-          <a:lstStyle/>
-          <a:p>
-            <a:pPr algn="l">
-              <a:spcAft>
-                <a:spcPts val="1400"/>
-              </a:spcAft>
-              <a:defRPr sz="12000" b="0">
-                <a:solidFill>
-                  <a:srgbClr val="D4AF37"/>
-                </a:solidFill>
-                <a:latin typeface="Calibri"/>
-              </a:defRPr>
-            </a:pPr>
-            <a:r>
-              <a:t>01</a:t>
-            </a:r>
-          </a:p>
-        </p:txBody>
-      </p:sp>
-      <p:sp>
-        <p:nvSpPr>
-          <p:cNvPr id="4" name="TextBox 3"/>
-          <p:cNvSpPr txBox="1"/>
-          <p:nvPr/>
-        </p:nvSpPr>
-        <p:spPr>
-          <a:xfrm>
-            <a:off x="731520" y="3657600"/>
-            <a:ext cx="10058400" cy="1097280"/>
-          </a:xfrm>
-          <a:prstGeom prst="rect">
-            <a:avLst/>
-          </a:prstGeom>
-          <a:noFill/>
-        </p:spPr>
-        <p:txBody>
-          <a:bodyPr wrap="square" anchor="t">
-            <a:spAutoFit/>
-          </a:bodyPr>
-          <a:lstStyle/>
-          <a:p>
-            <a:pPr algn="l">
-              <a:spcAft>
-                <a:spcPts val="1400"/>
-              </a:spcAft>
-              <a:defRPr sz="5400" b="1">
-                <a:solidFill>
-                  <a:srgbClr val="F5F7FA"/>
-                </a:solidFill>
-                <a:latin typeface="Calibri"/>
-              </a:defRPr>
-            </a:pPr>
-            <a:r>
-              <a:t>О компании</a:t>
-            </a:r>
-          </a:p>
-        </p:txBody>
-      </p:sp>
-      <p:sp>
-        <p:nvSpPr>
-          <p:cNvPr id="5" name="TextBox 4"/>
-          <p:cNvSpPr txBox="1"/>
-          <p:nvPr/>
-        </p:nvSpPr>
-        <p:spPr>
-          <a:xfrm>
-            <a:off x="749808" y="4754880"/>
-            <a:ext cx="9144000" cy="731520"/>
-          </a:xfrm>
-          <a:prstGeom prst="rect">
-            <a:avLst/>
-          </a:prstGeom>
-          <a:noFill/>
-        </p:spPr>
-        <p:txBody>
-          <a:bodyPr wrap="square" anchor="t">
-            <a:spAutoFit/>
-          </a:bodyPr>
-          <a:lstStyle/>
-          <a:p>
-            <a:pPr algn="l">
-              <a:spcAft>
-                <a:spcPts val="800"/>
-              </a:spcAft>
-              <a:defRPr sz="2200" b="0">
-                <a:solidFill>
-                  <a:srgbClr val="919BAF"/>
-                </a:solidFill>
-                <a:latin typeface="Calibri"/>
-              </a:defRPr>
-            </a:pPr>
-            <a:r>
-              <a:t>Кто мы и чем занимаемся</a:t>
-            </a:r>
-          </a:p>
-        </p:txBody>
-      </p:sp>
-      <p:sp>
-        <p:nvSpPr>
-          <p:cNvPr id="6" name="TextBox 5"/>
-          <p:cNvSpPr txBox="1"/>
-          <p:nvPr/>
-        </p:nvSpPr>
-        <p:spPr>
-          <a:xfrm>
-            <a:off x="731520" y="6217920"/>
-            <a:ext cx="7315200" cy="365760"/>
-          </a:xfrm>
-          <a:prstGeom prst="rect">
-            <a:avLst/>
-          </a:prstGeom>
-          <a:noFill/>
-        </p:spPr>
-        <p:txBody>
-          <a:bodyPr wrap="square" anchor="t">
-            <a:spAutoFit/>
-          </a:bodyPr>
-          <a:lstStyle/>
-          <a:p>
-            <a:pPr algn="l">
-              <a:spcAft>
-                <a:spcPts val="800"/>
-              </a:spcAft>
-              <a:defRPr sz="1400" b="0">
-                <a:solidFill>
-                  <a:srgbClr val="919BAF"/>
-                </a:solidFill>
-                <a:latin typeface="Calibri"/>
-              </a:defRPr>
-            </a:pPr>
-            <a:r>
-              <a:t>Воронеж · 2026</a:t>
-            </a:r>
-          </a:p>
-        </p:txBody>
-      </p:sp>
-    </p:spTree>
-  </p:cSld>
-  <p:clrMapOvr>
-    <a:masterClrMapping/>
-  </p:clrMapOvr>
-  <p:transition spd="med" advClick="1">
-    <p:push dir="l"/>
   </p:transition>
 </p:sld>
 </file>
@@ -4645,7 +4045,7 @@
       <p:grpSpPr/>
       <p:pic>
         <p:nvPicPr>
-          <p:cNvPr id="2" name="Picture 1" descr="bg-dark.png"/>
+          <p:cNvPr id="2" name="Picture 1" descr="bg-dark_soft.png"/>
           <p:cNvPicPr>
             <a:picLocks noChangeAspect="1"/>
           </p:cNvPicPr>
@@ -4693,9 +4093,9 @@
               <a:spcAft>
                 <a:spcPts val="800"/>
               </a:spcAft>
-              <a:defRPr sz="1100" b="1">
-                <a:solidFill>
-                  <a:srgbClr val="D4AF37"/>
+              <a:defRPr sz="1000" b="1">
+                <a:solidFill>
+                  <a:srgbClr val="AA9146"/>
                 </a:solidFill>
                 <a:latin typeface="Calibri"/>
               </a:defRPr>
@@ -4732,7 +4132,46 @@
               <a:spcAft>
                 <a:spcPts val="800"/>
               </a:spcAft>
-              <a:defRPr sz="1100" b="1">
+              <a:defRPr sz="1000" b="0">
+                <a:solidFill>
+                  <a:srgbClr val="919BAF"/>
+                </a:solidFill>
+                <a:latin typeface="Calibri"/>
+              </a:defRPr>
+            </a:pPr>
+            <a:r>
+              <a:t>gurza36.ru</a:t>
+            </a:r>
+          </a:p>
+        </p:txBody>
+      </p:sp>
+      <p:sp>
+        <p:nvSpPr>
+          <p:cNvPr id="5" name="TextBox 4"/>
+          <p:cNvSpPr txBox="1"/>
+          <p:nvPr/>
+        </p:nvSpPr>
+        <p:spPr>
+          <a:xfrm>
+            <a:off x="640080" y="914400"/>
+            <a:ext cx="9144000" cy="548640"/>
+          </a:xfrm>
+          <a:prstGeom prst="rect">
+            <a:avLst/>
+          </a:prstGeom>
+          <a:noFill/>
+        </p:spPr>
+        <p:txBody>
+          <a:bodyPr wrap="square" anchor="t">
+            <a:spAutoFit/>
+          </a:bodyPr>
+          <a:lstStyle/>
+          <a:p>
+            <a:pPr algn="l">
+              <a:spcAft>
+                <a:spcPts val="800"/>
+              </a:spcAft>
+              <a:defRPr sz="1400" b="1">
                 <a:solidFill>
                   <a:srgbClr val="D4AF37"/>
                 </a:solidFill>
@@ -4740,28 +4179,31 @@
               </a:defRPr>
             </a:pPr>
             <a:r>
-              <a:t>gurza36.ru</a:t>
-            </a:r>
-          </a:p>
-        </p:txBody>
-      </p:sp>
-      <p:sp>
-        <p:nvSpPr>
-          <p:cNvPr id="5" name="Rectangle 4"/>
+              <a:t>УСЛУГИ ПОД КЛЮЧ</a:t>
+            </a:r>
+          </a:p>
+        </p:txBody>
+      </p:sp>
+      <p:sp>
+        <p:nvSpPr>
+          <p:cNvPr id="6" name="Rectangle 5"/>
           <p:cNvSpPr/>
           <p:nvPr/>
         </p:nvSpPr>
         <p:spPr>
           <a:xfrm>
-            <a:off x="502920" y="658368"/>
-            <a:ext cx="11155680" cy="0"/>
-          </a:xfrm>
-          <a:prstGeom prst="rect">
-            <a:avLst/>
-          </a:prstGeom>
-          <a:ln w="9525">
+            <a:off x="640080" y="1554480"/>
+            <a:ext cx="5486400" cy="1325880"/>
+          </a:xfrm>
+          <a:prstGeom prst="rect">
+            <a:avLst/>
+          </a:prstGeom>
+          <a:solidFill>
+            <a:srgbClr val="121824"/>
+          </a:solidFill>
+          <a:ln>
             <a:solidFill>
-              <a:srgbClr val="D4AF37"/>
+              <a:srgbClr val="3C465A"/>
             </a:solidFill>
           </a:ln>
         </p:spPr>
@@ -4789,14 +4231,14 @@
       </p:sp>
       <p:sp>
         <p:nvSpPr>
-          <p:cNvPr id="6" name="TextBox 5"/>
+          <p:cNvPr id="7" name="TextBox 6"/>
           <p:cNvSpPr txBox="1"/>
           <p:nvPr/>
         </p:nvSpPr>
         <p:spPr>
           <a:xfrm>
-            <a:off x="640080" y="914400"/>
-            <a:ext cx="9144000" cy="457200"/>
+            <a:off x="777240" y="1664207"/>
+            <a:ext cx="5120640" cy="411480"/>
           </a:xfrm>
           <a:prstGeom prst="rect">
             <a:avLst/>
@@ -4813,7 +4255,7 @@
               <a:spcAft>
                 <a:spcPts val="800"/>
               </a:spcAft>
-              <a:defRPr sz="1400" b="1">
+              <a:defRPr sz="1700" b="1">
                 <a:solidFill>
                   <a:srgbClr val="D4AF37"/>
                 </a:solidFill>
@@ -4821,21 +4263,21 @@
               </a:defRPr>
             </a:pPr>
             <a:r>
-              <a:t>О КОМПАНИИ</a:t>
-            </a:r>
-          </a:p>
-        </p:txBody>
-      </p:sp>
-      <p:sp>
-        <p:nvSpPr>
-          <p:cNvPr id="7" name="TextBox 6"/>
+              <a:t>Административные здания</a:t>
+            </a:r>
+          </a:p>
+        </p:txBody>
+      </p:sp>
+      <p:sp>
+        <p:nvSpPr>
+          <p:cNvPr id="8" name="TextBox 7"/>
           <p:cNvSpPr txBox="1"/>
           <p:nvPr/>
         </p:nvSpPr>
         <p:spPr>
           <a:xfrm>
-            <a:off x="640080" y="1325880"/>
-            <a:ext cx="10058400" cy="731520"/>
+            <a:off x="777240" y="2084831"/>
+            <a:ext cx="5120640" cy="640080"/>
           </a:xfrm>
           <a:prstGeom prst="rect">
             <a:avLst/>
@@ -4850,93 +4292,9 @@
           <a:p>
             <a:pPr algn="l">
               <a:spcAft>
-                <a:spcPts val="1400"/>
-              </a:spcAft>
-              <a:defRPr sz="3400" b="1">
-                <a:solidFill>
-                  <a:srgbClr val="F5F7FA"/>
-                </a:solidFill>
-                <a:latin typeface="Calibri"/>
-              </a:defRPr>
-            </a:pPr>
-            <a:r>
-              <a:t>Работаем с 2011 года — и знаем цену доверию</a:t>
-            </a:r>
-          </a:p>
-        </p:txBody>
-      </p:sp>
-      <p:sp>
-        <p:nvSpPr>
-          <p:cNvPr id="8" name="TextBox 7"/>
-          <p:cNvSpPr txBox="1"/>
-          <p:nvPr/>
-        </p:nvSpPr>
-        <p:spPr>
-          <a:xfrm>
-            <a:off x="640080" y="2286000"/>
-            <a:ext cx="10058400" cy="2011680"/>
-          </a:xfrm>
-          <a:prstGeom prst="rect">
-            <a:avLst/>
-          </a:prstGeom>
-          <a:noFill/>
-        </p:spPr>
-        <p:txBody>
-          <a:bodyPr wrap="square" anchor="t">
-            <a:spAutoFit/>
-          </a:bodyPr>
-          <a:lstStyle/>
-          <a:p>
-            <a:pPr algn="l">
-              <a:spcAft>
                 <a:spcPts val="800"/>
               </a:spcAft>
-              <a:defRPr sz="1800" b="0">
-                <a:solidFill>
-                  <a:srgbClr val="F5F7FA"/>
-                </a:solidFill>
-                <a:latin typeface="Calibri"/>
-              </a:defRPr>
-            </a:pPr>
-            <a:r>
-              <a:t>ООО ЧОО «Гюрза» оказывает услуги частной охраны высокого качества</a:t>
-            </a:r>
-          </a:p>
-          <a:p>
-            <a:pPr>
-              <a:spcAft>
-                <a:spcPts val="800"/>
-              </a:spcAft>
-              <a:defRPr sz="1800" b="0">
-                <a:solidFill>
-                  <a:srgbClr val="F5F7FA"/>
-                </a:solidFill>
-                <a:latin typeface="Calibri"/>
-              </a:defRPr>
-            </a:pPr>
-            <a:r>
-              <a:t>по доступным ценам — для физических и юридических лиц.</a:t>
-            </a:r>
-          </a:p>
-          <a:p>
-            <a:pPr>
-              <a:spcAft>
-                <a:spcPts val="800"/>
-              </a:spcAft>
-              <a:defRPr sz="800" b="0">
-                <a:solidFill>
-                  <a:srgbClr val="F5F7FA"/>
-                </a:solidFill>
-                <a:latin typeface="Calibri"/>
-              </a:defRPr>
-            </a:pPr>
-          </a:p>
-          <a:p>
-            <a:pPr>
-              <a:spcAft>
-                <a:spcPts val="800"/>
-              </a:spcAft>
-              <a:defRPr sz="1700" b="0">
+              <a:defRPr sz="1300" b="0">
                 <a:solidFill>
                   <a:srgbClr val="919BAF"/>
                 </a:solidFill>
@@ -4944,36 +4302,7 @@
               </a:defRPr>
             </a:pPr>
             <a:r>
-              <a:t>Разовые задачи и долгосрочные договоры. Воронеж и область.</a:t>
-            </a:r>
-          </a:p>
-          <a:p>
-            <a:pPr>
-              <a:spcAft>
-                <a:spcPts val="800"/>
-              </a:spcAft>
-              <a:defRPr sz="800" b="0">
-                <a:solidFill>
-                  <a:srgbClr val="F5F7FA"/>
-                </a:solidFill>
-                <a:latin typeface="Calibri"/>
-              </a:defRPr>
-            </a:pPr>
-          </a:p>
-          <a:p>
-            <a:pPr>
-              <a:spcAft>
-                <a:spcPts val="800"/>
-              </a:spcAft>
-              <a:defRPr sz="1700" b="1">
-                <a:solidFill>
-                  <a:srgbClr val="F0D98C"/>
-                </a:solidFill>
-                <a:latin typeface="Calibri"/>
-              </a:defRPr>
-            </a:pPr>
-            <a:r>
-              <a:t>Гюрза — символ молниеносной реакции и абсолютного контроля территории.</a:t>
+              <a:t>Офисы, бизнес-центры, порядок и безопасность персонала</a:t>
             </a:r>
           </a:p>
         </p:txBody>
@@ -4986,8 +4315,8 @@
         </p:nvSpPr>
         <p:spPr>
           <a:xfrm>
-            <a:off x="640080" y="4572000"/>
-            <a:ext cx="3474720" cy="1417320"/>
+            <a:off x="6400800" y="1554480"/>
+            <a:ext cx="5486400" cy="1325880"/>
           </a:xfrm>
           <a:prstGeom prst="rect">
             <a:avLst/>
@@ -4995,9 +4324,9 @@
           <a:solidFill>
             <a:srgbClr val="121824"/>
           </a:solidFill>
-          <a:ln w="6350">
+          <a:ln>
             <a:solidFill>
-              <a:srgbClr val="D4AF37"/>
+              <a:srgbClr val="3C465A"/>
             </a:solidFill>
           </a:ln>
         </p:spPr>
@@ -5031,8 +4360,8 @@
         </p:nvSpPr>
         <p:spPr>
           <a:xfrm>
-            <a:off x="822959" y="4709160"/>
-            <a:ext cx="3108960" cy="640080"/>
+            <a:off x="6537960" y="1664207"/>
+            <a:ext cx="5120640" cy="411480"/>
           </a:xfrm>
           <a:prstGeom prst="rect">
             <a:avLst/>
@@ -5047,9 +4376,9 @@
           <a:p>
             <a:pPr algn="l">
               <a:spcAft>
-                <a:spcPts val="1400"/>
-              </a:spcAft>
-              <a:defRPr sz="3600" b="1">
+                <a:spcPts val="800"/>
+              </a:spcAft>
+              <a:defRPr sz="1700" b="1">
                 <a:solidFill>
                   <a:srgbClr val="D4AF37"/>
                 </a:solidFill>
@@ -5057,7 +4386,7 @@
               </a:defRPr>
             </a:pPr>
             <a:r>
-              <a:t>2011</a:t>
+              <a:t>Строительные объекты</a:t>
             </a:r>
           </a:p>
         </p:txBody>
@@ -5070,8 +4399,8 @@
         </p:nvSpPr>
         <p:spPr>
           <a:xfrm>
-            <a:off x="822959" y="5349240"/>
-            <a:ext cx="3108960" cy="548640"/>
+            <a:off x="6537960" y="2084831"/>
+            <a:ext cx="5120640" cy="640080"/>
           </a:xfrm>
           <a:prstGeom prst="rect">
             <a:avLst/>
@@ -5096,7 +4425,7 @@
               </a:defRPr>
             </a:pPr>
             <a:r>
-              <a:t>год основания</a:t>
+              <a:t>Площадки, техника, материалы на всех этапах</a:t>
             </a:r>
           </a:p>
         </p:txBody>
@@ -5109,8 +4438,8 @@
         </p:nvSpPr>
         <p:spPr>
           <a:xfrm>
-            <a:off x="4251959" y="4572000"/>
-            <a:ext cx="3474720" cy="1417320"/>
+            <a:off x="640080" y="3063239"/>
+            <a:ext cx="5486400" cy="1325880"/>
           </a:xfrm>
           <a:prstGeom prst="rect">
             <a:avLst/>
@@ -5118,9 +4447,9 @@
           <a:solidFill>
             <a:srgbClr val="121824"/>
           </a:solidFill>
-          <a:ln w="6350">
+          <a:ln>
             <a:solidFill>
-              <a:srgbClr val="D4AF37"/>
+              <a:srgbClr val="3C465A"/>
             </a:solidFill>
           </a:ln>
         </p:spPr>
@@ -5154,8 +4483,8 @@
         </p:nvSpPr>
         <p:spPr>
           <a:xfrm>
-            <a:off x="4434840" y="4709160"/>
-            <a:ext cx="3108960" cy="640080"/>
+            <a:off x="777240" y="3172968"/>
+            <a:ext cx="5120640" cy="411480"/>
           </a:xfrm>
           <a:prstGeom prst="rect">
             <a:avLst/>
@@ -5170,9 +4499,9 @@
           <a:p>
             <a:pPr algn="l">
               <a:spcAft>
-                <a:spcPts val="1400"/>
-              </a:spcAft>
-              <a:defRPr sz="3600" b="1">
+                <a:spcPts val="800"/>
+              </a:spcAft>
+              <a:defRPr sz="1700" b="1">
                 <a:solidFill>
                   <a:srgbClr val="D4AF37"/>
                 </a:solidFill>
@@ -5180,7 +4509,7 @@
               </a:defRPr>
             </a:pPr>
             <a:r>
-              <a:t>24/7</a:t>
+              <a:t>Складские помещения</a:t>
             </a:r>
           </a:p>
         </p:txBody>
@@ -5193,8 +4522,8 @@
         </p:nvSpPr>
         <p:spPr>
           <a:xfrm>
-            <a:off x="4434840" y="5349240"/>
-            <a:ext cx="3108960" cy="548640"/>
+            <a:off x="777240" y="3593591"/>
+            <a:ext cx="5120640" cy="640080"/>
           </a:xfrm>
           <a:prstGeom prst="rect">
             <a:avLst/>
@@ -5219,7 +4548,7 @@
               </a:defRPr>
             </a:pPr>
             <a:r>
-              <a:t>охрана объектов</a:t>
+              <a:t>ТМЦ, логистика, сохранность грузов</a:t>
             </a:r>
           </a:p>
         </p:txBody>
@@ -5232,8 +4561,8 @@
         </p:nvSpPr>
         <p:spPr>
           <a:xfrm>
-            <a:off x="7863840" y="4572000"/>
-            <a:ext cx="3474720" cy="1417320"/>
+            <a:off x="6400800" y="3063239"/>
+            <a:ext cx="5486400" cy="1325880"/>
           </a:xfrm>
           <a:prstGeom prst="rect">
             <a:avLst/>
@@ -5241,9 +4570,9 @@
           <a:solidFill>
             <a:srgbClr val="121824"/>
           </a:solidFill>
-          <a:ln w="6350">
+          <a:ln>
             <a:solidFill>
-              <a:srgbClr val="D4AF37"/>
+              <a:srgbClr val="3C465A"/>
             </a:solidFill>
           </a:ln>
         </p:spPr>
@@ -5277,8 +4606,8 @@
         </p:nvSpPr>
         <p:spPr>
           <a:xfrm>
-            <a:off x="8046719" y="4709160"/>
-            <a:ext cx="3108960" cy="640080"/>
+            <a:off x="6537960" y="3172968"/>
+            <a:ext cx="5120640" cy="411480"/>
           </a:xfrm>
           <a:prstGeom prst="rect">
             <a:avLst/>
@@ -5293,9 +4622,9 @@
           <a:p>
             <a:pPr algn="l">
               <a:spcAft>
-                <a:spcPts val="1400"/>
-              </a:spcAft>
-              <a:defRPr sz="3600" b="1">
+                <a:spcPts val="800"/>
+              </a:spcAft>
+              <a:defRPr sz="1700" b="1">
                 <a:solidFill>
                   <a:srgbClr val="D4AF37"/>
                 </a:solidFill>
@@ -5303,7 +4632,7 @@
               </a:defRPr>
             </a:pPr>
             <a:r>
-              <a:t>100%</a:t>
+              <a:t>Пропускной режим</a:t>
             </a:r>
           </a:p>
         </p:txBody>
@@ -5316,8 +4645,8 @@
         </p:nvSpPr>
         <p:spPr>
           <a:xfrm>
-            <a:off x="8046719" y="5349240"/>
-            <a:ext cx="3108960" cy="548640"/>
+            <a:off x="6537960" y="3593591"/>
+            <a:ext cx="5120640" cy="640080"/>
           </a:xfrm>
           <a:prstGeom prst="rect">
             <a:avLst/>
@@ -5342,7 +4671,253 @@
               </a:defRPr>
             </a:pPr>
             <a:r>
-              <a:t>опытные специалисты</a:t>
+              <a:t>КПП, контроль доступа, внутриобъектовый режим</a:t>
+            </a:r>
+          </a:p>
+        </p:txBody>
+      </p:sp>
+      <p:sp>
+        <p:nvSpPr>
+          <p:cNvPr id="18" name="Rectangle 17"/>
+          <p:cNvSpPr/>
+          <p:nvPr/>
+        </p:nvSpPr>
+        <p:spPr>
+          <a:xfrm>
+            <a:off x="640080" y="4572000"/>
+            <a:ext cx="5486400" cy="1325880"/>
+          </a:xfrm>
+          <a:prstGeom prst="rect">
+            <a:avLst/>
+          </a:prstGeom>
+          <a:solidFill>
+            <a:srgbClr val="121824"/>
+          </a:solidFill>
+          <a:ln>
+            <a:solidFill>
+              <a:srgbClr val="3C465A"/>
+            </a:solidFill>
+          </a:ln>
+        </p:spPr>
+        <p:style>
+          <a:lnRef idx="1">
+            <a:schemeClr val="accent1"/>
+          </a:lnRef>
+          <a:fillRef idx="3">
+            <a:schemeClr val="accent1"/>
+          </a:fillRef>
+          <a:effectRef idx="2">
+            <a:schemeClr val="accent1"/>
+          </a:effectRef>
+          <a:fontRef idx="minor">
+            <a:schemeClr val="lt1"/>
+          </a:fontRef>
+        </p:style>
+        <p:txBody>
+          <a:bodyPr rtlCol="0" anchor="ctr"/>
+          <a:lstStyle/>
+          <a:p>
+            <a:pPr algn="ctr"/>
+          </a:p>
+        </p:txBody>
+      </p:sp>
+      <p:sp>
+        <p:nvSpPr>
+          <p:cNvPr id="19" name="TextBox 18"/>
+          <p:cNvSpPr txBox="1"/>
+          <p:nvPr/>
+        </p:nvSpPr>
+        <p:spPr>
+          <a:xfrm>
+            <a:off x="777240" y="4681728"/>
+            <a:ext cx="5120640" cy="411480"/>
+          </a:xfrm>
+          <a:prstGeom prst="rect">
+            <a:avLst/>
+          </a:prstGeom>
+          <a:noFill/>
+        </p:spPr>
+        <p:txBody>
+          <a:bodyPr wrap="square" anchor="t">
+            <a:spAutoFit/>
+          </a:bodyPr>
+          <a:lstStyle/>
+          <a:p>
+            <a:pPr algn="l">
+              <a:spcAft>
+                <a:spcPts val="800"/>
+              </a:spcAft>
+              <a:defRPr sz="1700" b="1">
+                <a:solidFill>
+                  <a:srgbClr val="D4AF37"/>
+                </a:solidFill>
+                <a:latin typeface="Calibri"/>
+              </a:defRPr>
+            </a:pPr>
+            <a:r>
+              <a:t>Сельхозпредприятия</a:t>
+            </a:r>
+          </a:p>
+        </p:txBody>
+      </p:sp>
+      <p:sp>
+        <p:nvSpPr>
+          <p:cNvPr id="20" name="TextBox 19"/>
+          <p:cNvSpPr txBox="1"/>
+          <p:nvPr/>
+        </p:nvSpPr>
+        <p:spPr>
+          <a:xfrm>
+            <a:off x="777240" y="5102352"/>
+            <a:ext cx="5120640" cy="640080"/>
+          </a:xfrm>
+          <a:prstGeom prst="rect">
+            <a:avLst/>
+          </a:prstGeom>
+          <a:noFill/>
+        </p:spPr>
+        <p:txBody>
+          <a:bodyPr wrap="square" anchor="t">
+            <a:spAutoFit/>
+          </a:bodyPr>
+          <a:lstStyle/>
+          <a:p>
+            <a:pPr algn="l">
+              <a:spcAft>
+                <a:spcPts val="800"/>
+              </a:spcAft>
+              <a:defRPr sz="1300" b="0">
+                <a:solidFill>
+                  <a:srgbClr val="919BAF"/>
+                </a:solidFill>
+                <a:latin typeface="Calibri"/>
+              </a:defRPr>
+            </a:pPr>
+            <a:r>
+              <a:t>Зерновые и масличные базы — наша специализация</a:t>
+            </a:r>
+          </a:p>
+        </p:txBody>
+      </p:sp>
+      <p:sp>
+        <p:nvSpPr>
+          <p:cNvPr id="21" name="Rectangle 20"/>
+          <p:cNvSpPr/>
+          <p:nvPr/>
+        </p:nvSpPr>
+        <p:spPr>
+          <a:xfrm>
+            <a:off x="6400800" y="4572000"/>
+            <a:ext cx="5486400" cy="1325880"/>
+          </a:xfrm>
+          <a:prstGeom prst="rect">
+            <a:avLst/>
+          </a:prstGeom>
+          <a:solidFill>
+            <a:srgbClr val="121824"/>
+          </a:solidFill>
+          <a:ln>
+            <a:solidFill>
+              <a:srgbClr val="3C465A"/>
+            </a:solidFill>
+          </a:ln>
+        </p:spPr>
+        <p:style>
+          <a:lnRef idx="1">
+            <a:schemeClr val="accent1"/>
+          </a:lnRef>
+          <a:fillRef idx="3">
+            <a:schemeClr val="accent1"/>
+          </a:fillRef>
+          <a:effectRef idx="2">
+            <a:schemeClr val="accent1"/>
+          </a:effectRef>
+          <a:fontRef idx="minor">
+            <a:schemeClr val="lt1"/>
+          </a:fontRef>
+        </p:style>
+        <p:txBody>
+          <a:bodyPr rtlCol="0" anchor="ctr"/>
+          <a:lstStyle/>
+          <a:p>
+            <a:pPr algn="ctr"/>
+          </a:p>
+        </p:txBody>
+      </p:sp>
+      <p:sp>
+        <p:nvSpPr>
+          <p:cNvPr id="22" name="TextBox 21"/>
+          <p:cNvSpPr txBox="1"/>
+          <p:nvPr/>
+        </p:nvSpPr>
+        <p:spPr>
+          <a:xfrm>
+            <a:off x="6537960" y="4681728"/>
+            <a:ext cx="5120640" cy="411480"/>
+          </a:xfrm>
+          <a:prstGeom prst="rect">
+            <a:avLst/>
+          </a:prstGeom>
+          <a:noFill/>
+        </p:spPr>
+        <p:txBody>
+          <a:bodyPr wrap="square" anchor="t">
+            <a:spAutoFit/>
+          </a:bodyPr>
+          <a:lstStyle/>
+          <a:p>
+            <a:pPr algn="l">
+              <a:spcAft>
+                <a:spcPts val="800"/>
+              </a:spcAft>
+              <a:defRPr sz="1700" b="1">
+                <a:solidFill>
+                  <a:srgbClr val="D4AF37"/>
+                </a:solidFill>
+                <a:latin typeface="Calibri"/>
+              </a:defRPr>
+            </a:pPr>
+            <a:r>
+              <a:t>Анализ угроз</a:t>
+            </a:r>
+          </a:p>
+        </p:txBody>
+      </p:sp>
+      <p:sp>
+        <p:nvSpPr>
+          <p:cNvPr id="23" name="TextBox 22"/>
+          <p:cNvSpPr txBox="1"/>
+          <p:nvPr/>
+        </p:nvSpPr>
+        <p:spPr>
+          <a:xfrm>
+            <a:off x="6537960" y="5102352"/>
+            <a:ext cx="5120640" cy="640080"/>
+          </a:xfrm>
+          <a:prstGeom prst="rect">
+            <a:avLst/>
+          </a:prstGeom>
+          <a:noFill/>
+        </p:spPr>
+        <p:txBody>
+          <a:bodyPr wrap="square" anchor="t">
+            <a:spAutoFit/>
+          </a:bodyPr>
+          <a:lstStyle/>
+          <a:p>
+            <a:pPr algn="l">
+              <a:spcAft>
+                <a:spcPts val="800"/>
+              </a:spcAft>
+              <a:defRPr sz="1300" b="0">
+                <a:solidFill>
+                  <a:srgbClr val="919BAF"/>
+                </a:solidFill>
+                <a:latin typeface="Calibri"/>
+              </a:defRPr>
+            </a:pPr>
+            <a:r>
+              <a:t>Оценка объекта и индивидуальная система охраны</a:t>
             </a:r>
           </a:p>
         </p:txBody>
@@ -5370,7 +4945,7 @@
       <p:grpSpPr/>
       <p:pic>
         <p:nvPicPr>
-          <p:cNvPr id="2" name="Picture 1" descr="bg-section.png"/>
+          <p:cNvPr id="2" name="Picture 1" descr="bg-dark.png"/>
           <p:cNvPicPr>
             <a:picLocks noChangeAspect="1"/>
           </p:cNvPicPr>
@@ -5400,8 +4975,8 @@
         </p:nvSpPr>
         <p:spPr>
           <a:xfrm>
-            <a:off x="731520" y="2011680"/>
-            <a:ext cx="2743200" cy="1371600"/>
+            <a:off x="502920" y="320040"/>
+            <a:ext cx="3657600" cy="274320"/>
           </a:xfrm>
           <a:prstGeom prst="rect">
             <a:avLst/>
@@ -5416,17 +4991,17 @@
           <a:p>
             <a:pPr algn="l">
               <a:spcAft>
-                <a:spcPts val="1400"/>
-              </a:spcAft>
-              <a:defRPr sz="12000" b="0">
-                <a:solidFill>
-                  <a:srgbClr val="D4AF37"/>
-                </a:solidFill>
-                <a:latin typeface="Calibri"/>
-              </a:defRPr>
-            </a:pPr>
-            <a:r>
-              <a:t>02</a:t>
+                <a:spcPts val="800"/>
+              </a:spcAft>
+              <a:defRPr sz="1000" b="1">
+                <a:solidFill>
+                  <a:srgbClr val="AA9146"/>
+                </a:solidFill>
+                <a:latin typeface="Calibri"/>
+              </a:defRPr>
+            </a:pPr>
+            <a:r>
+              <a:t>ЧОО «ГЮРЗА»</a:t>
             </a:r>
           </a:p>
         </p:txBody>
@@ -5439,8 +5014,8 @@
         </p:nvSpPr>
         <p:spPr>
           <a:xfrm>
-            <a:off x="731520" y="3657600"/>
-            <a:ext cx="10058400" cy="1097280"/>
+            <a:off x="8961120" y="320040"/>
+            <a:ext cx="2743200" cy="274320"/>
           </a:xfrm>
           <a:prstGeom prst="rect">
             <a:avLst/>
@@ -5453,19 +5028,19 @@
           </a:bodyPr>
           <a:lstStyle/>
           <a:p>
-            <a:pPr algn="l">
-              <a:spcAft>
-                <a:spcPts val="1400"/>
-              </a:spcAft>
-              <a:defRPr sz="5400" b="1">
-                <a:solidFill>
-                  <a:srgbClr val="F5F7FA"/>
-                </a:solidFill>
-                <a:latin typeface="Calibri"/>
-              </a:defRPr>
-            </a:pPr>
-            <a:r>
-              <a:t>Услуги</a:t>
+            <a:pPr algn="r">
+              <a:spcAft>
+                <a:spcPts val="800"/>
+              </a:spcAft>
+              <a:defRPr sz="1000" b="0">
+                <a:solidFill>
+                  <a:srgbClr val="919BAF"/>
+                </a:solidFill>
+                <a:latin typeface="Calibri"/>
+              </a:defRPr>
+            </a:pPr>
+            <a:r>
+              <a:t>gurza36.ru</a:t>
             </a:r>
           </a:p>
         </p:txBody>
@@ -5478,8 +5053,8 @@
         </p:nvSpPr>
         <p:spPr>
           <a:xfrm>
-            <a:off x="749808" y="4754880"/>
-            <a:ext cx="9144000" cy="731520"/>
+            <a:off x="640080" y="914400"/>
+            <a:ext cx="9144000" cy="457200"/>
           </a:xfrm>
           <a:prstGeom prst="rect">
             <a:avLst/>
@@ -5496,15 +5071,15 @@
               <a:spcAft>
                 <a:spcPts val="800"/>
               </a:spcAft>
-              <a:defRPr sz="2200" b="0">
-                <a:solidFill>
-                  <a:srgbClr val="919BAF"/>
-                </a:solidFill>
-                <a:latin typeface="Calibri"/>
-              </a:defRPr>
-            </a:pPr>
-            <a:r>
-              <a:t>Что мы охраняем</a:t>
+              <a:defRPr sz="1400" b="1">
+                <a:solidFill>
+                  <a:srgbClr val="D4AF37"/>
+                </a:solidFill>
+                <a:latin typeface="Calibri"/>
+              </a:defRPr>
+            </a:pPr>
+            <a:r>
+              <a:t>ПРЕИМУЩЕСТВА</a:t>
             </a:r>
           </a:p>
         </p:txBody>
@@ -5517,8 +5092,8 @@
         </p:nvSpPr>
         <p:spPr>
           <a:xfrm>
-            <a:off x="731520" y="6217920"/>
-            <a:ext cx="7315200" cy="365760"/>
+            <a:off x="640080" y="1371600"/>
+            <a:ext cx="10058400" cy="640080"/>
           </a:xfrm>
           <a:prstGeom prst="rect">
             <a:avLst/>
@@ -5533,9 +5108,132 @@
           <a:p>
             <a:pPr algn="l">
               <a:spcAft>
+                <a:spcPts val="1400"/>
+              </a:spcAft>
+              <a:defRPr sz="3200" b="1">
+                <a:solidFill>
+                  <a:srgbClr val="F5F7FA"/>
+                </a:solidFill>
+                <a:latin typeface="Calibri"/>
+              </a:defRPr>
+            </a:pPr>
+            <a:r>
+              <a:t>Сотрудничая с нами, вы получаете</a:t>
+            </a:r>
+          </a:p>
+        </p:txBody>
+      </p:sp>
+      <p:sp>
+        <p:nvSpPr>
+          <p:cNvPr id="7" name="Rectangle 6"/>
+          <p:cNvSpPr/>
+          <p:nvPr/>
+        </p:nvSpPr>
+        <p:spPr>
+          <a:xfrm>
+            <a:off x="640080" y="2286000"/>
+            <a:ext cx="3474720" cy="1417320"/>
+          </a:xfrm>
+          <a:prstGeom prst="rect">
+            <a:avLst/>
+          </a:prstGeom>
+          <a:solidFill>
+            <a:srgbClr val="0E121A"/>
+          </a:solidFill>
+          <a:ln w="9525">
+            <a:solidFill>
+              <a:srgbClr val="373C48"/>
+            </a:solidFill>
+          </a:ln>
+        </p:spPr>
+        <p:style>
+          <a:lnRef idx="1">
+            <a:schemeClr val="accent1"/>
+          </a:lnRef>
+          <a:fillRef idx="3">
+            <a:schemeClr val="accent1"/>
+          </a:fillRef>
+          <a:effectRef idx="2">
+            <a:schemeClr val="accent1"/>
+          </a:effectRef>
+          <a:fontRef idx="minor">
+            <a:schemeClr val="lt1"/>
+          </a:fontRef>
+        </p:style>
+        <p:txBody>
+          <a:bodyPr rtlCol="0" anchor="ctr"/>
+          <a:lstStyle/>
+          <a:p>
+            <a:pPr algn="ctr"/>
+          </a:p>
+        </p:txBody>
+      </p:sp>
+      <p:sp>
+        <p:nvSpPr>
+          <p:cNvPr id="8" name="TextBox 7"/>
+          <p:cNvSpPr txBox="1"/>
+          <p:nvPr/>
+        </p:nvSpPr>
+        <p:spPr>
+          <a:xfrm>
+            <a:off x="822959" y="2423160"/>
+            <a:ext cx="3108960" cy="640080"/>
+          </a:xfrm>
+          <a:prstGeom prst="rect">
+            <a:avLst/>
+          </a:prstGeom>
+          <a:noFill/>
+        </p:spPr>
+        <p:txBody>
+          <a:bodyPr wrap="square" anchor="t">
+            <a:spAutoFit/>
+          </a:bodyPr>
+          <a:lstStyle/>
+          <a:p>
+            <a:pPr algn="l">
+              <a:spcAft>
+                <a:spcPts val="1400"/>
+              </a:spcAft>
+              <a:defRPr sz="3600" b="1">
+                <a:solidFill>
+                  <a:srgbClr val="D4AF37"/>
+                </a:solidFill>
+                <a:latin typeface="Calibri"/>
+              </a:defRPr>
+            </a:pPr>
+            <a:r>
+              <a:t>15+</a:t>
+            </a:r>
+          </a:p>
+        </p:txBody>
+      </p:sp>
+      <p:sp>
+        <p:nvSpPr>
+          <p:cNvPr id="9" name="TextBox 8"/>
+          <p:cNvSpPr txBox="1"/>
+          <p:nvPr/>
+        </p:nvSpPr>
+        <p:spPr>
+          <a:xfrm>
+            <a:off x="822959" y="3063240"/>
+            <a:ext cx="3108960" cy="548640"/>
+          </a:xfrm>
+          <a:prstGeom prst="rect">
+            <a:avLst/>
+          </a:prstGeom>
+          <a:noFill/>
+        </p:spPr>
+        <p:txBody>
+          <a:bodyPr wrap="square" anchor="t">
+            <a:spAutoFit/>
+          </a:bodyPr>
+          <a:lstStyle/>
+          <a:p>
+            <a:pPr algn="l">
+              <a:spcAft>
                 <a:spcPts val="800"/>
               </a:spcAft>
-              <a:defRPr sz="1400" b="0">
+              <a:defRPr sz="1300" b="0">
                 <a:solidFill>
                   <a:srgbClr val="919BAF"/>
                 </a:solidFill>
@@ -5543,7 +5241,352 @@
               </a:defRPr>
             </a:pPr>
             <a:r>
-              <a:t>Воронеж · 2026</a:t>
+              <a:t>лет на рынке охранных услуг</a:t>
+            </a:r>
+          </a:p>
+        </p:txBody>
+      </p:sp>
+      <p:sp>
+        <p:nvSpPr>
+          <p:cNvPr id="10" name="Rectangle 9"/>
+          <p:cNvSpPr/>
+          <p:nvPr/>
+        </p:nvSpPr>
+        <p:spPr>
+          <a:xfrm>
+            <a:off x="4251959" y="2286000"/>
+            <a:ext cx="3474720" cy="1417320"/>
+          </a:xfrm>
+          <a:prstGeom prst="rect">
+            <a:avLst/>
+          </a:prstGeom>
+          <a:solidFill>
+            <a:srgbClr val="0E121A"/>
+          </a:solidFill>
+          <a:ln w="9525">
+            <a:solidFill>
+              <a:srgbClr val="373C48"/>
+            </a:solidFill>
+          </a:ln>
+        </p:spPr>
+        <p:style>
+          <a:lnRef idx="1">
+            <a:schemeClr val="accent1"/>
+          </a:lnRef>
+          <a:fillRef idx="3">
+            <a:schemeClr val="accent1"/>
+          </a:fillRef>
+          <a:effectRef idx="2">
+            <a:schemeClr val="accent1"/>
+          </a:effectRef>
+          <a:fontRef idx="minor">
+            <a:schemeClr val="lt1"/>
+          </a:fontRef>
+        </p:style>
+        <p:txBody>
+          <a:bodyPr rtlCol="0" anchor="ctr"/>
+          <a:lstStyle/>
+          <a:p>
+            <a:pPr algn="ctr"/>
+          </a:p>
+        </p:txBody>
+      </p:sp>
+      <p:sp>
+        <p:nvSpPr>
+          <p:cNvPr id="11" name="TextBox 10"/>
+          <p:cNvSpPr txBox="1"/>
+          <p:nvPr/>
+        </p:nvSpPr>
+        <p:spPr>
+          <a:xfrm>
+            <a:off x="4434840" y="2423160"/>
+            <a:ext cx="3108960" cy="640080"/>
+          </a:xfrm>
+          <a:prstGeom prst="rect">
+            <a:avLst/>
+          </a:prstGeom>
+          <a:noFill/>
+        </p:spPr>
+        <p:txBody>
+          <a:bodyPr wrap="square" anchor="t">
+            <a:spAutoFit/>
+          </a:bodyPr>
+          <a:lstStyle/>
+          <a:p>
+            <a:pPr algn="l">
+              <a:spcAft>
+                <a:spcPts val="1400"/>
+              </a:spcAft>
+              <a:defRPr sz="3600" b="1">
+                <a:solidFill>
+                  <a:srgbClr val="D4AF37"/>
+                </a:solidFill>
+                <a:latin typeface="Calibri"/>
+              </a:defRPr>
+            </a:pPr>
+            <a:r>
+              <a:t>100%</a:t>
+            </a:r>
+          </a:p>
+        </p:txBody>
+      </p:sp>
+      <p:sp>
+        <p:nvSpPr>
+          <p:cNvPr id="12" name="TextBox 11"/>
+          <p:cNvSpPr txBox="1"/>
+          <p:nvPr/>
+        </p:nvSpPr>
+        <p:spPr>
+          <a:xfrm>
+            <a:off x="4434840" y="3063240"/>
+            <a:ext cx="3108960" cy="548640"/>
+          </a:xfrm>
+          <a:prstGeom prst="rect">
+            <a:avLst/>
+          </a:prstGeom>
+          <a:noFill/>
+        </p:spPr>
+        <p:txBody>
+          <a:bodyPr wrap="square" anchor="t">
+            <a:spAutoFit/>
+          </a:bodyPr>
+          <a:lstStyle/>
+          <a:p>
+            <a:pPr algn="l">
+              <a:spcAft>
+                <a:spcPts val="800"/>
+              </a:spcAft>
+              <a:defRPr sz="1300" b="0">
+                <a:solidFill>
+                  <a:srgbClr val="919BAF"/>
+                </a:solidFill>
+                <a:latin typeface="Calibri"/>
+              </a:defRPr>
+            </a:pPr>
+            <a:r>
+              <a:t>специалисты высокого класса</a:t>
+            </a:r>
+          </a:p>
+        </p:txBody>
+      </p:sp>
+      <p:sp>
+        <p:nvSpPr>
+          <p:cNvPr id="13" name="Rectangle 12"/>
+          <p:cNvSpPr/>
+          <p:nvPr/>
+        </p:nvSpPr>
+        <p:spPr>
+          <a:xfrm>
+            <a:off x="7863840" y="2286000"/>
+            <a:ext cx="3474720" cy="1417320"/>
+          </a:xfrm>
+          <a:prstGeom prst="rect">
+            <a:avLst/>
+          </a:prstGeom>
+          <a:solidFill>
+            <a:srgbClr val="0E121A"/>
+          </a:solidFill>
+          <a:ln w="9525">
+            <a:solidFill>
+              <a:srgbClr val="373C48"/>
+            </a:solidFill>
+          </a:ln>
+        </p:spPr>
+        <p:style>
+          <a:lnRef idx="1">
+            <a:schemeClr val="accent1"/>
+          </a:lnRef>
+          <a:fillRef idx="3">
+            <a:schemeClr val="accent1"/>
+          </a:fillRef>
+          <a:effectRef idx="2">
+            <a:schemeClr val="accent1"/>
+          </a:effectRef>
+          <a:fontRef idx="minor">
+            <a:schemeClr val="lt1"/>
+          </a:fontRef>
+        </p:style>
+        <p:txBody>
+          <a:bodyPr rtlCol="0" anchor="ctr"/>
+          <a:lstStyle/>
+          <a:p>
+            <a:pPr algn="ctr"/>
+          </a:p>
+        </p:txBody>
+      </p:sp>
+      <p:sp>
+        <p:nvSpPr>
+          <p:cNvPr id="14" name="TextBox 13"/>
+          <p:cNvSpPr txBox="1"/>
+          <p:nvPr/>
+        </p:nvSpPr>
+        <p:spPr>
+          <a:xfrm>
+            <a:off x="8046719" y="2423160"/>
+            <a:ext cx="3108960" cy="640080"/>
+          </a:xfrm>
+          <a:prstGeom prst="rect">
+            <a:avLst/>
+          </a:prstGeom>
+          <a:noFill/>
+        </p:spPr>
+        <p:txBody>
+          <a:bodyPr wrap="square" anchor="t">
+            <a:spAutoFit/>
+          </a:bodyPr>
+          <a:lstStyle/>
+          <a:p>
+            <a:pPr algn="l">
+              <a:spcAft>
+                <a:spcPts val="1400"/>
+              </a:spcAft>
+              <a:defRPr sz="3600" b="1">
+                <a:solidFill>
+                  <a:srgbClr val="D4AF37"/>
+                </a:solidFill>
+                <a:latin typeface="Calibri"/>
+              </a:defRPr>
+            </a:pPr>
+            <a:r>
+              <a:t>24/7</a:t>
+            </a:r>
+          </a:p>
+        </p:txBody>
+      </p:sp>
+      <p:sp>
+        <p:nvSpPr>
+          <p:cNvPr id="15" name="TextBox 14"/>
+          <p:cNvSpPr txBox="1"/>
+          <p:nvPr/>
+        </p:nvSpPr>
+        <p:spPr>
+          <a:xfrm>
+            <a:off x="8046719" y="3063240"/>
+            <a:ext cx="3108960" cy="548640"/>
+          </a:xfrm>
+          <a:prstGeom prst="rect">
+            <a:avLst/>
+          </a:prstGeom>
+          <a:noFill/>
+        </p:spPr>
+        <p:txBody>
+          <a:bodyPr wrap="square" anchor="t">
+            <a:spAutoFit/>
+          </a:bodyPr>
+          <a:lstStyle/>
+          <a:p>
+            <a:pPr algn="l">
+              <a:spcAft>
+                <a:spcPts val="800"/>
+              </a:spcAft>
+              <a:defRPr sz="1300" b="0">
+                <a:solidFill>
+                  <a:srgbClr val="919BAF"/>
+                </a:solidFill>
+                <a:latin typeface="Calibri"/>
+              </a:defRPr>
+            </a:pPr>
+            <a:r>
+              <a:t>непрерывная охрана</a:t>
+            </a:r>
+          </a:p>
+        </p:txBody>
+      </p:sp>
+      <p:sp>
+        <p:nvSpPr>
+          <p:cNvPr id="16" name="TextBox 15"/>
+          <p:cNvSpPr txBox="1"/>
+          <p:nvPr/>
+        </p:nvSpPr>
+        <p:spPr>
+          <a:xfrm>
+            <a:off x="731520" y="3931920"/>
+            <a:ext cx="10515600" cy="4114800"/>
+          </a:xfrm>
+          <a:prstGeom prst="rect">
+            <a:avLst/>
+          </a:prstGeom>
+          <a:noFill/>
+        </p:spPr>
+        <p:txBody>
+          <a:bodyPr wrap="square" anchor="t">
+            <a:spAutoFit/>
+          </a:bodyPr>
+          <a:lstStyle/>
+          <a:p>
+            <a:pPr algn="l">
+              <a:spcBef>
+                <a:spcPts val="1000"/>
+              </a:spcBef>
+              <a:spcAft>
+                <a:spcPts val="600"/>
+              </a:spcAft>
+              <a:defRPr sz="1800">
+                <a:solidFill>
+                  <a:srgbClr val="F5F7FA"/>
+                </a:solidFill>
+                <a:latin typeface="Calibri"/>
+              </a:defRPr>
+            </a:pPr>
+            <a:r>
+              <a:t>—  Любой бюджет — от экономного до высокобюджетного решения</a:t>
+            </a:r>
+          </a:p>
+          <a:p>
+            <a:pPr>
+              <a:spcBef>
+                <a:spcPts val="1000"/>
+              </a:spcBef>
+              <a:spcAft>
+                <a:spcPts val="600"/>
+              </a:spcAft>
+              <a:defRPr sz="1800">
+                <a:solidFill>
+                  <a:srgbClr val="F5F7FA"/>
+                </a:solidFill>
+                <a:latin typeface="Calibri"/>
+              </a:defRPr>
+            </a:pPr>
+            <a:r>
+              <a:t>—  Индивидуальный подход к каждому объекту</a:t>
+            </a:r>
+          </a:p>
+          <a:p>
+            <a:pPr>
+              <a:spcBef>
+                <a:spcPts val="1000"/>
+              </a:spcBef>
+              <a:spcAft>
+                <a:spcPts val="600"/>
+              </a:spcAft>
+              <a:defRPr sz="1800">
+                <a:solidFill>
+                  <a:srgbClr val="F5F7FA"/>
+                </a:solidFill>
+                <a:latin typeface="Calibri"/>
+              </a:defRPr>
+            </a:pPr>
+            <a:r>
+              <a:t>—  Оперативная реакция и чёткий контроль территории</a:t>
+            </a:r>
+          </a:p>
+          <a:p>
+            <a:pPr>
+              <a:spcBef>
+                <a:spcPts val="1000"/>
+              </a:spcBef>
+              <a:spcAft>
+                <a:spcPts val="600"/>
+              </a:spcAft>
+              <a:defRPr sz="1800">
+                <a:solidFill>
+                  <a:srgbClr val="F5F7FA"/>
+                </a:solidFill>
+                <a:latin typeface="Calibri"/>
+              </a:defRPr>
+            </a:pPr>
+            <a:r>
+              <a:t>—  Профессиональная оценка рисков перед началом работы</a:t>
             </a:r>
           </a:p>
         </p:txBody>
@@ -5554,7 +5597,7 @@
     <a:masterClrMapping/>
   </p:clrMapOvr>
   <p:transition spd="med" advClick="1">
-    <p:push dir="l"/>
+    <p:fadeThroughBlack/>
   </p:transition>
 </p:sld>
 </file>
@@ -5571,7 +5614,7 @@
       <p:grpSpPr/>
       <p:pic>
         <p:nvPicPr>
-          <p:cNvPr id="2" name="Picture 1" descr="bg-dark.png"/>
+          <p:cNvPr id="2" name="Picture 1" descr="bg-dark_alt.png"/>
           <p:cNvPicPr>
             <a:picLocks noChangeAspect="1"/>
           </p:cNvPicPr>
@@ -5619,9 +5662,9 @@
               <a:spcAft>
                 <a:spcPts val="800"/>
               </a:spcAft>
-              <a:defRPr sz="1100" b="1">
-                <a:solidFill>
-                  <a:srgbClr val="D4AF37"/>
+              <a:defRPr sz="1000" b="1">
+                <a:solidFill>
+                  <a:srgbClr val="AA9146"/>
                 </a:solidFill>
                 <a:latin typeface="Calibri"/>
               </a:defRPr>
@@ -5658,9 +5701,9 @@
               <a:spcAft>
                 <a:spcPts val="800"/>
               </a:spcAft>
-              <a:defRPr sz="1100" b="1">
-                <a:solidFill>
-                  <a:srgbClr val="D4AF37"/>
+              <a:defRPr sz="1000" b="0">
+                <a:solidFill>
+                  <a:srgbClr val="919BAF"/>
                 </a:solidFill>
                 <a:latin typeface="Calibri"/>
               </a:defRPr>
@@ -5673,56 +5716,14 @@
       </p:sp>
       <p:sp>
         <p:nvSpPr>
-          <p:cNvPr id="5" name="Rectangle 4"/>
-          <p:cNvSpPr/>
-          <p:nvPr/>
-        </p:nvSpPr>
-        <p:spPr>
-          <a:xfrm>
-            <a:off x="502920" y="658368"/>
-            <a:ext cx="11155680" cy="0"/>
-          </a:xfrm>
-          <a:prstGeom prst="rect">
-            <a:avLst/>
-          </a:prstGeom>
-          <a:ln w="9525">
-            <a:solidFill>
-              <a:srgbClr val="D4AF37"/>
-            </a:solidFill>
-          </a:ln>
-        </p:spPr>
-        <p:style>
-          <a:lnRef idx="1">
-            <a:schemeClr val="accent1"/>
-          </a:lnRef>
-          <a:fillRef idx="3">
-            <a:schemeClr val="accent1"/>
-          </a:fillRef>
-          <a:effectRef idx="2">
-            <a:schemeClr val="accent1"/>
-          </a:effectRef>
-          <a:fontRef idx="minor">
-            <a:schemeClr val="lt1"/>
-          </a:fontRef>
-        </p:style>
-        <p:txBody>
-          <a:bodyPr rtlCol="0" anchor="ctr"/>
-          <a:lstStyle/>
-          <a:p>
-            <a:pPr algn="ctr"/>
-          </a:p>
-        </p:txBody>
-      </p:sp>
-      <p:sp>
-        <p:nvSpPr>
-          <p:cNvPr id="6" name="TextBox 5"/>
+          <p:cNvPr id="5" name="TextBox 4"/>
           <p:cNvSpPr txBox="1"/>
           <p:nvPr/>
         </p:nvSpPr>
         <p:spPr>
           <a:xfrm>
             <a:off x="640080" y="914400"/>
-            <a:ext cx="9144000" cy="548640"/>
+            <a:ext cx="9144000" cy="457200"/>
           </a:xfrm>
           <a:prstGeom prst="rect">
             <a:avLst/>
@@ -5747,66 +5748,21 @@
               </a:defRPr>
             </a:pPr>
             <a:r>
-              <a:t>УСЛУГИ ПОД КЛЮЧ</a:t>
-            </a:r>
-          </a:p>
-        </p:txBody>
-      </p:sp>
-      <p:sp>
-        <p:nvSpPr>
-          <p:cNvPr id="7" name="Rectangle 6"/>
-          <p:cNvSpPr/>
-          <p:nvPr/>
-        </p:nvSpPr>
-        <p:spPr>
-          <a:xfrm>
-            <a:off x="640080" y="1554480"/>
-            <a:ext cx="5486400" cy="1325880"/>
-          </a:xfrm>
-          <a:prstGeom prst="rect">
-            <a:avLst/>
-          </a:prstGeom>
-          <a:solidFill>
-            <a:srgbClr val="121824"/>
-          </a:solidFill>
-          <a:ln>
-            <a:solidFill>
-              <a:srgbClr val="3C465A"/>
-            </a:solidFill>
-          </a:ln>
-        </p:spPr>
-        <p:style>
-          <a:lnRef idx="1">
-            <a:schemeClr val="accent1"/>
-          </a:lnRef>
-          <a:fillRef idx="3">
-            <a:schemeClr val="accent1"/>
-          </a:fillRef>
-          <a:effectRef idx="2">
-            <a:schemeClr val="accent1"/>
-          </a:effectRef>
-          <a:fontRef idx="minor">
-            <a:schemeClr val="lt1"/>
-          </a:fontRef>
-        </p:style>
-        <p:txBody>
-          <a:bodyPr rtlCol="0" anchor="ctr"/>
-          <a:lstStyle/>
-          <a:p>
-            <a:pPr algn="ctr"/>
-          </a:p>
-        </p:txBody>
-      </p:sp>
-      <p:sp>
-        <p:nvSpPr>
-          <p:cNvPr id="8" name="TextBox 7"/>
+              <a:t>СПЕЦИАЛИЗАЦИЯ</a:t>
+            </a:r>
+          </a:p>
+        </p:txBody>
+      </p:sp>
+      <p:sp>
+        <p:nvSpPr>
+          <p:cNvPr id="6" name="TextBox 5"/>
           <p:cNvSpPr txBox="1"/>
           <p:nvPr/>
         </p:nvSpPr>
         <p:spPr>
           <a:xfrm>
-            <a:off x="777240" y="1664207"/>
-            <a:ext cx="5120640" cy="411480"/>
+            <a:off x="640080" y="1325880"/>
+            <a:ext cx="10058400" cy="731520"/>
           </a:xfrm>
           <a:prstGeom prst="rect">
             <a:avLst/>
@@ -5821,31 +5777,31 @@
           <a:p>
             <a:pPr algn="l">
               <a:spcAft>
-                <a:spcPts val="800"/>
-              </a:spcAft>
-              <a:defRPr sz="1700" b="1">
-                <a:solidFill>
-                  <a:srgbClr val="D4AF37"/>
-                </a:solidFill>
-                <a:latin typeface="Calibri"/>
-              </a:defRPr>
-            </a:pPr>
-            <a:r>
-              <a:t>Административные здания</a:t>
-            </a:r>
-          </a:p>
-        </p:txBody>
-      </p:sp>
-      <p:sp>
-        <p:nvSpPr>
-          <p:cNvPr id="9" name="TextBox 8"/>
+                <a:spcPts val="1400"/>
+              </a:spcAft>
+              <a:defRPr sz="3400" b="1">
+                <a:solidFill>
+                  <a:srgbClr val="F5F7FA"/>
+                </a:solidFill>
+                <a:latin typeface="Calibri"/>
+              </a:defRPr>
+            </a:pPr>
+            <a:r>
+              <a:t>Охрана агропредприятий и зерновых баз</a:t>
+            </a:r>
+          </a:p>
+        </p:txBody>
+      </p:sp>
+      <p:sp>
+        <p:nvSpPr>
+          <p:cNvPr id="7" name="TextBox 6"/>
           <p:cNvSpPr txBox="1"/>
           <p:nvPr/>
         </p:nvSpPr>
         <p:spPr>
           <a:xfrm>
-            <a:off x="777240" y="2084831"/>
-            <a:ext cx="5120640" cy="640080"/>
+            <a:off x="640080" y="2286000"/>
+            <a:ext cx="5943600" cy="2286000"/>
           </a:xfrm>
           <a:prstGeom prst="rect">
             <a:avLst/>
@@ -5862,7 +5818,68 @@
               <a:spcAft>
                 <a:spcPts val="800"/>
               </a:spcAft>
-              <a:defRPr sz="1300" b="0">
+              <a:defRPr sz="1800" b="0">
+                <a:solidFill>
+                  <a:srgbClr val="F5F7FA"/>
+                </a:solidFill>
+                <a:latin typeface="Calibri"/>
+              </a:defRPr>
+            </a:pPr>
+            <a:r>
+              <a:t>Особая компетенция — охрана сельхозпредприятий и баз</a:t>
+            </a:r>
+          </a:p>
+          <a:p>
+            <a:pPr>
+              <a:spcAft>
+                <a:spcPts val="800"/>
+              </a:spcAft>
+              <a:defRPr sz="1800" b="0">
+                <a:solidFill>
+                  <a:srgbClr val="F5F7FA"/>
+                </a:solidFill>
+                <a:latin typeface="Calibri"/>
+              </a:defRPr>
+            </a:pPr>
+            <a:r>
+              <a:t>по приёмке, подработке, хранению и отпуску</a:t>
+            </a:r>
+          </a:p>
+          <a:p>
+            <a:pPr>
+              <a:spcAft>
+                <a:spcPts val="800"/>
+              </a:spcAft>
+              <a:defRPr sz="1800" b="1">
+                <a:solidFill>
+                  <a:srgbClr val="F0D98C"/>
+                </a:solidFill>
+                <a:latin typeface="Calibri"/>
+              </a:defRPr>
+            </a:pPr>
+            <a:r>
+              <a:t>зерновых и масличной продукции.</a:t>
+            </a:r>
+          </a:p>
+          <a:p>
+            <a:pPr>
+              <a:spcAft>
+                <a:spcPts val="800"/>
+              </a:spcAft>
+              <a:defRPr sz="1000" b="0">
+                <a:solidFill>
+                  <a:srgbClr val="F5F7FA"/>
+                </a:solidFill>
+                <a:latin typeface="Calibri"/>
+              </a:defRPr>
+            </a:pPr>
+          </a:p>
+          <a:p>
+            <a:pPr>
+              <a:spcAft>
+                <a:spcPts val="800"/>
+              </a:spcAft>
+              <a:defRPr sz="1700" b="0">
                 <a:solidFill>
                   <a:srgbClr val="919BAF"/>
                 </a:solidFill>
@@ -5870,122 +5887,15 @@
               </a:defRPr>
             </a:pPr>
             <a:r>
-              <a:t>Офисы, бизнес-центры, порядок и безопасность персонала</a:t>
-            </a:r>
-          </a:p>
-        </p:txBody>
-      </p:sp>
-      <p:sp>
-        <p:nvSpPr>
-          <p:cNvPr id="10" name="Rectangle 9"/>
-          <p:cNvSpPr/>
-          <p:nvPr/>
-        </p:nvSpPr>
-        <p:spPr>
-          <a:xfrm>
-            <a:off x="6400800" y="1554480"/>
-            <a:ext cx="5486400" cy="1325880"/>
-          </a:xfrm>
-          <a:prstGeom prst="rect">
-            <a:avLst/>
-          </a:prstGeom>
-          <a:solidFill>
-            <a:srgbClr val="121824"/>
-          </a:solidFill>
-          <a:ln>
-            <a:solidFill>
-              <a:srgbClr val="3C465A"/>
-            </a:solidFill>
-          </a:ln>
-        </p:spPr>
-        <p:style>
-          <a:lnRef idx="1">
-            <a:schemeClr val="accent1"/>
-          </a:lnRef>
-          <a:fillRef idx="3">
-            <a:schemeClr val="accent1"/>
-          </a:fillRef>
-          <a:effectRef idx="2">
-            <a:schemeClr val="accent1"/>
-          </a:effectRef>
-          <a:fontRef idx="minor">
-            <a:schemeClr val="lt1"/>
-          </a:fontRef>
-        </p:style>
-        <p:txBody>
-          <a:bodyPr rtlCol="0" anchor="ctr"/>
-          <a:lstStyle/>
-          <a:p>
-            <a:pPr algn="ctr"/>
-          </a:p>
-        </p:txBody>
-      </p:sp>
-      <p:sp>
-        <p:nvSpPr>
-          <p:cNvPr id="11" name="TextBox 10"/>
-          <p:cNvSpPr txBox="1"/>
-          <p:nvPr/>
-        </p:nvSpPr>
-        <p:spPr>
-          <a:xfrm>
-            <a:off x="6537960" y="1664207"/>
-            <a:ext cx="5120640" cy="411480"/>
-          </a:xfrm>
-          <a:prstGeom prst="rect">
-            <a:avLst/>
-          </a:prstGeom>
-          <a:noFill/>
-        </p:spPr>
-        <p:txBody>
-          <a:bodyPr wrap="square" anchor="t">
-            <a:spAutoFit/>
-          </a:bodyPr>
-          <a:lstStyle/>
-          <a:p>
-            <a:pPr algn="l">
+              <a:t>Понимаем специфику сезонных рисков, логистики и</a:t>
+            </a:r>
+          </a:p>
+          <a:p>
+            <a:pPr>
               <a:spcAft>
                 <a:spcPts val="800"/>
               </a:spcAft>
-              <a:defRPr sz="1700" b="1">
-                <a:solidFill>
-                  <a:srgbClr val="D4AF37"/>
-                </a:solidFill>
-                <a:latin typeface="Calibri"/>
-              </a:defRPr>
-            </a:pPr>
-            <a:r>
-              <a:t>Строительные объекты</a:t>
-            </a:r>
-          </a:p>
-        </p:txBody>
-      </p:sp>
-      <p:sp>
-        <p:nvSpPr>
-          <p:cNvPr id="12" name="TextBox 11"/>
-          <p:cNvSpPr txBox="1"/>
-          <p:nvPr/>
-        </p:nvSpPr>
-        <p:spPr>
-          <a:xfrm>
-            <a:off x="6537960" y="2084831"/>
-            <a:ext cx="5120640" cy="640080"/>
-          </a:xfrm>
-          <a:prstGeom prst="rect">
-            <a:avLst/>
-          </a:prstGeom>
-          <a:noFill/>
-        </p:spPr>
-        <p:txBody>
-          <a:bodyPr wrap="square" anchor="t">
-            <a:spAutoFit/>
-          </a:bodyPr>
-          <a:lstStyle/>
-          <a:p>
-            <a:pPr algn="l">
-              <a:spcAft>
-                <a:spcPts val="800"/>
-              </a:spcAft>
-              <a:defRPr sz="1300" b="0">
+              <a:defRPr sz="1700" b="0">
                 <a:solidFill>
                   <a:srgbClr val="919BAF"/>
                 </a:solidFill>
@@ -5993,503 +5903,35 @@
               </a:defRPr>
             </a:pPr>
             <a:r>
-              <a:t>Площадки, техника, материалы на всех этапах</a:t>
-            </a:r>
-          </a:p>
-        </p:txBody>
-      </p:sp>
-      <p:sp>
-        <p:nvSpPr>
-          <p:cNvPr id="13" name="Rectangle 12"/>
-          <p:cNvSpPr/>
-          <p:nvPr/>
-        </p:nvSpPr>
-        <p:spPr>
-          <a:xfrm>
-            <a:off x="640080" y="3063239"/>
-            <a:ext cx="5486400" cy="1325880"/>
-          </a:xfrm>
-          <a:prstGeom prst="rect">
-            <a:avLst/>
-          </a:prstGeom>
-          <a:solidFill>
-            <a:srgbClr val="121824"/>
-          </a:solidFill>
-          <a:ln>
-            <a:solidFill>
-              <a:srgbClr val="3C465A"/>
-            </a:solidFill>
-          </a:ln>
-        </p:spPr>
-        <p:style>
-          <a:lnRef idx="1">
-            <a:schemeClr val="accent1"/>
-          </a:lnRef>
-          <a:fillRef idx="3">
-            <a:schemeClr val="accent1"/>
-          </a:fillRef>
-          <a:effectRef idx="2">
-            <a:schemeClr val="accent1"/>
-          </a:effectRef>
-          <a:fontRef idx="minor">
-            <a:schemeClr val="lt1"/>
-          </a:fontRef>
-        </p:style>
-        <p:txBody>
-          <a:bodyPr rtlCol="0" anchor="ctr"/>
-          <a:lstStyle/>
-          <a:p>
-            <a:pPr algn="ctr"/>
-          </a:p>
-        </p:txBody>
-      </p:sp>
-      <p:sp>
-        <p:nvSpPr>
-          <p:cNvPr id="14" name="TextBox 13"/>
-          <p:cNvSpPr txBox="1"/>
-          <p:nvPr/>
-        </p:nvSpPr>
-        <p:spPr>
-          <a:xfrm>
-            <a:off x="777240" y="3172968"/>
-            <a:ext cx="5120640" cy="411480"/>
-          </a:xfrm>
-          <a:prstGeom prst="rect">
-            <a:avLst/>
-          </a:prstGeom>
-          <a:noFill/>
-        </p:spPr>
-        <p:txBody>
-          <a:bodyPr wrap="square" anchor="t">
-            <a:spAutoFit/>
-          </a:bodyPr>
-          <a:lstStyle/>
-          <a:p>
-            <a:pPr algn="l">
-              <a:spcAft>
-                <a:spcPts val="800"/>
-              </a:spcAft>
-              <a:defRPr sz="1700" b="1">
-                <a:solidFill>
-                  <a:srgbClr val="D4AF37"/>
-                </a:solidFill>
-                <a:latin typeface="Calibri"/>
-              </a:defRPr>
-            </a:pPr>
-            <a:r>
-              <a:t>Складские помещения</a:t>
-            </a:r>
-          </a:p>
-        </p:txBody>
-      </p:sp>
-      <p:sp>
-        <p:nvSpPr>
-          <p:cNvPr id="15" name="TextBox 14"/>
-          <p:cNvSpPr txBox="1"/>
-          <p:nvPr/>
-        </p:nvSpPr>
-        <p:spPr>
-          <a:xfrm>
-            <a:off x="777240" y="3593591"/>
-            <a:ext cx="5120640" cy="640080"/>
-          </a:xfrm>
-          <a:prstGeom prst="rect">
-            <a:avLst/>
-          </a:prstGeom>
-          <a:noFill/>
-        </p:spPr>
-        <p:txBody>
-          <a:bodyPr wrap="square" anchor="t">
-            <a:spAutoFit/>
-          </a:bodyPr>
-          <a:lstStyle/>
-          <a:p>
-            <a:pPr algn="l">
-              <a:spcAft>
-                <a:spcPts val="800"/>
-              </a:spcAft>
-              <a:defRPr sz="1300" b="0">
-                <a:solidFill>
-                  <a:srgbClr val="919BAF"/>
-                </a:solidFill>
-                <a:latin typeface="Calibri"/>
-              </a:defRPr>
-            </a:pPr>
-            <a:r>
-              <a:t>ТМЦ, логистика, сохранность грузов</a:t>
-            </a:r>
-          </a:p>
-        </p:txBody>
-      </p:sp>
-      <p:sp>
-        <p:nvSpPr>
-          <p:cNvPr id="16" name="Rectangle 15"/>
-          <p:cNvSpPr/>
-          <p:nvPr/>
-        </p:nvSpPr>
-        <p:spPr>
-          <a:xfrm>
-            <a:off x="6400800" y="3063239"/>
-            <a:ext cx="5486400" cy="1325880"/>
-          </a:xfrm>
-          <a:prstGeom prst="rect">
-            <a:avLst/>
-          </a:prstGeom>
-          <a:solidFill>
-            <a:srgbClr val="121824"/>
-          </a:solidFill>
-          <a:ln>
-            <a:solidFill>
-              <a:srgbClr val="3C465A"/>
-            </a:solidFill>
-          </a:ln>
-        </p:spPr>
-        <p:style>
-          <a:lnRef idx="1">
-            <a:schemeClr val="accent1"/>
-          </a:lnRef>
-          <a:fillRef idx="3">
-            <a:schemeClr val="accent1"/>
-          </a:fillRef>
-          <a:effectRef idx="2">
-            <a:schemeClr val="accent1"/>
-          </a:effectRef>
-          <a:fontRef idx="minor">
-            <a:schemeClr val="lt1"/>
-          </a:fontRef>
-        </p:style>
-        <p:txBody>
-          <a:bodyPr rtlCol="0" anchor="ctr"/>
-          <a:lstStyle/>
-          <a:p>
-            <a:pPr algn="ctr"/>
-          </a:p>
-        </p:txBody>
-      </p:sp>
-      <p:sp>
-        <p:nvSpPr>
-          <p:cNvPr id="17" name="TextBox 16"/>
-          <p:cNvSpPr txBox="1"/>
-          <p:nvPr/>
-        </p:nvSpPr>
-        <p:spPr>
-          <a:xfrm>
-            <a:off x="6537960" y="3172968"/>
-            <a:ext cx="5120640" cy="411480"/>
-          </a:xfrm>
-          <a:prstGeom prst="rect">
-            <a:avLst/>
-          </a:prstGeom>
-          <a:noFill/>
-        </p:spPr>
-        <p:txBody>
-          <a:bodyPr wrap="square" anchor="t">
-            <a:spAutoFit/>
-          </a:bodyPr>
-          <a:lstStyle/>
-          <a:p>
-            <a:pPr algn="l">
-              <a:spcAft>
-                <a:spcPts val="800"/>
-              </a:spcAft>
-              <a:defRPr sz="1700" b="1">
-                <a:solidFill>
-                  <a:srgbClr val="D4AF37"/>
-                </a:solidFill>
-                <a:latin typeface="Calibri"/>
-              </a:defRPr>
-            </a:pPr>
-            <a:r>
-              <a:t>Пропускной режим</a:t>
-            </a:r>
-          </a:p>
-        </p:txBody>
-      </p:sp>
-      <p:sp>
-        <p:nvSpPr>
-          <p:cNvPr id="18" name="TextBox 17"/>
-          <p:cNvSpPr txBox="1"/>
-          <p:nvPr/>
-        </p:nvSpPr>
-        <p:spPr>
-          <a:xfrm>
-            <a:off x="6537960" y="3593591"/>
-            <a:ext cx="5120640" cy="640080"/>
-          </a:xfrm>
-          <a:prstGeom prst="rect">
-            <a:avLst/>
-          </a:prstGeom>
-          <a:noFill/>
-        </p:spPr>
-        <p:txBody>
-          <a:bodyPr wrap="square" anchor="t">
-            <a:spAutoFit/>
-          </a:bodyPr>
-          <a:lstStyle/>
-          <a:p>
-            <a:pPr algn="l">
-              <a:spcAft>
-                <a:spcPts val="800"/>
-              </a:spcAft>
-              <a:defRPr sz="1300" b="0">
-                <a:solidFill>
-                  <a:srgbClr val="919BAF"/>
-                </a:solidFill>
-                <a:latin typeface="Calibri"/>
-              </a:defRPr>
-            </a:pPr>
-            <a:r>
-              <a:t>КПП, контроль доступа, внутриобъектовый режим</a:t>
-            </a:r>
-          </a:p>
-        </p:txBody>
-      </p:sp>
-      <p:sp>
-        <p:nvSpPr>
-          <p:cNvPr id="19" name="Rectangle 18"/>
-          <p:cNvSpPr/>
-          <p:nvPr/>
-        </p:nvSpPr>
-        <p:spPr>
-          <a:xfrm>
-            <a:off x="640080" y="4572000"/>
-            <a:ext cx="5486400" cy="1325880"/>
-          </a:xfrm>
-          <a:prstGeom prst="rect">
-            <a:avLst/>
-          </a:prstGeom>
-          <a:solidFill>
-            <a:srgbClr val="121824"/>
-          </a:solidFill>
-          <a:ln>
-            <a:solidFill>
-              <a:srgbClr val="3C465A"/>
-            </a:solidFill>
-          </a:ln>
-        </p:spPr>
-        <p:style>
-          <a:lnRef idx="1">
-            <a:schemeClr val="accent1"/>
-          </a:lnRef>
-          <a:fillRef idx="3">
-            <a:schemeClr val="accent1"/>
-          </a:fillRef>
-          <a:effectRef idx="2">
-            <a:schemeClr val="accent1"/>
-          </a:effectRef>
-          <a:fontRef idx="minor">
-            <a:schemeClr val="lt1"/>
-          </a:fontRef>
-        </p:style>
-        <p:txBody>
-          <a:bodyPr rtlCol="0" anchor="ctr"/>
-          <a:lstStyle/>
-          <a:p>
-            <a:pPr algn="ctr"/>
-          </a:p>
-        </p:txBody>
-      </p:sp>
-      <p:sp>
-        <p:nvSpPr>
-          <p:cNvPr id="20" name="TextBox 19"/>
-          <p:cNvSpPr txBox="1"/>
-          <p:nvPr/>
-        </p:nvSpPr>
-        <p:spPr>
-          <a:xfrm>
-            <a:off x="777240" y="4681728"/>
-            <a:ext cx="5120640" cy="411480"/>
-          </a:xfrm>
-          <a:prstGeom prst="rect">
-            <a:avLst/>
-          </a:prstGeom>
-          <a:noFill/>
-        </p:spPr>
-        <p:txBody>
-          <a:bodyPr wrap="square" anchor="t">
-            <a:spAutoFit/>
-          </a:bodyPr>
-          <a:lstStyle/>
-          <a:p>
-            <a:pPr algn="l">
-              <a:spcAft>
-                <a:spcPts val="800"/>
-              </a:spcAft>
-              <a:defRPr sz="1700" b="1">
-                <a:solidFill>
-                  <a:srgbClr val="D4AF37"/>
-                </a:solidFill>
-                <a:latin typeface="Calibri"/>
-              </a:defRPr>
-            </a:pPr>
-            <a:r>
-              <a:t>Сельхозпредприятия</a:t>
-            </a:r>
-          </a:p>
-        </p:txBody>
-      </p:sp>
-      <p:sp>
-        <p:nvSpPr>
-          <p:cNvPr id="21" name="TextBox 20"/>
-          <p:cNvSpPr txBox="1"/>
-          <p:nvPr/>
-        </p:nvSpPr>
-        <p:spPr>
-          <a:xfrm>
-            <a:off x="777240" y="5102352"/>
-            <a:ext cx="5120640" cy="640080"/>
-          </a:xfrm>
-          <a:prstGeom prst="rect">
-            <a:avLst/>
-          </a:prstGeom>
-          <a:noFill/>
-        </p:spPr>
-        <p:txBody>
-          <a:bodyPr wrap="square" anchor="t">
-            <a:spAutoFit/>
-          </a:bodyPr>
-          <a:lstStyle/>
-          <a:p>
-            <a:pPr algn="l">
-              <a:spcAft>
-                <a:spcPts val="800"/>
-              </a:spcAft>
-              <a:defRPr sz="1300" b="0">
-                <a:solidFill>
-                  <a:srgbClr val="919BAF"/>
-                </a:solidFill>
-                <a:latin typeface="Calibri"/>
-              </a:defRPr>
-            </a:pPr>
-            <a:r>
-              <a:t>Зерновые и масличные базы — наша специализация</a:t>
-            </a:r>
-          </a:p>
-        </p:txBody>
-      </p:sp>
-      <p:sp>
-        <p:nvSpPr>
-          <p:cNvPr id="22" name="Rectangle 21"/>
-          <p:cNvSpPr/>
-          <p:nvPr/>
-        </p:nvSpPr>
-        <p:spPr>
-          <a:xfrm>
-            <a:off x="6400800" y="4572000"/>
-            <a:ext cx="5486400" cy="1325880"/>
-          </a:xfrm>
-          <a:prstGeom prst="rect">
-            <a:avLst/>
-          </a:prstGeom>
-          <a:solidFill>
-            <a:srgbClr val="121824"/>
-          </a:solidFill>
-          <a:ln>
-            <a:solidFill>
-              <a:srgbClr val="3C465A"/>
-            </a:solidFill>
-          </a:ln>
-        </p:spPr>
-        <p:style>
-          <a:lnRef idx="1">
-            <a:schemeClr val="accent1"/>
-          </a:lnRef>
-          <a:fillRef idx="3">
-            <a:schemeClr val="accent1"/>
-          </a:fillRef>
-          <a:effectRef idx="2">
-            <a:schemeClr val="accent1"/>
-          </a:effectRef>
-          <a:fontRef idx="minor">
-            <a:schemeClr val="lt1"/>
-          </a:fontRef>
-        </p:style>
-        <p:txBody>
-          <a:bodyPr rtlCol="0" anchor="ctr"/>
-          <a:lstStyle/>
-          <a:p>
-            <a:pPr algn="ctr"/>
-          </a:p>
-        </p:txBody>
-      </p:sp>
-      <p:sp>
-        <p:nvSpPr>
-          <p:cNvPr id="23" name="TextBox 22"/>
-          <p:cNvSpPr txBox="1"/>
-          <p:nvPr/>
-        </p:nvSpPr>
-        <p:spPr>
-          <a:xfrm>
-            <a:off x="6537960" y="4681728"/>
-            <a:ext cx="5120640" cy="411480"/>
-          </a:xfrm>
-          <a:prstGeom prst="rect">
-            <a:avLst/>
-          </a:prstGeom>
-          <a:noFill/>
-        </p:spPr>
-        <p:txBody>
-          <a:bodyPr wrap="square" anchor="t">
-            <a:spAutoFit/>
-          </a:bodyPr>
-          <a:lstStyle/>
-          <a:p>
-            <a:pPr algn="l">
-              <a:spcAft>
-                <a:spcPts val="800"/>
-              </a:spcAft>
-              <a:defRPr sz="1700" b="1">
-                <a:solidFill>
-                  <a:srgbClr val="D4AF37"/>
-                </a:solidFill>
-                <a:latin typeface="Calibri"/>
-              </a:defRPr>
-            </a:pPr>
-            <a:r>
-              <a:t>Анализ угроз</a:t>
-            </a:r>
-          </a:p>
-        </p:txBody>
-      </p:sp>
-      <p:sp>
-        <p:nvSpPr>
-          <p:cNvPr id="24" name="TextBox 23"/>
-          <p:cNvSpPr txBox="1"/>
-          <p:nvPr/>
-        </p:nvSpPr>
-        <p:spPr>
-          <a:xfrm>
-            <a:off x="6537960" y="5102352"/>
-            <a:ext cx="5120640" cy="640080"/>
-          </a:xfrm>
-          <a:prstGeom prst="rect">
-            <a:avLst/>
-          </a:prstGeom>
-          <a:noFill/>
-        </p:spPr>
-        <p:txBody>
-          <a:bodyPr wrap="square" anchor="t">
-            <a:spAutoFit/>
-          </a:bodyPr>
-          <a:lstStyle/>
-          <a:p>
-            <a:pPr algn="l">
-              <a:spcAft>
-                <a:spcPts val="800"/>
-              </a:spcAft>
-              <a:defRPr sz="1300" b="0">
-                <a:solidFill>
-                  <a:srgbClr val="919BAF"/>
-                </a:solidFill>
-                <a:latin typeface="Calibri"/>
-              </a:defRPr>
-            </a:pPr>
-            <a:r>
-              <a:t>Оценка объекта и индивидуальная система охраны</a:t>
-            </a:r>
-          </a:p>
-        </p:txBody>
-      </p:sp>
+              <a:t>сохранности урожая — работаем точечно под задачу.</a:t>
+            </a:r>
+          </a:p>
+        </p:txBody>
+      </p:sp>
+      <p:pic>
+        <p:nvPicPr>
+          <p:cNvPr id="8" name="Picture 7" descr="02-about.png"/>
+          <p:cNvPicPr>
+            <a:picLocks noChangeAspect="1"/>
+          </p:cNvPicPr>
+          <p:nvPr/>
+        </p:nvPicPr>
+        <p:blipFill>
+          <a:blip r:embed="rId3"/>
+          <a:stretch>
+            <a:fillRect/>
+          </a:stretch>
+        </p:blipFill>
+        <p:spPr>
+          <a:xfrm>
+            <a:off x="6675120" y="1645920"/>
+            <a:ext cx="5029200" cy="3143250"/>
+          </a:xfrm>
+          <a:prstGeom prst="rect">
+            <a:avLst/>
+          </a:prstGeom>
+        </p:spPr>
+      </p:pic>
     </p:spTree>
   </p:cSld>
   <p:clrMapOvr>
@@ -6513,7 +5955,7 @@
       <p:grpSpPr/>
       <p:pic>
         <p:nvPicPr>
-          <p:cNvPr id="2" name="Picture 1" descr="bg-section.png"/>
+          <p:cNvPr id="2" name="Picture 1" descr="bg-dark_soft.png"/>
           <p:cNvPicPr>
             <a:picLocks noChangeAspect="1"/>
           </p:cNvPicPr>
@@ -6543,8 +5985,8 @@
         </p:nvSpPr>
         <p:spPr>
           <a:xfrm>
-            <a:off x="731520" y="2011680"/>
-            <a:ext cx="2743200" cy="1371600"/>
+            <a:off x="502920" y="320040"/>
+            <a:ext cx="3657600" cy="274320"/>
           </a:xfrm>
           <a:prstGeom prst="rect">
             <a:avLst/>
@@ -6559,17 +6001,17 @@
           <a:p>
             <a:pPr algn="l">
               <a:spcAft>
-                <a:spcPts val="1400"/>
-              </a:spcAft>
-              <a:defRPr sz="12000" b="0">
-                <a:solidFill>
-                  <a:srgbClr val="D4AF37"/>
-                </a:solidFill>
-                <a:latin typeface="Calibri"/>
-              </a:defRPr>
-            </a:pPr>
-            <a:r>
-              <a:t>03</a:t>
+                <a:spcPts val="800"/>
+              </a:spcAft>
+              <a:defRPr sz="1000" b="1">
+                <a:solidFill>
+                  <a:srgbClr val="AA9146"/>
+                </a:solidFill>
+                <a:latin typeface="Calibri"/>
+              </a:defRPr>
+            </a:pPr>
+            <a:r>
+              <a:t>ЧОО «ГЮРЗА»</a:t>
             </a:r>
           </a:p>
         </p:txBody>
@@ -6582,8 +6024,8 @@
         </p:nvSpPr>
         <p:spPr>
           <a:xfrm>
-            <a:off x="731520" y="3657600"/>
-            <a:ext cx="10058400" cy="1097280"/>
+            <a:off x="8961120" y="320040"/>
+            <a:ext cx="2743200" cy="274320"/>
           </a:xfrm>
           <a:prstGeom prst="rect">
             <a:avLst/>
@@ -6596,19 +6038,19 @@
           </a:bodyPr>
           <a:lstStyle/>
           <a:p>
-            <a:pPr algn="l">
-              <a:spcAft>
-                <a:spcPts val="1400"/>
-              </a:spcAft>
-              <a:defRPr sz="5400" b="1">
-                <a:solidFill>
-                  <a:srgbClr val="F5F7FA"/>
-                </a:solidFill>
-                <a:latin typeface="Calibri"/>
-              </a:defRPr>
-            </a:pPr>
-            <a:r>
-              <a:t>Преимущества</a:t>
+            <a:pPr algn="r">
+              <a:spcAft>
+                <a:spcPts val="800"/>
+              </a:spcAft>
+              <a:defRPr sz="1000" b="0">
+                <a:solidFill>
+                  <a:srgbClr val="919BAF"/>
+                </a:solidFill>
+                <a:latin typeface="Calibri"/>
+              </a:defRPr>
+            </a:pPr>
+            <a:r>
+              <a:t>gurza36.ru</a:t>
             </a:r>
           </a:p>
         </p:txBody>
@@ -6621,8 +6063,8 @@
         </p:nvSpPr>
         <p:spPr>
           <a:xfrm>
-            <a:off x="749808" y="4754880"/>
-            <a:ext cx="9144000" cy="731520"/>
+            <a:off x="640080" y="914400"/>
+            <a:ext cx="9144000" cy="457200"/>
           </a:xfrm>
           <a:prstGeom prst="rect">
             <a:avLst/>
@@ -6639,15 +6081,15 @@
               <a:spcAft>
                 <a:spcPts val="800"/>
               </a:spcAft>
-              <a:defRPr sz="2200" b="0">
-                <a:solidFill>
-                  <a:srgbClr val="919BAF"/>
-                </a:solidFill>
-                <a:latin typeface="Calibri"/>
-              </a:defRPr>
-            </a:pPr>
-            <a:r>
-              <a:t>Почему выбирают нас</a:t>
+              <a:defRPr sz="1400" b="1">
+                <a:solidFill>
+                  <a:srgbClr val="D4AF37"/>
+                </a:solidFill>
+                <a:latin typeface="Calibri"/>
+              </a:defRPr>
+            </a:pPr>
+            <a:r>
+              <a:t>ГЕОГРАФИЯ</a:t>
             </a:r>
           </a:p>
         </p:txBody>
@@ -6660,8 +6102,8 @@
         </p:nvSpPr>
         <p:spPr>
           <a:xfrm>
-            <a:off x="731520" y="6217920"/>
-            <a:ext cx="7315200" cy="365760"/>
+            <a:off x="640080" y="1325880"/>
+            <a:ext cx="10058400" cy="640080"/>
           </a:xfrm>
           <a:prstGeom prst="rect">
             <a:avLst/>
@@ -6676,17 +6118,135 @@
           <a:p>
             <a:pPr algn="l">
               <a:spcAft>
-                <a:spcPts val="800"/>
-              </a:spcAft>
-              <a:defRPr sz="1400" b="0">
-                <a:solidFill>
-                  <a:srgbClr val="919BAF"/>
-                </a:solidFill>
-                <a:latin typeface="Calibri"/>
-              </a:defRPr>
-            </a:pPr>
-            <a:r>
-              <a:t>Воронеж · 2026</a:t>
+                <a:spcPts val="1400"/>
+              </a:spcAft>
+              <a:defRPr sz="3600" b="1">
+                <a:solidFill>
+                  <a:srgbClr val="F5F7FA"/>
+                </a:solidFill>
+                <a:latin typeface="Calibri"/>
+              </a:defRPr>
+            </a:pPr>
+            <a:r>
+              <a:t>Воронеж и Воронежская область</a:t>
+            </a:r>
+          </a:p>
+        </p:txBody>
+      </p:sp>
+      <p:sp>
+        <p:nvSpPr>
+          <p:cNvPr id="7" name="TextBox 6"/>
+          <p:cNvSpPr txBox="1"/>
+          <p:nvPr/>
+        </p:nvSpPr>
+        <p:spPr>
+          <a:xfrm>
+            <a:off x="731520" y="2194560"/>
+            <a:ext cx="10515600" cy="4114800"/>
+          </a:xfrm>
+          <a:prstGeom prst="rect">
+            <a:avLst/>
+          </a:prstGeom>
+          <a:noFill/>
+        </p:spPr>
+        <p:txBody>
+          <a:bodyPr wrap="square" anchor="t">
+            <a:spAutoFit/>
+          </a:bodyPr>
+          <a:lstStyle/>
+          <a:p>
+            <a:pPr algn="l">
+              <a:spcBef>
+                <a:spcPts val="1000"/>
+              </a:spcBef>
+              <a:spcAft>
+                <a:spcPts val="600"/>
+              </a:spcAft>
+              <a:defRPr sz="1900">
+                <a:solidFill>
+                  <a:srgbClr val="F5F7FA"/>
+                </a:solidFill>
+                <a:latin typeface="Calibri"/>
+              </a:defRPr>
+            </a:pPr>
+            <a:r>
+              <a:t>—  Административные и офисные здания</a:t>
+            </a:r>
+          </a:p>
+          <a:p>
+            <a:pPr>
+              <a:spcBef>
+                <a:spcPts val="1000"/>
+              </a:spcBef>
+              <a:spcAft>
+                <a:spcPts val="600"/>
+              </a:spcAft>
+              <a:defRPr sz="1900">
+                <a:solidFill>
+                  <a:srgbClr val="F5F7FA"/>
+                </a:solidFill>
+                <a:latin typeface="Calibri"/>
+              </a:defRPr>
+            </a:pPr>
+            <a:r>
+              <a:t>—  Строительные площадки и объекты на всех стадиях</a:t>
+            </a:r>
+          </a:p>
+          <a:p>
+            <a:pPr>
+              <a:spcBef>
+                <a:spcPts val="1000"/>
+              </a:spcBef>
+              <a:spcAft>
+                <a:spcPts val="600"/>
+              </a:spcAft>
+              <a:defRPr sz="1900">
+                <a:solidFill>
+                  <a:srgbClr val="F5F7FA"/>
+                </a:solidFill>
+                <a:latin typeface="Calibri"/>
+              </a:defRPr>
+            </a:pPr>
+            <a:r>
+              <a:t>—  Склады, логистические и производственные комплексы</a:t>
+            </a:r>
+          </a:p>
+          <a:p>
+            <a:pPr>
+              <a:spcBef>
+                <a:spcPts val="1000"/>
+              </a:spcBef>
+              <a:spcAft>
+                <a:spcPts val="600"/>
+              </a:spcAft>
+              <a:defRPr sz="1900">
+                <a:solidFill>
+                  <a:srgbClr val="F5F7FA"/>
+                </a:solidFill>
+                <a:latin typeface="Calibri"/>
+              </a:defRPr>
+            </a:pPr>
+            <a:r>
+              <a:t>—  Сельхозпредприятия, элеваторы, зерновые базы</a:t>
+            </a:r>
+          </a:p>
+          <a:p>
+            <a:pPr>
+              <a:spcBef>
+                <a:spcPts val="1000"/>
+              </a:spcBef>
+              <a:spcAft>
+                <a:spcPts val="600"/>
+              </a:spcAft>
+              <a:defRPr sz="1900">
+                <a:solidFill>
+                  <a:srgbClr val="F5F7FA"/>
+                </a:solidFill>
+                <a:latin typeface="Calibri"/>
+              </a:defRPr>
+            </a:pPr>
+            <a:r>
+              <a:t>—  Объекты с пропускным и внутриобъектовым режимом</a:t>
             </a:r>
           </a:p>
         </p:txBody>
@@ -6697,7 +6257,7 @@
     <a:masterClrMapping/>
   </p:clrMapOvr>
   <p:transition spd="med" advClick="1">
-    <p:push dir="l"/>
+    <p:fadeThroughBlack/>
   </p:transition>
 </p:sld>
 </file>
@@ -6762,9 +6322,9 @@
               <a:spcAft>
                 <a:spcPts val="800"/>
               </a:spcAft>
-              <a:defRPr sz="1100" b="1">
-                <a:solidFill>
-                  <a:srgbClr val="D4AF37"/>
+              <a:defRPr sz="1000" b="1">
+                <a:solidFill>
+                  <a:srgbClr val="AA9146"/>
                 </a:solidFill>
                 <a:latin typeface="Calibri"/>
               </a:defRPr>
@@ -6801,9 +6361,9 @@
               <a:spcAft>
                 <a:spcPts val="800"/>
               </a:spcAft>
-              <a:defRPr sz="1100" b="1">
-                <a:solidFill>
-                  <a:srgbClr val="D4AF37"/>
+              <a:defRPr sz="1000" b="0">
+                <a:solidFill>
+                  <a:srgbClr val="919BAF"/>
                 </a:solidFill>
                 <a:latin typeface="Calibri"/>
               </a:defRPr>
@@ -6816,49 +6376,7 @@
       </p:sp>
       <p:sp>
         <p:nvSpPr>
-          <p:cNvPr id="5" name="Rectangle 4"/>
-          <p:cNvSpPr/>
-          <p:nvPr/>
-        </p:nvSpPr>
-        <p:spPr>
-          <a:xfrm>
-            <a:off x="502920" y="658368"/>
-            <a:ext cx="11155680" cy="0"/>
-          </a:xfrm>
-          <a:prstGeom prst="rect">
-            <a:avLst/>
-          </a:prstGeom>
-          <a:ln w="9525">
-            <a:solidFill>
-              <a:srgbClr val="D4AF37"/>
-            </a:solidFill>
-          </a:ln>
-        </p:spPr>
-        <p:style>
-          <a:lnRef idx="1">
-            <a:schemeClr val="accent1"/>
-          </a:lnRef>
-          <a:fillRef idx="3">
-            <a:schemeClr val="accent1"/>
-          </a:fillRef>
-          <a:effectRef idx="2">
-            <a:schemeClr val="accent1"/>
-          </a:effectRef>
-          <a:fontRef idx="minor">
-            <a:schemeClr val="lt1"/>
-          </a:fontRef>
-        </p:style>
-        <p:txBody>
-          <a:bodyPr rtlCol="0" anchor="ctr"/>
-          <a:lstStyle/>
-          <a:p>
-            <a:pPr algn="ctr"/>
-          </a:p>
-        </p:txBody>
-      </p:sp>
-      <p:sp>
-        <p:nvSpPr>
-          <p:cNvPr id="6" name="TextBox 5"/>
+          <p:cNvPr id="5" name="TextBox 4"/>
           <p:cNvSpPr txBox="1"/>
           <p:nvPr/>
         </p:nvSpPr>
@@ -6890,20 +6408,20 @@
               </a:defRPr>
             </a:pPr>
             <a:r>
-              <a:t>ПРЕИМУЩЕСТВА</a:t>
-            </a:r>
-          </a:p>
-        </p:txBody>
-      </p:sp>
-      <p:sp>
-        <p:nvSpPr>
-          <p:cNvPr id="7" name="TextBox 6"/>
+              <a:t>КОНТАКТЫ</a:t>
+            </a:r>
+          </a:p>
+        </p:txBody>
+      </p:sp>
+      <p:sp>
+        <p:nvSpPr>
+          <p:cNvPr id="6" name="TextBox 5"/>
           <p:cNvSpPr txBox="1"/>
           <p:nvPr/>
         </p:nvSpPr>
         <p:spPr>
           <a:xfrm>
-            <a:off x="640080" y="1371600"/>
+            <a:off x="640080" y="1325880"/>
             <a:ext cx="10058400" cy="640080"/>
           </a:xfrm>
           <a:prstGeom prst="rect">
@@ -6921,7 +6439,7 @@
               <a:spcAft>
                 <a:spcPts val="1400"/>
               </a:spcAft>
-              <a:defRPr sz="3200" b="1">
+              <a:defRPr sz="3600" b="1">
                 <a:solidFill>
                   <a:srgbClr val="F5F7FA"/>
                 </a:solidFill>
@@ -6929,66 +6447,21 @@
               </a:defRPr>
             </a:pPr>
             <a:r>
-              <a:t>Сотрудничая с нами, вы получаете</a:t>
-            </a:r>
-          </a:p>
-        </p:txBody>
-      </p:sp>
-      <p:sp>
-        <p:nvSpPr>
-          <p:cNvPr id="8" name="Rectangle 7"/>
-          <p:cNvSpPr/>
-          <p:nvPr/>
-        </p:nvSpPr>
-        <p:spPr>
-          <a:xfrm>
-            <a:off x="640080" y="2286000"/>
-            <a:ext cx="3474720" cy="1417320"/>
-          </a:xfrm>
-          <a:prstGeom prst="rect">
-            <a:avLst/>
-          </a:prstGeom>
-          <a:solidFill>
-            <a:srgbClr val="121824"/>
-          </a:solidFill>
-          <a:ln w="6350">
-            <a:solidFill>
-              <a:srgbClr val="D4AF37"/>
-            </a:solidFill>
-          </a:ln>
-        </p:spPr>
-        <p:style>
-          <a:lnRef idx="1">
-            <a:schemeClr val="accent1"/>
-          </a:lnRef>
-          <a:fillRef idx="3">
-            <a:schemeClr val="accent1"/>
-          </a:fillRef>
-          <a:effectRef idx="2">
-            <a:schemeClr val="accent1"/>
-          </a:effectRef>
-          <a:fontRef idx="minor">
-            <a:schemeClr val="lt1"/>
-          </a:fontRef>
-        </p:style>
-        <p:txBody>
-          <a:bodyPr rtlCol="0" anchor="ctr"/>
-          <a:lstStyle/>
-          <a:p>
-            <a:pPr algn="ctr"/>
-          </a:p>
-        </p:txBody>
-      </p:sp>
-      <p:sp>
-        <p:nvSpPr>
-          <p:cNvPr id="9" name="TextBox 8"/>
+              <a:t>Связаться с нами</a:t>
+            </a:r>
+          </a:p>
+        </p:txBody>
+      </p:sp>
+      <p:sp>
+        <p:nvSpPr>
+          <p:cNvPr id="7" name="TextBox 6"/>
           <p:cNvSpPr txBox="1"/>
           <p:nvPr/>
         </p:nvSpPr>
         <p:spPr>
           <a:xfrm>
-            <a:off x="822959" y="2423160"/>
-            <a:ext cx="3108960" cy="640080"/>
+            <a:off x="640080" y="2103120"/>
+            <a:ext cx="5303520" cy="2560320"/>
           </a:xfrm>
           <a:prstGeom prst="rect">
             <a:avLst/>
@@ -7003,31 +6476,137 @@
           <a:p>
             <a:pPr algn="l">
               <a:spcAft>
+                <a:spcPts val="800"/>
+              </a:spcAft>
+              <a:defRPr sz="1600" b="0">
+                <a:solidFill>
+                  <a:srgbClr val="919BAF"/>
+                </a:solidFill>
+                <a:latin typeface="Calibri"/>
+              </a:defRPr>
+            </a:pPr>
+            <a:r>
+              <a:t>Официальный сайт:</a:t>
+            </a:r>
+          </a:p>
+          <a:p>
+            <a:pPr>
+              <a:spcAft>
                 <a:spcPts val="1400"/>
               </a:spcAft>
-              <a:defRPr sz="3600" b="1">
-                <a:solidFill>
-                  <a:srgbClr val="D4AF37"/>
-                </a:solidFill>
-                <a:latin typeface="Calibri"/>
-              </a:defRPr>
-            </a:pPr>
-            <a:r>
-              <a:t>15+</a:t>
-            </a:r>
-          </a:p>
-        </p:txBody>
-      </p:sp>
-      <p:sp>
-        <p:nvSpPr>
-          <p:cNvPr id="10" name="TextBox 9"/>
+              <a:defRPr sz="2800" b="1">
+                <a:solidFill>
+                  <a:srgbClr val="F0D98C"/>
+                </a:solidFill>
+                <a:latin typeface="Calibri"/>
+              </a:defRPr>
+            </a:pPr>
+            <a:r>
+              <a:t>gurza36.ru</a:t>
+            </a:r>
+          </a:p>
+          <a:p>
+            <a:pPr>
+              <a:spcAft>
+                <a:spcPts val="800"/>
+              </a:spcAft>
+              <a:defRPr sz="800" b="0">
+                <a:solidFill>
+                  <a:srgbClr val="F5F7FA"/>
+                </a:solidFill>
+                <a:latin typeface="Calibri"/>
+              </a:defRPr>
+            </a:pPr>
+          </a:p>
+          <a:p>
+            <a:pPr>
+              <a:spcAft>
+                <a:spcPts val="800"/>
+              </a:spcAft>
+              <a:defRPr sz="1600" b="0">
+                <a:solidFill>
+                  <a:srgbClr val="919BAF"/>
+                </a:solidFill>
+                <a:latin typeface="Calibri"/>
+              </a:defRPr>
+            </a:pPr>
+            <a:r>
+              <a:t>Телефоны:</a:t>
+            </a:r>
+          </a:p>
+          <a:p>
+            <a:pPr>
+              <a:spcAft>
+                <a:spcPts val="800"/>
+              </a:spcAft>
+              <a:defRPr sz="2000" b="1">
+                <a:solidFill>
+                  <a:srgbClr val="F5F7FA"/>
+                </a:solidFill>
+                <a:latin typeface="Calibri"/>
+              </a:defRPr>
+            </a:pPr>
+            <a:r>
+              <a:t>+7 (473) 278-51-47</a:t>
+            </a:r>
+          </a:p>
+          <a:p>
+            <a:pPr>
+              <a:spcAft>
+                <a:spcPts val="800"/>
+              </a:spcAft>
+              <a:defRPr sz="2000" b="1">
+                <a:solidFill>
+                  <a:srgbClr val="F5F7FA"/>
+                </a:solidFill>
+                <a:latin typeface="Calibri"/>
+              </a:defRPr>
+            </a:pPr>
+            <a:r>
+              <a:t>+7 (900) 954-43-12</a:t>
+            </a:r>
+          </a:p>
+          <a:p>
+            <a:pPr>
+              <a:spcAft>
+                <a:spcPts val="800"/>
+              </a:spcAft>
+              <a:defRPr sz="800" b="0">
+                <a:solidFill>
+                  <a:srgbClr val="F5F7FA"/>
+                </a:solidFill>
+                <a:latin typeface="Calibri"/>
+              </a:defRPr>
+            </a:pPr>
+          </a:p>
+          <a:p>
+            <a:pPr>
+              <a:spcAft>
+                <a:spcPts val="800"/>
+              </a:spcAft>
+              <a:defRPr sz="1700" b="0">
+                <a:solidFill>
+                  <a:srgbClr val="F5F7FA"/>
+                </a:solidFill>
+                <a:latin typeface="Calibri"/>
+              </a:defRPr>
+            </a:pPr>
+            <a:r>
+              <a:t>Email: mike1592@yandex.ru</a:t>
+            </a:r>
+          </a:p>
+        </p:txBody>
+      </p:sp>
+      <p:sp>
+        <p:nvSpPr>
+          <p:cNvPr id="8" name="TextBox 7"/>
           <p:cNvSpPr txBox="1"/>
           <p:nvPr/>
         </p:nvSpPr>
         <p:spPr>
           <a:xfrm>
-            <a:off x="822959" y="3063240"/>
-            <a:ext cx="3108960" cy="548640"/>
+            <a:off x="640080" y="4754880"/>
+            <a:ext cx="5486400" cy="1097280"/>
           </a:xfrm>
           <a:prstGeom prst="rect">
             <a:avLst/>
@@ -7044,7 +6623,7 @@
               <a:spcAft>
                 <a:spcPts val="800"/>
               </a:spcAft>
-              <a:defRPr sz="1300" b="0">
+              <a:defRPr sz="1600" b="0">
                 <a:solidFill>
                   <a:srgbClr val="919BAF"/>
                 </a:solidFill>
@@ -7052,122 +6631,15 @@
               </a:defRPr>
             </a:pPr>
             <a:r>
-              <a:t>лет на рынке охранных услуг</a:t>
-            </a:r>
-          </a:p>
-        </p:txBody>
-      </p:sp>
-      <p:sp>
-        <p:nvSpPr>
-          <p:cNvPr id="11" name="Rectangle 10"/>
-          <p:cNvSpPr/>
-          <p:nvPr/>
-        </p:nvSpPr>
-        <p:spPr>
-          <a:xfrm>
-            <a:off x="4251959" y="2286000"/>
-            <a:ext cx="3474720" cy="1417320"/>
-          </a:xfrm>
-          <a:prstGeom prst="rect">
-            <a:avLst/>
-          </a:prstGeom>
-          <a:solidFill>
-            <a:srgbClr val="121824"/>
-          </a:solidFill>
-          <a:ln w="6350">
-            <a:solidFill>
-              <a:srgbClr val="D4AF37"/>
-            </a:solidFill>
-          </a:ln>
-        </p:spPr>
-        <p:style>
-          <a:lnRef idx="1">
-            <a:schemeClr val="accent1"/>
-          </a:lnRef>
-          <a:fillRef idx="3">
-            <a:schemeClr val="accent1"/>
-          </a:fillRef>
-          <a:effectRef idx="2">
-            <a:schemeClr val="accent1"/>
-          </a:effectRef>
-          <a:fontRef idx="minor">
-            <a:schemeClr val="lt1"/>
-          </a:fontRef>
-        </p:style>
-        <p:txBody>
-          <a:bodyPr rtlCol="0" anchor="ctr"/>
-          <a:lstStyle/>
-          <a:p>
-            <a:pPr algn="ctr"/>
-          </a:p>
-        </p:txBody>
-      </p:sp>
-      <p:sp>
-        <p:nvSpPr>
-          <p:cNvPr id="12" name="TextBox 11"/>
-          <p:cNvSpPr txBox="1"/>
-          <p:nvPr/>
-        </p:nvSpPr>
-        <p:spPr>
-          <a:xfrm>
-            <a:off x="4434840" y="2423160"/>
-            <a:ext cx="3108960" cy="640080"/>
-          </a:xfrm>
-          <a:prstGeom prst="rect">
-            <a:avLst/>
-          </a:prstGeom>
-          <a:noFill/>
-        </p:spPr>
-        <p:txBody>
-          <a:bodyPr wrap="square" anchor="t">
-            <a:spAutoFit/>
-          </a:bodyPr>
-          <a:lstStyle/>
-          <a:p>
-            <a:pPr algn="l">
-              <a:spcAft>
-                <a:spcPts val="1400"/>
-              </a:spcAft>
-              <a:defRPr sz="3600" b="1">
-                <a:solidFill>
-                  <a:srgbClr val="D4AF37"/>
-                </a:solidFill>
-                <a:latin typeface="Calibri"/>
-              </a:defRPr>
-            </a:pPr>
-            <a:r>
-              <a:t>100%</a:t>
-            </a:r>
-          </a:p>
-        </p:txBody>
-      </p:sp>
-      <p:sp>
-        <p:nvSpPr>
-          <p:cNvPr id="13" name="TextBox 12"/>
-          <p:cNvSpPr txBox="1"/>
-          <p:nvPr/>
-        </p:nvSpPr>
-        <p:spPr>
-          <a:xfrm>
-            <a:off x="4434840" y="3063240"/>
-            <a:ext cx="3108960" cy="548640"/>
-          </a:xfrm>
-          <a:prstGeom prst="rect">
-            <a:avLst/>
-          </a:prstGeom>
-          <a:noFill/>
-        </p:spPr>
-        <p:txBody>
-          <a:bodyPr wrap="square" anchor="t">
-            <a:spAutoFit/>
-          </a:bodyPr>
-          <a:lstStyle/>
-          <a:p>
-            <a:pPr algn="l">
+              <a:t>394016, г. Воронеж,</a:t>
+            </a:r>
+          </a:p>
+          <a:p>
+            <a:pPr>
               <a:spcAft>
                 <a:spcPts val="800"/>
               </a:spcAft>
-              <a:defRPr sz="1300" b="0">
+              <a:defRPr sz="1600" b="0">
                 <a:solidFill>
                   <a:srgbClr val="919BAF"/>
                 </a:solidFill>
@@ -7175,233 +6647,35 @@
               </a:defRPr>
             </a:pPr>
             <a:r>
-              <a:t>специалисты высокого класса</a:t>
-            </a:r>
-          </a:p>
-        </p:txBody>
-      </p:sp>
-      <p:sp>
-        <p:nvSpPr>
-          <p:cNvPr id="14" name="Rectangle 13"/>
-          <p:cNvSpPr/>
-          <p:nvPr/>
-        </p:nvSpPr>
-        <p:spPr>
-          <a:xfrm>
-            <a:off x="7863840" y="2286000"/>
-            <a:ext cx="3474720" cy="1417320"/>
-          </a:xfrm>
-          <a:prstGeom prst="rect">
-            <a:avLst/>
-          </a:prstGeom>
-          <a:solidFill>
-            <a:srgbClr val="121824"/>
-          </a:solidFill>
-          <a:ln w="6350">
-            <a:solidFill>
-              <a:srgbClr val="D4AF37"/>
-            </a:solidFill>
-          </a:ln>
-        </p:spPr>
-        <p:style>
-          <a:lnRef idx="1">
-            <a:schemeClr val="accent1"/>
-          </a:lnRef>
-          <a:fillRef idx="3">
-            <a:schemeClr val="accent1"/>
-          </a:fillRef>
-          <a:effectRef idx="2">
-            <a:schemeClr val="accent1"/>
-          </a:effectRef>
-          <a:fontRef idx="minor">
-            <a:schemeClr val="lt1"/>
-          </a:fontRef>
-        </p:style>
-        <p:txBody>
-          <a:bodyPr rtlCol="0" anchor="ctr"/>
-          <a:lstStyle/>
-          <a:p>
-            <a:pPr algn="ctr"/>
-          </a:p>
-        </p:txBody>
-      </p:sp>
-      <p:sp>
-        <p:nvSpPr>
-          <p:cNvPr id="15" name="TextBox 14"/>
-          <p:cNvSpPr txBox="1"/>
-          <p:nvPr/>
-        </p:nvSpPr>
-        <p:spPr>
-          <a:xfrm>
-            <a:off x="8046719" y="2423160"/>
-            <a:ext cx="3108960" cy="640080"/>
-          </a:xfrm>
-          <a:prstGeom prst="rect">
-            <a:avLst/>
-          </a:prstGeom>
-          <a:noFill/>
-        </p:spPr>
-        <p:txBody>
-          <a:bodyPr wrap="square" anchor="t">
-            <a:spAutoFit/>
-          </a:bodyPr>
-          <a:lstStyle/>
-          <a:p>
-            <a:pPr algn="l">
-              <a:spcAft>
-                <a:spcPts val="1400"/>
-              </a:spcAft>
-              <a:defRPr sz="3600" b="1">
-                <a:solidFill>
-                  <a:srgbClr val="D4AF37"/>
-                </a:solidFill>
-                <a:latin typeface="Calibri"/>
-              </a:defRPr>
-            </a:pPr>
-            <a:r>
-              <a:t>24/7</a:t>
-            </a:r>
-          </a:p>
-        </p:txBody>
-      </p:sp>
-      <p:sp>
-        <p:nvSpPr>
-          <p:cNvPr id="16" name="TextBox 15"/>
-          <p:cNvSpPr txBox="1"/>
-          <p:nvPr/>
-        </p:nvSpPr>
-        <p:spPr>
-          <a:xfrm>
-            <a:off x="8046719" y="3063240"/>
-            <a:ext cx="3108960" cy="548640"/>
-          </a:xfrm>
-          <a:prstGeom prst="rect">
-            <a:avLst/>
-          </a:prstGeom>
-          <a:noFill/>
-        </p:spPr>
-        <p:txBody>
-          <a:bodyPr wrap="square" anchor="t">
-            <a:spAutoFit/>
-          </a:bodyPr>
-          <a:lstStyle/>
-          <a:p>
-            <a:pPr algn="l">
-              <a:spcAft>
-                <a:spcPts val="800"/>
-              </a:spcAft>
-              <a:defRPr sz="1300" b="0">
-                <a:solidFill>
-                  <a:srgbClr val="919BAF"/>
-                </a:solidFill>
-                <a:latin typeface="Calibri"/>
-              </a:defRPr>
-            </a:pPr>
-            <a:r>
-              <a:t>непрерывная охрана</a:t>
-            </a:r>
-          </a:p>
-        </p:txBody>
-      </p:sp>
-      <p:sp>
-        <p:nvSpPr>
-          <p:cNvPr id="17" name="TextBox 16"/>
-          <p:cNvSpPr txBox="1"/>
-          <p:nvPr/>
-        </p:nvSpPr>
-        <p:spPr>
-          <a:xfrm>
-            <a:off x="731520" y="3931920"/>
-            <a:ext cx="10515600" cy="4114800"/>
-          </a:xfrm>
-          <a:prstGeom prst="rect">
-            <a:avLst/>
-          </a:prstGeom>
-          <a:noFill/>
-        </p:spPr>
-        <p:txBody>
-          <a:bodyPr wrap="square" anchor="t">
-            <a:spAutoFit/>
-          </a:bodyPr>
-          <a:lstStyle/>
-          <a:p>
-            <a:pPr algn="l">
-              <a:spcBef>
-                <a:spcPts val="1000"/>
-              </a:spcBef>
-              <a:spcAft>
-                <a:spcPts val="600"/>
-              </a:spcAft>
-              <a:defRPr sz="1800">
-                <a:solidFill>
-                  <a:srgbClr val="F5F7FA"/>
-                </a:solidFill>
-                <a:latin typeface="Calibri"/>
-              </a:defRPr>
-            </a:pPr>
-            <a:r>
-              <a:t>◆  Любой бюджет — от экономного до высокобюджетного решения</a:t>
-            </a:r>
-          </a:p>
-          <a:p>
-            <a:pPr>
-              <a:spcBef>
-                <a:spcPts val="1000"/>
-              </a:spcBef>
-              <a:spcAft>
-                <a:spcPts val="600"/>
-              </a:spcAft>
-              <a:defRPr sz="1800">
-                <a:solidFill>
-                  <a:srgbClr val="F5F7FA"/>
-                </a:solidFill>
-                <a:latin typeface="Calibri"/>
-              </a:defRPr>
-            </a:pPr>
-            <a:r>
-              <a:t>◆  Индивидуальный подход к каждому объекту</a:t>
-            </a:r>
-          </a:p>
-          <a:p>
-            <a:pPr>
-              <a:spcBef>
-                <a:spcPts val="1000"/>
-              </a:spcBef>
-              <a:spcAft>
-                <a:spcPts val="600"/>
-              </a:spcAft>
-              <a:defRPr sz="1800">
-                <a:solidFill>
-                  <a:srgbClr val="F5F7FA"/>
-                </a:solidFill>
-                <a:latin typeface="Calibri"/>
-              </a:defRPr>
-            </a:pPr>
-            <a:r>
-              <a:t>◆  Оперативная реакция и чёткий контроль территории</a:t>
-            </a:r>
-          </a:p>
-          <a:p>
-            <a:pPr>
-              <a:spcBef>
-                <a:spcPts val="1000"/>
-              </a:spcBef>
-              <a:spcAft>
-                <a:spcPts val="600"/>
-              </a:spcAft>
-              <a:defRPr sz="1800">
-                <a:solidFill>
-                  <a:srgbClr val="F5F7FA"/>
-                </a:solidFill>
-                <a:latin typeface="Calibri"/>
-              </a:defRPr>
-            </a:pPr>
-            <a:r>
-              <a:t>◆  Профессиональная оценка рисков перед началом работы</a:t>
-            </a:r>
-          </a:p>
-        </p:txBody>
-      </p:sp>
+              <a:t>ул. Солнечная, 17/1, офис 4</a:t>
+            </a:r>
+          </a:p>
+        </p:txBody>
+      </p:sp>
+      <p:pic>
+        <p:nvPicPr>
+          <p:cNvPr id="9" name="Picture 8" descr="03-contacts.png"/>
+          <p:cNvPicPr>
+            <a:picLocks noChangeAspect="1"/>
+          </p:cNvPicPr>
+          <p:nvPr/>
+        </p:nvPicPr>
+        <p:blipFill>
+          <a:blip r:embed="rId3"/>
+          <a:stretch>
+            <a:fillRect/>
+          </a:stretch>
+        </p:blipFill>
+        <p:spPr>
+          <a:xfrm>
+            <a:off x="6217920" y="1737360"/>
+            <a:ext cx="5486400" cy="3429000"/>
+          </a:xfrm>
+          <a:prstGeom prst="rect">
+            <a:avLst/>
+          </a:prstGeom>
+        </p:spPr>
+      </p:pic>
     </p:spTree>
   </p:cSld>
   <p:clrMapOvr>
@@ -7425,7 +6699,7 @@
       <p:grpSpPr/>
       <p:pic>
         <p:nvPicPr>
-          <p:cNvPr id="2" name="Picture 1" descr="bg-dark.png"/>
+          <p:cNvPr id="2" name="Picture 1" descr="bg-dark_alt.png"/>
           <p:cNvPicPr>
             <a:picLocks noChangeAspect="1"/>
           </p:cNvPicPr>
@@ -7473,9 +6747,9 @@
               <a:spcAft>
                 <a:spcPts val="800"/>
               </a:spcAft>
-              <a:defRPr sz="1100" b="1">
-                <a:solidFill>
-                  <a:srgbClr val="D4AF37"/>
+              <a:defRPr sz="1000" b="1">
+                <a:solidFill>
+                  <a:srgbClr val="AA9146"/>
                 </a:solidFill>
                 <a:latin typeface="Calibri"/>
               </a:defRPr>
@@ -7512,9 +6786,9 @@
               <a:spcAft>
                 <a:spcPts val="800"/>
               </a:spcAft>
-              <a:defRPr sz="1100" b="1">
-                <a:solidFill>
-                  <a:srgbClr val="D4AF37"/>
+              <a:defRPr sz="1000" b="0">
+                <a:solidFill>
+                  <a:srgbClr val="919BAF"/>
                 </a:solidFill>
                 <a:latin typeface="Calibri"/>
               </a:defRPr>
@@ -7527,49 +6801,7 @@
       </p:sp>
       <p:sp>
         <p:nvSpPr>
-          <p:cNvPr id="5" name="Rectangle 4"/>
-          <p:cNvSpPr/>
-          <p:nvPr/>
-        </p:nvSpPr>
-        <p:spPr>
-          <a:xfrm>
-            <a:off x="502920" y="658368"/>
-            <a:ext cx="11155680" cy="0"/>
-          </a:xfrm>
-          <a:prstGeom prst="rect">
-            <a:avLst/>
-          </a:prstGeom>
-          <a:ln w="9525">
-            <a:solidFill>
-              <a:srgbClr val="D4AF37"/>
-            </a:solidFill>
-          </a:ln>
-        </p:spPr>
-        <p:style>
-          <a:lnRef idx="1">
-            <a:schemeClr val="accent1"/>
-          </a:lnRef>
-          <a:fillRef idx="3">
-            <a:schemeClr val="accent1"/>
-          </a:fillRef>
-          <a:effectRef idx="2">
-            <a:schemeClr val="accent1"/>
-          </a:effectRef>
-          <a:fontRef idx="minor">
-            <a:schemeClr val="lt1"/>
-          </a:fontRef>
-        </p:style>
-        <p:txBody>
-          <a:bodyPr rtlCol="0" anchor="ctr"/>
-          <a:lstStyle/>
-          <a:p>
-            <a:pPr algn="ctr"/>
-          </a:p>
-        </p:txBody>
-      </p:sp>
-      <p:sp>
-        <p:nvSpPr>
-          <p:cNvPr id="6" name="TextBox 5"/>
+          <p:cNvPr id="5" name="TextBox 4"/>
           <p:cNvSpPr txBox="1"/>
           <p:nvPr/>
         </p:nvSpPr>
@@ -7601,20 +6833,20 @@
               </a:defRPr>
             </a:pPr>
             <a:r>
-              <a:t>СПЕЦИАЛИЗАЦИЯ</a:t>
-            </a:r>
-          </a:p>
-        </p:txBody>
-      </p:sp>
-      <p:sp>
-        <p:nvSpPr>
-          <p:cNvPr id="7" name="TextBox 6"/>
+              <a:t>РУКОВОДСТВО</a:t>
+            </a:r>
+          </a:p>
+        </p:txBody>
+      </p:sp>
+      <p:sp>
+        <p:nvSpPr>
+          <p:cNvPr id="6" name="TextBox 5"/>
           <p:cNvSpPr txBox="1"/>
           <p:nvPr/>
         </p:nvSpPr>
         <p:spPr>
           <a:xfrm>
-            <a:off x="640080" y="1325880"/>
+            <a:off x="640080" y="1645920"/>
             <a:ext cx="10058400" cy="731520"/>
           </a:xfrm>
           <a:prstGeom prst="rect">
@@ -7632,7 +6864,7 @@
               <a:spcAft>
                 <a:spcPts val="1400"/>
               </a:spcAft>
-              <a:defRPr sz="3400" b="1">
+              <a:defRPr sz="3600" b="1">
                 <a:solidFill>
                   <a:srgbClr val="F5F7FA"/>
                 </a:solidFill>
@@ -7640,21 +6872,21 @@
               </a:defRPr>
             </a:pPr>
             <a:r>
-              <a:t>Охрана агропредприятий и зерновых баз</a:t>
-            </a:r>
-          </a:p>
-        </p:txBody>
-      </p:sp>
-      <p:sp>
-        <p:nvSpPr>
-          <p:cNvPr id="8" name="TextBox 7"/>
+              <a:t>Самофалов Михаил Иванович</a:t>
+            </a:r>
+          </a:p>
+        </p:txBody>
+      </p:sp>
+      <p:sp>
+        <p:nvSpPr>
+          <p:cNvPr id="7" name="TextBox 6"/>
           <p:cNvSpPr txBox="1"/>
           <p:nvPr/>
         </p:nvSpPr>
         <p:spPr>
           <a:xfrm>
-            <a:off x="640080" y="2286000"/>
-            <a:ext cx="5943600" cy="2286000"/>
+            <a:off x="640080" y="2468880"/>
+            <a:ext cx="10058400" cy="457200"/>
           </a:xfrm>
           <a:prstGeom prst="rect">
             <a:avLst/>
@@ -7671,6 +6903,45 @@
               <a:spcAft>
                 <a:spcPts val="800"/>
               </a:spcAft>
+              <a:defRPr sz="2200" b="1">
+                <a:solidFill>
+                  <a:srgbClr val="D4AF37"/>
+                </a:solidFill>
+                <a:latin typeface="Calibri"/>
+              </a:defRPr>
+            </a:pPr>
+            <a:r>
+              <a:t>Директор ООО ЧОО «Гюрза»</a:t>
+            </a:r>
+          </a:p>
+        </p:txBody>
+      </p:sp>
+      <p:sp>
+        <p:nvSpPr>
+          <p:cNvPr id="8" name="TextBox 7"/>
+          <p:cNvSpPr txBox="1"/>
+          <p:nvPr/>
+        </p:nvSpPr>
+        <p:spPr>
+          <a:xfrm>
+            <a:off x="640080" y="3200400"/>
+            <a:ext cx="9144000" cy="1371600"/>
+          </a:xfrm>
+          <a:prstGeom prst="rect">
+            <a:avLst/>
+          </a:prstGeom>
+          <a:noFill/>
+        </p:spPr>
+        <p:txBody>
+          <a:bodyPr wrap="square" anchor="t">
+            <a:spAutoFit/>
+          </a:bodyPr>
+          <a:lstStyle/>
+          <a:p>
+            <a:pPr algn="l">
+              <a:spcAft>
+                <a:spcPts val="800"/>
+              </a:spcAft>
               <a:defRPr sz="1800" b="0">
                 <a:solidFill>
                   <a:srgbClr val="F5F7FA"/>
@@ -7679,7 +6950,7 @@
               </a:defRPr>
             </a:pPr>
             <a:r>
-              <a:t>Особая компетенция — охрана сельхозпредприятий и баз</a:t>
+              <a:t>Готовы обсудить охрану вашего объекта,</a:t>
             </a:r>
           </a:p>
           <a:p>
@@ -7695,7 +6966,7 @@
               </a:defRPr>
             </a:pPr>
             <a:r>
-              <a:t>по приёмке, подработке, хранению и отпуску</a:t>
+              <a:t>провести экспертную оценку и предложить</a:t>
             </a:r>
           </a:p>
           <a:p>
@@ -7703,88 +6974,99 @@
               <a:spcAft>
                 <a:spcPts val="800"/>
               </a:spcAft>
-              <a:defRPr sz="1800" b="1">
-                <a:solidFill>
-                  <a:srgbClr val="F0D98C"/>
-                </a:solidFill>
-                <a:latin typeface="Calibri"/>
-              </a:defRPr>
-            </a:pPr>
-            <a:r>
-              <a:t>зерновых и масличной продукции.</a:t>
+              <a:defRPr sz="1800" b="0">
+                <a:solidFill>
+                  <a:srgbClr val="F5F7FA"/>
+                </a:solidFill>
+                <a:latin typeface="Calibri"/>
+              </a:defRPr>
+            </a:pPr>
+            <a:r>
+              <a:t>оптимальный вариант охраны под ваш бюджет.</a:t>
+            </a:r>
+          </a:p>
+        </p:txBody>
+      </p:sp>
+      <p:sp>
+        <p:nvSpPr>
+          <p:cNvPr id="9" name="TextBox 8"/>
+          <p:cNvSpPr txBox="1"/>
+          <p:nvPr/>
+        </p:nvSpPr>
+        <p:spPr>
+          <a:xfrm>
+            <a:off x="731520" y="4389120"/>
+            <a:ext cx="10515600" cy="4114800"/>
+          </a:xfrm>
+          <a:prstGeom prst="rect">
+            <a:avLst/>
+          </a:prstGeom>
+          <a:noFill/>
+        </p:spPr>
+        <p:txBody>
+          <a:bodyPr wrap="square" anchor="t">
+            <a:spAutoFit/>
+          </a:bodyPr>
+          <a:lstStyle/>
+          <a:p>
+            <a:pPr algn="l">
+              <a:spcBef>
+                <a:spcPts val="1000"/>
+              </a:spcBef>
+              <a:spcAft>
+                <a:spcPts val="600"/>
+              </a:spcAft>
+              <a:defRPr sz="1800">
+                <a:solidFill>
+                  <a:srgbClr val="F5F7FA"/>
+                </a:solidFill>
+                <a:latin typeface="Calibri"/>
+              </a:defRPr>
+            </a:pPr>
+            <a:r>
+              <a:t>—  Звоните — проконсультируем и ответим на все вопросы</a:t>
             </a:r>
           </a:p>
           <a:p>
             <a:pPr>
-              <a:spcAft>
-                <a:spcPts val="800"/>
-              </a:spcAft>
-              <a:defRPr sz="1000" b="0">
+              <a:spcBef>
+                <a:spcPts val="1000"/>
+              </a:spcBef>
+              <a:spcAft>
+                <a:spcPts val="600"/>
+              </a:spcAft>
+              <a:defRPr sz="1800">
                 <a:solidFill>
                   <a:srgbClr val="F5F7FA"/>
                 </a:solidFill>
                 <a:latin typeface="Calibri"/>
               </a:defRPr>
             </a:pPr>
+            <a:r>
+              <a:t>—  Выезд на объект для оценки угроз</a:t>
+            </a:r>
           </a:p>
           <a:p>
             <a:pPr>
-              <a:spcAft>
-                <a:spcPts val="800"/>
-              </a:spcAft>
-              <a:defRPr sz="1700" b="0">
-                <a:solidFill>
-                  <a:srgbClr val="919BAF"/>
-                </a:solidFill>
-                <a:latin typeface="Calibri"/>
-              </a:defRPr>
-            </a:pPr>
-            <a:r>
-              <a:t>Понимаем специфику сезонных рисков, логистики и</a:t>
-            </a:r>
-          </a:p>
-          <a:p>
-            <a:pPr>
-              <a:spcAft>
-                <a:spcPts val="800"/>
-              </a:spcAft>
-              <a:defRPr sz="1700" b="0">
-                <a:solidFill>
-                  <a:srgbClr val="919BAF"/>
-                </a:solidFill>
-                <a:latin typeface="Calibri"/>
-              </a:defRPr>
-            </a:pPr>
-            <a:r>
-              <a:t>сохранности урожая — работаем точечно под задачу.</a:t>
-            </a:r>
-          </a:p>
-        </p:txBody>
-      </p:sp>
-      <p:pic>
-        <p:nvPicPr>
-          <p:cNvPr id="9" name="Picture 8" descr="02-about.png"/>
-          <p:cNvPicPr>
-            <a:picLocks noChangeAspect="1"/>
-          </p:cNvPicPr>
-          <p:nvPr/>
-        </p:nvPicPr>
-        <p:blipFill>
-          <a:blip r:embed="rId3"/>
-          <a:stretch>
-            <a:fillRect/>
-          </a:stretch>
-        </p:blipFill>
-        <p:spPr>
-          <a:xfrm>
-            <a:off x="6675120" y="1645920"/>
-            <a:ext cx="5029200" cy="3143250"/>
-          </a:xfrm>
-          <a:prstGeom prst="rect">
-            <a:avLst/>
-          </a:prstGeom>
-        </p:spPr>
-      </p:pic>
+              <a:spcBef>
+                <a:spcPts val="1000"/>
+              </a:spcBef>
+              <a:spcAft>
+                <a:spcPts val="600"/>
+              </a:spcAft>
+              <a:defRPr sz="1800">
+                <a:solidFill>
+                  <a:srgbClr val="F5F7FA"/>
+                </a:solidFill>
+                <a:latin typeface="Calibri"/>
+              </a:defRPr>
+            </a:pPr>
+            <a:r>
+              <a:t>—  Гибкие условия: разовые и долгосрочные договоры</a:t>
+            </a:r>
+          </a:p>
+        </p:txBody>
+      </p:sp>
     </p:spTree>
   </p:cSld>
   <p:clrMapOvr>
@@ -7830,16 +7112,40 @@
           </a:prstGeom>
         </p:spPr>
       </p:pic>
-      <p:sp>
-        <p:nvSpPr>
-          <p:cNvPr id="3" name="TextBox 2"/>
+      <p:pic>
+        <p:nvPicPr>
+          <p:cNvPr id="3" name="Picture 2" descr="04-logo.png"/>
+          <p:cNvPicPr>
+            <a:picLocks noChangeAspect="1"/>
+          </p:cNvPicPr>
+          <p:nvPr/>
+        </p:nvPicPr>
+        <p:blipFill>
+          <a:blip r:embed="rId3"/>
+          <a:stretch>
+            <a:fillRect/>
+          </a:stretch>
+        </p:blipFill>
+        <p:spPr>
+          <a:xfrm>
+            <a:off x="4846320" y="731520"/>
+            <a:ext cx="2377440" cy="2371924"/>
+          </a:xfrm>
+          <a:prstGeom prst="rect">
+            <a:avLst/>
+          </a:prstGeom>
+        </p:spPr>
+      </p:pic>
+      <p:sp>
+        <p:nvSpPr>
+          <p:cNvPr id="4" name="TextBox 3"/>
           <p:cNvSpPr txBox="1"/>
           <p:nvPr/>
         </p:nvSpPr>
         <p:spPr>
           <a:xfrm>
-            <a:off x="502920" y="320040"/>
-            <a:ext cx="3657600" cy="274320"/>
+            <a:off x="685800" y="2926080"/>
+            <a:ext cx="10972800" cy="731520"/>
           </a:xfrm>
           <a:prstGeom prst="rect">
             <a:avLst/>
@@ -7852,11 +7158,11 @@
           </a:bodyPr>
           <a:lstStyle/>
           <a:p>
-            <a:pPr algn="l">
-              <a:spcAft>
-                <a:spcPts val="800"/>
-              </a:spcAft>
-              <a:defRPr sz="1100" b="1">
+            <a:pPr algn="ctr">
+              <a:spcAft>
+                <a:spcPts val="1400"/>
+              </a:spcAft>
+              <a:defRPr sz="4800" b="1">
                 <a:solidFill>
                   <a:srgbClr val="D4AF37"/>
                 </a:solidFill>
@@ -7864,21 +7170,21 @@
               </a:defRPr>
             </a:pPr>
             <a:r>
-              <a:t>ЧОО «ГЮРЗА»</a:t>
-            </a:r>
-          </a:p>
-        </p:txBody>
-      </p:sp>
-      <p:sp>
-        <p:nvSpPr>
-          <p:cNvPr id="4" name="TextBox 3"/>
+              <a:t>ЧОО «Гюрза»</a:t>
+            </a:r>
+          </a:p>
+        </p:txBody>
+      </p:sp>
+      <p:sp>
+        <p:nvSpPr>
+          <p:cNvPr id="5" name="TextBox 4"/>
           <p:cNvSpPr txBox="1"/>
           <p:nvPr/>
         </p:nvSpPr>
         <p:spPr>
           <a:xfrm>
-            <a:off x="8961120" y="320040"/>
-            <a:ext cx="2743200" cy="274320"/>
+            <a:off x="685800" y="3749039"/>
+            <a:ext cx="10972800" cy="1371600"/>
           </a:xfrm>
           <a:prstGeom prst="rect">
             <a:avLst/>
@@ -7891,257 +7197,51 @@
           </a:bodyPr>
           <a:lstStyle/>
           <a:p>
-            <a:pPr algn="r">
+            <a:pPr algn="ctr">
               <a:spcAft>
                 <a:spcPts val="800"/>
               </a:spcAft>
-              <a:defRPr sz="1100" b="1">
-                <a:solidFill>
-                  <a:srgbClr val="D4AF37"/>
-                </a:solidFill>
-                <a:latin typeface="Calibri"/>
-              </a:defRPr>
-            </a:pPr>
-            <a:r>
-              <a:t>gurza36.ru</a:t>
-            </a:r>
-          </a:p>
-        </p:txBody>
-      </p:sp>
-      <p:sp>
-        <p:nvSpPr>
-          <p:cNvPr id="5" name="Rectangle 4"/>
-          <p:cNvSpPr/>
-          <p:nvPr/>
-        </p:nvSpPr>
-        <p:spPr>
-          <a:xfrm>
-            <a:off x="502920" y="658368"/>
-            <a:ext cx="11155680" cy="0"/>
-          </a:xfrm>
-          <a:prstGeom prst="rect">
-            <a:avLst/>
-          </a:prstGeom>
-          <a:ln w="9525">
-            <a:solidFill>
-              <a:srgbClr val="D4AF37"/>
-            </a:solidFill>
-          </a:ln>
-        </p:spPr>
-        <p:style>
-          <a:lnRef idx="1">
-            <a:schemeClr val="accent1"/>
-          </a:lnRef>
-          <a:fillRef idx="3">
-            <a:schemeClr val="accent1"/>
-          </a:fillRef>
-          <a:effectRef idx="2">
-            <a:schemeClr val="accent1"/>
-          </a:effectRef>
-          <a:fontRef idx="minor">
-            <a:schemeClr val="lt1"/>
-          </a:fontRef>
-        </p:style>
-        <p:txBody>
-          <a:bodyPr rtlCol="0" anchor="ctr"/>
-          <a:lstStyle/>
-          <a:p>
-            <a:pPr algn="ctr"/>
-          </a:p>
-        </p:txBody>
-      </p:sp>
-      <p:sp>
-        <p:nvSpPr>
-          <p:cNvPr id="6" name="TextBox 5"/>
-          <p:cNvSpPr txBox="1"/>
-          <p:nvPr/>
-        </p:nvSpPr>
-        <p:spPr>
-          <a:xfrm>
-            <a:off x="640080" y="914400"/>
-            <a:ext cx="9144000" cy="457200"/>
-          </a:xfrm>
-          <a:prstGeom prst="rect">
-            <a:avLst/>
-          </a:prstGeom>
-          <a:noFill/>
-        </p:spPr>
-        <p:txBody>
-          <a:bodyPr wrap="square" anchor="t">
-            <a:spAutoFit/>
-          </a:bodyPr>
-          <a:lstStyle/>
-          <a:p>
-            <a:pPr algn="l">
+              <a:defRPr sz="1800" b="0">
+                <a:solidFill>
+                  <a:srgbClr val="F5F7FA"/>
+                </a:solidFill>
+                <a:latin typeface="Calibri"/>
+              </a:defRPr>
+            </a:pPr>
+            <a:r>
+              <a:t>+7 (473) 278-51-47  ·  +7 (900) 954-43-12</a:t>
+            </a:r>
+          </a:p>
+          <a:p>
+            <a:pPr>
               <a:spcAft>
                 <a:spcPts val="800"/>
               </a:spcAft>
-              <a:defRPr sz="1400" b="1">
-                <a:solidFill>
-                  <a:srgbClr val="D4AF37"/>
-                </a:solidFill>
-                <a:latin typeface="Calibri"/>
-              </a:defRPr>
-            </a:pPr>
-            <a:r>
-              <a:t>ГЕОГРАФИЯ</a:t>
-            </a:r>
-          </a:p>
-        </p:txBody>
-      </p:sp>
-      <p:sp>
-        <p:nvSpPr>
-          <p:cNvPr id="7" name="TextBox 6"/>
-          <p:cNvSpPr txBox="1"/>
-          <p:nvPr/>
-        </p:nvSpPr>
-        <p:spPr>
-          <a:xfrm>
-            <a:off x="640080" y="1325880"/>
-            <a:ext cx="10058400" cy="640080"/>
-          </a:xfrm>
-          <a:prstGeom prst="rect">
-            <a:avLst/>
-          </a:prstGeom>
-          <a:noFill/>
-        </p:spPr>
-        <p:txBody>
-          <a:bodyPr wrap="square" anchor="t">
-            <a:spAutoFit/>
-          </a:bodyPr>
-          <a:lstStyle/>
-          <a:p>
-            <a:pPr algn="l">
-              <a:spcAft>
-                <a:spcPts val="1400"/>
-              </a:spcAft>
-              <a:defRPr sz="3600" b="1">
-                <a:solidFill>
-                  <a:srgbClr val="F5F7FA"/>
-                </a:solidFill>
-                <a:latin typeface="Calibri"/>
-              </a:defRPr>
-            </a:pPr>
-            <a:r>
-              <a:t>Воронеж и Воронежская область</a:t>
-            </a:r>
-          </a:p>
-        </p:txBody>
-      </p:sp>
-      <p:sp>
-        <p:nvSpPr>
-          <p:cNvPr id="8" name="TextBox 7"/>
-          <p:cNvSpPr txBox="1"/>
-          <p:nvPr/>
-        </p:nvSpPr>
-        <p:spPr>
-          <a:xfrm>
-            <a:off x="731520" y="2194560"/>
-            <a:ext cx="10515600" cy="4114800"/>
-          </a:xfrm>
-          <a:prstGeom prst="rect">
-            <a:avLst/>
-          </a:prstGeom>
-          <a:noFill/>
-        </p:spPr>
-        <p:txBody>
-          <a:bodyPr wrap="square" anchor="t">
-            <a:spAutoFit/>
-          </a:bodyPr>
-          <a:lstStyle/>
-          <a:p>
-            <a:pPr algn="l">
-              <a:spcBef>
-                <a:spcPts val="1000"/>
-              </a:spcBef>
-              <a:spcAft>
-                <a:spcPts val="600"/>
-              </a:spcAft>
-              <a:defRPr sz="1900">
-                <a:solidFill>
-                  <a:srgbClr val="F5F7FA"/>
-                </a:solidFill>
-                <a:latin typeface="Calibri"/>
-              </a:defRPr>
-            </a:pPr>
-            <a:r>
-              <a:t>◆  Административные и офисные здания</a:t>
+              <a:defRPr sz="1800" b="0">
+                <a:solidFill>
+                  <a:srgbClr val="F0D98C"/>
+                </a:solidFill>
+                <a:latin typeface="Calibri"/>
+              </a:defRPr>
+            </a:pPr>
+            <a:r>
+              <a:t>mike1592@yandex.ru  ·  gurza36.ru</a:t>
             </a:r>
           </a:p>
           <a:p>
             <a:pPr>
-              <a:spcBef>
-                <a:spcPts val="1000"/>
-              </a:spcBef>
-              <a:spcAft>
-                <a:spcPts val="600"/>
-              </a:spcAft>
-              <a:defRPr sz="1900">
-                <a:solidFill>
-                  <a:srgbClr val="F5F7FA"/>
-                </a:solidFill>
-                <a:latin typeface="Calibri"/>
-              </a:defRPr>
-            </a:pPr>
-            <a:r>
-              <a:t>◆  Строительные площадки и объекты на всех стадиях</a:t>
-            </a:r>
-          </a:p>
-          <a:p>
-            <a:pPr>
-              <a:spcBef>
-                <a:spcPts val="1000"/>
-              </a:spcBef>
-              <a:spcAft>
-                <a:spcPts val="600"/>
-              </a:spcAft>
-              <a:defRPr sz="1900">
-                <a:solidFill>
-                  <a:srgbClr val="F5F7FA"/>
-                </a:solidFill>
-                <a:latin typeface="Calibri"/>
-              </a:defRPr>
-            </a:pPr>
-            <a:r>
-              <a:t>◆  Склады, логистические и производственные комплексы</a:t>
-            </a:r>
-          </a:p>
-          <a:p>
-            <a:pPr>
-              <a:spcBef>
-                <a:spcPts val="1000"/>
-              </a:spcBef>
-              <a:spcAft>
-                <a:spcPts val="600"/>
-              </a:spcAft>
-              <a:defRPr sz="1900">
-                <a:solidFill>
-                  <a:srgbClr val="F5F7FA"/>
-                </a:solidFill>
-                <a:latin typeface="Calibri"/>
-              </a:defRPr>
-            </a:pPr>
-            <a:r>
-              <a:t>◆  Сельхозпредприятия, элеваторы, зерновые базы</a:t>
-            </a:r>
-          </a:p>
-          <a:p>
-            <a:pPr>
-              <a:spcBef>
-                <a:spcPts val="1000"/>
-              </a:spcBef>
-              <a:spcAft>
-                <a:spcPts val="600"/>
-              </a:spcAft>
-              <a:defRPr sz="1900">
-                <a:solidFill>
-                  <a:srgbClr val="F5F7FA"/>
-                </a:solidFill>
-                <a:latin typeface="Calibri"/>
-              </a:defRPr>
-            </a:pPr>
-            <a:r>
-              <a:t>◆  Объекты с пропускным и внутриобъектовым режимом</a:t>
+              <a:spcAft>
+                <a:spcPts val="800"/>
+              </a:spcAft>
+              <a:defRPr sz="1600" b="0">
+                <a:solidFill>
+                  <a:srgbClr val="919BAF"/>
+                </a:solidFill>
+                <a:latin typeface="Calibri"/>
+              </a:defRPr>
+            </a:pPr>
+            <a:r>
+              <a:t>394016, г. Воронеж, ул. Солнечная, 17/1, офис 4</a:t>
             </a:r>
           </a:p>
         </p:txBody>
